--- a/vignettes/figures/overview.pptx
+++ b/vignettes/figures/overview.pptx
@@ -115,7 +115,7 @@
             <a:srgbClr val="A4A3A4"/>
           </p15:clr>
         </p15:guide>
-        <p15:guide id="2" pos="3840" userDrawn="1">
+        <p15:guide id="2" pos="3477" userDrawn="1">
           <p15:clr>
             <a:srgbClr val="A4A3A4"/>
           </p15:clr>
@@ -129,7 +129,7 @@
 <file path=ppt/revisionInfo.xml><?xml version="1.0" encoding="utf-8"?>
 <p1510:revInfo xmlns:a="http://schemas.openxmlformats.org/drawingml/2006/main" xmlns:r="http://schemas.openxmlformats.org/officeDocument/2006/relationships" xmlns:p1510="http://schemas.microsoft.com/office/powerpoint/2015/10/main">
   <p1510:revLst>
-    <p1510:client id="{4AA116FE-460E-754C-A3BF-FE57C3E35162}" v="757" dt="2026-05-04T13:32:53.642"/>
+    <p1510:client id="{4AA116FE-460E-754C-A3BF-FE57C3E35162}" v="46" dt="2026-05-06T19:22:14.838"/>
   </p1510:revLst>
 </p1510:revInfo>
 </file>
@@ -139,375 +139,18 @@
   <pc:docChgLst>
     <pc:chgData name="Schilling Sabine HSLU W" userId="b0e2af5c-9187-4900-883a-c96514cd8e15" providerId="ADAL" clId="{5E51067F-94D7-505D-9735-0698788361AC}"/>
     <pc:docChg chg="undo custSel addSld delSld modSld">
-      <pc:chgData name="Schilling Sabine HSLU W" userId="b0e2af5c-9187-4900-883a-c96514cd8e15" providerId="ADAL" clId="{5E51067F-94D7-505D-9735-0698788361AC}" dt="2026-05-04T13:33:08.542" v="1555" actId="1076"/>
+      <pc:chgData name="Schilling Sabine HSLU W" userId="b0e2af5c-9187-4900-883a-c96514cd8e15" providerId="ADAL" clId="{5E51067F-94D7-505D-9735-0698788361AC}" dt="2026-05-06T19:22:14.838" v="1842" actId="20577"/>
       <pc:docMkLst>
         <pc:docMk/>
       </pc:docMkLst>
-      <pc:sldChg chg="addSp delSp modSp del mod">
-        <pc:chgData name="Schilling Sabine HSLU W" userId="b0e2af5c-9187-4900-883a-c96514cd8e15" providerId="ADAL" clId="{5E51067F-94D7-505D-9735-0698788361AC}" dt="2026-05-04T12:21:57.184" v="1130" actId="2696"/>
-        <pc:sldMkLst>
-          <pc:docMk/>
-          <pc:sldMk cId="2897501157" sldId="270"/>
-        </pc:sldMkLst>
-        <pc:spChg chg="mod">
-          <ac:chgData name="Schilling Sabine HSLU W" userId="b0e2af5c-9187-4900-883a-c96514cd8e15" providerId="ADAL" clId="{5E51067F-94D7-505D-9735-0698788361AC}" dt="2026-05-04T11:32:25.295" v="482" actId="1076"/>
-          <ac:spMkLst>
-            <pc:docMk/>
-            <pc:sldMk cId="2897501157" sldId="270"/>
-            <ac:spMk id="3" creationId="{B82A358C-C6B1-3990-6B39-C187D7991602}"/>
-          </ac:spMkLst>
-        </pc:spChg>
-        <pc:spChg chg="mod">
-          <ac:chgData name="Schilling Sabine HSLU W" userId="b0e2af5c-9187-4900-883a-c96514cd8e15" providerId="ADAL" clId="{5E51067F-94D7-505D-9735-0698788361AC}" dt="2026-05-04T12:03:16.575" v="909" actId="1076"/>
-          <ac:spMkLst>
-            <pc:docMk/>
-            <pc:sldMk cId="2897501157" sldId="270"/>
-            <ac:spMk id="4" creationId="{EA6DE006-824C-B9F2-B1FC-630D5F80A6CD}"/>
-          </ac:spMkLst>
-        </pc:spChg>
-        <pc:spChg chg="add mod">
-          <ac:chgData name="Schilling Sabine HSLU W" userId="b0e2af5c-9187-4900-883a-c96514cd8e15" providerId="ADAL" clId="{5E51067F-94D7-505D-9735-0698788361AC}" dt="2026-05-04T11:33:35.310" v="495" actId="20577"/>
-          <ac:spMkLst>
-            <pc:docMk/>
-            <pc:sldMk cId="2897501157" sldId="270"/>
-            <ac:spMk id="5" creationId="{CFBC890C-EED2-9C69-903F-52928F3DE988}"/>
-          </ac:spMkLst>
-        </pc:spChg>
-        <pc:spChg chg="mod">
-          <ac:chgData name="Schilling Sabine HSLU W" userId="b0e2af5c-9187-4900-883a-c96514cd8e15" providerId="ADAL" clId="{5E51067F-94D7-505D-9735-0698788361AC}" dt="2026-05-04T12:02:18.624" v="899" actId="20577"/>
-          <ac:spMkLst>
-            <pc:docMk/>
-            <pc:sldMk cId="2897501157" sldId="270"/>
-            <ac:spMk id="6" creationId="{86DCB496-316C-6122-CA7B-A204DF8FD384}"/>
-          </ac:spMkLst>
-        </pc:spChg>
-        <pc:spChg chg="mod">
-          <ac:chgData name="Schilling Sabine HSLU W" userId="b0e2af5c-9187-4900-883a-c96514cd8e15" providerId="ADAL" clId="{5E51067F-94D7-505D-9735-0698788361AC}" dt="2026-05-04T12:02:13.680" v="898" actId="20577"/>
-          <ac:spMkLst>
-            <pc:docMk/>
-            <pc:sldMk cId="2897501157" sldId="270"/>
-            <ac:spMk id="7" creationId="{5ACA6224-4A01-AA90-B785-2A7EE3741DFC}"/>
-          </ac:spMkLst>
-        </pc:spChg>
-        <pc:spChg chg="mod">
-          <ac:chgData name="Schilling Sabine HSLU W" userId="b0e2af5c-9187-4900-883a-c96514cd8e15" providerId="ADAL" clId="{5E51067F-94D7-505D-9735-0698788361AC}" dt="2026-05-04T12:02:13.680" v="898" actId="20577"/>
-          <ac:spMkLst>
-            <pc:docMk/>
-            <pc:sldMk cId="2897501157" sldId="270"/>
-            <ac:spMk id="8" creationId="{F2F64B86-B98D-B012-9DE3-7AA5AAD7FF24}"/>
-          </ac:spMkLst>
-        </pc:spChg>
-        <pc:spChg chg="add mod">
-          <ac:chgData name="Schilling Sabine HSLU W" userId="b0e2af5c-9187-4900-883a-c96514cd8e15" providerId="ADAL" clId="{5E51067F-94D7-505D-9735-0698788361AC}" dt="2026-05-04T11:35:07.644" v="544" actId="20577"/>
-          <ac:spMkLst>
-            <pc:docMk/>
-            <pc:sldMk cId="2897501157" sldId="270"/>
-            <ac:spMk id="9" creationId="{B38FB260-FBC5-47B1-4701-4415BE688B01}"/>
-          </ac:spMkLst>
-        </pc:spChg>
-        <pc:spChg chg="add mod">
-          <ac:chgData name="Schilling Sabine HSLU W" userId="b0e2af5c-9187-4900-883a-c96514cd8e15" providerId="ADAL" clId="{5E51067F-94D7-505D-9735-0698788361AC}" dt="2026-05-04T11:30:12.424" v="464"/>
-          <ac:spMkLst>
-            <pc:docMk/>
-            <pc:sldMk cId="2897501157" sldId="270"/>
-            <ac:spMk id="11" creationId="{7F920C18-98CA-4C0F-4B66-C4ABBF5FB0B9}"/>
-          </ac:spMkLst>
-        </pc:spChg>
-        <pc:spChg chg="add mod">
-          <ac:chgData name="Schilling Sabine HSLU W" userId="b0e2af5c-9187-4900-883a-c96514cd8e15" providerId="ADAL" clId="{5E51067F-94D7-505D-9735-0698788361AC}" dt="2026-05-04T11:31:28.414" v="466"/>
-          <ac:spMkLst>
-            <pc:docMk/>
-            <pc:sldMk cId="2897501157" sldId="270"/>
-            <ac:spMk id="12" creationId="{B91EBC38-002C-294A-5F2E-27182FB12F5C}"/>
-          </ac:spMkLst>
-        </pc:spChg>
-        <pc:spChg chg="add del mod">
-          <ac:chgData name="Schilling Sabine HSLU W" userId="b0e2af5c-9187-4900-883a-c96514cd8e15" providerId="ADAL" clId="{5E51067F-94D7-505D-9735-0698788361AC}" dt="2026-05-04T12:02:08.834" v="897" actId="478"/>
-          <ac:spMkLst>
-            <pc:docMk/>
-            <pc:sldMk cId="2897501157" sldId="270"/>
-            <ac:spMk id="13" creationId="{F9272AF7-1F61-3FB1-B2C0-F2D6A5309857}"/>
-          </ac:spMkLst>
-        </pc:spChg>
-        <pc:spChg chg="add del mod">
-          <ac:chgData name="Schilling Sabine HSLU W" userId="b0e2af5c-9187-4900-883a-c96514cd8e15" providerId="ADAL" clId="{5E51067F-94D7-505D-9735-0698788361AC}" dt="2026-05-04T12:02:02.492" v="896" actId="478"/>
-          <ac:spMkLst>
-            <pc:docMk/>
-            <pc:sldMk cId="2897501157" sldId="270"/>
-            <ac:spMk id="14" creationId="{3C33620C-A380-9077-4DCF-1C5E9B81BB91}"/>
-          </ac:spMkLst>
-        </pc:spChg>
-        <pc:spChg chg="add mod">
-          <ac:chgData name="Schilling Sabine HSLU W" userId="b0e2af5c-9187-4900-883a-c96514cd8e15" providerId="ADAL" clId="{5E51067F-94D7-505D-9735-0698788361AC}" dt="2026-05-04T12:03:02.046" v="908"/>
-          <ac:spMkLst>
-            <pc:docMk/>
-            <pc:sldMk cId="2897501157" sldId="270"/>
-            <ac:spMk id="15" creationId="{DE0ECB97-7F71-1D3A-D20E-DB3E0FDA43DD}"/>
-          </ac:spMkLst>
-        </pc:spChg>
-        <pc:spChg chg="mod">
-          <ac:chgData name="Schilling Sabine HSLU W" userId="b0e2af5c-9187-4900-883a-c96514cd8e15" providerId="ADAL" clId="{5E51067F-94D7-505D-9735-0698788361AC}" dt="2026-05-04T12:02:13.680" v="898" actId="20577"/>
-          <ac:spMkLst>
-            <pc:docMk/>
-            <pc:sldMk cId="2897501157" sldId="270"/>
-            <ac:spMk id="19" creationId="{84ED9AE0-A68E-27CD-8722-CE39E58FD04B}"/>
-          </ac:spMkLst>
-        </pc:spChg>
-        <pc:spChg chg="mod">
-          <ac:chgData name="Schilling Sabine HSLU W" userId="b0e2af5c-9187-4900-883a-c96514cd8e15" providerId="ADAL" clId="{5E51067F-94D7-505D-9735-0698788361AC}" dt="2026-05-04T12:02:13.680" v="898" actId="20577"/>
-          <ac:spMkLst>
-            <pc:docMk/>
-            <pc:sldMk cId="2897501157" sldId="270"/>
-            <ac:spMk id="36" creationId="{A7586868-99DC-EF12-97A7-763AC8495D52}"/>
-          </ac:spMkLst>
-        </pc:spChg>
-        <pc:spChg chg="mod">
-          <ac:chgData name="Schilling Sabine HSLU W" userId="b0e2af5c-9187-4900-883a-c96514cd8e15" providerId="ADAL" clId="{5E51067F-94D7-505D-9735-0698788361AC}" dt="2026-05-04T12:02:13.680" v="898" actId="20577"/>
-          <ac:spMkLst>
-            <pc:docMk/>
-            <pc:sldMk cId="2897501157" sldId="270"/>
-            <ac:spMk id="40" creationId="{ACE973C8-BADF-3D6C-572B-80B1C47A21EB}"/>
-          </ac:spMkLst>
-        </pc:spChg>
-        <pc:grpChg chg="mod">
-          <ac:chgData name="Schilling Sabine HSLU W" userId="b0e2af5c-9187-4900-883a-c96514cd8e15" providerId="ADAL" clId="{5E51067F-94D7-505D-9735-0698788361AC}" dt="2026-05-04T12:02:13.680" v="898" actId="20577"/>
-          <ac:grpSpMkLst>
-            <pc:docMk/>
-            <pc:sldMk cId="2897501157" sldId="270"/>
-            <ac:grpSpMk id="47" creationId="{C5429D89-858D-4955-FECE-9612A3B8384D}"/>
-          </ac:grpSpMkLst>
-        </pc:grpChg>
-        <pc:cxnChg chg="mod">
-          <ac:chgData name="Schilling Sabine HSLU W" userId="b0e2af5c-9187-4900-883a-c96514cd8e15" providerId="ADAL" clId="{5E51067F-94D7-505D-9735-0698788361AC}" dt="2026-05-04T12:02:13.680" v="898" actId="20577"/>
-          <ac:cxnSpMkLst>
-            <pc:docMk/>
-            <pc:sldMk cId="2897501157" sldId="270"/>
-            <ac:cxnSpMk id="2" creationId="{F51B80B4-465E-A8C8-F532-2C4261325255}"/>
-          </ac:cxnSpMkLst>
-        </pc:cxnChg>
-        <pc:cxnChg chg="add mod">
-          <ac:chgData name="Schilling Sabine HSLU W" userId="b0e2af5c-9187-4900-883a-c96514cd8e15" providerId="ADAL" clId="{5E51067F-94D7-505D-9735-0698788361AC}" dt="2026-05-04T11:30:00.514" v="462" actId="1076"/>
-          <ac:cxnSpMkLst>
-            <pc:docMk/>
-            <pc:sldMk cId="2897501157" sldId="270"/>
-            <ac:cxnSpMk id="10" creationId="{6D942ABD-1DA4-614B-45D0-A3ABB37F3D71}"/>
-          </ac:cxnSpMkLst>
-        </pc:cxnChg>
-        <pc:cxnChg chg="mod">
-          <ac:chgData name="Schilling Sabine HSLU W" userId="b0e2af5c-9187-4900-883a-c96514cd8e15" providerId="ADAL" clId="{5E51067F-94D7-505D-9735-0698788361AC}" dt="2026-05-04T12:02:13.680" v="898" actId="20577"/>
-          <ac:cxnSpMkLst>
-            <pc:docMk/>
-            <pc:sldMk cId="2897501157" sldId="270"/>
-            <ac:cxnSpMk id="35" creationId="{9921E0F5-DA65-AA28-0AA9-E14599087B90}"/>
-          </ac:cxnSpMkLst>
-        </pc:cxnChg>
-        <pc:cxnChg chg="mod">
-          <ac:chgData name="Schilling Sabine HSLU W" userId="b0e2af5c-9187-4900-883a-c96514cd8e15" providerId="ADAL" clId="{5E51067F-94D7-505D-9735-0698788361AC}" dt="2026-05-04T12:02:13.680" v="898" actId="20577"/>
-          <ac:cxnSpMkLst>
-            <pc:docMk/>
-            <pc:sldMk cId="2897501157" sldId="270"/>
-            <ac:cxnSpMk id="37" creationId="{F2E86E26-6ED6-B4A4-2956-09738F3D65DE}"/>
-          </ac:cxnSpMkLst>
-        </pc:cxnChg>
-      </pc:sldChg>
-      <pc:sldChg chg="addSp delSp modSp add del mod">
-        <pc:chgData name="Schilling Sabine HSLU W" userId="b0e2af5c-9187-4900-883a-c96514cd8e15" providerId="ADAL" clId="{5E51067F-94D7-505D-9735-0698788361AC}" dt="2026-05-04T12:44:37.298" v="1180" actId="2696"/>
-        <pc:sldMkLst>
-          <pc:docMk/>
-          <pc:sldMk cId="1319703547" sldId="271"/>
-        </pc:sldMkLst>
-        <pc:spChg chg="mod">
-          <ac:chgData name="Schilling Sabine HSLU W" userId="b0e2af5c-9187-4900-883a-c96514cd8e15" providerId="ADAL" clId="{5E51067F-94D7-505D-9735-0698788361AC}" dt="2026-05-04T12:24:39.807" v="1135" actId="1076"/>
-          <ac:spMkLst>
-            <pc:docMk/>
-            <pc:sldMk cId="1319703547" sldId="271"/>
-            <ac:spMk id="3" creationId="{78887C92-DBF7-0760-366A-009857DDC553}"/>
-          </ac:spMkLst>
-        </pc:spChg>
-        <pc:spChg chg="mod">
-          <ac:chgData name="Schilling Sabine HSLU W" userId="b0e2af5c-9187-4900-883a-c96514cd8e15" providerId="ADAL" clId="{5E51067F-94D7-505D-9735-0698788361AC}" dt="2026-05-04T12:25:39.935" v="1140" actId="20577"/>
-          <ac:spMkLst>
-            <pc:docMk/>
-            <pc:sldMk cId="1319703547" sldId="271"/>
-            <ac:spMk id="4" creationId="{4B94E6ED-EA26-03FA-C422-6AF89A6A6511}"/>
-          </ac:spMkLst>
-        </pc:spChg>
-        <pc:spChg chg="mod">
-          <ac:chgData name="Schilling Sabine HSLU W" userId="b0e2af5c-9187-4900-883a-c96514cd8e15" providerId="ADAL" clId="{5E51067F-94D7-505D-9735-0698788361AC}" dt="2026-05-04T12:05:56.398" v="977" actId="1076"/>
-          <ac:spMkLst>
-            <pc:docMk/>
-            <pc:sldMk cId="1319703547" sldId="271"/>
-            <ac:spMk id="5" creationId="{A9530028-FE3C-94CB-195A-E6E863D02842}"/>
-          </ac:spMkLst>
-        </pc:spChg>
-        <pc:spChg chg="mod topLvl">
-          <ac:chgData name="Schilling Sabine HSLU W" userId="b0e2af5c-9187-4900-883a-c96514cd8e15" providerId="ADAL" clId="{5E51067F-94D7-505D-9735-0698788361AC}" dt="2026-05-04T12:25:40.099" v="1141" actId="20577"/>
-          <ac:spMkLst>
-            <pc:docMk/>
-            <pc:sldMk cId="1319703547" sldId="271"/>
-            <ac:spMk id="6" creationId="{AAECE821-6FC3-2ADF-964F-1A3C2DF194C0}"/>
-          </ac:spMkLst>
-        </pc:spChg>
-        <pc:spChg chg="mod topLvl">
-          <ac:chgData name="Schilling Sabine HSLU W" userId="b0e2af5c-9187-4900-883a-c96514cd8e15" providerId="ADAL" clId="{5E51067F-94D7-505D-9735-0698788361AC}" dt="2026-05-04T12:27:35.238" v="1147" actId="465"/>
-          <ac:spMkLst>
-            <pc:docMk/>
-            <pc:sldMk cId="1319703547" sldId="271"/>
-            <ac:spMk id="7" creationId="{7934AC28-2236-344E-9E1F-AEB426F67267}"/>
-          </ac:spMkLst>
-        </pc:spChg>
-        <pc:spChg chg="mod topLvl">
-          <ac:chgData name="Schilling Sabine HSLU W" userId="b0e2af5c-9187-4900-883a-c96514cd8e15" providerId="ADAL" clId="{5E51067F-94D7-505D-9735-0698788361AC}" dt="2026-05-04T12:20:10.590" v="1115" actId="20577"/>
-          <ac:spMkLst>
-            <pc:docMk/>
-            <pc:sldMk cId="1319703547" sldId="271"/>
-            <ac:spMk id="8" creationId="{E2911FD4-BB20-9FF4-E0B5-BEA92BCCC9EB}"/>
-          </ac:spMkLst>
-        </pc:spChg>
-        <pc:spChg chg="mod">
-          <ac:chgData name="Schilling Sabine HSLU W" userId="b0e2af5c-9187-4900-883a-c96514cd8e15" providerId="ADAL" clId="{5E51067F-94D7-505D-9735-0698788361AC}" dt="2026-05-04T12:25:42.891" v="1142" actId="20577"/>
-          <ac:spMkLst>
-            <pc:docMk/>
-            <pc:sldMk cId="1319703547" sldId="271"/>
-            <ac:spMk id="9" creationId="{9F8862E7-8A70-598A-DCBC-086EDE00F16D}"/>
-          </ac:spMkLst>
-        </pc:spChg>
-        <pc:spChg chg="mod">
-          <ac:chgData name="Schilling Sabine HSLU W" userId="b0e2af5c-9187-4900-883a-c96514cd8e15" providerId="ADAL" clId="{5E51067F-94D7-505D-9735-0698788361AC}" dt="2026-05-04T12:30:26.772" v="1167" actId="167"/>
-          <ac:spMkLst>
-            <pc:docMk/>
-            <pc:sldMk cId="1319703547" sldId="271"/>
-            <ac:spMk id="15" creationId="{DA4AD8CE-790F-4624-7569-6156DCA5B8B7}"/>
-          </ac:spMkLst>
-        </pc:spChg>
-        <pc:spChg chg="mod topLvl">
-          <ac:chgData name="Schilling Sabine HSLU W" userId="b0e2af5c-9187-4900-883a-c96514cd8e15" providerId="ADAL" clId="{5E51067F-94D7-505D-9735-0698788361AC}" dt="2026-05-04T12:21:50.260" v="1129" actId="20577"/>
-          <ac:spMkLst>
-            <pc:docMk/>
-            <pc:sldMk cId="1319703547" sldId="271"/>
-            <ac:spMk id="19" creationId="{6B1AD94A-8014-8AA9-0BB8-1222F9EFAFE2}"/>
-          </ac:spMkLst>
-        </pc:spChg>
-        <pc:spChg chg="mod topLvl">
-          <ac:chgData name="Schilling Sabine HSLU W" userId="b0e2af5c-9187-4900-883a-c96514cd8e15" providerId="ADAL" clId="{5E51067F-94D7-505D-9735-0698788361AC}" dt="2026-05-04T12:18:21.611" v="1074" actId="1076"/>
-          <ac:spMkLst>
-            <pc:docMk/>
-            <pc:sldMk cId="1319703547" sldId="271"/>
-            <ac:spMk id="36" creationId="{44247DA4-7503-A105-CF48-3EF1E9F41023}"/>
-          </ac:spMkLst>
-        </pc:spChg>
-        <pc:spChg chg="mod topLvl">
-          <ac:chgData name="Schilling Sabine HSLU W" userId="b0e2af5c-9187-4900-883a-c96514cd8e15" providerId="ADAL" clId="{5E51067F-94D7-505D-9735-0698788361AC}" dt="2026-05-04T12:21:07.194" v="1126" actId="14100"/>
-          <ac:spMkLst>
-            <pc:docMk/>
-            <pc:sldMk cId="1319703547" sldId="271"/>
-            <ac:spMk id="40" creationId="{EFD11876-6D02-1F33-0112-EAB97F450AC7}"/>
-          </ac:spMkLst>
-        </pc:spChg>
-        <pc:grpChg chg="add mod">
-          <ac:chgData name="Schilling Sabine HSLU W" userId="b0e2af5c-9187-4900-883a-c96514cd8e15" providerId="ADAL" clId="{5E51067F-94D7-505D-9735-0698788361AC}" dt="2026-05-04T12:28:12.574" v="1153" actId="1076"/>
-          <ac:grpSpMkLst>
-            <pc:docMk/>
-            <pc:sldMk cId="1319703547" sldId="271"/>
-            <ac:grpSpMk id="26" creationId="{4AEF16A7-43D3-8BFE-79FF-0F8B471BD9B7}"/>
-          </ac:grpSpMkLst>
-        </pc:grpChg>
-        <pc:grpChg chg="del">
-          <ac:chgData name="Schilling Sabine HSLU W" userId="b0e2af5c-9187-4900-883a-c96514cd8e15" providerId="ADAL" clId="{5E51067F-94D7-505D-9735-0698788361AC}" dt="2026-05-04T12:04:11.375" v="911" actId="165"/>
-          <ac:grpSpMkLst>
-            <pc:docMk/>
-            <pc:sldMk cId="1319703547" sldId="271"/>
-            <ac:grpSpMk id="47" creationId="{81197DC7-CF54-27CA-CB4E-333CBEFEAF87}"/>
-          </ac:grpSpMkLst>
-        </pc:grpChg>
-        <pc:cxnChg chg="mod topLvl">
-          <ac:chgData name="Schilling Sabine HSLU W" userId="b0e2af5c-9187-4900-883a-c96514cd8e15" providerId="ADAL" clId="{5E51067F-94D7-505D-9735-0698788361AC}" dt="2026-05-04T12:28:50.342" v="1159" actId="1036"/>
-          <ac:cxnSpMkLst>
-            <pc:docMk/>
-            <pc:sldMk cId="1319703547" sldId="271"/>
-            <ac:cxnSpMk id="2" creationId="{7FC03C23-0D9F-912A-3CD3-D3149BFC0012}"/>
-          </ac:cxnSpMkLst>
-        </pc:cxnChg>
-        <pc:cxnChg chg="mod">
-          <ac:chgData name="Schilling Sabine HSLU W" userId="b0e2af5c-9187-4900-883a-c96514cd8e15" providerId="ADAL" clId="{5E51067F-94D7-505D-9735-0698788361AC}" dt="2026-05-04T12:29:20.707" v="1166" actId="14100"/>
-          <ac:cxnSpMkLst>
-            <pc:docMk/>
-            <pc:sldMk cId="1319703547" sldId="271"/>
-            <ac:cxnSpMk id="10" creationId="{1335A4DE-1A38-7903-0855-D17D223F10DC}"/>
-          </ac:cxnSpMkLst>
-        </pc:cxnChg>
-        <pc:cxnChg chg="add mod">
-          <ac:chgData name="Schilling Sabine HSLU W" userId="b0e2af5c-9187-4900-883a-c96514cd8e15" providerId="ADAL" clId="{5E51067F-94D7-505D-9735-0698788361AC}" dt="2026-05-04T12:29:16.341" v="1165" actId="14100"/>
-          <ac:cxnSpMkLst>
-            <pc:docMk/>
-            <pc:sldMk cId="1319703547" sldId="271"/>
-            <ac:cxnSpMk id="16" creationId="{2F4FC44B-5086-1E00-2657-A78DA5BAF3A4}"/>
-          </ac:cxnSpMkLst>
-        </pc:cxnChg>
-        <pc:cxnChg chg="mod topLvl">
-          <ac:chgData name="Schilling Sabine HSLU W" userId="b0e2af5c-9187-4900-883a-c96514cd8e15" providerId="ADAL" clId="{5E51067F-94D7-505D-9735-0698788361AC}" dt="2026-05-04T12:18:21.611" v="1074" actId="1076"/>
-          <ac:cxnSpMkLst>
-            <pc:docMk/>
-            <pc:sldMk cId="1319703547" sldId="271"/>
-            <ac:cxnSpMk id="35" creationId="{E96EDC80-DEFC-96D7-BC25-CB4A81FCCF88}"/>
-          </ac:cxnSpMkLst>
-        </pc:cxnChg>
-        <pc:cxnChg chg="mod topLvl">
-          <ac:chgData name="Schilling Sabine HSLU W" userId="b0e2af5c-9187-4900-883a-c96514cd8e15" providerId="ADAL" clId="{5E51067F-94D7-505D-9735-0698788361AC}" dt="2026-05-04T12:18:21.611" v="1074" actId="1076"/>
-          <ac:cxnSpMkLst>
-            <pc:docMk/>
-            <pc:sldMk cId="1319703547" sldId="271"/>
-            <ac:cxnSpMk id="37" creationId="{23FC1AFF-A2BD-85AF-7F28-92DD6B768A93}"/>
-          </ac:cxnSpMkLst>
-        </pc:cxnChg>
-      </pc:sldChg>
-      <pc:sldChg chg="modSp add del mod">
-        <pc:chgData name="Schilling Sabine HSLU W" userId="b0e2af5c-9187-4900-883a-c96514cd8e15" providerId="ADAL" clId="{5E51067F-94D7-505D-9735-0698788361AC}" dt="2026-05-04T12:44:38.741" v="1181" actId="2696"/>
-        <pc:sldMkLst>
-          <pc:docMk/>
-          <pc:sldMk cId="1182159817" sldId="272"/>
-        </pc:sldMkLst>
-        <pc:spChg chg="mod">
-          <ac:chgData name="Schilling Sabine HSLU W" userId="b0e2af5c-9187-4900-883a-c96514cd8e15" providerId="ADAL" clId="{5E51067F-94D7-505D-9735-0698788361AC}" dt="2026-05-04T12:43:40.486" v="1176" actId="1076"/>
-          <ac:spMkLst>
-            <pc:docMk/>
-            <pc:sldMk cId="1182159817" sldId="272"/>
-            <ac:spMk id="3" creationId="{78887C92-DBF7-0760-366A-009857DDC553}"/>
-          </ac:spMkLst>
-        </pc:spChg>
-        <pc:spChg chg="mod">
-          <ac:chgData name="Schilling Sabine HSLU W" userId="b0e2af5c-9187-4900-883a-c96514cd8e15" providerId="ADAL" clId="{5E51067F-94D7-505D-9735-0698788361AC}" dt="2026-05-04T12:43:12.538" v="1170" actId="1076"/>
-          <ac:spMkLst>
-            <pc:docMk/>
-            <pc:sldMk cId="1182159817" sldId="272"/>
-            <ac:spMk id="19" creationId="{6B1AD94A-8014-8AA9-0BB8-1222F9EFAFE2}"/>
-          </ac:spMkLst>
-        </pc:spChg>
-      </pc:sldChg>
       <pc:sldChg chg="addSp delSp modSp add mod">
-        <pc:chgData name="Schilling Sabine HSLU W" userId="b0e2af5c-9187-4900-883a-c96514cd8e15" providerId="ADAL" clId="{5E51067F-94D7-505D-9735-0698788361AC}" dt="2026-05-04T13:33:08.542" v="1555" actId="1076"/>
+        <pc:chgData name="Schilling Sabine HSLU W" userId="b0e2af5c-9187-4900-883a-c96514cd8e15" providerId="ADAL" clId="{5E51067F-94D7-505D-9735-0698788361AC}" dt="2026-05-06T19:22:14.838" v="1842" actId="20577"/>
         <pc:sldMkLst>
           <pc:docMk/>
           <pc:sldMk cId="211450528" sldId="273"/>
         </pc:sldMkLst>
-        <pc:spChg chg="del mod">
-          <ac:chgData name="Schilling Sabine HSLU W" userId="b0e2af5c-9187-4900-883a-c96514cd8e15" providerId="ADAL" clId="{5E51067F-94D7-505D-9735-0698788361AC}" dt="2026-05-04T13:31:42.167" v="1509" actId="478"/>
-          <ac:spMkLst>
-            <pc:docMk/>
-            <pc:sldMk cId="211450528" sldId="273"/>
-            <ac:spMk id="3" creationId="{5A452548-7E2F-047A-41EE-0332CA3ED7F5}"/>
-          </ac:spMkLst>
-        </pc:spChg>
-        <pc:spChg chg="del mod topLvl">
-          <ac:chgData name="Schilling Sabine HSLU W" userId="b0e2af5c-9187-4900-883a-c96514cd8e15" providerId="ADAL" clId="{5E51067F-94D7-505D-9735-0698788361AC}" dt="2026-05-04T13:29:56.562" v="1427" actId="478"/>
-          <ac:spMkLst>
-            <pc:docMk/>
-            <pc:sldMk cId="211450528" sldId="273"/>
-            <ac:spMk id="4" creationId="{288B1966-71E2-3B72-2BE2-39B36F8EAD67}"/>
-          </ac:spMkLst>
-        </pc:spChg>
         <pc:spChg chg="mod">
-          <ac:chgData name="Schilling Sabine HSLU W" userId="b0e2af5c-9187-4900-883a-c96514cd8e15" providerId="ADAL" clId="{5E51067F-94D7-505D-9735-0698788361AC}" dt="2026-05-04T13:32:50.032" v="1548" actId="20577"/>
+          <ac:chgData name="Schilling Sabine HSLU W" userId="b0e2af5c-9187-4900-883a-c96514cd8e15" providerId="ADAL" clId="{5E51067F-94D7-505D-9735-0698788361AC}" dt="2026-05-06T19:18:36.355" v="1782" actId="20577"/>
           <ac:spMkLst>
             <pc:docMk/>
             <pc:sldMk cId="211450528" sldId="273"/>
@@ -515,7 +158,7 @@
           </ac:spMkLst>
         </pc:spChg>
         <pc:spChg chg="mod topLvl">
-          <ac:chgData name="Schilling Sabine HSLU W" userId="b0e2af5c-9187-4900-883a-c96514cd8e15" providerId="ADAL" clId="{5E51067F-94D7-505D-9735-0698788361AC}" dt="2026-05-04T13:32:50.032" v="1548" actId="20577"/>
+          <ac:chgData name="Schilling Sabine HSLU W" userId="b0e2af5c-9187-4900-883a-c96514cd8e15" providerId="ADAL" clId="{5E51067F-94D7-505D-9735-0698788361AC}" dt="2026-05-06T19:18:36.355" v="1782" actId="20577"/>
           <ac:spMkLst>
             <pc:docMk/>
             <pc:sldMk cId="211450528" sldId="273"/>
@@ -523,7 +166,7 @@
           </ac:spMkLst>
         </pc:spChg>
         <pc:spChg chg="mod">
-          <ac:chgData name="Schilling Sabine HSLU W" userId="b0e2af5c-9187-4900-883a-c96514cd8e15" providerId="ADAL" clId="{5E51067F-94D7-505D-9735-0698788361AC}" dt="2026-05-04T13:32:50.032" v="1548" actId="20577"/>
+          <ac:chgData name="Schilling Sabine HSLU W" userId="b0e2af5c-9187-4900-883a-c96514cd8e15" providerId="ADAL" clId="{5E51067F-94D7-505D-9735-0698788361AC}" dt="2026-05-06T19:18:36.355" v="1782" actId="20577"/>
           <ac:spMkLst>
             <pc:docMk/>
             <pc:sldMk cId="211450528" sldId="273"/>
@@ -531,7 +174,7 @@
           </ac:spMkLst>
         </pc:spChg>
         <pc:spChg chg="mod">
-          <ac:chgData name="Schilling Sabine HSLU W" userId="b0e2af5c-9187-4900-883a-c96514cd8e15" providerId="ADAL" clId="{5E51067F-94D7-505D-9735-0698788361AC}" dt="2026-05-04T13:32:50.032" v="1548" actId="20577"/>
+          <ac:chgData name="Schilling Sabine HSLU W" userId="b0e2af5c-9187-4900-883a-c96514cd8e15" providerId="ADAL" clId="{5E51067F-94D7-505D-9735-0698788361AC}" dt="2026-05-06T19:20:11.622" v="1808" actId="20577"/>
           <ac:spMkLst>
             <pc:docMk/>
             <pc:sldMk cId="211450528" sldId="273"/>
@@ -539,7 +182,7 @@
           </ac:spMkLst>
         </pc:spChg>
         <pc:spChg chg="mod">
-          <ac:chgData name="Schilling Sabine HSLU W" userId="b0e2af5c-9187-4900-883a-c96514cd8e15" providerId="ADAL" clId="{5E51067F-94D7-505D-9735-0698788361AC}" dt="2026-05-04T13:32:53.642" v="1554" actId="20577"/>
+          <ac:chgData name="Schilling Sabine HSLU W" userId="b0e2af5c-9187-4900-883a-c96514cd8e15" providerId="ADAL" clId="{5E51067F-94D7-505D-9735-0698788361AC}" dt="2026-05-06T19:18:36.355" v="1782" actId="20577"/>
           <ac:spMkLst>
             <pc:docMk/>
             <pc:sldMk cId="211450528" sldId="273"/>
@@ -547,23 +190,15 @@
           </ac:spMkLst>
         </pc:spChg>
         <pc:spChg chg="add mod">
-          <ac:chgData name="Schilling Sabine HSLU W" userId="b0e2af5c-9187-4900-883a-c96514cd8e15" providerId="ADAL" clId="{5E51067F-94D7-505D-9735-0698788361AC}" dt="2026-05-04T13:32:50.032" v="1548" actId="20577"/>
+          <ac:chgData name="Schilling Sabine HSLU W" userId="b0e2af5c-9187-4900-883a-c96514cd8e15" providerId="ADAL" clId="{5E51067F-94D7-505D-9735-0698788361AC}" dt="2026-05-06T19:18:36.355" v="1782" actId="20577"/>
           <ac:spMkLst>
             <pc:docMk/>
             <pc:sldMk cId="211450528" sldId="273"/>
             <ac:spMk id="12" creationId="{C1981550-83BB-9397-710A-8F2694DD3EA9}"/>
           </ac:spMkLst>
         </pc:spChg>
-        <pc:spChg chg="add del mod">
-          <ac:chgData name="Schilling Sabine HSLU W" userId="b0e2af5c-9187-4900-883a-c96514cd8e15" providerId="ADAL" clId="{5E51067F-94D7-505D-9735-0698788361AC}" dt="2026-05-04T12:45:48.030" v="1185" actId="478"/>
-          <ac:spMkLst>
-            <pc:docMk/>
-            <pc:sldMk cId="211450528" sldId="273"/>
-            <ac:spMk id="15" creationId="{3537A5B2-7004-F4AD-61AE-5A96C807F564}"/>
-          </ac:spMkLst>
-        </pc:spChg>
         <pc:spChg chg="mod">
-          <ac:chgData name="Schilling Sabine HSLU W" userId="b0e2af5c-9187-4900-883a-c96514cd8e15" providerId="ADAL" clId="{5E51067F-94D7-505D-9735-0698788361AC}" dt="2026-05-04T13:32:50.032" v="1548" actId="20577"/>
+          <ac:chgData name="Schilling Sabine HSLU W" userId="b0e2af5c-9187-4900-883a-c96514cd8e15" providerId="ADAL" clId="{5E51067F-94D7-505D-9735-0698788361AC}" dt="2026-05-06T19:22:14.838" v="1842" actId="20577"/>
           <ac:spMkLst>
             <pc:docMk/>
             <pc:sldMk cId="211450528" sldId="273"/>
@@ -571,7 +206,7 @@
           </ac:spMkLst>
         </pc:spChg>
         <pc:spChg chg="mod">
-          <ac:chgData name="Schilling Sabine HSLU W" userId="b0e2af5c-9187-4900-883a-c96514cd8e15" providerId="ADAL" clId="{5E51067F-94D7-505D-9735-0698788361AC}" dt="2026-05-04T13:32:50.032" v="1548" actId="20577"/>
+          <ac:chgData name="Schilling Sabine HSLU W" userId="b0e2af5c-9187-4900-883a-c96514cd8e15" providerId="ADAL" clId="{5E51067F-94D7-505D-9735-0698788361AC}" dt="2026-05-06T19:19:42.567" v="1804" actId="1036"/>
           <ac:spMkLst>
             <pc:docMk/>
             <pc:sldMk cId="211450528" sldId="273"/>
@@ -579,39 +214,15 @@
           </ac:spMkLst>
         </pc:spChg>
         <pc:spChg chg="mod">
-          <ac:chgData name="Schilling Sabine HSLU W" userId="b0e2af5c-9187-4900-883a-c96514cd8e15" providerId="ADAL" clId="{5E51067F-94D7-505D-9735-0698788361AC}" dt="2026-05-04T13:32:50.032" v="1548" actId="20577"/>
+          <ac:chgData name="Schilling Sabine HSLU W" userId="b0e2af5c-9187-4900-883a-c96514cd8e15" providerId="ADAL" clId="{5E51067F-94D7-505D-9735-0698788361AC}" dt="2026-05-06T19:19:42.567" v="1804" actId="1036"/>
           <ac:spMkLst>
             <pc:docMk/>
             <pc:sldMk cId="211450528" sldId="273"/>
             <ac:spMk id="40" creationId="{24589715-130D-1803-FC06-FD5A8DB9FD73}"/>
           </ac:spMkLst>
         </pc:spChg>
-        <pc:spChg chg="add mod">
-          <ac:chgData name="Schilling Sabine HSLU W" userId="b0e2af5c-9187-4900-883a-c96514cd8e15" providerId="ADAL" clId="{5E51067F-94D7-505D-9735-0698788361AC}" dt="2026-05-04T13:26:49.900" v="1418" actId="767"/>
-          <ac:spMkLst>
-            <pc:docMk/>
-            <pc:sldMk cId="211450528" sldId="273"/>
-            <ac:spMk id="52" creationId="{D4B53032-722F-1B47-4853-163C28750E01}"/>
-          </ac:spMkLst>
-        </pc:spChg>
-        <pc:grpChg chg="add del mod">
-          <ac:chgData name="Schilling Sabine HSLU W" userId="b0e2af5c-9187-4900-883a-c96514cd8e15" providerId="ADAL" clId="{5E51067F-94D7-505D-9735-0698788361AC}" dt="2026-05-04T13:29:56.562" v="1427" actId="478"/>
-          <ac:grpSpMkLst>
-            <pc:docMk/>
-            <pc:sldMk cId="211450528" sldId="273"/>
-            <ac:grpSpMk id="11" creationId="{993841D5-8F71-5814-5A84-23B51192E926}"/>
-          </ac:grpSpMkLst>
-        </pc:grpChg>
-        <pc:grpChg chg="add del">
-          <ac:chgData name="Schilling Sabine HSLU W" userId="b0e2af5c-9187-4900-883a-c96514cd8e15" providerId="ADAL" clId="{5E51067F-94D7-505D-9735-0698788361AC}" dt="2026-05-04T12:46:16.180" v="1188" actId="165"/>
-          <ac:grpSpMkLst>
-            <pc:docMk/>
-            <pc:sldMk cId="211450528" sldId="273"/>
-            <ac:grpSpMk id="26" creationId="{9A1C2021-1AD9-601B-4B38-6901F6A8E8BC}"/>
-          </ac:grpSpMkLst>
-        </pc:grpChg>
         <pc:grpChg chg="add mod">
-          <ac:chgData name="Schilling Sabine HSLU W" userId="b0e2af5c-9187-4900-883a-c96514cd8e15" providerId="ADAL" clId="{5E51067F-94D7-505D-9735-0698788361AC}" dt="2026-05-04T13:33:08.542" v="1555" actId="1076"/>
+          <ac:chgData name="Schilling Sabine HSLU W" userId="b0e2af5c-9187-4900-883a-c96514cd8e15" providerId="ADAL" clId="{5E51067F-94D7-505D-9735-0698788361AC}" dt="2026-05-06T19:18:36.355" v="1782" actId="20577"/>
           <ac:grpSpMkLst>
             <pc:docMk/>
             <pc:sldMk cId="211450528" sldId="273"/>
@@ -624,6 +235,14 @@
             <pc:docMk/>
             <pc:sldMk cId="211450528" sldId="273"/>
             <ac:cxnSpMk id="2" creationId="{3C415C7F-748B-C1ED-EE4E-BD64FBAA5934}"/>
+          </ac:cxnSpMkLst>
+        </pc:cxnChg>
+        <pc:cxnChg chg="add del mod">
+          <ac:chgData name="Schilling Sabine HSLU W" userId="b0e2af5c-9187-4900-883a-c96514cd8e15" providerId="ADAL" clId="{5E51067F-94D7-505D-9735-0698788361AC}" dt="2026-05-06T19:18:17.398" v="1756" actId="478"/>
+          <ac:cxnSpMkLst>
+            <pc:docMk/>
+            <pc:sldMk cId="211450528" sldId="273"/>
+            <ac:cxnSpMk id="3" creationId="{FCE9BDC2-6EF6-C498-0819-E7C698505B6C}"/>
           </ac:cxnSpMkLst>
         </pc:cxnChg>
         <pc:cxnChg chg="mod">
@@ -642,16 +261,8 @@
             <ac:cxnSpMk id="16" creationId="{3DDE1A43-F7C7-70FB-7017-DCD87C3E884D}"/>
           </ac:cxnSpMkLst>
         </pc:cxnChg>
-        <pc:cxnChg chg="del mod">
-          <ac:chgData name="Schilling Sabine HSLU W" userId="b0e2af5c-9187-4900-883a-c96514cd8e15" providerId="ADAL" clId="{5E51067F-94D7-505D-9735-0698788361AC}" dt="2026-05-04T13:01:57.847" v="1358" actId="478"/>
-          <ac:cxnSpMkLst>
-            <pc:docMk/>
-            <pc:sldMk cId="211450528" sldId="273"/>
-            <ac:cxnSpMk id="35" creationId="{6C009D71-461A-726A-6D11-D131CFC4B15E}"/>
-          </ac:cxnSpMkLst>
-        </pc:cxnChg>
         <pc:cxnChg chg="mod">
-          <ac:chgData name="Schilling Sabine HSLU W" userId="b0e2af5c-9187-4900-883a-c96514cd8e15" providerId="ADAL" clId="{5E51067F-94D7-505D-9735-0698788361AC}" dt="2026-05-04T13:05:42.660" v="1386" actId="14100"/>
+          <ac:chgData name="Schilling Sabine HSLU W" userId="b0e2af5c-9187-4900-883a-c96514cd8e15" providerId="ADAL" clId="{5E51067F-94D7-505D-9735-0698788361AC}" dt="2026-05-06T19:19:42.567" v="1804" actId="1036"/>
           <ac:cxnSpMkLst>
             <pc:docMk/>
             <pc:sldMk cId="211450528" sldId="273"/>
@@ -659,130 +270,11 @@
           </ac:cxnSpMkLst>
         </pc:cxnChg>
         <pc:cxnChg chg="add mod">
-          <ac:chgData name="Schilling Sabine HSLU W" userId="b0e2af5c-9187-4900-883a-c96514cd8e15" providerId="ADAL" clId="{5E51067F-94D7-505D-9735-0698788361AC}" dt="2026-05-04T13:04:03.928" v="1375" actId="1076"/>
+          <ac:chgData name="Schilling Sabine HSLU W" userId="b0e2af5c-9187-4900-883a-c96514cd8e15" providerId="ADAL" clId="{5E51067F-94D7-505D-9735-0698788361AC}" dt="2026-05-06T19:20:16.733" v="1809" actId="1076"/>
           <ac:cxnSpMkLst>
             <pc:docMk/>
             <pc:sldMk cId="211450528" sldId="273"/>
             <ac:cxnSpMk id="49" creationId="{B5C5DBDB-04E0-3BA1-F10B-880665C4834B}"/>
-          </ac:cxnSpMkLst>
-        </pc:cxnChg>
-      </pc:sldChg>
-      <pc:sldChg chg="addSp delSp modSp new del mod">
-        <pc:chgData name="Schilling Sabine HSLU W" userId="b0e2af5c-9187-4900-883a-c96514cd8e15" providerId="ADAL" clId="{5E51067F-94D7-505D-9735-0698788361AC}" dt="2026-05-04T13:26:33.654" v="1416" actId="2696"/>
-        <pc:sldMkLst>
-          <pc:docMk/>
-          <pc:sldMk cId="3188828130" sldId="274"/>
-        </pc:sldMkLst>
-        <pc:spChg chg="mod">
-          <ac:chgData name="Schilling Sabine HSLU W" userId="b0e2af5c-9187-4900-883a-c96514cd8e15" providerId="ADAL" clId="{5E51067F-94D7-505D-9735-0698788361AC}" dt="2026-05-04T13:26:24.992" v="1414"/>
-          <ac:spMkLst>
-            <pc:docMk/>
-            <pc:sldMk cId="3188828130" sldId="274"/>
-            <ac:spMk id="3" creationId="{89B0B983-4591-21D1-27F7-CF26085CD5A2}"/>
-          </ac:spMkLst>
-        </pc:spChg>
-        <pc:spChg chg="mod">
-          <ac:chgData name="Schilling Sabine HSLU W" userId="b0e2af5c-9187-4900-883a-c96514cd8e15" providerId="ADAL" clId="{5E51067F-94D7-505D-9735-0698788361AC}" dt="2026-05-04T13:26:24.992" v="1414"/>
-          <ac:spMkLst>
-            <pc:docMk/>
-            <pc:sldMk cId="3188828130" sldId="274"/>
-            <ac:spMk id="4" creationId="{20C935F0-8380-633B-0F74-A1F2C2941773}"/>
-          </ac:spMkLst>
-        </pc:spChg>
-        <pc:spChg chg="mod">
-          <ac:chgData name="Schilling Sabine HSLU W" userId="b0e2af5c-9187-4900-883a-c96514cd8e15" providerId="ADAL" clId="{5E51067F-94D7-505D-9735-0698788361AC}" dt="2026-05-04T13:26:24.992" v="1414"/>
-          <ac:spMkLst>
-            <pc:docMk/>
-            <pc:sldMk cId="3188828130" sldId="274"/>
-            <ac:spMk id="6" creationId="{AF52B51F-91CC-1543-E601-F4DF1C3EBB96}"/>
-          </ac:spMkLst>
-        </pc:spChg>
-        <pc:spChg chg="mod">
-          <ac:chgData name="Schilling Sabine HSLU W" userId="b0e2af5c-9187-4900-883a-c96514cd8e15" providerId="ADAL" clId="{5E51067F-94D7-505D-9735-0698788361AC}" dt="2026-05-04T13:26:24.992" v="1414"/>
-          <ac:spMkLst>
-            <pc:docMk/>
-            <pc:sldMk cId="3188828130" sldId="274"/>
-            <ac:spMk id="7" creationId="{BBBE8FEE-1F88-C7A7-BB64-7185B8F73EC2}"/>
-          </ac:spMkLst>
-        </pc:spChg>
-        <pc:spChg chg="mod">
-          <ac:chgData name="Schilling Sabine HSLU W" userId="b0e2af5c-9187-4900-883a-c96514cd8e15" providerId="ADAL" clId="{5E51067F-94D7-505D-9735-0698788361AC}" dt="2026-05-04T13:26:24.992" v="1414"/>
-          <ac:spMkLst>
-            <pc:docMk/>
-            <pc:sldMk cId="3188828130" sldId="274"/>
-            <ac:spMk id="9" creationId="{8C2A18D0-1C0A-0BC5-DCE8-1CCF52A9A928}"/>
-          </ac:spMkLst>
-        </pc:spChg>
-        <pc:spChg chg="mod">
-          <ac:chgData name="Schilling Sabine HSLU W" userId="b0e2af5c-9187-4900-883a-c96514cd8e15" providerId="ADAL" clId="{5E51067F-94D7-505D-9735-0698788361AC}" dt="2026-05-04T13:26:24.992" v="1414"/>
-          <ac:spMkLst>
-            <pc:docMk/>
-            <pc:sldMk cId="3188828130" sldId="274"/>
-            <ac:spMk id="11" creationId="{92A7E006-E153-C3BB-8ED1-80F482C496E0}"/>
-          </ac:spMkLst>
-        </pc:spChg>
-        <pc:spChg chg="mod">
-          <ac:chgData name="Schilling Sabine HSLU W" userId="b0e2af5c-9187-4900-883a-c96514cd8e15" providerId="ADAL" clId="{5E51067F-94D7-505D-9735-0698788361AC}" dt="2026-05-04T13:26:24.992" v="1414"/>
-          <ac:spMkLst>
-            <pc:docMk/>
-            <pc:sldMk cId="3188828130" sldId="274"/>
-            <ac:spMk id="12" creationId="{C3F11821-FFE7-2892-5B8C-02209DBF6DF7}"/>
-          </ac:spMkLst>
-        </pc:spChg>
-        <pc:spChg chg="mod">
-          <ac:chgData name="Schilling Sabine HSLU W" userId="b0e2af5c-9187-4900-883a-c96514cd8e15" providerId="ADAL" clId="{5E51067F-94D7-505D-9735-0698788361AC}" dt="2026-05-04T13:26:24.992" v="1414"/>
-          <ac:spMkLst>
-            <pc:docMk/>
-            <pc:sldMk cId="3188828130" sldId="274"/>
-            <ac:spMk id="14" creationId="{FEDD7B9B-A50E-F1CD-6387-40C6B08FB6B6}"/>
-          </ac:spMkLst>
-        </pc:spChg>
-        <pc:spChg chg="mod">
-          <ac:chgData name="Schilling Sabine HSLU W" userId="b0e2af5c-9187-4900-883a-c96514cd8e15" providerId="ADAL" clId="{5E51067F-94D7-505D-9735-0698788361AC}" dt="2026-05-04T13:26:24.992" v="1414"/>
-          <ac:spMkLst>
-            <pc:docMk/>
-            <pc:sldMk cId="3188828130" sldId="274"/>
-            <ac:spMk id="18" creationId="{3D09B8F6-95DF-13E6-6BE6-B4BFD7DCB775}"/>
-          </ac:spMkLst>
-        </pc:spChg>
-        <pc:spChg chg="mod">
-          <ac:chgData name="Schilling Sabine HSLU W" userId="b0e2af5c-9187-4900-883a-c96514cd8e15" providerId="ADAL" clId="{5E51067F-94D7-505D-9735-0698788361AC}" dt="2026-05-04T13:26:24.992" v="1414"/>
-          <ac:spMkLst>
-            <pc:docMk/>
-            <pc:sldMk cId="3188828130" sldId="274"/>
-            <ac:spMk id="19" creationId="{C3B90691-D125-CB4E-8EE1-941826EE7623}"/>
-          </ac:spMkLst>
-        </pc:spChg>
-        <pc:grpChg chg="del">
-          <ac:chgData name="Schilling Sabine HSLU W" userId="b0e2af5c-9187-4900-883a-c96514cd8e15" providerId="ADAL" clId="{5E51067F-94D7-505D-9735-0698788361AC}" dt="2026-05-04T13:26:29.833" v="1415" actId="478"/>
-          <ac:grpSpMkLst>
-            <pc:docMk/>
-            <pc:sldMk cId="3188828130" sldId="274"/>
-            <ac:grpSpMk id="2" creationId="{2BB919FF-B2BB-0414-A9F3-A098725809BD}"/>
-          </ac:grpSpMkLst>
-        </pc:grpChg>
-        <pc:cxnChg chg="mod">
-          <ac:chgData name="Schilling Sabine HSLU W" userId="b0e2af5c-9187-4900-883a-c96514cd8e15" providerId="ADAL" clId="{5E51067F-94D7-505D-9735-0698788361AC}" dt="2026-05-04T13:26:29.833" v="1415" actId="478"/>
-          <ac:cxnSpMkLst>
-            <pc:docMk/>
-            <pc:sldMk cId="3188828130" sldId="274"/>
-            <ac:cxnSpMk id="8" creationId="{9A71E3B4-B1CF-ADEC-81BB-7CA19571DD10}"/>
-          </ac:cxnSpMkLst>
-        </pc:cxnChg>
-        <pc:cxnChg chg="mod">
-          <ac:chgData name="Schilling Sabine HSLU W" userId="b0e2af5c-9187-4900-883a-c96514cd8e15" providerId="ADAL" clId="{5E51067F-94D7-505D-9735-0698788361AC}" dt="2026-05-04T13:26:29.833" v="1415" actId="478"/>
-          <ac:cxnSpMkLst>
-            <pc:docMk/>
-            <pc:sldMk cId="3188828130" sldId="274"/>
-            <ac:cxnSpMk id="10" creationId="{A5B7DAB5-0D27-DAE7-D9A3-B6EFA8D2F7BF}"/>
-          </ac:cxnSpMkLst>
-        </pc:cxnChg>
-        <pc:cxnChg chg="mod">
-          <ac:chgData name="Schilling Sabine HSLU W" userId="b0e2af5c-9187-4900-883a-c96514cd8e15" providerId="ADAL" clId="{5E51067F-94D7-505D-9735-0698788361AC}" dt="2026-05-04T13:26:29.833" v="1415" actId="478"/>
-          <ac:cxnSpMkLst>
-            <pc:docMk/>
-            <pc:sldMk cId="3188828130" sldId="274"/>
-            <ac:cxnSpMk id="15" creationId="{AF0D11B9-B89F-ADCB-9B7B-DA762EF6D147}"/>
           </ac:cxnSpMkLst>
         </pc:cxnChg>
       </pc:sldChg>
@@ -873,7 +365,7 @@
           <a:p>
             <a:fld id="{0AECA108-3915-9043-8428-B4BE4472B821}" type="datetimeFigureOut">
               <a:rPr lang="de-DE" smtClean="0"/>
-              <a:t>04.05.26</a:t>
+              <a:t>06.05.26</a:t>
             </a:fld>
             <a:endParaRPr lang="de-DE"/>
           </a:p>
@@ -1395,7 +887,7 @@
           <a:p>
             <a:fld id="{43497422-92ED-3D47-BF28-17000E80E497}" type="datetimeFigureOut">
               <a:rPr lang="de-DE" smtClean="0"/>
-              <a:t>04.05.26</a:t>
+              <a:t>06.05.26</a:t>
             </a:fld>
             <a:endParaRPr lang="de-DE"/>
           </a:p>
@@ -1593,7 +1085,7 @@
           <a:p>
             <a:fld id="{43497422-92ED-3D47-BF28-17000E80E497}" type="datetimeFigureOut">
               <a:rPr lang="de-DE" smtClean="0"/>
-              <a:t>04.05.26</a:t>
+              <a:t>06.05.26</a:t>
             </a:fld>
             <a:endParaRPr lang="de-DE"/>
           </a:p>
@@ -1801,7 +1293,7 @@
           <a:p>
             <a:fld id="{43497422-92ED-3D47-BF28-17000E80E497}" type="datetimeFigureOut">
               <a:rPr lang="de-DE" smtClean="0"/>
-              <a:t>04.05.26</a:t>
+              <a:t>06.05.26</a:t>
             </a:fld>
             <a:endParaRPr lang="de-DE"/>
           </a:p>
@@ -1999,7 +1491,7 @@
           <a:p>
             <a:fld id="{43497422-92ED-3D47-BF28-17000E80E497}" type="datetimeFigureOut">
               <a:rPr lang="de-DE" smtClean="0"/>
-              <a:t>04.05.26</a:t>
+              <a:t>06.05.26</a:t>
             </a:fld>
             <a:endParaRPr lang="de-DE"/>
           </a:p>
@@ -2274,7 +1766,7 @@
           <a:p>
             <a:fld id="{43497422-92ED-3D47-BF28-17000E80E497}" type="datetimeFigureOut">
               <a:rPr lang="de-DE" smtClean="0"/>
-              <a:t>04.05.26</a:t>
+              <a:t>06.05.26</a:t>
             </a:fld>
             <a:endParaRPr lang="de-DE"/>
           </a:p>
@@ -2539,7 +2031,7 @@
           <a:p>
             <a:fld id="{43497422-92ED-3D47-BF28-17000E80E497}" type="datetimeFigureOut">
               <a:rPr lang="de-DE" smtClean="0"/>
-              <a:t>04.05.26</a:t>
+              <a:t>06.05.26</a:t>
             </a:fld>
             <a:endParaRPr lang="de-DE"/>
           </a:p>
@@ -2951,7 +2443,7 @@
           <a:p>
             <a:fld id="{43497422-92ED-3D47-BF28-17000E80E497}" type="datetimeFigureOut">
               <a:rPr lang="de-DE" smtClean="0"/>
-              <a:t>04.05.26</a:t>
+              <a:t>06.05.26</a:t>
             </a:fld>
             <a:endParaRPr lang="de-DE"/>
           </a:p>
@@ -3092,7 +2584,7 @@
           <a:p>
             <a:fld id="{43497422-92ED-3D47-BF28-17000E80E497}" type="datetimeFigureOut">
               <a:rPr lang="de-DE" smtClean="0"/>
-              <a:t>04.05.26</a:t>
+              <a:t>06.05.26</a:t>
             </a:fld>
             <a:endParaRPr lang="de-DE"/>
           </a:p>
@@ -3205,7 +2697,7 @@
           <a:p>
             <a:fld id="{43497422-92ED-3D47-BF28-17000E80E497}" type="datetimeFigureOut">
               <a:rPr lang="de-DE" smtClean="0"/>
-              <a:t>04.05.26</a:t>
+              <a:t>06.05.26</a:t>
             </a:fld>
             <a:endParaRPr lang="de-DE"/>
           </a:p>
@@ -3516,7 +3008,7 @@
           <a:p>
             <a:fld id="{43497422-92ED-3D47-BF28-17000E80E497}" type="datetimeFigureOut">
               <a:rPr lang="de-DE" smtClean="0"/>
-              <a:t>04.05.26</a:t>
+              <a:t>06.05.26</a:t>
             </a:fld>
             <a:endParaRPr lang="de-DE"/>
           </a:p>
@@ -3804,7 +3296,7 @@
           <a:p>
             <a:fld id="{43497422-92ED-3D47-BF28-17000E80E497}" type="datetimeFigureOut">
               <a:rPr lang="de-DE" smtClean="0"/>
-              <a:t>04.05.26</a:t>
+              <a:t>06.05.26</a:t>
             </a:fld>
             <a:endParaRPr lang="de-DE"/>
           </a:p>
@@ -4045,7 +3537,7 @@
           <a:p>
             <a:fld id="{43497422-92ED-3D47-BF28-17000E80E497}" type="datetimeFigureOut">
               <a:rPr lang="de-DE" smtClean="0"/>
-              <a:t>04.05.26</a:t>
+              <a:t>06.05.26</a:t>
             </a:fld>
             <a:endParaRPr lang="de-DE"/>
           </a:p>
@@ -4483,9 +3975,9 @@
         <p:grpSpPr>
           <a:xfrm>
             <a:off x="763420" y="668463"/>
-            <a:ext cx="10665159" cy="3387451"/>
+            <a:ext cx="10665159" cy="3629498"/>
             <a:chOff x="1360460" y="316483"/>
-            <a:chExt cx="10665159" cy="3387451"/>
+            <a:chExt cx="10665159" cy="3629498"/>
           </a:xfrm>
         </p:grpSpPr>
         <p:sp>
@@ -4627,8 +4119,8 @@
             </a:p>
           </p:txBody>
         </p:sp>
-        <mc:AlternateContent xmlns:mc="http://schemas.openxmlformats.org/markup-compatibility/2006">
-          <mc:Choice xmlns:a14="http://schemas.microsoft.com/office/drawing/2010/main" Requires="a14">
+        <mc:AlternateContent xmlns:mc="http://schemas.openxmlformats.org/markup-compatibility/2006" xmlns:a14="http://schemas.microsoft.com/office/drawing/2010/main">
+          <mc:Choice Requires="a14">
             <p:sp>
               <p:nvSpPr>
                 <p:cNvPr id="9" name="Textfeld 8">
@@ -4780,7 +4272,7 @@
               </p:txBody>
             </p:sp>
           </mc:Choice>
-          <mc:Fallback>
+          <mc:Fallback xmlns="">
             <p:sp>
               <p:nvSpPr>
                 <p:cNvPr id="9" name="Textfeld 8">
@@ -4847,7 +4339,7 @@
           <p:spPr>
             <a:xfrm>
               <a:off x="1360460" y="2508787"/>
-              <a:ext cx="4329205" cy="468000"/>
+              <a:ext cx="4329205" cy="646331"/>
             </a:xfrm>
             <a:prstGeom prst="rect">
               <a:avLst/>
@@ -4941,6 +4433,13 @@
                 </a:rPr>
                 <a:t>”</a:t>
               </a:r>
+              <a:br>
+                <a:rPr lang="en-GB" sz="1200" dirty="0">
+                  <a:latin typeface="Calibri" panose="020F0502020204030204" pitchFamily="34" charset="0"/>
+                  <a:ea typeface="Cambria Math" panose="02040503050406030204" pitchFamily="18" charset="0"/>
+                  <a:cs typeface="Calibri" panose="020F0502020204030204" pitchFamily="34" charset="0"/>
+                </a:rPr>
+              </a:br>
               <a:endParaRPr lang="en-GB" sz="1200" noProof="0" dirty="0">
                 <a:latin typeface="Calibri" panose="020F0502020204030204" pitchFamily="34" charset="0"/>
                 <a:ea typeface="Cambria Math" panose="02040503050406030204" pitchFamily="18" charset="0"/>
@@ -5040,129 +4539,236 @@
                 </a:rPr>
                 <a:t>”</a:t>
               </a:r>
-              <a:endParaRPr lang="en-GB" sz="1200" noProof="0" dirty="0">
-                <a:latin typeface="Calibri" panose="020F0502020204030204" pitchFamily="34" charset="0"/>
-                <a:ea typeface="Cambria Math" panose="02040503050406030204" pitchFamily="18" charset="0"/>
-                <a:cs typeface="Calibri" panose="020F0502020204030204" pitchFamily="34" charset="0"/>
-              </a:endParaRPr>
-            </a:p>
-          </p:txBody>
-        </p:sp>
-        <p:sp>
-          <p:nvSpPr>
-            <p:cNvPr id="19" name="Textfeld 18">
-              <a:extLst>
-                <a:ext uri="{FF2B5EF4-FFF2-40B4-BE49-F238E27FC236}">
-                  <a16:creationId xmlns:a16="http://schemas.microsoft.com/office/drawing/2014/main" id="{5B16A604-2B7C-E85E-0A91-CC96741BDB01}"/>
-                </a:ext>
-              </a:extLst>
-            </p:cNvPr>
-            <p:cNvSpPr txBox="1"/>
-            <p:nvPr/>
-          </p:nvSpPr>
-          <p:spPr>
-            <a:xfrm>
-              <a:off x="6193108" y="2508787"/>
-              <a:ext cx="5719853" cy="468000"/>
-            </a:xfrm>
-            <a:prstGeom prst="rect">
-              <a:avLst/>
-            </a:prstGeom>
-            <a:noFill/>
-            <a:ln w="12700">
-              <a:solidFill>
-                <a:schemeClr val="tx1"/>
-              </a:solidFill>
-            </a:ln>
-          </p:spPr>
-          <p:txBody>
-            <a:bodyPr wrap="square">
-              <a:spAutoFit/>
-            </a:bodyPr>
-            <a:lstStyle>
-              <a:defPPr>
-                <a:defRPr lang="de-DE"/>
-              </a:defPPr>
-            </a:lstStyle>
-            <a:p>
-              <a:pPr algn="ctr"/>
-              <a:r>
-                <a:rPr lang="en-GB" sz="1200" noProof="0" dirty="0">
-                  <a:latin typeface="Calibri" panose="020F0502020204030204" pitchFamily="34" charset="0"/>
-                  <a:ea typeface="Cambria Math" panose="02040503050406030204" pitchFamily="18" charset="0"/>
-                  <a:cs typeface="Calibri" panose="020F0502020204030204" pitchFamily="34" charset="0"/>
-                </a:rPr>
-                <a:t>                           Simple linear regression </a:t>
-              </a:r>
-              <a:r>
-                <a:rPr lang="en-GB" sz="1200" dirty="0" err="1">
-                  <a:latin typeface="Courier New" panose="02070309020205020404" pitchFamily="49" charset="0"/>
-                  <a:ea typeface="Cambria Math" panose="02040503050406030204" pitchFamily="18" charset="0"/>
-                  <a:cs typeface="Courier New" panose="02070309020205020404" pitchFamily="49" charset="0"/>
-                </a:rPr>
-                <a:t>lm</a:t>
-              </a:r>
-              <a:r>
-                <a:rPr lang="en-GB" sz="1200" dirty="0">
-                  <a:latin typeface="Courier New" panose="02070309020205020404" pitchFamily="49" charset="0"/>
-                  <a:ea typeface="Cambria Math" panose="02040503050406030204" pitchFamily="18" charset="0"/>
-                  <a:cs typeface="Courier New" panose="02070309020205020404" pitchFamily="49" charset="0"/>
-                </a:rPr>
-                <a:t>(),</a:t>
-              </a:r>
-              <a:endParaRPr lang="en-GB" sz="1200" noProof="0" dirty="0">
-                <a:latin typeface="Calibri" panose="020F0502020204030204" pitchFamily="34" charset="0"/>
-                <a:ea typeface="Cambria Math" panose="02040503050406030204" pitchFamily="18" charset="0"/>
-                <a:cs typeface="Calibri" panose="020F0502020204030204" pitchFamily="34" charset="0"/>
-              </a:endParaRPr>
-            </a:p>
-            <a:p>
-              <a:pPr algn="ctr"/>
-              <a:r>
-                <a:rPr lang="en-GB" sz="1200" noProof="0" dirty="0">
-                  <a:latin typeface="Calibri" panose="020F0502020204030204" pitchFamily="34" charset="0"/>
-                  <a:ea typeface="Cambria Math" panose="02040503050406030204" pitchFamily="18" charset="0"/>
-                  <a:cs typeface="Calibri" panose="020F0502020204030204" pitchFamily="34" charset="0"/>
-                </a:rPr>
-                <a:t> </a:t>
-              </a:r>
-              <a:r>
-                <a:rPr lang="en-GB" sz="1200" noProof="0" dirty="0" err="1">
-                  <a:latin typeface="Calibri" panose="020F0502020204030204" pitchFamily="34" charset="0"/>
-                  <a:ea typeface="Cambria Math" panose="02040503050406030204" pitchFamily="18" charset="0"/>
-                  <a:cs typeface="Calibri" panose="020F0502020204030204" pitchFamily="34" charset="0"/>
-                </a:rPr>
-                <a:t>do_regression</a:t>
-              </a:r>
-              <a:r>
-                <a:rPr lang="en-GB" sz="1200" noProof="0" dirty="0">
-                  <a:latin typeface="Calibri" panose="020F0502020204030204" pitchFamily="34" charset="0"/>
-                  <a:ea typeface="Cambria Math" panose="02040503050406030204" pitchFamily="18" charset="0"/>
-                  <a:cs typeface="Calibri" panose="020F0502020204030204" pitchFamily="34" charset="0"/>
-                </a:rPr>
-                <a:t>=FALSE: Spearman/ Pearson correlation  </a:t>
-              </a:r>
-              <a:r>
-                <a:rPr lang="en-GB" sz="1200" dirty="0" err="1">
-                  <a:latin typeface="Courier New" panose="02070309020205020404" pitchFamily="49" charset="0"/>
-                  <a:ea typeface="Cambria Math" panose="02040503050406030204" pitchFamily="18" charset="0"/>
-                  <a:cs typeface="Courier New" panose="02070309020205020404" pitchFamily="49" charset="0"/>
-                </a:rPr>
-                <a:t>cor</a:t>
-              </a:r>
-              <a:r>
-                <a:rPr lang="en-GB" sz="1200" dirty="0">
-                  <a:latin typeface="Courier New" panose="02070309020205020404" pitchFamily="49" charset="0"/>
-                  <a:ea typeface="Cambria Math" panose="02040503050406030204" pitchFamily="18" charset="0"/>
-                  <a:cs typeface="Courier New" panose="02070309020205020404" pitchFamily="49" charset="0"/>
-                </a:rPr>
-                <a:t>()   </a:t>
-              </a:r>
             </a:p>
           </p:txBody>
         </p:sp>
         <mc:AlternateContent xmlns:mc="http://schemas.openxmlformats.org/markup-compatibility/2006">
           <mc:Choice xmlns:a14="http://schemas.microsoft.com/office/drawing/2010/main" Requires="a14">
+            <p:sp>
+              <p:nvSpPr>
+                <p:cNvPr id="19" name="Textfeld 18">
+                  <a:extLst>
+                    <a:ext uri="{FF2B5EF4-FFF2-40B4-BE49-F238E27FC236}">
+                      <a16:creationId xmlns:a16="http://schemas.microsoft.com/office/drawing/2014/main" id="{5B16A604-2B7C-E85E-0A91-CC96741BDB01}"/>
+                    </a:ext>
+                  </a:extLst>
+                </p:cNvPr>
+                <p:cNvSpPr txBox="1"/>
+                <p:nvPr/>
+              </p:nvSpPr>
+              <p:spPr>
+                <a:xfrm>
+                  <a:off x="6211570" y="2526658"/>
+                  <a:ext cx="5719853" cy="646331"/>
+                </a:xfrm>
+                <a:prstGeom prst="rect">
+                  <a:avLst/>
+                </a:prstGeom>
+                <a:noFill/>
+                <a:ln w="12700">
+                  <a:solidFill>
+                    <a:schemeClr val="tx1"/>
+                  </a:solidFill>
+                </a:ln>
+              </p:spPr>
+              <p:txBody>
+                <a:bodyPr wrap="square">
+                  <a:spAutoFit/>
+                </a:bodyPr>
+                <a:lstStyle>
+                  <a:defPPr>
+                    <a:defRPr lang="de-DE"/>
+                  </a:defPPr>
+                </a:lstStyle>
+                <a:p>
+                  <a:pPr lvl="1"/>
+                  <a:r>
+                    <a:rPr lang="en-GB" sz="1200" noProof="0" dirty="0">
+                      <a:latin typeface="Calibri" panose="020F0502020204030204" pitchFamily="34" charset="0"/>
+                      <a:ea typeface="Cambria Math" panose="02040503050406030204" pitchFamily="18" charset="0"/>
+                      <a:cs typeface="Calibri" panose="020F0502020204030204" pitchFamily="34" charset="0"/>
+                    </a:rPr>
+                    <a:t>Simple linear regression:   </a:t>
+                  </a:r>
+                  <a:r>
+                    <a:rPr lang="en-GB" sz="1200" dirty="0" err="1">
+                      <a:latin typeface="Courier New" panose="02070309020205020404" pitchFamily="49" charset="0"/>
+                      <a:ea typeface="Cambria Math" panose="02040503050406030204" pitchFamily="18" charset="0"/>
+                      <a:cs typeface="Courier New" panose="02070309020205020404" pitchFamily="49" charset="0"/>
+                    </a:rPr>
+                    <a:t>lm</a:t>
+                  </a:r>
+                  <a:r>
+                    <a:rPr lang="en-GB" sz="1200" dirty="0">
+                      <a:latin typeface="Courier New" panose="02070309020205020404" pitchFamily="49" charset="0"/>
+                      <a:ea typeface="Cambria Math" panose="02040503050406030204" pitchFamily="18" charset="0"/>
+                      <a:cs typeface="Courier New" panose="02070309020205020404" pitchFamily="49" charset="0"/>
+                    </a:rPr>
+                    <a:t>()</a:t>
+                  </a:r>
+                  <a:br>
+                    <a:rPr lang="en-GB" sz="1200" dirty="0">
+                      <a:latin typeface="Courier New" panose="02070309020205020404" pitchFamily="49" charset="0"/>
+                      <a:ea typeface="Cambria Math" panose="02040503050406030204" pitchFamily="18" charset="0"/>
+                      <a:cs typeface="Courier New" panose="02070309020205020404" pitchFamily="49" charset="0"/>
+                    </a:rPr>
+                  </a:br>
+                  <a:r>
+                    <a:rPr lang="en-GB" sz="1200" dirty="0">
+                      <a:latin typeface="Calibri" panose="020F0502020204030204" pitchFamily="34" charset="0"/>
+                      <a:ea typeface="Cambria Math" panose="02040503050406030204" pitchFamily="18" charset="0"/>
+                      <a:cs typeface="Calibri" panose="020F0502020204030204" pitchFamily="34" charset="0"/>
+                    </a:rPr>
+                    <a:t>Spearman rank </a:t>
+                  </a:r>
+                  <a:r>
+                    <a:rPr lang="en-GB" sz="1200" dirty="0" err="1">
+                      <a:latin typeface="Calibri" panose="020F0502020204030204" pitchFamily="34" charset="0"/>
+                      <a:ea typeface="Cambria Math" panose="02040503050406030204" pitchFamily="18" charset="0"/>
+                      <a:cs typeface="Calibri" panose="020F0502020204030204" pitchFamily="34" charset="0"/>
+                    </a:rPr>
+                    <a:t>correlation</a:t>
+                  </a:r>
+                  <a:r>
+                    <a:rPr lang="en-GB" sz="1200" dirty="0" err="1">
+                      <a:latin typeface="Courier New" panose="02070309020205020404" pitchFamily="49" charset="0"/>
+                      <a:ea typeface="Cambria Math" panose="02040503050406030204" pitchFamily="18" charset="0"/>
+                      <a:cs typeface="Courier New" panose="02070309020205020404" pitchFamily="49" charset="0"/>
+                    </a:rPr>
+                    <a:t>:visstat</a:t>
+                  </a:r>
+                  <a:r>
+                    <a:rPr lang="en-GB" sz="1200" dirty="0">
+                      <a:latin typeface="Courier New" panose="02070309020205020404" pitchFamily="49" charset="0"/>
+                      <a:ea typeface="Cambria Math" panose="02040503050406030204" pitchFamily="18" charset="0"/>
+                      <a:cs typeface="Courier New" panose="02070309020205020404" pitchFamily="49" charset="0"/>
+                    </a:rPr>
+                    <a:t>(…,</a:t>
+                  </a:r>
+                  <a:r>
+                    <a:rPr lang="en-GB" sz="1200" b="1" dirty="0" err="1">
+                      <a:latin typeface="Courier New" panose="02070309020205020404" pitchFamily="49" charset="0"/>
+                      <a:ea typeface="Cambria Math" panose="02040503050406030204" pitchFamily="18" charset="0"/>
+                      <a:cs typeface="Courier New" panose="02070309020205020404" pitchFamily="49" charset="0"/>
+                    </a:rPr>
+                    <a:t>do_regression</a:t>
+                  </a:r>
+                  <a:r>
+                    <a:rPr lang="en-GB" sz="1200" b="1" dirty="0">
+                      <a:latin typeface="Courier New" panose="02070309020205020404" pitchFamily="49" charset="0"/>
+                      <a:ea typeface="Cambria Math" panose="02040503050406030204" pitchFamily="18" charset="0"/>
+                      <a:cs typeface="Courier New" panose="02070309020205020404" pitchFamily="49" charset="0"/>
+                    </a:rPr>
+                    <a:t>=FALSE</a:t>
+                  </a:r>
+                  <a:r>
+                    <a:rPr lang="en-GB" sz="1200" dirty="0">
+                      <a:latin typeface="Courier New" panose="02070309020205020404" pitchFamily="49" charset="0"/>
+                      <a:ea typeface="Cambria Math" panose="02040503050406030204" pitchFamily="18" charset="0"/>
+                      <a:cs typeface="Courier New" panose="02070309020205020404" pitchFamily="49" charset="0"/>
+                    </a:rPr>
+                    <a:t>)</a:t>
+                  </a:r>
+                  <a14:m>
+                    <m:oMath xmlns:m="http://schemas.openxmlformats.org/officeDocument/2006/math">
+                      <m:r>
+                        <a:rPr lang="en-US" sz="1200" b="0" i="1" smtClean="0">
+                          <a:latin typeface="Cambria Math" panose="02040503050406030204" pitchFamily="18" charset="0"/>
+                          <a:ea typeface="Cambria Math" panose="02040503050406030204" pitchFamily="18" charset="0"/>
+                          <a:cs typeface="Courier New" panose="02070309020205020404" pitchFamily="49" charset="0"/>
+                        </a:rPr>
+                        <m:t>→</m:t>
+                      </m:r>
+                    </m:oMath>
+                  </a14:m>
+                  <a:endParaRPr lang="en-US" sz="1200" b="0" dirty="0">
+                    <a:latin typeface="Courier New" panose="02070309020205020404" pitchFamily="49" charset="0"/>
+                    <a:ea typeface="Cambria Math" panose="02040503050406030204" pitchFamily="18" charset="0"/>
+                    <a:cs typeface="Courier New" panose="02070309020205020404" pitchFamily="49" charset="0"/>
+                  </a:endParaRPr>
+                </a:p>
+                <a:p>
+                  <a:pPr lvl="1"/>
+                  <a:r>
+                    <a:rPr lang="en-GB" sz="1200" dirty="0">
+                      <a:latin typeface="Courier New" panose="02070309020205020404" pitchFamily="49" charset="0"/>
+                      <a:ea typeface="Cambria Math" panose="02040503050406030204" pitchFamily="18" charset="0"/>
+                      <a:cs typeface="Courier New" panose="02070309020205020404" pitchFamily="49" charset="0"/>
+                    </a:rPr>
+                    <a:t>                 </a:t>
+                  </a:r>
+                  <a:r>
+                    <a:rPr lang="en-GB" sz="1200" dirty="0" err="1">
+                      <a:latin typeface="Courier New" panose="02070309020205020404" pitchFamily="49" charset="0"/>
+                      <a:ea typeface="Cambria Math" panose="02040503050406030204" pitchFamily="18" charset="0"/>
+                      <a:cs typeface="Courier New" panose="02070309020205020404" pitchFamily="49" charset="0"/>
+                    </a:rPr>
+                    <a:t>cor.test</a:t>
+                  </a:r>
+                  <a:r>
+                    <a:rPr lang="en-GB" sz="1200" dirty="0">
+                      <a:latin typeface="Courier New" panose="02070309020205020404" pitchFamily="49" charset="0"/>
+                      <a:ea typeface="Cambria Math" panose="02040503050406030204" pitchFamily="18" charset="0"/>
+                      <a:cs typeface="Courier New" panose="02070309020205020404" pitchFamily="49" charset="0"/>
+                    </a:rPr>
+                    <a:t>(…,method=“spearman”)</a:t>
+                  </a:r>
+                </a:p>
+              </p:txBody>
+            </p:sp>
+          </mc:Choice>
+          <mc:Fallback>
+            <p:sp>
+              <p:nvSpPr>
+                <p:cNvPr id="19" name="Textfeld 18">
+                  <a:extLst>
+                    <a:ext uri="{FF2B5EF4-FFF2-40B4-BE49-F238E27FC236}">
+                      <a16:creationId xmlns:a16="http://schemas.microsoft.com/office/drawing/2014/main" id="{5B16A604-2B7C-E85E-0A91-CC96741BDB01}"/>
+                    </a:ext>
+                  </a:extLst>
+                </p:cNvPr>
+                <p:cNvSpPr txBox="1">
+                  <a:spLocks noRot="1" noChangeAspect="1" noMove="1" noResize="1" noEditPoints="1" noAdjustHandles="1" noChangeArrowheads="1" noChangeShapeType="1" noTextEdit="1"/>
+                </p:cNvSpPr>
+                <p:nvPr/>
+              </p:nvSpPr>
+              <p:spPr>
+                <a:xfrm>
+                  <a:off x="6211570" y="2526658"/>
+                  <a:ext cx="5719853" cy="646331"/>
+                </a:xfrm>
+                <a:prstGeom prst="rect">
+                  <a:avLst/>
+                </a:prstGeom>
+                <a:blipFill>
+                  <a:blip r:embed="rId4"/>
+                  <a:stretch>
+                    <a:fillRect b="-5769"/>
+                  </a:stretch>
+                </a:blipFill>
+                <a:ln w="12700">
+                  <a:solidFill>
+                    <a:schemeClr val="tx1"/>
+                  </a:solidFill>
+                </a:ln>
+              </p:spPr>
+              <p:txBody>
+                <a:bodyPr/>
+                <a:lstStyle/>
+                <a:p>
+                  <a:r>
+                    <a:rPr lang="de-DE">
+                      <a:noFill/>
+                    </a:rPr>
+                    <a:t> </a:t>
+                  </a:r>
+                </a:p>
+              </p:txBody>
+            </p:sp>
+          </mc:Fallback>
+        </mc:AlternateContent>
+        <mc:AlternateContent xmlns:mc="http://schemas.openxmlformats.org/markup-compatibility/2006" xmlns:a14="http://schemas.microsoft.com/office/drawing/2010/main">
+          <mc:Choice Requires="a14">
             <p:sp>
               <p:nvSpPr>
                 <p:cNvPr id="7" name="Textfeld 6">
@@ -5400,7 +5006,7 @@
               </p:txBody>
             </p:sp>
           </mc:Choice>
-          <mc:Fallback>
+          <mc:Fallback xmlns="">
             <p:sp>
               <p:nvSpPr>
                 <p:cNvPr id="7" name="Textfeld 6">
@@ -5424,7 +5030,7 @@
                   <a:avLst/>
                 </a:prstGeom>
                 <a:blipFill>
-                  <a:blip r:embed="rId4"/>
+                  <a:blip r:embed="rId5"/>
                   <a:stretch>
                     <a:fillRect/>
                   </a:stretch>
@@ -5508,7 +5114,7 @@
           </p:nvSpPr>
           <p:spPr>
             <a:xfrm>
-              <a:off x="1369664" y="3241151"/>
+              <a:off x="1369664" y="3483198"/>
               <a:ext cx="4329204" cy="461665"/>
             </a:xfrm>
             <a:prstGeom prst="rect">
@@ -5607,7 +5213,7 @@
           </p:nvCxnSpPr>
           <p:spPr>
             <a:xfrm flipV="1">
-              <a:off x="5698868" y="3469934"/>
+              <a:off x="5698868" y="3711981"/>
               <a:ext cx="494242" cy="2050"/>
             </a:xfrm>
             <a:prstGeom prst="straightConnector1">
@@ -5649,7 +5255,7 @@
           </p:nvSpPr>
           <p:spPr>
             <a:xfrm>
-              <a:off x="6193110" y="3235934"/>
+              <a:off x="6193110" y="3477981"/>
               <a:ext cx="5719851" cy="468000"/>
             </a:xfrm>
             <a:prstGeom prst="rect">
@@ -5731,8 +5337,8 @@
             </a:p>
           </p:txBody>
         </p:sp>
-        <mc:AlternateContent xmlns:mc="http://schemas.openxmlformats.org/markup-compatibility/2006">
-          <mc:Choice xmlns:a14="http://schemas.microsoft.com/office/drawing/2010/main" Requires="a14">
+        <mc:AlternateContent xmlns:mc="http://schemas.openxmlformats.org/markup-compatibility/2006" xmlns:a14="http://schemas.microsoft.com/office/drawing/2010/main">
+          <mc:Choice Requires="a14">
             <p:sp>
               <p:nvSpPr>
                 <p:cNvPr id="6" name="Textfeld 5">
@@ -5844,14 +5450,7 @@
                           <a:latin typeface="Cambria Math" panose="02040503050406030204" pitchFamily="18" charset="0"/>
                           <a:ea typeface="Cambria Math" panose="02040503050406030204" pitchFamily="18" charset="0"/>
                         </a:rPr>
-                        <m:t>&gt;</m:t>
-                      </m:r>
-                      <m:r>
-                        <a:rPr lang="en-US" sz="1200" i="1">
-                          <a:latin typeface="Cambria Math" panose="02040503050406030204" pitchFamily="18" charset="0"/>
-                          <a:ea typeface="Cambria Math" panose="02040503050406030204" pitchFamily="18" charset="0"/>
-                        </a:rPr>
-                        <m:t>2</m:t>
+                        <m:t>&gt;2</m:t>
                       </m:r>
                     </m:oMath>
                   </a14:m>
@@ -5896,7 +5495,7 @@
               </p:txBody>
             </p:sp>
           </mc:Choice>
-          <mc:Fallback>
+          <mc:Fallback xmlns="">
             <p:sp>
               <p:nvSpPr>
                 <p:cNvPr id="6" name="Textfeld 5">
@@ -5920,7 +5519,7 @@
                   <a:avLst/>
                 </a:prstGeom>
                 <a:blipFill>
-                  <a:blip r:embed="rId5"/>
+                  <a:blip r:embed="rId6"/>
                   <a:stretch>
                     <a:fillRect b="-16667"/>
                   </a:stretch>
@@ -5946,8 +5545,8 @@
             </p:sp>
           </mc:Fallback>
         </mc:AlternateContent>
-        <mc:AlternateContent xmlns:mc="http://schemas.openxmlformats.org/markup-compatibility/2006">
-          <mc:Choice xmlns:a14="http://schemas.microsoft.com/office/drawing/2010/main" Requires="a14">
+        <mc:AlternateContent xmlns:mc="http://schemas.openxmlformats.org/markup-compatibility/2006" xmlns:a14="http://schemas.microsoft.com/office/drawing/2010/main">
+          <mc:Choice Requires="a14">
             <p:sp>
               <p:nvSpPr>
                 <p:cNvPr id="5" name="Textfeld 4">
@@ -6138,7 +5737,7 @@
               </p:txBody>
             </p:sp>
           </mc:Choice>
-          <mc:Fallback>
+          <mc:Fallback xmlns="">
             <p:sp>
               <p:nvSpPr>
                 <p:cNvPr id="5" name="Textfeld 4">
@@ -6162,7 +5761,7 @@
                   <a:avLst/>
                 </a:prstGeom>
                 <a:blipFill>
-                  <a:blip r:embed="rId6"/>
+                  <a:blip r:embed="rId7"/>
                   <a:stretch>
                     <a:fillRect b="-7692"/>
                   </a:stretch>
@@ -6293,7 +5892,7 @@
           </p:nvCxnSpPr>
           <p:spPr>
             <a:xfrm>
-              <a:off x="5680609" y="2742787"/>
+              <a:off x="5680608" y="2797386"/>
               <a:ext cx="512499" cy="3901"/>
             </a:xfrm>
             <a:prstGeom prst="straightConnector1">

--- a/vignettes/figures/overview.pptx
+++ b/vignettes/figures/overview.pptx
@@ -5,10 +5,11 @@
     <p:sldMasterId id="2147483648" r:id="rId1"/>
   </p:sldMasterIdLst>
   <p:notesMasterIdLst>
-    <p:notesMasterId r:id="rId3"/>
+    <p:notesMasterId r:id="rId4"/>
   </p:notesMasterIdLst>
   <p:sldIdLst>
     <p:sldId id="273" r:id="rId2"/>
+    <p:sldId id="274" r:id="rId3"/>
   </p:sldIdLst>
   <p:sldSz cx="12192000" cy="6858000"/>
   <p:notesSz cx="6858000" cy="9144000"/>
@@ -129,7 +130,7 @@
 <file path=ppt/revisionInfo.xml><?xml version="1.0" encoding="utf-8"?>
 <p1510:revInfo xmlns:a="http://schemas.openxmlformats.org/drawingml/2006/main" xmlns:r="http://schemas.openxmlformats.org/officeDocument/2006/relationships" xmlns:p1510="http://schemas.microsoft.com/office/powerpoint/2015/10/main">
   <p1510:revLst>
-    <p1510:client id="{4AA116FE-460E-754C-A3BF-FE57C3E35162}" v="46" dt="2026-05-06T19:22:14.838"/>
+    <p1510:client id="{4AA116FE-460E-754C-A3BF-FE57C3E35162}" v="122" dt="2026-05-09T21:38:50.659"/>
   </p1510:revLst>
 </p1510:revInfo>
 </file>
@@ -139,7 +140,7 @@
   <pc:docChgLst>
     <pc:chgData name="Schilling Sabine HSLU W" userId="b0e2af5c-9187-4900-883a-c96514cd8e15" providerId="ADAL" clId="{5E51067F-94D7-505D-9735-0698788361AC}"/>
     <pc:docChg chg="undo custSel addSld delSld modSld">
-      <pc:chgData name="Schilling Sabine HSLU W" userId="b0e2af5c-9187-4900-883a-c96514cd8e15" providerId="ADAL" clId="{5E51067F-94D7-505D-9735-0698788361AC}" dt="2026-05-06T19:22:14.838" v="1842" actId="20577"/>
+      <pc:chgData name="Schilling Sabine HSLU W" userId="b0e2af5c-9187-4900-883a-c96514cd8e15" providerId="ADAL" clId="{5E51067F-94D7-505D-9735-0698788361AC}" dt="2026-05-09T21:38:50.659" v="2341" actId="164"/>
       <pc:docMkLst>
         <pc:docMk/>
       </pc:docMkLst>
@@ -237,14 +238,6 @@
             <ac:cxnSpMk id="2" creationId="{3C415C7F-748B-C1ED-EE4E-BD64FBAA5934}"/>
           </ac:cxnSpMkLst>
         </pc:cxnChg>
-        <pc:cxnChg chg="add del mod">
-          <ac:chgData name="Schilling Sabine HSLU W" userId="b0e2af5c-9187-4900-883a-c96514cd8e15" providerId="ADAL" clId="{5E51067F-94D7-505D-9735-0698788361AC}" dt="2026-05-06T19:18:17.398" v="1756" actId="478"/>
-          <ac:cxnSpMkLst>
-            <pc:docMk/>
-            <pc:sldMk cId="211450528" sldId="273"/>
-            <ac:cxnSpMk id="3" creationId="{FCE9BDC2-6EF6-C498-0819-E7C698505B6C}"/>
-          </ac:cxnSpMkLst>
-        </pc:cxnChg>
         <pc:cxnChg chg="mod">
           <ac:chgData name="Schilling Sabine HSLU W" userId="b0e2af5c-9187-4900-883a-c96514cd8e15" providerId="ADAL" clId="{5E51067F-94D7-505D-9735-0698788361AC}" dt="2026-05-04T13:15:36.033" v="1388" actId="20577"/>
           <ac:cxnSpMkLst>
@@ -277,6 +270,356 @@
             <ac:cxnSpMk id="49" creationId="{B5C5DBDB-04E0-3BA1-F10B-880665C4834B}"/>
           </ac:cxnSpMkLst>
         </pc:cxnChg>
+      </pc:sldChg>
+      <pc:sldChg chg="addSp delSp modSp add mod setBg">
+        <pc:chgData name="Schilling Sabine HSLU W" userId="b0e2af5c-9187-4900-883a-c96514cd8e15" providerId="ADAL" clId="{5E51067F-94D7-505D-9735-0698788361AC}" dt="2026-05-09T21:38:50.659" v="2341" actId="164"/>
+        <pc:sldMkLst>
+          <pc:docMk/>
+          <pc:sldMk cId="3987773869" sldId="274"/>
+        </pc:sldMkLst>
+        <pc:spChg chg="mod topLvl">
+          <ac:chgData name="Schilling Sabine HSLU W" userId="b0e2af5c-9187-4900-883a-c96514cd8e15" providerId="ADAL" clId="{5E51067F-94D7-505D-9735-0698788361AC}" dt="2026-05-09T21:25:10.552" v="2159" actId="1076"/>
+          <ac:spMkLst>
+            <pc:docMk/>
+            <pc:sldMk cId="3987773869" sldId="274"/>
+            <ac:spMk id="5" creationId="{D88560B6-0A0F-0760-6149-6FF3B7B24210}"/>
+          </ac:spMkLst>
+        </pc:spChg>
+        <pc:spChg chg="mod topLvl">
+          <ac:chgData name="Schilling Sabine HSLU W" userId="b0e2af5c-9187-4900-883a-c96514cd8e15" providerId="ADAL" clId="{5E51067F-94D7-505D-9735-0698788361AC}" dt="2026-05-09T21:37:25.428" v="2311" actId="167"/>
+          <ac:spMkLst>
+            <pc:docMk/>
+            <pc:sldMk cId="3987773869" sldId="274"/>
+            <ac:spMk id="6" creationId="{850F5D96-EAD6-2EF1-FC49-CD5ADD5C2CF4}"/>
+          </ac:spMkLst>
+        </pc:spChg>
+        <pc:spChg chg="mod topLvl">
+          <ac:chgData name="Schilling Sabine HSLU W" userId="b0e2af5c-9187-4900-883a-c96514cd8e15" providerId="ADAL" clId="{5E51067F-94D7-505D-9735-0698788361AC}" dt="2026-05-09T21:37:00.663" v="2306" actId="207"/>
+          <ac:spMkLst>
+            <pc:docMk/>
+            <pc:sldMk cId="3987773869" sldId="274"/>
+            <ac:spMk id="7" creationId="{F15C4A27-3FC3-4E72-00C0-8FCD121A3D3F}"/>
+          </ac:spMkLst>
+        </pc:spChg>
+        <pc:spChg chg="mod topLvl">
+          <ac:chgData name="Schilling Sabine HSLU W" userId="b0e2af5c-9187-4900-883a-c96514cd8e15" providerId="ADAL" clId="{5E51067F-94D7-505D-9735-0698788361AC}" dt="2026-05-09T21:32:12.782" v="2242" actId="20577"/>
+          <ac:spMkLst>
+            <pc:docMk/>
+            <pc:sldMk cId="3987773869" sldId="274"/>
+            <ac:spMk id="8" creationId="{1259E59C-91A3-35E8-5F00-0D83BB6F2314}"/>
+          </ac:spMkLst>
+        </pc:spChg>
+        <pc:spChg chg="mod topLvl">
+          <ac:chgData name="Schilling Sabine HSLU W" userId="b0e2af5c-9187-4900-883a-c96514cd8e15" providerId="ADAL" clId="{5E51067F-94D7-505D-9735-0698788361AC}" dt="2026-05-09T21:35:45.040" v="2300" actId="552"/>
+          <ac:spMkLst>
+            <pc:docMk/>
+            <pc:sldMk cId="3987773869" sldId="274"/>
+            <ac:spMk id="9" creationId="{2C733A43-BA90-EED8-6758-242898D59516}"/>
+          </ac:spMkLst>
+        </pc:spChg>
+        <pc:spChg chg="add mod">
+          <ac:chgData name="Schilling Sabine HSLU W" userId="b0e2af5c-9187-4900-883a-c96514cd8e15" providerId="ADAL" clId="{5E51067F-94D7-505D-9735-0698788361AC}" dt="2026-05-09T21:34:01.860" v="2269" actId="1035"/>
+          <ac:spMkLst>
+            <pc:docMk/>
+            <pc:sldMk cId="3987773869" sldId="274"/>
+            <ac:spMk id="11" creationId="{FB9B848B-7023-14FC-D384-3530FD90ECCA}"/>
+          </ac:spMkLst>
+        </pc:spChg>
+        <pc:spChg chg="add del mod topLvl">
+          <ac:chgData name="Schilling Sabine HSLU W" userId="b0e2af5c-9187-4900-883a-c96514cd8e15" providerId="ADAL" clId="{5E51067F-94D7-505D-9735-0698788361AC}" dt="2026-05-09T21:37:44.716" v="2313" actId="14100"/>
+          <ac:spMkLst>
+            <pc:docMk/>
+            <pc:sldMk cId="3987773869" sldId="274"/>
+            <ac:spMk id="12" creationId="{4E91C313-141B-C0EB-7458-C988F814755D}"/>
+          </ac:spMkLst>
+        </pc:spChg>
+        <pc:spChg chg="add del mod">
+          <ac:chgData name="Schilling Sabine HSLU W" userId="b0e2af5c-9187-4900-883a-c96514cd8e15" providerId="ADAL" clId="{5E51067F-94D7-505D-9735-0698788361AC}" dt="2026-05-09T17:31:30.283" v="1884" actId="478"/>
+          <ac:spMkLst>
+            <pc:docMk/>
+            <pc:sldMk cId="3987773869" sldId="274"/>
+            <ac:spMk id="13" creationId="{BCA24DFF-631D-46F5-C48C-653D355D2FB3}"/>
+          </ac:spMkLst>
+        </pc:spChg>
+        <pc:spChg chg="add mod">
+          <ac:chgData name="Schilling Sabine HSLU W" userId="b0e2af5c-9187-4900-883a-c96514cd8e15" providerId="ADAL" clId="{5E51067F-94D7-505D-9735-0698788361AC}" dt="2026-05-09T21:33:39.864" v="2252" actId="1076"/>
+          <ac:spMkLst>
+            <pc:docMk/>
+            <pc:sldMk cId="3987773869" sldId="274"/>
+            <ac:spMk id="14" creationId="{C93B1E64-77B3-996B-0C03-74605808B38D}"/>
+          </ac:spMkLst>
+        </pc:spChg>
+        <pc:spChg chg="add del mod">
+          <ac:chgData name="Schilling Sabine HSLU W" userId="b0e2af5c-9187-4900-883a-c96514cd8e15" providerId="ADAL" clId="{5E51067F-94D7-505D-9735-0698788361AC}" dt="2026-05-09T17:47:03.185" v="2009" actId="478"/>
+          <ac:spMkLst>
+            <pc:docMk/>
+            <pc:sldMk cId="3987773869" sldId="274"/>
+            <ac:spMk id="17" creationId="{AF5CA990-E584-E49B-E758-98FBA01897F3}"/>
+          </ac:spMkLst>
+        </pc:spChg>
+        <pc:spChg chg="mod topLvl">
+          <ac:chgData name="Schilling Sabine HSLU W" userId="b0e2af5c-9187-4900-883a-c96514cd8e15" providerId="ADAL" clId="{5E51067F-94D7-505D-9735-0698788361AC}" dt="2026-05-09T21:35:45.040" v="2300" actId="552"/>
+          <ac:spMkLst>
+            <pc:docMk/>
+            <pc:sldMk cId="3987773869" sldId="274"/>
+            <ac:spMk id="19" creationId="{0F5D9D80-C8ED-1D5F-7CBA-0A72C71AD571}"/>
+          </ac:spMkLst>
+        </pc:spChg>
+        <pc:spChg chg="mod topLvl">
+          <ac:chgData name="Schilling Sabine HSLU W" userId="b0e2af5c-9187-4900-883a-c96514cd8e15" providerId="ADAL" clId="{5E51067F-94D7-505D-9735-0698788361AC}" dt="2026-05-09T21:34:12.069" v="2291" actId="1035"/>
+          <ac:spMkLst>
+            <pc:docMk/>
+            <pc:sldMk cId="3987773869" sldId="274"/>
+            <ac:spMk id="36" creationId="{E4B8EE02-0F90-3F09-7990-89B6B3DCBB2E}"/>
+          </ac:spMkLst>
+        </pc:spChg>
+        <pc:spChg chg="mod topLvl">
+          <ac:chgData name="Schilling Sabine HSLU W" userId="b0e2af5c-9187-4900-883a-c96514cd8e15" providerId="ADAL" clId="{5E51067F-94D7-505D-9735-0698788361AC}" dt="2026-05-09T21:34:12.069" v="2291" actId="1035"/>
+          <ac:spMkLst>
+            <pc:docMk/>
+            <pc:sldMk cId="3987773869" sldId="274"/>
+            <ac:spMk id="40" creationId="{50FC18BF-DA43-100C-15F7-046360CBE26F}"/>
+          </ac:spMkLst>
+        </pc:spChg>
+        <pc:spChg chg="add del mod">
+          <ac:chgData name="Schilling Sabine HSLU W" userId="b0e2af5c-9187-4900-883a-c96514cd8e15" providerId="ADAL" clId="{5E51067F-94D7-505D-9735-0698788361AC}" dt="2026-05-09T17:50:41.989" v="2029" actId="478"/>
+          <ac:spMkLst>
+            <pc:docMk/>
+            <pc:sldMk cId="3987773869" sldId="274"/>
+            <ac:spMk id="48" creationId="{E131DD3E-232D-FD1D-84AC-1082CF6D5BFA}"/>
+          </ac:spMkLst>
+        </pc:spChg>
+        <pc:spChg chg="add mod">
+          <ac:chgData name="Schilling Sabine HSLU W" userId="b0e2af5c-9187-4900-883a-c96514cd8e15" providerId="ADAL" clId="{5E51067F-94D7-505D-9735-0698788361AC}" dt="2026-05-09T21:25:30.467" v="2163" actId="1076"/>
+          <ac:spMkLst>
+            <pc:docMk/>
+            <pc:sldMk cId="3987773869" sldId="274"/>
+            <ac:spMk id="57" creationId="{8994B425-65B2-49E4-F84C-57A25705E933}"/>
+          </ac:spMkLst>
+        </pc:spChg>
+        <pc:spChg chg="add mod">
+          <ac:chgData name="Schilling Sabine HSLU W" userId="b0e2af5c-9187-4900-883a-c96514cd8e15" providerId="ADAL" clId="{5E51067F-94D7-505D-9735-0698788361AC}" dt="2026-05-09T21:38:26.498" v="2340" actId="20577"/>
+          <ac:spMkLst>
+            <pc:docMk/>
+            <pc:sldMk cId="3987773869" sldId="274"/>
+            <ac:spMk id="68" creationId="{E005EFC1-18B1-0452-D704-9026052FF006}"/>
+          </ac:spMkLst>
+        </pc:spChg>
+        <pc:grpChg chg="del mod">
+          <ac:chgData name="Schilling Sabine HSLU W" userId="b0e2af5c-9187-4900-883a-c96514cd8e15" providerId="ADAL" clId="{5E51067F-94D7-505D-9735-0698788361AC}" dt="2026-05-09T17:29:01.489" v="1868" actId="165"/>
+          <ac:grpSpMkLst>
+            <pc:docMk/>
+            <pc:sldMk cId="3987773869" sldId="274"/>
+            <ac:grpSpMk id="51" creationId="{6BB2D7E7-76E1-4A1B-2C49-6E7EAC145B7F}"/>
+          </ac:grpSpMkLst>
+        </pc:grpChg>
+        <pc:grpChg chg="mod">
+          <ac:chgData name="Schilling Sabine HSLU W" userId="b0e2af5c-9187-4900-883a-c96514cd8e15" providerId="ADAL" clId="{5E51067F-94D7-505D-9735-0698788361AC}" dt="2026-05-09T21:38:50.659" v="2341" actId="164"/>
+          <ac:grpSpMkLst>
+            <pc:docMk/>
+            <pc:sldMk cId="3987773869" sldId="274"/>
+            <ac:grpSpMk id="69" creationId="{44009903-A0FE-1610-A44A-7945B84624B2}"/>
+          </ac:grpSpMkLst>
+        </pc:grpChg>
+        <pc:grpChg chg="add mod">
+          <ac:chgData name="Schilling Sabine HSLU W" userId="b0e2af5c-9187-4900-883a-c96514cd8e15" providerId="ADAL" clId="{5E51067F-94D7-505D-9735-0698788361AC}" dt="2026-05-09T21:38:50.659" v="2341" actId="164"/>
+          <ac:grpSpMkLst>
+            <pc:docMk/>
+            <pc:sldMk cId="3987773869" sldId="274"/>
+            <ac:grpSpMk id="84" creationId="{E03D655E-9CD9-685D-7B91-6B5945795D4E}"/>
+          </ac:grpSpMkLst>
+        </pc:grpChg>
+        <pc:cxnChg chg="del mod">
+          <ac:chgData name="Schilling Sabine HSLU W" userId="b0e2af5c-9187-4900-883a-c96514cd8e15" providerId="ADAL" clId="{5E51067F-94D7-505D-9735-0698788361AC}" dt="2026-05-09T21:35:10.345" v="2296" actId="478"/>
+          <ac:cxnSpMkLst>
+            <pc:docMk/>
+            <pc:sldMk cId="3987773869" sldId="274"/>
+            <ac:cxnSpMk id="2" creationId="{F9C22910-8F70-1D49-07A9-1AAACFEF61DB}"/>
+          </ac:cxnSpMkLst>
+        </pc:cxnChg>
+        <pc:cxnChg chg="mod">
+          <ac:chgData name="Schilling Sabine HSLU W" userId="b0e2af5c-9187-4900-883a-c96514cd8e15" providerId="ADAL" clId="{5E51067F-94D7-505D-9735-0698788361AC}" dt="2026-05-09T21:35:04.675" v="2295" actId="12789"/>
+          <ac:cxnSpMkLst>
+            <pc:docMk/>
+            <pc:sldMk cId="3987773869" sldId="274"/>
+            <ac:cxnSpMk id="10" creationId="{7FFB23BA-1A56-EA09-897C-EAA0A7C46798}"/>
+          </ac:cxnSpMkLst>
+        </pc:cxnChg>
+        <pc:cxnChg chg="add mod">
+          <ac:chgData name="Schilling Sabine HSLU W" userId="b0e2af5c-9187-4900-883a-c96514cd8e15" providerId="ADAL" clId="{5E51067F-94D7-505D-9735-0698788361AC}" dt="2026-05-09T21:34:01.860" v="2269" actId="1035"/>
+          <ac:cxnSpMkLst>
+            <pc:docMk/>
+            <pc:sldMk cId="3987773869" sldId="274"/>
+            <ac:cxnSpMk id="15" creationId="{A6B56266-E50F-E630-DFBD-3065C4177F4D}"/>
+          </ac:cxnSpMkLst>
+        </pc:cxnChg>
+        <pc:cxnChg chg="mod">
+          <ac:chgData name="Schilling Sabine HSLU W" userId="b0e2af5c-9187-4900-883a-c96514cd8e15" providerId="ADAL" clId="{5E51067F-94D7-505D-9735-0698788361AC}" dt="2026-05-09T21:29:54.798" v="2222" actId="1076"/>
+          <ac:cxnSpMkLst>
+            <pc:docMk/>
+            <pc:sldMk cId="3987773869" sldId="274"/>
+            <ac:cxnSpMk id="16" creationId="{95EE3751-2F94-DC07-D76A-B01575DBC8AF}"/>
+          </ac:cxnSpMkLst>
+        </pc:cxnChg>
+        <pc:cxnChg chg="add del mod">
+          <ac:chgData name="Schilling Sabine HSLU W" userId="b0e2af5c-9187-4900-883a-c96514cd8e15" providerId="ADAL" clId="{5E51067F-94D7-505D-9735-0698788361AC}" dt="2026-05-09T17:48:12.843" v="2019" actId="478"/>
+          <ac:cxnSpMkLst>
+            <pc:docMk/>
+            <pc:sldMk cId="3987773869" sldId="274"/>
+            <ac:cxnSpMk id="18" creationId="{2F1D6734-909E-4516-3F31-0E296F304B43}"/>
+          </ac:cxnSpMkLst>
+        </pc:cxnChg>
+        <pc:cxnChg chg="add del mod">
+          <ac:chgData name="Schilling Sabine HSLU W" userId="b0e2af5c-9187-4900-883a-c96514cd8e15" providerId="ADAL" clId="{5E51067F-94D7-505D-9735-0698788361AC}" dt="2026-05-09T17:47:09.914" v="2011" actId="478"/>
+          <ac:cxnSpMkLst>
+            <pc:docMk/>
+            <pc:sldMk cId="3987773869" sldId="274"/>
+            <ac:cxnSpMk id="23" creationId="{304AE12C-FF0A-DDD0-5941-2AC0BA9359C5}"/>
+          </ac:cxnSpMkLst>
+        </pc:cxnChg>
+        <pc:cxnChg chg="mod">
+          <ac:chgData name="Schilling Sabine HSLU W" userId="b0e2af5c-9187-4900-883a-c96514cd8e15" providerId="ADAL" clId="{5E51067F-94D7-505D-9735-0698788361AC}" dt="2026-05-09T21:34:12.069" v="2291" actId="1035"/>
+          <ac:cxnSpMkLst>
+            <pc:docMk/>
+            <pc:sldMk cId="3987773869" sldId="274"/>
+            <ac:cxnSpMk id="37" creationId="{D0C86A91-FDA7-431A-A97E-45AB5F8F86AC}"/>
+          </ac:cxnSpMkLst>
+        </pc:cxnChg>
+        <pc:cxnChg chg="mod">
+          <ac:chgData name="Schilling Sabine HSLU W" userId="b0e2af5c-9187-4900-883a-c96514cd8e15" providerId="ADAL" clId="{5E51067F-94D7-505D-9735-0698788361AC}" dt="2026-05-09T21:33:36.447" v="2251" actId="1076"/>
+          <ac:cxnSpMkLst>
+            <pc:docMk/>
+            <pc:sldMk cId="3987773869" sldId="274"/>
+            <ac:cxnSpMk id="49" creationId="{C057720C-4C0C-4DDC-5805-67C405AC5729}"/>
+          </ac:cxnSpMkLst>
+        </pc:cxnChg>
+        <pc:cxnChg chg="add del mod">
+          <ac:chgData name="Schilling Sabine HSLU W" userId="b0e2af5c-9187-4900-883a-c96514cd8e15" providerId="ADAL" clId="{5E51067F-94D7-505D-9735-0698788361AC}" dt="2026-05-09T17:52:27.322" v="2035" actId="478"/>
+          <ac:cxnSpMkLst>
+            <pc:docMk/>
+            <pc:sldMk cId="3987773869" sldId="274"/>
+            <ac:cxnSpMk id="50" creationId="{844FCB7D-07C7-05A6-B469-AB9A86C8A16D}"/>
+          </ac:cxnSpMkLst>
+        </pc:cxnChg>
+        <pc:cxnChg chg="add del mod">
+          <ac:chgData name="Schilling Sabine HSLU W" userId="b0e2af5c-9187-4900-883a-c96514cd8e15" providerId="ADAL" clId="{5E51067F-94D7-505D-9735-0698788361AC}" dt="2026-05-09T17:52:25.632" v="2034" actId="478"/>
+          <ac:cxnSpMkLst>
+            <pc:docMk/>
+            <pc:sldMk cId="3987773869" sldId="274"/>
+            <ac:cxnSpMk id="55" creationId="{CDBDD451-D597-84E8-6AC7-BC097B795C4B}"/>
+          </ac:cxnSpMkLst>
+        </pc:cxnChg>
+        <pc:cxnChg chg="add del mod">
+          <ac:chgData name="Schilling Sabine HSLU W" userId="b0e2af5c-9187-4900-883a-c96514cd8e15" providerId="ADAL" clId="{5E51067F-94D7-505D-9735-0698788361AC}" dt="2026-05-09T18:34:25.920" v="2130" actId="478"/>
+          <ac:cxnSpMkLst>
+            <pc:docMk/>
+            <pc:sldMk cId="3987773869" sldId="274"/>
+            <ac:cxnSpMk id="61" creationId="{93E41B99-2FE0-8454-F08B-13B6822D3E6C}"/>
+          </ac:cxnSpMkLst>
+        </pc:cxnChg>
+        <pc:cxnChg chg="add mod">
+          <ac:chgData name="Schilling Sabine HSLU W" userId="b0e2af5c-9187-4900-883a-c96514cd8e15" providerId="ADAL" clId="{5E51067F-94D7-505D-9735-0698788361AC}" dt="2026-05-09T21:33:42.548" v="2253" actId="1076"/>
+          <ac:cxnSpMkLst>
+            <pc:docMk/>
+            <pc:sldMk cId="3987773869" sldId="274"/>
+            <ac:cxnSpMk id="67" creationId="{90D9A013-B638-2CFA-D596-D590570520DD}"/>
+          </ac:cxnSpMkLst>
+        </pc:cxnChg>
+        <pc:cxnChg chg="add mod">
+          <ac:chgData name="Schilling Sabine HSLU W" userId="b0e2af5c-9187-4900-883a-c96514cd8e15" providerId="ADAL" clId="{5E51067F-94D7-505D-9735-0698788361AC}" dt="2026-05-09T21:38:50.659" v="2341" actId="164"/>
+          <ac:cxnSpMkLst>
+            <pc:docMk/>
+            <pc:sldMk cId="3987773869" sldId="274"/>
+            <ac:cxnSpMk id="83" creationId="{277F9311-EB83-9B97-DA2A-A783B756E3C6}"/>
+          </ac:cxnSpMkLst>
+        </pc:cxnChg>
+      </pc:sldChg>
+      <pc:sldChg chg="modSp add del mod">
+        <pc:chgData name="Schilling Sabine HSLU W" userId="b0e2af5c-9187-4900-883a-c96514cd8e15" providerId="ADAL" clId="{5E51067F-94D7-505D-9735-0698788361AC}" dt="2026-05-09T17:32:50.935" v="1891" actId="2696"/>
+        <pc:sldMkLst>
+          <pc:docMk/>
+          <pc:sldMk cId="2301579658" sldId="275"/>
+        </pc:sldMkLst>
+        <pc:spChg chg="mod">
+          <ac:chgData name="Schilling Sabine HSLU W" userId="b0e2af5c-9187-4900-883a-c96514cd8e15" providerId="ADAL" clId="{5E51067F-94D7-505D-9735-0698788361AC}" dt="2026-05-09T17:27:59.106" v="1860" actId="20577"/>
+          <ac:spMkLst>
+            <pc:docMk/>
+            <pc:sldMk cId="2301579658" sldId="275"/>
+            <ac:spMk id="5" creationId="{1BA2DBBD-EF00-0AA5-56C7-D5449A181778}"/>
+          </ac:spMkLst>
+        </pc:spChg>
+        <pc:spChg chg="mod">
+          <ac:chgData name="Schilling Sabine HSLU W" userId="b0e2af5c-9187-4900-883a-c96514cd8e15" providerId="ADAL" clId="{5E51067F-94D7-505D-9735-0698788361AC}" dt="2026-05-09T17:27:59.106" v="1860" actId="20577"/>
+          <ac:spMkLst>
+            <pc:docMk/>
+            <pc:sldMk cId="2301579658" sldId="275"/>
+            <ac:spMk id="6" creationId="{D717D2A7-2DDE-DBEB-6ADE-E8F61B52E3FB}"/>
+          </ac:spMkLst>
+        </pc:spChg>
+        <pc:spChg chg="mod">
+          <ac:chgData name="Schilling Sabine HSLU W" userId="b0e2af5c-9187-4900-883a-c96514cd8e15" providerId="ADAL" clId="{5E51067F-94D7-505D-9735-0698788361AC}" dt="2026-05-09T17:27:59.106" v="1860" actId="20577"/>
+          <ac:spMkLst>
+            <pc:docMk/>
+            <pc:sldMk cId="2301579658" sldId="275"/>
+            <ac:spMk id="7" creationId="{CE12E117-1508-006F-3A9F-EF836987C197}"/>
+          </ac:spMkLst>
+        </pc:spChg>
+        <pc:spChg chg="mod">
+          <ac:chgData name="Schilling Sabine HSLU W" userId="b0e2af5c-9187-4900-883a-c96514cd8e15" providerId="ADAL" clId="{5E51067F-94D7-505D-9735-0698788361AC}" dt="2026-05-09T17:27:59.106" v="1860" actId="20577"/>
+          <ac:spMkLst>
+            <pc:docMk/>
+            <pc:sldMk cId="2301579658" sldId="275"/>
+            <ac:spMk id="8" creationId="{F3659B89-9F95-B722-5248-F1A3329247EC}"/>
+          </ac:spMkLst>
+        </pc:spChg>
+        <pc:spChg chg="mod">
+          <ac:chgData name="Schilling Sabine HSLU W" userId="b0e2af5c-9187-4900-883a-c96514cd8e15" providerId="ADAL" clId="{5E51067F-94D7-505D-9735-0698788361AC}" dt="2026-05-09T17:27:59.106" v="1860" actId="20577"/>
+          <ac:spMkLst>
+            <pc:docMk/>
+            <pc:sldMk cId="2301579658" sldId="275"/>
+            <ac:spMk id="9" creationId="{1337C1CE-6671-90F8-C10E-4DA3EDDAACED}"/>
+          </ac:spMkLst>
+        </pc:spChg>
+        <pc:spChg chg="mod">
+          <ac:chgData name="Schilling Sabine HSLU W" userId="b0e2af5c-9187-4900-883a-c96514cd8e15" providerId="ADAL" clId="{5E51067F-94D7-505D-9735-0698788361AC}" dt="2026-05-09T17:27:59.106" v="1860" actId="20577"/>
+          <ac:spMkLst>
+            <pc:docMk/>
+            <pc:sldMk cId="2301579658" sldId="275"/>
+            <ac:spMk id="12" creationId="{E6EB28DF-E9A7-6041-B1A7-927E907C77C6}"/>
+          </ac:spMkLst>
+        </pc:spChg>
+        <pc:spChg chg="mod">
+          <ac:chgData name="Schilling Sabine HSLU W" userId="b0e2af5c-9187-4900-883a-c96514cd8e15" providerId="ADAL" clId="{5E51067F-94D7-505D-9735-0698788361AC}" dt="2026-05-09T17:27:59.106" v="1860" actId="20577"/>
+          <ac:spMkLst>
+            <pc:docMk/>
+            <pc:sldMk cId="2301579658" sldId="275"/>
+            <ac:spMk id="19" creationId="{63EAAFBC-95FE-349D-8CF3-362DEEEE0E39}"/>
+          </ac:spMkLst>
+        </pc:spChg>
+        <pc:spChg chg="mod">
+          <ac:chgData name="Schilling Sabine HSLU W" userId="b0e2af5c-9187-4900-883a-c96514cd8e15" providerId="ADAL" clId="{5E51067F-94D7-505D-9735-0698788361AC}" dt="2026-05-09T17:27:59.106" v="1860" actId="20577"/>
+          <ac:spMkLst>
+            <pc:docMk/>
+            <pc:sldMk cId="2301579658" sldId="275"/>
+            <ac:spMk id="36" creationId="{2B44A6FE-D441-C71D-8CAE-FE019CD55DAF}"/>
+          </ac:spMkLst>
+        </pc:spChg>
+        <pc:spChg chg="mod">
+          <ac:chgData name="Schilling Sabine HSLU W" userId="b0e2af5c-9187-4900-883a-c96514cd8e15" providerId="ADAL" clId="{5E51067F-94D7-505D-9735-0698788361AC}" dt="2026-05-09T17:27:59.106" v="1860" actId="20577"/>
+          <ac:spMkLst>
+            <pc:docMk/>
+            <pc:sldMk cId="2301579658" sldId="275"/>
+            <ac:spMk id="40" creationId="{B71AD9BD-DD5E-0889-BBC5-EDF6027DE37E}"/>
+          </ac:spMkLst>
+        </pc:spChg>
+        <pc:grpChg chg="mod">
+          <ac:chgData name="Schilling Sabine HSLU W" userId="b0e2af5c-9187-4900-883a-c96514cd8e15" providerId="ADAL" clId="{5E51067F-94D7-505D-9735-0698788361AC}" dt="2026-05-09T17:27:59.106" v="1860" actId="20577"/>
+          <ac:grpSpMkLst>
+            <pc:docMk/>
+            <pc:sldMk cId="2301579658" sldId="275"/>
+            <ac:grpSpMk id="51" creationId="{001F8610-FCAD-306A-777D-224A41C5C1A4}"/>
+          </ac:grpSpMkLst>
+        </pc:grpChg>
       </pc:sldChg>
     </pc:docChg>
   </pc:docChgLst>
@@ -365,7 +708,7 @@
           <a:p>
             <a:fld id="{0AECA108-3915-9043-8428-B4BE4472B821}" type="datetimeFigureOut">
               <a:rPr lang="de-DE" smtClean="0"/>
-              <a:t>06.05.26</a:t>
+              <a:t>09.05.26</a:t>
             </a:fld>
             <a:endParaRPr lang="de-DE"/>
           </a:p>
@@ -740,6 +1083,114 @@
 </p:notes>
 </file>
 
+<file path=ppt/notesSlides/notesSlide2.xml><?xml version="1.0" encoding="utf-8"?>
+<p:notes xmlns:a="http://schemas.openxmlformats.org/drawingml/2006/main" xmlns:r="http://schemas.openxmlformats.org/officeDocument/2006/relationships" xmlns:p="http://schemas.openxmlformats.org/presentationml/2006/main">
+  <p:cSld>
+    <p:spTree>
+      <p:nvGrpSpPr>
+        <p:cNvPr id="1" name="">
+          <a:extLst>
+            <a:ext uri="{FF2B5EF4-FFF2-40B4-BE49-F238E27FC236}">
+              <a16:creationId xmlns:a16="http://schemas.microsoft.com/office/drawing/2014/main" id="{77E677AA-2D02-C294-F1F2-EEB3F2EB2ACF}"/>
+            </a:ext>
+          </a:extLst>
+        </p:cNvPr>
+        <p:cNvGrpSpPr/>
+        <p:nvPr/>
+      </p:nvGrpSpPr>
+      <p:grpSpPr>
+        <a:xfrm>
+          <a:off x="0" y="0"/>
+          <a:ext cx="0" cy="0"/>
+          <a:chOff x="0" y="0"/>
+          <a:chExt cx="0" cy="0"/>
+        </a:xfrm>
+      </p:grpSpPr>
+      <p:sp>
+        <p:nvSpPr>
+          <p:cNvPr id="2" name="Folienbildplatzhalter 1">
+            <a:extLst>
+              <a:ext uri="{FF2B5EF4-FFF2-40B4-BE49-F238E27FC236}">
+                <a16:creationId xmlns:a16="http://schemas.microsoft.com/office/drawing/2014/main" id="{C08177B2-679D-B01E-6976-DA06E15A359D}"/>
+              </a:ext>
+            </a:extLst>
+          </p:cNvPr>
+          <p:cNvSpPr>
+            <a:spLocks noGrp="1" noRot="1" noChangeAspect="1"/>
+          </p:cNvSpPr>
+          <p:nvPr>
+            <p:ph type="sldImg"/>
+          </p:nvPr>
+        </p:nvSpPr>
+        <p:spPr/>
+      </p:sp>
+      <p:sp>
+        <p:nvSpPr>
+          <p:cNvPr id="3" name="Notizenplatzhalter 2">
+            <a:extLst>
+              <a:ext uri="{FF2B5EF4-FFF2-40B4-BE49-F238E27FC236}">
+                <a16:creationId xmlns:a16="http://schemas.microsoft.com/office/drawing/2014/main" id="{06B5C141-7E16-2F0E-B8F6-2F29BF01266D}"/>
+              </a:ext>
+            </a:extLst>
+          </p:cNvPr>
+          <p:cNvSpPr>
+            <a:spLocks noGrp="1"/>
+          </p:cNvSpPr>
+          <p:nvPr>
+            <p:ph type="body" idx="1"/>
+          </p:nvPr>
+        </p:nvSpPr>
+        <p:spPr/>
+        <p:txBody>
+          <a:bodyPr/>
+          <a:lstStyle/>
+          <a:p>
+            <a:endParaRPr lang="de-DE" dirty="0"/>
+          </a:p>
+        </p:txBody>
+      </p:sp>
+      <p:sp>
+        <p:nvSpPr>
+          <p:cNvPr id="4" name="Foliennummernplatzhalter 3">
+            <a:extLst>
+              <a:ext uri="{FF2B5EF4-FFF2-40B4-BE49-F238E27FC236}">
+                <a16:creationId xmlns:a16="http://schemas.microsoft.com/office/drawing/2014/main" id="{13C38E17-2F54-5C54-9FFF-C56E170153EA}"/>
+              </a:ext>
+            </a:extLst>
+          </p:cNvPr>
+          <p:cNvSpPr>
+            <a:spLocks noGrp="1"/>
+          </p:cNvSpPr>
+          <p:nvPr>
+            <p:ph type="sldNum" sz="quarter" idx="5"/>
+          </p:nvPr>
+        </p:nvSpPr>
+        <p:spPr/>
+        <p:txBody>
+          <a:bodyPr/>
+          <a:lstStyle/>
+          <a:p>
+            <a:fld id="{67B21A6D-3249-074E-BBD6-BCFA95367850}" type="slidenum">
+              <a:rPr lang="de-DE" smtClean="0"/>
+              <a:t>2</a:t>
+            </a:fld>
+            <a:endParaRPr lang="de-DE"/>
+          </a:p>
+        </p:txBody>
+      </p:sp>
+    </p:spTree>
+    <p:extLst>
+      <p:ext uri="{BB962C8B-B14F-4D97-AF65-F5344CB8AC3E}">
+        <p14:creationId xmlns:p14="http://schemas.microsoft.com/office/powerpoint/2010/main" val="3583171411"/>
+      </p:ext>
+    </p:extLst>
+  </p:cSld>
+  <p:clrMapOvr>
+    <a:masterClrMapping/>
+  </p:clrMapOvr>
+</p:notes>
+</file>
+
 <file path=ppt/slideLayouts/slideLayout1.xml><?xml version="1.0" encoding="utf-8"?>
 <p:sldLayout xmlns:a="http://schemas.openxmlformats.org/drawingml/2006/main" xmlns:r="http://schemas.openxmlformats.org/officeDocument/2006/relationships" xmlns:p="http://schemas.openxmlformats.org/presentationml/2006/main" type="title" preserve="1">
   <p:cSld name="Titelfolie">
@@ -887,7 +1338,7 @@
           <a:p>
             <a:fld id="{43497422-92ED-3D47-BF28-17000E80E497}" type="datetimeFigureOut">
               <a:rPr lang="de-DE" smtClean="0"/>
-              <a:t>06.05.26</a:t>
+              <a:t>09.05.26</a:t>
             </a:fld>
             <a:endParaRPr lang="de-DE"/>
           </a:p>
@@ -1085,7 +1536,7 @@
           <a:p>
             <a:fld id="{43497422-92ED-3D47-BF28-17000E80E497}" type="datetimeFigureOut">
               <a:rPr lang="de-DE" smtClean="0"/>
-              <a:t>06.05.26</a:t>
+              <a:t>09.05.26</a:t>
             </a:fld>
             <a:endParaRPr lang="de-DE"/>
           </a:p>
@@ -1293,7 +1744,7 @@
           <a:p>
             <a:fld id="{43497422-92ED-3D47-BF28-17000E80E497}" type="datetimeFigureOut">
               <a:rPr lang="de-DE" smtClean="0"/>
-              <a:t>06.05.26</a:t>
+              <a:t>09.05.26</a:t>
             </a:fld>
             <a:endParaRPr lang="de-DE"/>
           </a:p>
@@ -1491,7 +1942,7 @@
           <a:p>
             <a:fld id="{43497422-92ED-3D47-BF28-17000E80E497}" type="datetimeFigureOut">
               <a:rPr lang="de-DE" smtClean="0"/>
-              <a:t>06.05.26</a:t>
+              <a:t>09.05.26</a:t>
             </a:fld>
             <a:endParaRPr lang="de-DE"/>
           </a:p>
@@ -1766,7 +2217,7 @@
           <a:p>
             <a:fld id="{43497422-92ED-3D47-BF28-17000E80E497}" type="datetimeFigureOut">
               <a:rPr lang="de-DE" smtClean="0"/>
-              <a:t>06.05.26</a:t>
+              <a:t>09.05.26</a:t>
             </a:fld>
             <a:endParaRPr lang="de-DE"/>
           </a:p>
@@ -2031,7 +2482,7 @@
           <a:p>
             <a:fld id="{43497422-92ED-3D47-BF28-17000E80E497}" type="datetimeFigureOut">
               <a:rPr lang="de-DE" smtClean="0"/>
-              <a:t>06.05.26</a:t>
+              <a:t>09.05.26</a:t>
             </a:fld>
             <a:endParaRPr lang="de-DE"/>
           </a:p>
@@ -2443,7 +2894,7 @@
           <a:p>
             <a:fld id="{43497422-92ED-3D47-BF28-17000E80E497}" type="datetimeFigureOut">
               <a:rPr lang="de-DE" smtClean="0"/>
-              <a:t>06.05.26</a:t>
+              <a:t>09.05.26</a:t>
             </a:fld>
             <a:endParaRPr lang="de-DE"/>
           </a:p>
@@ -2584,7 +3035,7 @@
           <a:p>
             <a:fld id="{43497422-92ED-3D47-BF28-17000E80E497}" type="datetimeFigureOut">
               <a:rPr lang="de-DE" smtClean="0"/>
-              <a:t>06.05.26</a:t>
+              <a:t>09.05.26</a:t>
             </a:fld>
             <a:endParaRPr lang="de-DE"/>
           </a:p>
@@ -2697,7 +3148,7 @@
           <a:p>
             <a:fld id="{43497422-92ED-3D47-BF28-17000E80E497}" type="datetimeFigureOut">
               <a:rPr lang="de-DE" smtClean="0"/>
-              <a:t>06.05.26</a:t>
+              <a:t>09.05.26</a:t>
             </a:fld>
             <a:endParaRPr lang="de-DE"/>
           </a:p>
@@ -3008,7 +3459,7 @@
           <a:p>
             <a:fld id="{43497422-92ED-3D47-BF28-17000E80E497}" type="datetimeFigureOut">
               <a:rPr lang="de-DE" smtClean="0"/>
-              <a:t>06.05.26</a:t>
+              <a:t>09.05.26</a:t>
             </a:fld>
             <a:endParaRPr lang="de-DE"/>
           </a:p>
@@ -3296,7 +3747,7 @@
           <a:p>
             <a:fld id="{43497422-92ED-3D47-BF28-17000E80E497}" type="datetimeFigureOut">
               <a:rPr lang="de-DE" smtClean="0"/>
-              <a:t>06.05.26</a:t>
+              <a:t>09.05.26</a:t>
             </a:fld>
             <a:endParaRPr lang="de-DE"/>
           </a:p>
@@ -3537,7 +3988,7 @@
           <a:p>
             <a:fld id="{43497422-92ED-3D47-BF28-17000E80E497}" type="datetimeFigureOut">
               <a:rPr lang="de-DE" smtClean="0"/>
-              <a:t>06.05.26</a:t>
+              <a:t>09.05.26</a:t>
             </a:fld>
             <a:endParaRPr lang="de-DE"/>
           </a:p>
@@ -4542,8 +4993,8 @@
             </a:p>
           </p:txBody>
         </p:sp>
-        <mc:AlternateContent xmlns:mc="http://schemas.openxmlformats.org/markup-compatibility/2006">
-          <mc:Choice xmlns:a14="http://schemas.microsoft.com/office/drawing/2010/main" Requires="a14">
+        <mc:AlternateContent xmlns:mc="http://schemas.openxmlformats.org/markup-compatibility/2006" xmlns:a14="http://schemas.microsoft.com/office/drawing/2010/main">
+          <mc:Choice Requires="a14">
             <p:sp>
               <p:nvSpPr>
                 <p:cNvPr id="19" name="Textfeld 18">
@@ -4717,7 +5168,7 @@
               </p:txBody>
             </p:sp>
           </mc:Choice>
-          <mc:Fallback>
+          <mc:Fallback xmlns="">
             <p:sp>
               <p:nvSpPr>
                 <p:cNvPr id="19" name="Textfeld 18">
@@ -5934,6 +6385,2558 @@
 </p:sld>
 </file>
 
+<file path=ppt/slides/slide2.xml><?xml version="1.0" encoding="utf-8"?>
+<p:sld xmlns:a="http://schemas.openxmlformats.org/drawingml/2006/main" xmlns:r="http://schemas.openxmlformats.org/officeDocument/2006/relationships" xmlns:p="http://schemas.openxmlformats.org/presentationml/2006/main">
+  <p:cSld>
+    <p:spTree>
+      <p:nvGrpSpPr>
+        <p:cNvPr id="1" name="">
+          <a:extLst>
+            <a:ext uri="{FF2B5EF4-FFF2-40B4-BE49-F238E27FC236}">
+              <a16:creationId xmlns:a16="http://schemas.microsoft.com/office/drawing/2014/main" id="{7E0540CC-8A73-C021-D968-04CBBCB7F34E}"/>
+            </a:ext>
+          </a:extLst>
+        </p:cNvPr>
+        <p:cNvGrpSpPr/>
+        <p:nvPr/>
+      </p:nvGrpSpPr>
+      <p:grpSpPr>
+        <a:xfrm>
+          <a:off x="0" y="0"/>
+          <a:ext cx="0" cy="0"/>
+          <a:chOff x="0" y="0"/>
+          <a:chExt cx="0" cy="0"/>
+        </a:xfrm>
+      </p:grpSpPr>
+      <p:grpSp>
+        <p:nvGrpSpPr>
+          <p:cNvPr id="84" name="Gruppieren 83">
+            <a:extLst>
+              <a:ext uri="{FF2B5EF4-FFF2-40B4-BE49-F238E27FC236}">
+                <a16:creationId xmlns:a16="http://schemas.microsoft.com/office/drawing/2014/main" id="{E03D655E-9CD9-685D-7B91-6B5945795D4E}"/>
+              </a:ext>
+            </a:extLst>
+          </p:cNvPr>
+          <p:cNvGrpSpPr/>
+          <p:nvPr/>
+        </p:nvGrpSpPr>
+        <p:grpSpPr>
+          <a:xfrm>
+            <a:off x="675232" y="679404"/>
+            <a:ext cx="10841537" cy="5113384"/>
+            <a:chOff x="675232" y="679404"/>
+            <a:chExt cx="10841537" cy="5113384"/>
+          </a:xfrm>
+        </p:grpSpPr>
+        <p:grpSp>
+          <p:nvGrpSpPr>
+            <p:cNvPr id="69" name="Gruppieren 68">
+              <a:extLst>
+                <a:ext uri="{FF2B5EF4-FFF2-40B4-BE49-F238E27FC236}">
+                  <a16:creationId xmlns:a16="http://schemas.microsoft.com/office/drawing/2014/main" id="{44009903-A0FE-1610-A44A-7945B84624B2}"/>
+                </a:ext>
+              </a:extLst>
+            </p:cNvPr>
+            <p:cNvGrpSpPr/>
+            <p:nvPr/>
+          </p:nvGrpSpPr>
+          <p:grpSpPr>
+            <a:xfrm>
+              <a:off x="675232" y="679404"/>
+              <a:ext cx="10841537" cy="5113384"/>
+              <a:chOff x="704029" y="582418"/>
+              <a:chExt cx="10841537" cy="5113384"/>
+            </a:xfrm>
+          </p:grpSpPr>
+          <p:sp>
+            <p:nvSpPr>
+              <p:cNvPr id="12" name="Textfeld 11">
+                <a:extLst>
+                  <a:ext uri="{FF2B5EF4-FFF2-40B4-BE49-F238E27FC236}">
+                    <a16:creationId xmlns:a16="http://schemas.microsoft.com/office/drawing/2014/main" id="{4E91C313-141B-C0EB-7458-C988F814755D}"/>
+                  </a:ext>
+                </a:extLst>
+              </p:cNvPr>
+              <p:cNvSpPr txBox="1"/>
+              <p:nvPr/>
+            </p:nvSpPr>
+            <p:spPr>
+              <a:xfrm>
+                <a:off x="5569708" y="582418"/>
+                <a:ext cx="5975858" cy="1938992"/>
+              </a:xfrm>
+              <a:prstGeom prst="rect">
+                <a:avLst/>
+              </a:prstGeom>
+              <a:solidFill>
+                <a:schemeClr val="bg1">
+                  <a:lumMod val="85000"/>
+                </a:schemeClr>
+              </a:solidFill>
+              <a:ln w="12700">
+                <a:solidFill>
+                  <a:schemeClr val="bg1">
+                    <a:lumMod val="65000"/>
+                  </a:schemeClr>
+                </a:solidFill>
+              </a:ln>
+            </p:spPr>
+            <p:txBody>
+              <a:bodyPr wrap="square">
+                <a:spAutoFit/>
+              </a:bodyPr>
+              <a:lstStyle>
+                <a:defPPr>
+                  <a:defRPr lang="de-DE"/>
+                </a:defPPr>
+              </a:lstStyle>
+              <a:p>
+                <a:pPr algn="ctr"/>
+                <a:r>
+                  <a:rPr lang="en-GB" sz="1200" noProof="0" dirty="0">
+                    <a:latin typeface="Calibri" panose="020F0502020204030204" pitchFamily="34" charset="0"/>
+                    <a:ea typeface="Cambria Math" panose="02040503050406030204" pitchFamily="18" charset="0"/>
+                    <a:cs typeface="Calibri" panose="020F0502020204030204" pitchFamily="34" charset="0"/>
+                  </a:rPr>
+                  <a:t>                           </a:t>
+                </a:r>
+                <a:r>
+                  <a:rPr lang="en-GB" sz="1200" dirty="0">
+                    <a:latin typeface="Calibri" panose="020F0502020204030204" pitchFamily="34" charset="0"/>
+                    <a:ea typeface="Cambria Math" panose="02040503050406030204" pitchFamily="18" charset="0"/>
+                    <a:cs typeface="Calibri" panose="020F0502020204030204" pitchFamily="34" charset="0"/>
+                  </a:rPr>
+                  <a:t>Tests of central tendencies</a:t>
+                </a:r>
+              </a:p>
+              <a:p>
+                <a:pPr algn="ctr"/>
+                <a:endParaRPr lang="en-GB" sz="1200" dirty="0">
+                  <a:latin typeface="Calibri" panose="020F0502020204030204" pitchFamily="34" charset="0"/>
+                  <a:ea typeface="Cambria Math" panose="02040503050406030204" pitchFamily="18" charset="0"/>
+                  <a:cs typeface="Calibri" panose="020F0502020204030204" pitchFamily="34" charset="0"/>
+                </a:endParaRPr>
+              </a:p>
+              <a:p>
+                <a:pPr algn="ctr"/>
+                <a:endParaRPr lang="en-GB" sz="1200" dirty="0">
+                  <a:latin typeface="Calibri" panose="020F0502020204030204" pitchFamily="34" charset="0"/>
+                  <a:ea typeface="Cambria Math" panose="02040503050406030204" pitchFamily="18" charset="0"/>
+                  <a:cs typeface="Calibri" panose="020F0502020204030204" pitchFamily="34" charset="0"/>
+                </a:endParaRPr>
+              </a:p>
+              <a:p>
+                <a:pPr algn="ctr"/>
+                <a:endParaRPr lang="en-GB" sz="1200" dirty="0">
+                  <a:latin typeface="Calibri" panose="020F0502020204030204" pitchFamily="34" charset="0"/>
+                  <a:ea typeface="Cambria Math" panose="02040503050406030204" pitchFamily="18" charset="0"/>
+                  <a:cs typeface="Calibri" panose="020F0502020204030204" pitchFamily="34" charset="0"/>
+                </a:endParaRPr>
+              </a:p>
+              <a:p>
+                <a:pPr algn="ctr"/>
+                <a:endParaRPr lang="en-GB" sz="1200" dirty="0">
+                  <a:latin typeface="Calibri" panose="020F0502020204030204" pitchFamily="34" charset="0"/>
+                  <a:ea typeface="Cambria Math" panose="02040503050406030204" pitchFamily="18" charset="0"/>
+                  <a:cs typeface="Calibri" panose="020F0502020204030204" pitchFamily="34" charset="0"/>
+                </a:endParaRPr>
+              </a:p>
+              <a:p>
+                <a:pPr algn="ctr"/>
+                <a:endParaRPr lang="en-GB" sz="1200" noProof="0" dirty="0">
+                  <a:latin typeface="Calibri" panose="020F0502020204030204" pitchFamily="34" charset="0"/>
+                  <a:ea typeface="Cambria Math" panose="02040503050406030204" pitchFamily="18" charset="0"/>
+                  <a:cs typeface="Calibri" panose="020F0502020204030204" pitchFamily="34" charset="0"/>
+                </a:endParaRPr>
+              </a:p>
+              <a:p>
+                <a:pPr algn="ctr"/>
+                <a:endParaRPr lang="en-GB" sz="1200" noProof="0" dirty="0">
+                  <a:latin typeface="Calibri" panose="020F0502020204030204" pitchFamily="34" charset="0"/>
+                  <a:ea typeface="Cambria Math" panose="02040503050406030204" pitchFamily="18" charset="0"/>
+                  <a:cs typeface="Calibri" panose="020F0502020204030204" pitchFamily="34" charset="0"/>
+                </a:endParaRPr>
+              </a:p>
+              <a:p>
+                <a:pPr algn="ctr"/>
+                <a:endParaRPr lang="en-GB" sz="1200" dirty="0">
+                  <a:latin typeface="Calibri" panose="020F0502020204030204" pitchFamily="34" charset="0"/>
+                  <a:ea typeface="Cambria Math" panose="02040503050406030204" pitchFamily="18" charset="0"/>
+                  <a:cs typeface="Calibri" panose="020F0502020204030204" pitchFamily="34" charset="0"/>
+                </a:endParaRPr>
+              </a:p>
+              <a:p>
+                <a:pPr algn="ctr"/>
+                <a:endParaRPr lang="en-GB" sz="1200" noProof="0" dirty="0">
+                  <a:latin typeface="Calibri" panose="020F0502020204030204" pitchFamily="34" charset="0"/>
+                  <a:ea typeface="Cambria Math" panose="02040503050406030204" pitchFamily="18" charset="0"/>
+                  <a:cs typeface="Calibri" panose="020F0502020204030204" pitchFamily="34" charset="0"/>
+                </a:endParaRPr>
+              </a:p>
+              <a:p>
+                <a:pPr algn="ctr"/>
+                <a:r>
+                  <a:rPr lang="en-GB" sz="1200" noProof="0" dirty="0">
+                    <a:latin typeface="Calibri" panose="020F0502020204030204" pitchFamily="34" charset="0"/>
+                    <a:ea typeface="Cambria Math" panose="02040503050406030204" pitchFamily="18" charset="0"/>
+                    <a:cs typeface="Calibri" panose="020F0502020204030204" pitchFamily="34" charset="0"/>
+                  </a:rPr>
+                  <a:t> </a:t>
+                </a:r>
+                <a:endParaRPr lang="en-GB" sz="1200" dirty="0">
+                  <a:latin typeface="Courier New" panose="02070309020205020404" pitchFamily="49" charset="0"/>
+                  <a:ea typeface="Cambria Math" panose="02040503050406030204" pitchFamily="18" charset="0"/>
+                  <a:cs typeface="Courier New" panose="02070309020205020404" pitchFamily="49" charset="0"/>
+                </a:endParaRPr>
+              </a:p>
+            </p:txBody>
+          </p:sp>
+          <mc:AlternateContent xmlns:mc="http://schemas.openxmlformats.org/markup-compatibility/2006">
+            <mc:Choice xmlns:a14="http://schemas.microsoft.com/office/drawing/2010/main" Requires="a14">
+              <p:sp>
+                <p:nvSpPr>
+                  <p:cNvPr id="6" name="Textfeld 5">
+                    <a:extLst>
+                      <a:ext uri="{FF2B5EF4-FFF2-40B4-BE49-F238E27FC236}">
+                        <a16:creationId xmlns:a16="http://schemas.microsoft.com/office/drawing/2014/main" id="{850F5D96-EAD6-2EF1-FC49-CD5ADD5C2CF4}"/>
+                      </a:ext>
+                    </a:extLst>
+                  </p:cNvPr>
+                  <p:cNvSpPr txBox="1"/>
+                  <p:nvPr/>
+                </p:nvSpPr>
+                <p:spPr>
+                  <a:xfrm>
+                    <a:off x="5614328" y="1002239"/>
+                    <a:ext cx="5664357" cy="276999"/>
+                  </a:xfrm>
+                  <a:prstGeom prst="rect">
+                    <a:avLst/>
+                  </a:prstGeom>
+                  <a:solidFill>
+                    <a:schemeClr val="accent4">
+                      <a:alpha val="20000"/>
+                    </a:schemeClr>
+                  </a:solidFill>
+                  <a:ln w="12700">
+                    <a:solidFill>
+                      <a:schemeClr val="tx1"/>
+                    </a:solidFill>
+                  </a:ln>
+                </p:spPr>
+                <p:txBody>
+                  <a:bodyPr wrap="square">
+                    <a:spAutoFit/>
+                  </a:bodyPr>
+                  <a:lstStyle>
+                    <a:defPPr>
+                      <a:defRPr lang="de-DE"/>
+                    </a:defPPr>
+                  </a:lstStyle>
+                  <a:p>
+                    <a:pPr algn="ctr"/>
+                    <a:r>
+                      <a:rPr lang="en-US" sz="1200" b="0" dirty="0">
+                        <a:ea typeface="Cambria Math" panose="02040503050406030204" pitchFamily="18" charset="0"/>
+                      </a:rPr>
+                      <a:t> parametric tests: </a:t>
+                    </a:r>
+                    <a14:m>
+                      <m:oMath xmlns:m="http://schemas.openxmlformats.org/officeDocument/2006/math">
+                        <m:r>
+                          <a:rPr lang="en-US" sz="1200" b="0" i="1" smtClean="0">
+                            <a:latin typeface="Cambria Math" panose="02040503050406030204" pitchFamily="18" charset="0"/>
+                            <a:ea typeface="Cambria Math" panose="02040503050406030204" pitchFamily="18" charset="0"/>
+                          </a:rPr>
+                          <m:t> </m:t>
+                        </m:r>
+                        <m:r>
+                          <a:rPr lang="en-US" sz="1200" b="0" i="1" smtClean="0">
+                            <a:latin typeface="Cambria Math" panose="02040503050406030204" pitchFamily="18" charset="0"/>
+                            <a:ea typeface="Cambria Math" panose="02040503050406030204" pitchFamily="18" charset="0"/>
+                          </a:rPr>
+                          <m:t>𝑘</m:t>
+                        </m:r>
+                        <m:r>
+                          <a:rPr lang="en-US" sz="1200" i="1">
+                            <a:latin typeface="Cambria Math" panose="02040503050406030204" pitchFamily="18" charset="0"/>
+                            <a:ea typeface="Cambria Math" panose="02040503050406030204" pitchFamily="18" charset="0"/>
+                          </a:rPr>
+                          <m:t>=2</m:t>
+                        </m:r>
+                      </m:oMath>
+                    </a14:m>
+                    <a:r>
+                      <a:rPr lang="en-GB" sz="1200" dirty="0">
+                        <a:latin typeface="Courier New" panose="02070309020205020404" pitchFamily="49" charset="0"/>
+                        <a:ea typeface="Cambria Math" panose="02040503050406030204" pitchFamily="18" charset="0"/>
+                        <a:cs typeface="Courier New" panose="02070309020205020404" pitchFamily="49" charset="0"/>
+                      </a:rPr>
+                      <a:t>: </a:t>
+                    </a:r>
+                    <a:r>
+                      <a:rPr lang="en-GB" sz="1200" dirty="0" err="1">
+                        <a:latin typeface="Courier New" panose="02070309020205020404" pitchFamily="49" charset="0"/>
+                        <a:ea typeface="Cambria Math" panose="02040503050406030204" pitchFamily="18" charset="0"/>
+                        <a:cs typeface="Courier New" panose="02070309020205020404" pitchFamily="49" charset="0"/>
+                      </a:rPr>
+                      <a:t>t.test</a:t>
+                    </a:r>
+                    <a:r>
+                      <a:rPr lang="en-GB" sz="1200" dirty="0">
+                        <a:latin typeface="Courier New" panose="02070309020205020404" pitchFamily="49" charset="0"/>
+                        <a:ea typeface="Cambria Math" panose="02040503050406030204" pitchFamily="18" charset="0"/>
+                        <a:cs typeface="Courier New" panose="02070309020205020404" pitchFamily="49" charset="0"/>
+                      </a:rPr>
+                      <a:t>(), </a:t>
+                    </a:r>
+                    <a14:m>
+                      <m:oMath xmlns:m="http://schemas.openxmlformats.org/officeDocument/2006/math">
+                        <m:r>
+                          <a:rPr lang="en-US" sz="1200" b="0" i="1" smtClean="0">
+                            <a:latin typeface="Cambria Math" panose="02040503050406030204" pitchFamily="18" charset="0"/>
+                            <a:ea typeface="Cambria Math" panose="02040503050406030204" pitchFamily="18" charset="0"/>
+                          </a:rPr>
+                          <m:t>𝑘</m:t>
+                        </m:r>
+                        <m:r>
+                          <a:rPr lang="en-US" sz="1200" i="1">
+                            <a:latin typeface="Cambria Math" panose="02040503050406030204" pitchFamily="18" charset="0"/>
+                            <a:ea typeface="Cambria Math" panose="02040503050406030204" pitchFamily="18" charset="0"/>
+                          </a:rPr>
+                          <m:t>&gt;2</m:t>
+                        </m:r>
+                      </m:oMath>
+                    </a14:m>
+                    <a:r>
+                      <a:rPr lang="en-GB" sz="1200" dirty="0">
+                        <a:latin typeface="Courier New" panose="02070309020205020404" pitchFamily="49" charset="0"/>
+                        <a:ea typeface="Cambria Math" panose="02040503050406030204" pitchFamily="18" charset="0"/>
+                        <a:cs typeface="Courier New" panose="02070309020205020404" pitchFamily="49" charset="0"/>
+                      </a:rPr>
+                      <a:t>: </a:t>
+                    </a:r>
+                    <a:r>
+                      <a:rPr lang="en-GB" sz="1200" dirty="0" err="1">
+                        <a:latin typeface="Courier New" panose="02070309020205020404" pitchFamily="49" charset="0"/>
+                        <a:ea typeface="Cambria Math" panose="02040503050406030204" pitchFamily="18" charset="0"/>
+                        <a:cs typeface="Courier New" panose="02070309020205020404" pitchFamily="49" charset="0"/>
+                      </a:rPr>
+                      <a:t>aov</a:t>
+                    </a:r>
+                    <a:r>
+                      <a:rPr lang="en-GB" sz="1200" dirty="0">
+                        <a:latin typeface="Courier New" panose="02070309020205020404" pitchFamily="49" charset="0"/>
+                        <a:ea typeface="Cambria Math" panose="02040503050406030204" pitchFamily="18" charset="0"/>
+                        <a:cs typeface="Courier New" panose="02070309020205020404" pitchFamily="49" charset="0"/>
+                      </a:rPr>
+                      <a:t>(), </a:t>
+                    </a:r>
+                    <a:r>
+                      <a:rPr lang="en-GB" sz="1200" dirty="0" err="1">
+                        <a:latin typeface="Courier New" panose="02070309020205020404" pitchFamily="49" charset="0"/>
+                        <a:ea typeface="Cambria Math" panose="02040503050406030204" pitchFamily="18" charset="0"/>
+                        <a:cs typeface="Courier New" panose="02070309020205020404" pitchFamily="49" charset="0"/>
+                      </a:rPr>
+                      <a:t>oneway.test</a:t>
+                    </a:r>
+                    <a:endParaRPr lang="en-GB" sz="1200" dirty="0">
+                      <a:latin typeface="Courier New" panose="02070309020205020404" pitchFamily="49" charset="0"/>
+                      <a:ea typeface="Cambria Math" panose="02040503050406030204" pitchFamily="18" charset="0"/>
+                      <a:cs typeface="Courier New" panose="02070309020205020404" pitchFamily="49" charset="0"/>
+                    </a:endParaRPr>
+                  </a:p>
+                </p:txBody>
+              </p:sp>
+            </mc:Choice>
+            <mc:Fallback>
+              <p:sp>
+                <p:nvSpPr>
+                  <p:cNvPr id="6" name="Textfeld 5">
+                    <a:extLst>
+                      <a:ext uri="{FF2B5EF4-FFF2-40B4-BE49-F238E27FC236}">
+                        <a16:creationId xmlns:a16="http://schemas.microsoft.com/office/drawing/2014/main" id="{850F5D96-EAD6-2EF1-FC49-CD5ADD5C2CF4}"/>
+                      </a:ext>
+                    </a:extLst>
+                  </p:cNvPr>
+                  <p:cNvSpPr txBox="1">
+                    <a:spLocks noRot="1" noChangeAspect="1" noMove="1" noResize="1" noEditPoints="1" noAdjustHandles="1" noChangeArrowheads="1" noChangeShapeType="1" noTextEdit="1"/>
+                  </p:cNvSpPr>
+                  <p:nvPr/>
+                </p:nvSpPr>
+                <p:spPr>
+                  <a:xfrm>
+                    <a:off x="5614328" y="1002239"/>
+                    <a:ext cx="5664357" cy="276999"/>
+                  </a:xfrm>
+                  <a:prstGeom prst="rect">
+                    <a:avLst/>
+                  </a:prstGeom>
+                  <a:blipFill>
+                    <a:blip r:embed="rId3"/>
+                    <a:stretch>
+                      <a:fillRect b="-16667"/>
+                    </a:stretch>
+                  </a:blipFill>
+                  <a:ln w="12700">
+                    <a:solidFill>
+                      <a:schemeClr val="tx1"/>
+                    </a:solidFill>
+                  </a:ln>
+                </p:spPr>
+                <p:txBody>
+                  <a:bodyPr/>
+                  <a:lstStyle/>
+                  <a:p>
+                    <a:r>
+                      <a:rPr lang="de-DE">
+                        <a:noFill/>
+                      </a:rPr>
+                      <a:t> </a:t>
+                    </a:r>
+                  </a:p>
+                </p:txBody>
+              </p:sp>
+            </mc:Fallback>
+          </mc:AlternateContent>
+          <p:sp>
+            <p:nvSpPr>
+              <p:cNvPr id="8" name="Textfeld 7">
+                <a:extLst>
+                  <a:ext uri="{FF2B5EF4-FFF2-40B4-BE49-F238E27FC236}">
+                    <a16:creationId xmlns:a16="http://schemas.microsoft.com/office/drawing/2014/main" id="{1259E59C-91A3-35E8-5F00-0D83BB6F2314}"/>
+                  </a:ext>
+                </a:extLst>
+              </p:cNvPr>
+              <p:cNvSpPr txBox="1">
+                <a:spLocks noChangeAspect="1"/>
+              </p:cNvSpPr>
+              <p:nvPr/>
+            </p:nvSpPr>
+            <p:spPr>
+              <a:xfrm>
+                <a:off x="749759" y="2954852"/>
+                <a:ext cx="4329205" cy="830997"/>
+              </a:xfrm>
+              <a:prstGeom prst="rect">
+                <a:avLst/>
+              </a:prstGeom>
+              <a:solidFill>
+                <a:schemeClr val="accent2">
+                  <a:lumMod val="20000"/>
+                  <a:lumOff val="80000"/>
+                </a:schemeClr>
+              </a:solidFill>
+              <a:ln w="12700">
+                <a:solidFill>
+                  <a:schemeClr val="tx1"/>
+                </a:solidFill>
+              </a:ln>
+            </p:spPr>
+            <p:txBody>
+              <a:bodyPr wrap="square">
+                <a:spAutoFit/>
+              </a:bodyPr>
+              <a:lstStyle/>
+              <a:p>
+                <a:pPr marL="171450" indent="-171450">
+                  <a:buFont typeface="Arial" panose="020B0604020202020204" pitchFamily="34" charset="0"/>
+                  <a:buChar char="•"/>
+                </a:pPr>
+                <a:r>
+                  <a:rPr lang="en-GB" sz="1200" noProof="0" dirty="0">
+                    <a:latin typeface="Calibri" panose="020F0502020204030204" pitchFamily="34" charset="0"/>
+                    <a:ea typeface="Cambria Math" panose="02040503050406030204" pitchFamily="18" charset="0"/>
+                    <a:cs typeface="Calibri" panose="020F0502020204030204" pitchFamily="34" charset="0"/>
+                  </a:rPr>
+                  <a:t>Numeric  predictor of </a:t>
+                </a:r>
+                <a:r>
+                  <a:rPr lang="en-GB" sz="1200" noProof="0" dirty="0">
+                    <a:latin typeface="Courier New" panose="02070309020205020404" pitchFamily="49" charset="0"/>
+                    <a:ea typeface="Cambria Math" panose="02040503050406030204" pitchFamily="18" charset="0"/>
+                    <a:cs typeface="Courier New" panose="02070309020205020404" pitchFamily="49" charset="0"/>
+                  </a:rPr>
+                  <a:t>class </a:t>
+                </a:r>
+                <a:r>
+                  <a:rPr lang="en-GB" sz="1200" dirty="0">
+                    <a:latin typeface="Calibri" panose="020F0502020204030204" pitchFamily="34" charset="0"/>
+                    <a:ea typeface="Cambria Math" panose="02040503050406030204" pitchFamily="18" charset="0"/>
+                    <a:cs typeface="Calibri" panose="020F0502020204030204" pitchFamily="34" charset="0"/>
+                  </a:rPr>
+                  <a:t>“</a:t>
+                </a:r>
+                <a:r>
+                  <a:rPr lang="en-GB" sz="1200" dirty="0">
+                    <a:latin typeface="Courier New" panose="02070309020205020404" pitchFamily="49" charset="0"/>
+                    <a:ea typeface="Cambria Math" panose="02040503050406030204" pitchFamily="18" charset="0"/>
+                    <a:cs typeface="Courier New" panose="02070309020205020404" pitchFamily="49" charset="0"/>
+                  </a:rPr>
+                  <a:t>numeric</a:t>
+                </a:r>
+                <a:r>
+                  <a:rPr lang="en-GB" sz="1200" dirty="0">
+                    <a:latin typeface="Calibri" panose="020F0502020204030204" pitchFamily="34" charset="0"/>
+                    <a:ea typeface="Cambria Math" panose="02040503050406030204" pitchFamily="18" charset="0"/>
+                    <a:cs typeface="Calibri" panose="020F0502020204030204" pitchFamily="34" charset="0"/>
+                  </a:rPr>
+                  <a:t>”</a:t>
+                </a:r>
+                <a:r>
+                  <a:rPr lang="en-GB" sz="1200" dirty="0">
+                    <a:latin typeface="Courier New" panose="02070309020205020404" pitchFamily="49" charset="0"/>
+                    <a:ea typeface="Cambria Math" panose="02040503050406030204" pitchFamily="18" charset="0"/>
+                    <a:cs typeface="Courier New" panose="02070309020205020404" pitchFamily="49" charset="0"/>
+                  </a:rPr>
+                  <a:t> </a:t>
+                </a:r>
+                <a:r>
+                  <a:rPr lang="en-GB" sz="1200" dirty="0">
+                    <a:latin typeface="Calibri" panose="020F0502020204030204" pitchFamily="34" charset="0"/>
+                    <a:ea typeface="Cambria Math" panose="02040503050406030204" pitchFamily="18" charset="0"/>
+                    <a:cs typeface="Calibri" panose="020F0502020204030204" pitchFamily="34" charset="0"/>
+                  </a:rPr>
+                  <a:t>or “</a:t>
+                </a:r>
+                <a:r>
+                  <a:rPr lang="en-GB" sz="1200" dirty="0">
+                    <a:latin typeface="Courier New" panose="02070309020205020404" pitchFamily="49" charset="0"/>
+                    <a:ea typeface="Cambria Math" panose="02040503050406030204" pitchFamily="18" charset="0"/>
+                    <a:cs typeface="Courier New" panose="02070309020205020404" pitchFamily="49" charset="0"/>
+                  </a:rPr>
+                  <a:t>integer</a:t>
+                </a:r>
+                <a:r>
+                  <a:rPr lang="en-GB" sz="1200" dirty="0">
+                    <a:latin typeface="Calibri" panose="020F0502020204030204" pitchFamily="34" charset="0"/>
+                    <a:ea typeface="Cambria Math" panose="02040503050406030204" pitchFamily="18" charset="0"/>
+                    <a:cs typeface="Calibri" panose="020F0502020204030204" pitchFamily="34" charset="0"/>
+                  </a:rPr>
+                  <a:t>”</a:t>
+                </a:r>
+                <a:br>
+                  <a:rPr lang="en-GB" sz="1200" dirty="0">
+                    <a:latin typeface="Calibri" panose="020F0502020204030204" pitchFamily="34" charset="0"/>
+                    <a:ea typeface="Cambria Math" panose="02040503050406030204" pitchFamily="18" charset="0"/>
+                    <a:cs typeface="Calibri" panose="020F0502020204030204" pitchFamily="34" charset="0"/>
+                  </a:rPr>
+                </a:br>
+                <a:endParaRPr lang="en-GB" sz="1200" noProof="0" dirty="0">
+                  <a:latin typeface="Calibri" panose="020F0502020204030204" pitchFamily="34" charset="0"/>
+                  <a:ea typeface="Cambria Math" panose="02040503050406030204" pitchFamily="18" charset="0"/>
+                  <a:cs typeface="Calibri" panose="020F0502020204030204" pitchFamily="34" charset="0"/>
+                </a:endParaRPr>
+              </a:p>
+              <a:p>
+                <a:pPr marL="171450" indent="-171450">
+                  <a:buFont typeface="Arial" panose="020B0604020202020204" pitchFamily="34" charset="0"/>
+                  <a:buChar char="•"/>
+                </a:pPr>
+                <a:r>
+                  <a:rPr lang="en-GB" sz="1200" dirty="0">
+                    <a:latin typeface="Calibri" panose="020F0502020204030204" pitchFamily="34" charset="0"/>
+                    <a:ea typeface="Cambria Math" panose="02040503050406030204" pitchFamily="18" charset="0"/>
+                    <a:cs typeface="Calibri" panose="020F0502020204030204" pitchFamily="34" charset="0"/>
+                  </a:rPr>
+                  <a:t>N</a:t>
+                </a:r>
+                <a:r>
+                  <a:rPr lang="en-GB" sz="1200" noProof="0" dirty="0" err="1">
+                    <a:latin typeface="Calibri" panose="020F0502020204030204" pitchFamily="34" charset="0"/>
+                    <a:ea typeface="Cambria Math" panose="02040503050406030204" pitchFamily="18" charset="0"/>
+                    <a:cs typeface="Calibri" panose="020F0502020204030204" pitchFamily="34" charset="0"/>
+                  </a:rPr>
+                  <a:t>umeric</a:t>
+                </a:r>
+                <a:r>
+                  <a:rPr lang="en-GB" sz="1200" noProof="0" dirty="0">
+                    <a:latin typeface="Calibri" panose="020F0502020204030204" pitchFamily="34" charset="0"/>
+                    <a:ea typeface="Cambria Math" panose="02040503050406030204" pitchFamily="18" charset="0"/>
+                    <a:cs typeface="Calibri" panose="020F0502020204030204" pitchFamily="34" charset="0"/>
+                  </a:rPr>
+                  <a:t> response of </a:t>
+                </a:r>
+                <a:r>
+                  <a:rPr lang="en-GB" sz="1200" noProof="0" dirty="0">
+                    <a:latin typeface="Courier New" panose="02070309020205020404" pitchFamily="49" charset="0"/>
+                    <a:ea typeface="Cambria Math" panose="02040503050406030204" pitchFamily="18" charset="0"/>
+                    <a:cs typeface="Courier New" panose="02070309020205020404" pitchFamily="49" charset="0"/>
+                  </a:rPr>
+                  <a:t>class </a:t>
+                </a:r>
+                <a:r>
+                  <a:rPr lang="en-GB" sz="1200" dirty="0">
+                    <a:latin typeface="Calibri" panose="020F0502020204030204" pitchFamily="34" charset="0"/>
+                    <a:ea typeface="Cambria Math" panose="02040503050406030204" pitchFamily="18" charset="0"/>
+                    <a:cs typeface="Calibri" panose="020F0502020204030204" pitchFamily="34" charset="0"/>
+                  </a:rPr>
+                  <a:t>“</a:t>
+                </a:r>
+                <a:r>
+                  <a:rPr lang="en-GB" sz="1200" noProof="0" dirty="0">
+                    <a:latin typeface="Courier New" panose="02070309020205020404" pitchFamily="49" charset="0"/>
+                    <a:ea typeface="Cambria Math" panose="02040503050406030204" pitchFamily="18" charset="0"/>
+                    <a:cs typeface="Courier New" panose="02070309020205020404" pitchFamily="49" charset="0"/>
+                  </a:rPr>
+                  <a:t>numeric</a:t>
+                </a:r>
+                <a:r>
+                  <a:rPr lang="en-GB" sz="1200" dirty="0">
+                    <a:latin typeface="Calibri" panose="020F0502020204030204" pitchFamily="34" charset="0"/>
+                    <a:ea typeface="Cambria Math" panose="02040503050406030204" pitchFamily="18" charset="0"/>
+                    <a:cs typeface="Calibri" panose="020F0502020204030204" pitchFamily="34" charset="0"/>
+                  </a:rPr>
+                  <a:t>”</a:t>
+                </a:r>
+                <a:r>
+                  <a:rPr lang="en-GB" sz="1200" dirty="0">
+                    <a:latin typeface="Courier New" panose="02070309020205020404" pitchFamily="49" charset="0"/>
+                    <a:ea typeface="Cambria Math" panose="02040503050406030204" pitchFamily="18" charset="0"/>
+                    <a:cs typeface="Courier New" panose="02070309020205020404" pitchFamily="49" charset="0"/>
+                  </a:rPr>
+                  <a:t> </a:t>
+                </a:r>
+                <a:r>
+                  <a:rPr lang="en-GB" sz="1200" noProof="0" dirty="0">
+                    <a:latin typeface="Calibri" panose="020F0502020204030204" pitchFamily="34" charset="0"/>
+                    <a:ea typeface="Cambria Math" panose="02040503050406030204" pitchFamily="18" charset="0"/>
+                    <a:cs typeface="Calibri" panose="020F0502020204030204" pitchFamily="34" charset="0"/>
+                  </a:rPr>
+                  <a:t>or “</a:t>
+                </a:r>
+                <a:r>
+                  <a:rPr lang="en-GB" sz="1200" noProof="0" dirty="0">
+                    <a:latin typeface="Courier New" panose="02070309020205020404" pitchFamily="49" charset="0"/>
+                    <a:ea typeface="Cambria Math" panose="02040503050406030204" pitchFamily="18" charset="0"/>
+                    <a:cs typeface="Courier New" panose="02070309020205020404" pitchFamily="49" charset="0"/>
+                  </a:rPr>
+                  <a:t>integer</a:t>
+                </a:r>
+                <a:r>
+                  <a:rPr lang="en-GB" sz="1200" dirty="0">
+                    <a:latin typeface="Calibri" panose="020F0502020204030204" pitchFamily="34" charset="0"/>
+                    <a:ea typeface="Cambria Math" panose="02040503050406030204" pitchFamily="18" charset="0"/>
+                    <a:cs typeface="Calibri" panose="020F0502020204030204" pitchFamily="34" charset="0"/>
+                  </a:rPr>
+                  <a:t>”</a:t>
+                </a:r>
+              </a:p>
+              <a:p>
+                <a:endParaRPr lang="en-GB" sz="1200" dirty="0">
+                  <a:latin typeface="Calibri" panose="020F0502020204030204" pitchFamily="34" charset="0"/>
+                  <a:ea typeface="Cambria Math" panose="02040503050406030204" pitchFamily="18" charset="0"/>
+                  <a:cs typeface="Calibri" panose="020F0502020204030204" pitchFamily="34" charset="0"/>
+                </a:endParaRPr>
+              </a:p>
+            </p:txBody>
+          </p:sp>
+          <p:sp>
+            <p:nvSpPr>
+              <p:cNvPr id="57" name="Textfeld 56">
+                <a:extLst>
+                  <a:ext uri="{FF2B5EF4-FFF2-40B4-BE49-F238E27FC236}">
+                    <a16:creationId xmlns:a16="http://schemas.microsoft.com/office/drawing/2014/main" id="{8994B425-65B2-49E4-F84C-57A25705E933}"/>
+                  </a:ext>
+                </a:extLst>
+              </p:cNvPr>
+              <p:cNvSpPr txBox="1"/>
+              <p:nvPr/>
+            </p:nvSpPr>
+            <p:spPr>
+              <a:xfrm>
+                <a:off x="704029" y="3517825"/>
+                <a:ext cx="4306342" cy="276999"/>
+              </a:xfrm>
+              <a:prstGeom prst="rect">
+                <a:avLst/>
+              </a:prstGeom>
+              <a:solidFill>
+                <a:schemeClr val="accent6">
+                  <a:lumMod val="60000"/>
+                  <a:lumOff val="40000"/>
+                  <a:alpha val="19758"/>
+                </a:schemeClr>
+              </a:solidFill>
+              <a:ln w="12700">
+                <a:noFill/>
+              </a:ln>
+            </p:spPr>
+            <p:txBody>
+              <a:bodyPr wrap="square" rtlCol="0">
+                <a:spAutoFit/>
+              </a:bodyPr>
+              <a:lstStyle/>
+              <a:p>
+                <a:pPr algn="ctr"/>
+                <a:r>
+                  <a:rPr kumimoji="0" lang="en-GB" sz="1200" b="1" i="0" u="none" strike="noStrike" kern="1200" cap="none" spc="0" normalizeH="0" baseline="0" noProof="0" dirty="0">
+                    <a:ln>
+                      <a:noFill/>
+                    </a:ln>
+                    <a:solidFill>
+                      <a:prstClr val="black"/>
+                    </a:solidFill>
+                    <a:effectLst/>
+                    <a:uLnTx/>
+                    <a:uFillTx/>
+                    <a:latin typeface="Calibri" panose="020F0502020204030204" pitchFamily="34" charset="0"/>
+                    <a:ea typeface="Cambria Math" panose="02040503050406030204" pitchFamily="18" charset="0"/>
+                    <a:cs typeface="Calibri" panose="020F0502020204030204" pitchFamily="34" charset="0"/>
+                  </a:rPr>
+                  <a:t>+ flag</a:t>
+                </a:r>
+                <a:r>
+                  <a:rPr kumimoji="0" lang="en-GB" sz="1200" b="0" i="0" u="none" strike="noStrike" kern="1200" cap="none" spc="0" normalizeH="0" baseline="0" noProof="0" dirty="0">
+                    <a:ln>
+                      <a:noFill/>
+                    </a:ln>
+                    <a:solidFill>
+                      <a:prstClr val="black"/>
+                    </a:solidFill>
+                    <a:effectLst/>
+                    <a:uLnTx/>
+                    <a:uFillTx/>
+                    <a:latin typeface="Calibri" panose="020F0502020204030204" pitchFamily="34" charset="0"/>
+                    <a:ea typeface="Cambria Math" panose="02040503050406030204" pitchFamily="18" charset="0"/>
+                    <a:cs typeface="Calibri" panose="020F0502020204030204" pitchFamily="34" charset="0"/>
+                  </a:rPr>
+                  <a:t>: </a:t>
+                </a:r>
+                <a:r>
+                  <a:rPr kumimoji="0" lang="en-GB" sz="1200" b="0" i="0" u="none" strike="noStrike" kern="1200" cap="none" spc="0" normalizeH="0" baseline="0" noProof="0" dirty="0" err="1">
+                    <a:ln>
+                      <a:noFill/>
+                    </a:ln>
+                    <a:solidFill>
+                      <a:prstClr val="black"/>
+                    </a:solidFill>
+                    <a:effectLst/>
+                    <a:uLnTx/>
+                    <a:uFillTx/>
+                    <a:latin typeface="Courier New" panose="02070309020205020404" pitchFamily="49" charset="0"/>
+                    <a:ea typeface="Cambria Math" panose="02040503050406030204" pitchFamily="18" charset="0"/>
+                    <a:cs typeface="Courier New" panose="02070309020205020404" pitchFamily="49" charset="0"/>
+                  </a:rPr>
+                  <a:t>visstat</a:t>
+                </a:r>
+                <a:r>
+                  <a:rPr kumimoji="0" lang="en-GB" sz="1200" b="0" i="0" u="none" strike="noStrike" kern="1200" cap="none" spc="0" normalizeH="0" baseline="0" noProof="0" dirty="0">
+                    <a:ln>
+                      <a:noFill/>
+                    </a:ln>
+                    <a:solidFill>
+                      <a:prstClr val="black"/>
+                    </a:solidFill>
+                    <a:effectLst/>
+                    <a:uLnTx/>
+                    <a:uFillTx/>
+                    <a:latin typeface="Courier New" panose="02070309020205020404" pitchFamily="49" charset="0"/>
+                    <a:ea typeface="Cambria Math" panose="02040503050406030204" pitchFamily="18" charset="0"/>
+                    <a:cs typeface="Courier New" panose="02070309020205020404" pitchFamily="49" charset="0"/>
+                  </a:rPr>
+                  <a:t>(…,</a:t>
+                </a:r>
+                <a:r>
+                  <a:rPr kumimoji="0" lang="en-GB" sz="1200" b="1" i="0" u="none" strike="noStrike" kern="1200" cap="none" spc="0" normalizeH="0" baseline="0" noProof="0" dirty="0" err="1">
+                    <a:ln>
+                      <a:noFill/>
+                    </a:ln>
+                    <a:solidFill>
+                      <a:prstClr val="black"/>
+                    </a:solidFill>
+                    <a:effectLst/>
+                    <a:uLnTx/>
+                    <a:uFillTx/>
+                    <a:latin typeface="Courier New" panose="02070309020205020404" pitchFamily="49" charset="0"/>
+                    <a:ea typeface="Cambria Math" panose="02040503050406030204" pitchFamily="18" charset="0"/>
+                    <a:cs typeface="Courier New" panose="02070309020205020404" pitchFamily="49" charset="0"/>
+                  </a:rPr>
+                  <a:t>do_regression</a:t>
+                </a:r>
+                <a:r>
+                  <a:rPr kumimoji="0" lang="en-GB" sz="1200" b="1" i="0" u="none" strike="noStrike" kern="1200" cap="none" spc="0" normalizeH="0" baseline="0" noProof="0" dirty="0">
+                    <a:ln>
+                      <a:noFill/>
+                    </a:ln>
+                    <a:solidFill>
+                      <a:prstClr val="black"/>
+                    </a:solidFill>
+                    <a:effectLst/>
+                    <a:uLnTx/>
+                    <a:uFillTx/>
+                    <a:latin typeface="Courier New" panose="02070309020205020404" pitchFamily="49" charset="0"/>
+                    <a:ea typeface="Cambria Math" panose="02040503050406030204" pitchFamily="18" charset="0"/>
+                    <a:cs typeface="Courier New" panose="02070309020205020404" pitchFamily="49" charset="0"/>
+                  </a:rPr>
+                  <a:t>=FALSE</a:t>
+                </a:r>
+                <a:r>
+                  <a:rPr kumimoji="0" lang="en-GB" sz="1200" i="0" u="none" strike="noStrike" kern="1200" cap="none" spc="0" normalizeH="0" baseline="0" noProof="0" dirty="0">
+                    <a:ln>
+                      <a:noFill/>
+                    </a:ln>
+                    <a:solidFill>
+                      <a:prstClr val="black"/>
+                    </a:solidFill>
+                    <a:effectLst/>
+                    <a:uLnTx/>
+                    <a:uFillTx/>
+                    <a:latin typeface="Courier New" panose="02070309020205020404" pitchFamily="49" charset="0"/>
+                    <a:ea typeface="Cambria Math" panose="02040503050406030204" pitchFamily="18" charset="0"/>
+                    <a:cs typeface="Courier New" panose="02070309020205020404" pitchFamily="49" charset="0"/>
+                  </a:rPr>
+                  <a:t>)</a:t>
+                </a:r>
+                <a:endParaRPr lang="de-DE" sz="800" noProof="0" dirty="0">
+                  <a:latin typeface="Calibri" panose="020F0502020204030204" pitchFamily="34" charset="0"/>
+                  <a:ea typeface="Cambria Math" panose="02040503050406030204" pitchFamily="18" charset="0"/>
+                  <a:cs typeface="Calibri" panose="020F0502020204030204" pitchFamily="34" charset="0"/>
+                </a:endParaRPr>
+              </a:p>
+            </p:txBody>
+          </p:sp>
+          <mc:AlternateContent xmlns:mc="http://schemas.openxmlformats.org/markup-compatibility/2006">
+            <mc:Choice xmlns:a14="http://schemas.microsoft.com/office/drawing/2010/main" Requires="a14">
+              <p:sp>
+                <p:nvSpPr>
+                  <p:cNvPr id="9" name="Textfeld 8">
+                    <a:extLst>
+                      <a:ext uri="{FF2B5EF4-FFF2-40B4-BE49-F238E27FC236}">
+                        <a16:creationId xmlns:a16="http://schemas.microsoft.com/office/drawing/2014/main" id="{2C733A43-BA90-EED8-6758-242898D59516}"/>
+                      </a:ext>
+                    </a:extLst>
+                  </p:cNvPr>
+                  <p:cNvSpPr txBox="1"/>
+                  <p:nvPr/>
+                </p:nvSpPr>
+                <p:spPr>
+                  <a:xfrm>
+                    <a:off x="5614328" y="2075934"/>
+                    <a:ext cx="5701592" cy="276999"/>
+                  </a:xfrm>
+                  <a:prstGeom prst="rect">
+                    <a:avLst/>
+                  </a:prstGeom>
+                  <a:solidFill>
+                    <a:schemeClr val="accent1">
+                      <a:lumMod val="40000"/>
+                      <a:lumOff val="60000"/>
+                    </a:schemeClr>
+                  </a:solidFill>
+                  <a:ln w="12700">
+                    <a:solidFill>
+                      <a:schemeClr val="tx1"/>
+                    </a:solidFill>
+                  </a:ln>
+                </p:spPr>
+                <p:txBody>
+                  <a:bodyPr wrap="square">
+                    <a:spAutoFit/>
+                  </a:bodyPr>
+                  <a:lstStyle>
+                    <a:defPPr>
+                      <a:defRPr lang="de-DE"/>
+                    </a:defPPr>
+                  </a:lstStyle>
+                  <a:p>
+                    <a:pPr algn="ctr"/>
+                    <a:r>
+                      <a:rPr lang="en-US" sz="1200" dirty="0">
+                        <a:ea typeface="Cambria Math" panose="02040503050406030204" pitchFamily="18" charset="0"/>
+                      </a:rPr>
+                      <a:t>non-parametric tests:</a:t>
+                    </a:r>
+                    <a:r>
+                      <a:rPr lang="en-GB" sz="1200" dirty="0">
+                        <a:latin typeface="Courier New" panose="02070309020205020404" pitchFamily="49" charset="0"/>
+                        <a:ea typeface="Cambria Math" panose="02040503050406030204" pitchFamily="18" charset="0"/>
+                        <a:cs typeface="Courier New" panose="02070309020205020404" pitchFamily="49" charset="0"/>
+                      </a:rPr>
+                      <a:t> </a:t>
+                    </a:r>
+                    <a14:m>
+                      <m:oMath xmlns:m="http://schemas.openxmlformats.org/officeDocument/2006/math">
+                        <m:r>
+                          <a:rPr lang="en-US" sz="1200" b="0" i="1" smtClean="0">
+                            <a:latin typeface="Cambria Math" panose="02040503050406030204" pitchFamily="18" charset="0"/>
+                            <a:ea typeface="Cambria Math" panose="02040503050406030204" pitchFamily="18" charset="0"/>
+                          </a:rPr>
+                          <m:t>𝑘</m:t>
+                        </m:r>
+                        <m:r>
+                          <a:rPr lang="en-US" sz="1200" b="0" i="1" smtClean="0">
+                            <a:latin typeface="Cambria Math" panose="02040503050406030204" pitchFamily="18" charset="0"/>
+                            <a:ea typeface="Cambria Math" panose="02040503050406030204" pitchFamily="18" charset="0"/>
+                          </a:rPr>
+                          <m:t>=2</m:t>
+                        </m:r>
+                      </m:oMath>
+                    </a14:m>
+                    <a:r>
+                      <a:rPr lang="en-GB" sz="1200" dirty="0">
+                        <a:latin typeface="Courier New" panose="02070309020205020404" pitchFamily="49" charset="0"/>
+                        <a:ea typeface="Cambria Math" panose="02040503050406030204" pitchFamily="18" charset="0"/>
+                        <a:cs typeface="Courier New" panose="02070309020205020404" pitchFamily="49" charset="0"/>
+                      </a:rPr>
+                      <a:t>: </a:t>
+                    </a:r>
+                    <a:r>
+                      <a:rPr lang="en-GB" sz="1200" dirty="0" err="1">
+                        <a:latin typeface="Courier New" panose="02070309020205020404" pitchFamily="49" charset="0"/>
+                        <a:ea typeface="Cambria Math" panose="02040503050406030204" pitchFamily="18" charset="0"/>
+                        <a:cs typeface="Courier New" panose="02070309020205020404" pitchFamily="49" charset="0"/>
+                      </a:rPr>
+                      <a:t>wilcox.test</a:t>
+                    </a:r>
+                    <a:r>
+                      <a:rPr lang="en-GB" sz="1200" dirty="0">
+                        <a:latin typeface="Courier New" panose="02070309020205020404" pitchFamily="49" charset="0"/>
+                        <a:ea typeface="Cambria Math" panose="02040503050406030204" pitchFamily="18" charset="0"/>
+                        <a:cs typeface="Courier New" panose="02070309020205020404" pitchFamily="49" charset="0"/>
+                      </a:rPr>
+                      <a:t>(),</a:t>
+                    </a:r>
+                    <a:r>
+                      <a:rPr lang="en-GB" sz="1200" dirty="0">
+                        <a:ea typeface="Cambria Math" panose="02040503050406030204" pitchFamily="18" charset="0"/>
+                      </a:rPr>
+                      <a:t> </a:t>
+                    </a:r>
+                    <a14:m>
+                      <m:oMath xmlns:m="http://schemas.openxmlformats.org/officeDocument/2006/math">
+                        <m:r>
+                          <a:rPr lang="en-US" sz="1200" b="0" i="1" smtClean="0">
+                            <a:latin typeface="Cambria Math" panose="02040503050406030204" pitchFamily="18" charset="0"/>
+                            <a:ea typeface="Cambria Math" panose="02040503050406030204" pitchFamily="18" charset="0"/>
+                          </a:rPr>
+                          <m:t>𝑘</m:t>
+                        </m:r>
+                        <m:r>
+                          <a:rPr lang="en-US" sz="1200" b="0" i="1" smtClean="0">
+                            <a:latin typeface="Cambria Math" panose="02040503050406030204" pitchFamily="18" charset="0"/>
+                            <a:ea typeface="Cambria Math" panose="02040503050406030204" pitchFamily="18" charset="0"/>
+                          </a:rPr>
+                          <m:t>&gt;2</m:t>
+                        </m:r>
+                      </m:oMath>
+                    </a14:m>
+                    <a:r>
+                      <a:rPr lang="en-GB" sz="1200" dirty="0">
+                        <a:latin typeface="Courier New" panose="02070309020205020404" pitchFamily="49" charset="0"/>
+                        <a:ea typeface="Cambria Math" panose="02040503050406030204" pitchFamily="18" charset="0"/>
+                        <a:cs typeface="Courier New" panose="02070309020205020404" pitchFamily="49" charset="0"/>
+                      </a:rPr>
+                      <a:t>: </a:t>
+                    </a:r>
+                    <a:r>
+                      <a:rPr lang="en-GB" sz="1200" dirty="0" err="1">
+                        <a:latin typeface="Courier New" panose="02070309020205020404" pitchFamily="49" charset="0"/>
+                        <a:ea typeface="Cambria Math" panose="02040503050406030204" pitchFamily="18" charset="0"/>
+                        <a:cs typeface="Courier New" panose="02070309020205020404" pitchFamily="49" charset="0"/>
+                      </a:rPr>
+                      <a:t>kruskal.test</a:t>
+                    </a:r>
+                    <a:r>
+                      <a:rPr lang="en-GB" sz="1200" dirty="0">
+                        <a:latin typeface="Courier New" panose="02070309020205020404" pitchFamily="49" charset="0"/>
+                        <a:ea typeface="Cambria Math" panose="02040503050406030204" pitchFamily="18" charset="0"/>
+                        <a:cs typeface="Courier New" panose="02070309020205020404" pitchFamily="49" charset="0"/>
+                      </a:rPr>
+                      <a:t>()</a:t>
+                    </a:r>
+                  </a:p>
+                </p:txBody>
+              </p:sp>
+            </mc:Choice>
+            <mc:Fallback>
+              <p:sp>
+                <p:nvSpPr>
+                  <p:cNvPr id="9" name="Textfeld 8">
+                    <a:extLst>
+                      <a:ext uri="{FF2B5EF4-FFF2-40B4-BE49-F238E27FC236}">
+                        <a16:creationId xmlns:a16="http://schemas.microsoft.com/office/drawing/2014/main" id="{2C733A43-BA90-EED8-6758-242898D59516}"/>
+                      </a:ext>
+                    </a:extLst>
+                  </p:cNvPr>
+                  <p:cNvSpPr txBox="1">
+                    <a:spLocks noRot="1" noChangeAspect="1" noMove="1" noResize="1" noEditPoints="1" noAdjustHandles="1" noChangeArrowheads="1" noChangeShapeType="1" noTextEdit="1"/>
+                  </p:cNvSpPr>
+                  <p:nvPr/>
+                </p:nvSpPr>
+                <p:spPr>
+                  <a:xfrm>
+                    <a:off x="5614328" y="2075934"/>
+                    <a:ext cx="5701592" cy="276999"/>
+                  </a:xfrm>
+                  <a:prstGeom prst="rect">
+                    <a:avLst/>
+                  </a:prstGeom>
+                  <a:blipFill>
+                    <a:blip r:embed="rId4"/>
+                    <a:stretch>
+                      <a:fillRect b="-12500"/>
+                    </a:stretch>
+                  </a:blipFill>
+                  <a:ln w="12700">
+                    <a:solidFill>
+                      <a:schemeClr val="tx1"/>
+                    </a:solidFill>
+                  </a:ln>
+                </p:spPr>
+                <p:txBody>
+                  <a:bodyPr/>
+                  <a:lstStyle/>
+                  <a:p>
+                    <a:r>
+                      <a:rPr lang="de-DE">
+                        <a:noFill/>
+                      </a:rPr>
+                      <a:t> </a:t>
+                    </a:r>
+                  </a:p>
+                </p:txBody>
+              </p:sp>
+            </mc:Fallback>
+          </mc:AlternateContent>
+          <p:sp>
+            <p:nvSpPr>
+              <p:cNvPr id="19" name="Textfeld 18">
+                <a:extLst>
+                  <a:ext uri="{FF2B5EF4-FFF2-40B4-BE49-F238E27FC236}">
+                    <a16:creationId xmlns:a16="http://schemas.microsoft.com/office/drawing/2014/main" id="{0F5D9D80-C8ED-1D5F-7CBA-0A72C71AD571}"/>
+                  </a:ext>
+                </a:extLst>
+              </p:cNvPr>
+              <p:cNvSpPr txBox="1"/>
+              <p:nvPr/>
+            </p:nvSpPr>
+            <p:spPr>
+              <a:xfrm>
+                <a:off x="5614328" y="3021516"/>
+                <a:ext cx="5719853" cy="276999"/>
+              </a:xfrm>
+              <a:prstGeom prst="rect">
+                <a:avLst/>
+              </a:prstGeom>
+              <a:solidFill>
+                <a:schemeClr val="accent2">
+                  <a:lumMod val="20000"/>
+                  <a:lumOff val="80000"/>
+                </a:schemeClr>
+              </a:solidFill>
+              <a:ln w="12700">
+                <a:solidFill>
+                  <a:schemeClr val="tx1"/>
+                </a:solidFill>
+              </a:ln>
+            </p:spPr>
+            <p:txBody>
+              <a:bodyPr wrap="square">
+                <a:spAutoFit/>
+              </a:bodyPr>
+              <a:lstStyle>
+                <a:defPPr>
+                  <a:defRPr lang="de-DE"/>
+                </a:defPPr>
+              </a:lstStyle>
+              <a:p>
+                <a:pPr lvl="1"/>
+                <a:r>
+                  <a:rPr lang="en-GB" sz="1200" noProof="0" dirty="0">
+                    <a:latin typeface="Calibri" panose="020F0502020204030204" pitchFamily="34" charset="0"/>
+                    <a:ea typeface="Cambria Math" panose="02040503050406030204" pitchFamily="18" charset="0"/>
+                    <a:cs typeface="Calibri" panose="020F0502020204030204" pitchFamily="34" charset="0"/>
+                  </a:rPr>
+                  <a:t>Simple linear regression:   </a:t>
+                </a:r>
+                <a:r>
+                  <a:rPr lang="en-GB" sz="1200" dirty="0" err="1">
+                    <a:latin typeface="Courier New" panose="02070309020205020404" pitchFamily="49" charset="0"/>
+                    <a:ea typeface="Cambria Math" panose="02040503050406030204" pitchFamily="18" charset="0"/>
+                    <a:cs typeface="Courier New" panose="02070309020205020404" pitchFamily="49" charset="0"/>
+                  </a:rPr>
+                  <a:t>lm</a:t>
+                </a:r>
+                <a:r>
+                  <a:rPr lang="en-GB" sz="1200" dirty="0">
+                    <a:latin typeface="Courier New" panose="02070309020205020404" pitchFamily="49" charset="0"/>
+                    <a:ea typeface="Cambria Math" panose="02040503050406030204" pitchFamily="18" charset="0"/>
+                    <a:cs typeface="Courier New" panose="02070309020205020404" pitchFamily="49" charset="0"/>
+                  </a:rPr>
+                  <a:t>()</a:t>
+                </a:r>
+              </a:p>
+            </p:txBody>
+          </p:sp>
+          <mc:AlternateContent xmlns:mc="http://schemas.openxmlformats.org/markup-compatibility/2006">
+            <mc:Choice xmlns:a14="http://schemas.microsoft.com/office/drawing/2010/main" Requires="a14">
+              <p:sp>
+                <p:nvSpPr>
+                  <p:cNvPr id="7" name="Textfeld 6">
+                    <a:extLst>
+                      <a:ext uri="{FF2B5EF4-FFF2-40B4-BE49-F238E27FC236}">
+                        <a16:creationId xmlns:a16="http://schemas.microsoft.com/office/drawing/2014/main" id="{F15C4A27-3FC3-4E72-00C0-8FCD121A3D3F}"/>
+                      </a:ext>
+                    </a:extLst>
+                  </p:cNvPr>
+                  <p:cNvSpPr txBox="1"/>
+                  <p:nvPr/>
+                </p:nvSpPr>
+                <p:spPr>
+                  <a:xfrm>
+                    <a:off x="772625" y="909906"/>
+                    <a:ext cx="4320000" cy="461665"/>
+                  </a:xfrm>
+                  <a:prstGeom prst="rect">
+                    <a:avLst/>
+                  </a:prstGeom>
+                  <a:solidFill>
+                    <a:schemeClr val="bg2">
+                      <a:lumMod val="90000"/>
+                    </a:schemeClr>
+                  </a:solidFill>
+                  <a:ln w="12700">
+                    <a:solidFill>
+                      <a:schemeClr val="tx1"/>
+                    </a:solidFill>
+                  </a:ln>
+                </p:spPr>
+                <p:txBody>
+                  <a:bodyPr wrap="square">
+                    <a:spAutoFit/>
+                  </a:bodyPr>
+                  <a:lstStyle/>
+                  <a:p>
+                    <a:r>
+                      <a:rPr lang="en-GB" sz="1200" dirty="0">
+                        <a:latin typeface="Calibri" panose="020F0502020204030204" pitchFamily="34" charset="0"/>
+                        <a:ea typeface="Cambria Math" panose="02040503050406030204" pitchFamily="18" charset="0"/>
+                        <a:cs typeface="Calibri" panose="020F0502020204030204" pitchFamily="34" charset="0"/>
+                      </a:rPr>
+                      <a:t>C</a:t>
+                    </a:r>
+                    <a:r>
+                      <a:rPr lang="en-GB" sz="1200" noProof="0" dirty="0" err="1">
+                        <a:latin typeface="Calibri" panose="020F0502020204030204" pitchFamily="34" charset="0"/>
+                        <a:ea typeface="Cambria Math" panose="02040503050406030204" pitchFamily="18" charset="0"/>
+                        <a:cs typeface="Calibri" panose="020F0502020204030204" pitchFamily="34" charset="0"/>
+                      </a:rPr>
+                      <a:t>ategorical</a:t>
+                    </a:r>
+                    <a:r>
+                      <a:rPr lang="en-GB" sz="1200" noProof="0" dirty="0">
+                        <a:latin typeface="Calibri" panose="020F0502020204030204" pitchFamily="34" charset="0"/>
+                        <a:ea typeface="Cambria Math" panose="02040503050406030204" pitchFamily="18" charset="0"/>
+                        <a:cs typeface="Calibri" panose="020F0502020204030204" pitchFamily="34" charset="0"/>
+                      </a:rPr>
+                      <a:t> predictor of </a:t>
+                    </a:r>
+                    <a:r>
+                      <a:rPr lang="en-GB" sz="1200" noProof="0" dirty="0">
+                        <a:latin typeface="Courier New" panose="02070309020205020404" pitchFamily="49" charset="0"/>
+                        <a:ea typeface="Cambria Math" panose="02040503050406030204" pitchFamily="18" charset="0"/>
+                        <a:cs typeface="Courier New" panose="02070309020205020404" pitchFamily="49" charset="0"/>
+                      </a:rPr>
+                      <a:t>class </a:t>
+                    </a:r>
+                    <a:r>
+                      <a:rPr lang="en-GB" sz="1200" dirty="0">
+                        <a:latin typeface="Calibri" panose="020F0502020204030204" pitchFamily="34" charset="0"/>
+                        <a:ea typeface="Cambria Math" panose="02040503050406030204" pitchFamily="18" charset="0"/>
+                        <a:cs typeface="Calibri" panose="020F0502020204030204" pitchFamily="34" charset="0"/>
+                      </a:rPr>
+                      <a:t>“</a:t>
+                    </a:r>
+                    <a:r>
+                      <a:rPr lang="en-GB" sz="1200" dirty="0">
+                        <a:latin typeface="Courier New" panose="02070309020205020404" pitchFamily="49" charset="0"/>
+                        <a:ea typeface="Cambria Math" panose="02040503050406030204" pitchFamily="18" charset="0"/>
+                        <a:cs typeface="Courier New" panose="02070309020205020404" pitchFamily="49" charset="0"/>
+                      </a:rPr>
+                      <a:t>factor</a:t>
+                    </a:r>
+                    <a:r>
+                      <a:rPr lang="en-GB" sz="1200" noProof="0" dirty="0">
+                        <a:latin typeface="Calibri" panose="020F0502020204030204" pitchFamily="34" charset="0"/>
+                        <a:ea typeface="Cambria Math" panose="02040503050406030204" pitchFamily="18" charset="0"/>
+                        <a:cs typeface="Calibri" panose="020F0502020204030204" pitchFamily="34" charset="0"/>
+                      </a:rPr>
+                      <a:t>“  with </a:t>
+                    </a:r>
+                    <a14:m>
+                      <m:oMath xmlns:m="http://schemas.openxmlformats.org/officeDocument/2006/math">
+                        <m:r>
+                          <a:rPr lang="en-US" sz="1200" b="0" i="1" noProof="0" smtClean="0">
+                            <a:latin typeface="Cambria Math" panose="02040503050406030204" pitchFamily="18" charset="0"/>
+                            <a:ea typeface="Cambria Math" panose="02040503050406030204" pitchFamily="18" charset="0"/>
+                            <a:cs typeface="Calibri" panose="020F0502020204030204" pitchFamily="34" charset="0"/>
+                          </a:rPr>
+                          <m:t>𝑘</m:t>
+                        </m:r>
+                      </m:oMath>
+                    </a14:m>
+                    <a:r>
+                      <a:rPr lang="en-GB" sz="1200" noProof="0" dirty="0">
+                        <a:latin typeface="Calibri" panose="020F0502020204030204" pitchFamily="34" charset="0"/>
+                        <a:ea typeface="Cambria Math" panose="02040503050406030204" pitchFamily="18" charset="0"/>
+                        <a:cs typeface="Calibri" panose="020F0502020204030204" pitchFamily="34" charset="0"/>
+                      </a:rPr>
+                      <a:t> levels</a:t>
+                    </a:r>
+                  </a:p>
+                  <a:p>
+                    <a:pPr marL="171450" indent="-171450">
+                      <a:buFont typeface="Arial" panose="020B0604020202020204" pitchFamily="34" charset="0"/>
+                      <a:buChar char="•"/>
+                    </a:pPr>
+                    <a:r>
+                      <a:rPr lang="en-GB" sz="1200" dirty="0">
+                        <a:latin typeface="Calibri" panose="020F0502020204030204" pitchFamily="34" charset="0"/>
+                        <a:ea typeface="Cambria Math" panose="02040503050406030204" pitchFamily="18" charset="0"/>
+                        <a:cs typeface="Calibri" panose="020F0502020204030204" pitchFamily="34" charset="0"/>
+                      </a:rPr>
+                      <a:t>N</a:t>
+                    </a:r>
+                    <a:r>
+                      <a:rPr lang="en-GB" sz="1200" noProof="0" dirty="0" err="1">
+                        <a:latin typeface="Calibri" panose="020F0502020204030204" pitchFamily="34" charset="0"/>
+                        <a:ea typeface="Cambria Math" panose="02040503050406030204" pitchFamily="18" charset="0"/>
+                        <a:cs typeface="Calibri" panose="020F0502020204030204" pitchFamily="34" charset="0"/>
+                      </a:rPr>
+                      <a:t>umeric</a:t>
+                    </a:r>
+                    <a:r>
+                      <a:rPr lang="en-GB" sz="1200" dirty="0">
+                        <a:latin typeface="Calibri" panose="020F0502020204030204" pitchFamily="34" charset="0"/>
+                        <a:ea typeface="Cambria Math" panose="02040503050406030204" pitchFamily="18" charset="0"/>
+                        <a:cs typeface="Calibri" panose="020F0502020204030204" pitchFamily="34" charset="0"/>
+                      </a:rPr>
+                      <a:t> </a:t>
+                    </a:r>
+                    <a:r>
+                      <a:rPr lang="en-GB" sz="1200" noProof="0" dirty="0">
+                        <a:latin typeface="Calibri" panose="020F0502020204030204" pitchFamily="34" charset="0"/>
+                        <a:ea typeface="Cambria Math" panose="02040503050406030204" pitchFamily="18" charset="0"/>
+                        <a:cs typeface="Calibri" panose="020F0502020204030204" pitchFamily="34" charset="0"/>
+                      </a:rPr>
+                      <a:t>response of </a:t>
+                    </a:r>
+                    <a:r>
+                      <a:rPr lang="en-GB" sz="1200" noProof="0" dirty="0">
+                        <a:latin typeface="Courier New" panose="02070309020205020404" pitchFamily="49" charset="0"/>
+                        <a:ea typeface="Cambria Math" panose="02040503050406030204" pitchFamily="18" charset="0"/>
+                        <a:cs typeface="Courier New" panose="02070309020205020404" pitchFamily="49" charset="0"/>
+                      </a:rPr>
+                      <a:t>class </a:t>
+                    </a:r>
+                    <a:r>
+                      <a:rPr lang="en-GB" sz="1200" dirty="0">
+                        <a:latin typeface="Calibri" panose="020F0502020204030204" pitchFamily="34" charset="0"/>
+                        <a:ea typeface="Cambria Math" panose="02040503050406030204" pitchFamily="18" charset="0"/>
+                        <a:cs typeface="Calibri" panose="020F0502020204030204" pitchFamily="34" charset="0"/>
+                      </a:rPr>
+                      <a:t>“</a:t>
+                    </a:r>
+                    <a:r>
+                      <a:rPr lang="en-GB" sz="1200" noProof="0" dirty="0">
+                        <a:latin typeface="Courier New" panose="02070309020205020404" pitchFamily="49" charset="0"/>
+                        <a:ea typeface="Cambria Math" panose="02040503050406030204" pitchFamily="18" charset="0"/>
+                        <a:cs typeface="Courier New" panose="02070309020205020404" pitchFamily="49" charset="0"/>
+                      </a:rPr>
+                      <a:t>numeric</a:t>
+                    </a:r>
+                    <a:r>
+                      <a:rPr lang="en-GB" sz="1200" dirty="0">
+                        <a:latin typeface="Calibri" panose="020F0502020204030204" pitchFamily="34" charset="0"/>
+                        <a:ea typeface="Cambria Math" panose="02040503050406030204" pitchFamily="18" charset="0"/>
+                        <a:cs typeface="Calibri" panose="020F0502020204030204" pitchFamily="34" charset="0"/>
+                      </a:rPr>
+                      <a:t>”</a:t>
+                    </a:r>
+                    <a:r>
+                      <a:rPr lang="en-GB" sz="1200" dirty="0">
+                        <a:latin typeface="Courier New" panose="02070309020205020404" pitchFamily="49" charset="0"/>
+                        <a:ea typeface="Cambria Math" panose="02040503050406030204" pitchFamily="18" charset="0"/>
+                        <a:cs typeface="Courier New" panose="02070309020205020404" pitchFamily="49" charset="0"/>
+                      </a:rPr>
+                      <a:t> </a:t>
+                    </a:r>
+                    <a:r>
+                      <a:rPr lang="en-GB" sz="1200" noProof="0" dirty="0">
+                        <a:latin typeface="Calibri" panose="020F0502020204030204" pitchFamily="34" charset="0"/>
+                        <a:ea typeface="Cambria Math" panose="02040503050406030204" pitchFamily="18" charset="0"/>
+                        <a:cs typeface="Calibri" panose="020F0502020204030204" pitchFamily="34" charset="0"/>
+                      </a:rPr>
+                      <a:t>or “</a:t>
+                    </a:r>
+                    <a:r>
+                      <a:rPr lang="en-GB" sz="1200" noProof="0" dirty="0">
+                        <a:latin typeface="Courier New" panose="02070309020205020404" pitchFamily="49" charset="0"/>
+                        <a:ea typeface="Cambria Math" panose="02040503050406030204" pitchFamily="18" charset="0"/>
+                        <a:cs typeface="Courier New" panose="02070309020205020404" pitchFamily="49" charset="0"/>
+                      </a:rPr>
+                      <a:t>integer</a:t>
+                    </a:r>
+                    <a:r>
+                      <a:rPr lang="en-GB" sz="1200" dirty="0">
+                        <a:latin typeface="Calibri" panose="020F0502020204030204" pitchFamily="34" charset="0"/>
+                        <a:ea typeface="Cambria Math" panose="02040503050406030204" pitchFamily="18" charset="0"/>
+                        <a:cs typeface="Calibri" panose="020F0502020204030204" pitchFamily="34" charset="0"/>
+                      </a:rPr>
+                      <a:t>”</a:t>
+                    </a:r>
+                  </a:p>
+                </p:txBody>
+              </p:sp>
+            </mc:Choice>
+            <mc:Fallback>
+              <p:sp>
+                <p:nvSpPr>
+                  <p:cNvPr id="7" name="Textfeld 6">
+                    <a:extLst>
+                      <a:ext uri="{FF2B5EF4-FFF2-40B4-BE49-F238E27FC236}">
+                        <a16:creationId xmlns:a16="http://schemas.microsoft.com/office/drawing/2014/main" id="{F15C4A27-3FC3-4E72-00C0-8FCD121A3D3F}"/>
+                      </a:ext>
+                    </a:extLst>
+                  </p:cNvPr>
+                  <p:cNvSpPr txBox="1">
+                    <a:spLocks noRot="1" noChangeAspect="1" noMove="1" noResize="1" noEditPoints="1" noAdjustHandles="1" noChangeArrowheads="1" noChangeShapeType="1" noTextEdit="1"/>
+                  </p:cNvSpPr>
+                  <p:nvPr/>
+                </p:nvSpPr>
+                <p:spPr>
+                  <a:xfrm>
+                    <a:off x="772625" y="909906"/>
+                    <a:ext cx="4320000" cy="461665"/>
+                  </a:xfrm>
+                  <a:prstGeom prst="rect">
+                    <a:avLst/>
+                  </a:prstGeom>
+                  <a:blipFill>
+                    <a:blip r:embed="rId5"/>
+                    <a:stretch>
+                      <a:fillRect b="-7692"/>
+                    </a:stretch>
+                  </a:blipFill>
+                  <a:ln w="12700">
+                    <a:solidFill>
+                      <a:schemeClr val="tx1"/>
+                    </a:solidFill>
+                  </a:ln>
+                </p:spPr>
+                <p:txBody>
+                  <a:bodyPr/>
+                  <a:lstStyle/>
+                  <a:p>
+                    <a:r>
+                      <a:rPr lang="de-DE">
+                        <a:noFill/>
+                      </a:rPr>
+                      <a:t> </a:t>
+                    </a:r>
+                  </a:p>
+                </p:txBody>
+              </p:sp>
+            </mc:Fallback>
+          </mc:AlternateContent>
+          <p:sp>
+            <p:nvSpPr>
+              <p:cNvPr id="36" name="Textfeld 35">
+                <a:extLst>
+                  <a:ext uri="{FF2B5EF4-FFF2-40B4-BE49-F238E27FC236}">
+                    <a16:creationId xmlns:a16="http://schemas.microsoft.com/office/drawing/2014/main" id="{E4B8EE02-0F90-3F09-7990-89B6B3DCBB2E}"/>
+                  </a:ext>
+                </a:extLst>
+              </p:cNvPr>
+              <p:cNvSpPr txBox="1"/>
+              <p:nvPr/>
+            </p:nvSpPr>
+            <p:spPr>
+              <a:xfrm>
+                <a:off x="772625" y="5234137"/>
+                <a:ext cx="4329204" cy="461665"/>
+              </a:xfrm>
+              <a:prstGeom prst="rect">
+                <a:avLst/>
+              </a:prstGeom>
+              <a:solidFill>
+                <a:schemeClr val="accent4">
+                  <a:lumMod val="20000"/>
+                  <a:lumOff val="80000"/>
+                </a:schemeClr>
+              </a:solidFill>
+              <a:ln w="12700">
+                <a:solidFill>
+                  <a:schemeClr val="tx1"/>
+                </a:solidFill>
+              </a:ln>
+            </p:spPr>
+            <p:txBody>
+              <a:bodyPr wrap="square">
+                <a:spAutoFit/>
+              </a:bodyPr>
+              <a:lstStyle/>
+              <a:p>
+                <a:pPr marL="171450" indent="-171450">
+                  <a:buFont typeface="Arial" panose="020B0604020202020204" pitchFamily="34" charset="0"/>
+                  <a:buChar char="•"/>
+                </a:pPr>
+                <a:r>
+                  <a:rPr lang="en-GB" sz="1200" noProof="0" dirty="0">
+                    <a:latin typeface="Calibri" panose="020F0502020204030204" pitchFamily="34" charset="0"/>
+                    <a:ea typeface="Cambria Math" panose="02040503050406030204" pitchFamily="18" charset="0"/>
+                    <a:cs typeface="Calibri" panose="020F0502020204030204" pitchFamily="34" charset="0"/>
+                  </a:rPr>
+                  <a:t>Both variables  of  </a:t>
+                </a:r>
+                <a:r>
+                  <a:rPr lang="en-GB" sz="1200" dirty="0">
+                    <a:latin typeface="Courier New" panose="02070309020205020404" pitchFamily="49" charset="0"/>
+                    <a:ea typeface="Cambria Math" panose="02040503050406030204" pitchFamily="18" charset="0"/>
+                    <a:cs typeface="Courier New" panose="02070309020205020404" pitchFamily="49" charset="0"/>
+                  </a:rPr>
+                  <a:t>class </a:t>
+                </a:r>
+                <a:r>
+                  <a:rPr lang="en-GB" sz="1200" dirty="0">
+                    <a:latin typeface="Calibri" panose="020F0502020204030204" pitchFamily="34" charset="0"/>
+                    <a:ea typeface="Cambria Math" panose="02040503050406030204" pitchFamily="18" charset="0"/>
+                    <a:cs typeface="Calibri" panose="020F0502020204030204" pitchFamily="34" charset="0"/>
+                  </a:rPr>
+                  <a:t>“</a:t>
+                </a:r>
+                <a:r>
+                  <a:rPr lang="en-GB" sz="1200" dirty="0">
+                    <a:latin typeface="Courier New" panose="02070309020205020404" pitchFamily="49" charset="0"/>
+                    <a:ea typeface="Cambria Math" panose="02040503050406030204" pitchFamily="18" charset="0"/>
+                    <a:cs typeface="Courier New" panose="02070309020205020404" pitchFamily="49" charset="0"/>
+                  </a:rPr>
+                  <a:t>factor</a:t>
+                </a:r>
+                <a:r>
+                  <a:rPr lang="en-GB" sz="1200" dirty="0">
+                    <a:latin typeface="Calibri" panose="020F0502020204030204" pitchFamily="34" charset="0"/>
+                    <a:ea typeface="Cambria Math" panose="02040503050406030204" pitchFamily="18" charset="0"/>
+                    <a:cs typeface="Calibri" panose="020F0502020204030204" pitchFamily="34" charset="0"/>
+                  </a:rPr>
+                  <a:t> “</a:t>
+                </a:r>
+              </a:p>
+              <a:p>
+                <a:pPr marL="171450" indent="-171450">
+                  <a:buFont typeface="Arial" panose="020B0604020202020204" pitchFamily="34" charset="0"/>
+                  <a:buChar char="•"/>
+                </a:pPr>
+                <a:endParaRPr lang="en-GB" sz="1200" dirty="0">
+                  <a:latin typeface="Calibri" panose="020F0502020204030204" pitchFamily="34" charset="0"/>
+                  <a:ea typeface="Cambria Math" panose="02040503050406030204" pitchFamily="18" charset="0"/>
+                  <a:cs typeface="Calibri" panose="020F0502020204030204" pitchFamily="34" charset="0"/>
+                </a:endParaRPr>
+              </a:p>
+            </p:txBody>
+          </p:sp>
+          <p:cxnSp>
+            <p:nvCxnSpPr>
+              <p:cNvPr id="37" name="Gerade Verbindung mit Pfeil 36">
+                <a:extLst>
+                  <a:ext uri="{FF2B5EF4-FFF2-40B4-BE49-F238E27FC236}">
+                    <a16:creationId xmlns:a16="http://schemas.microsoft.com/office/drawing/2014/main" id="{D0C86A91-FDA7-431A-A97E-45AB5F8F86AC}"/>
+                  </a:ext>
+                </a:extLst>
+              </p:cNvPr>
+              <p:cNvCxnSpPr>
+                <a:cxnSpLocks/>
+                <a:stCxn id="36" idx="3"/>
+                <a:endCxn id="40" idx="1"/>
+              </p:cNvCxnSpPr>
+              <p:nvPr/>
+            </p:nvCxnSpPr>
+            <p:spPr>
+              <a:xfrm flipV="1">
+                <a:off x="5101829" y="5460863"/>
+                <a:ext cx="535366" cy="4107"/>
+              </a:xfrm>
+              <a:prstGeom prst="straightConnector1">
+                <a:avLst/>
+              </a:prstGeom>
+              <a:ln w="12700">
+                <a:solidFill>
+                  <a:schemeClr val="tx1"/>
+                </a:solidFill>
+                <a:tailEnd type="triangle"/>
+              </a:ln>
+            </p:spPr>
+            <p:style>
+              <a:lnRef idx="1">
+                <a:schemeClr val="accent1"/>
+              </a:lnRef>
+              <a:fillRef idx="0">
+                <a:schemeClr val="accent1"/>
+              </a:fillRef>
+              <a:effectRef idx="0">
+                <a:schemeClr val="accent1"/>
+              </a:effectRef>
+              <a:fontRef idx="minor">
+                <a:schemeClr val="tx1"/>
+              </a:fontRef>
+            </p:style>
+          </p:cxnSp>
+          <p:sp>
+            <p:nvSpPr>
+              <p:cNvPr id="40" name="Textfeld 39">
+                <a:extLst>
+                  <a:ext uri="{FF2B5EF4-FFF2-40B4-BE49-F238E27FC236}">
+                    <a16:creationId xmlns:a16="http://schemas.microsoft.com/office/drawing/2014/main" id="{50FC18BF-DA43-100C-15F7-046360CBE26F}"/>
+                  </a:ext>
+                </a:extLst>
+              </p:cNvPr>
+              <p:cNvSpPr txBox="1"/>
+              <p:nvPr/>
+            </p:nvSpPr>
+            <p:spPr>
+              <a:xfrm>
+                <a:off x="5637195" y="5230030"/>
+                <a:ext cx="5719851" cy="461665"/>
+              </a:xfrm>
+              <a:prstGeom prst="rect">
+                <a:avLst/>
+              </a:prstGeom>
+              <a:solidFill>
+                <a:schemeClr val="accent4">
+                  <a:lumMod val="20000"/>
+                  <a:lumOff val="80000"/>
+                </a:schemeClr>
+              </a:solidFill>
+              <a:ln w="12700">
+                <a:solidFill>
+                  <a:schemeClr val="tx1"/>
+                </a:solidFill>
+              </a:ln>
+            </p:spPr>
+            <p:txBody>
+              <a:bodyPr wrap="square">
+                <a:spAutoFit/>
+              </a:bodyPr>
+              <a:lstStyle>
+                <a:defPPr>
+                  <a:defRPr lang="de-DE"/>
+                </a:defPPr>
+              </a:lstStyle>
+              <a:p>
+                <a:pPr algn="ctr"/>
+                <a:r>
+                  <a:rPr lang="en-GB" sz="1200" noProof="0" dirty="0">
+                    <a:latin typeface="Calibri" panose="020F0502020204030204" pitchFamily="34" charset="0"/>
+                    <a:ea typeface="Cambria Math" panose="02040503050406030204" pitchFamily="18" charset="0"/>
+                    <a:cs typeface="Calibri" panose="020F0502020204030204" pitchFamily="34" charset="0"/>
+                  </a:rPr>
+                  <a:t>            Comparing proportions:</a:t>
+                </a:r>
+                <a:br>
+                  <a:rPr lang="en-GB" sz="1200" noProof="0" dirty="0">
+                    <a:latin typeface="Calibri" panose="020F0502020204030204" pitchFamily="34" charset="0"/>
+                    <a:ea typeface="Cambria Math" panose="02040503050406030204" pitchFamily="18" charset="0"/>
+                    <a:cs typeface="Calibri" panose="020F0502020204030204" pitchFamily="34" charset="0"/>
+                  </a:rPr>
+                </a:br>
+                <a:r>
+                  <a:rPr lang="en-GB" sz="1200" dirty="0" err="1">
+                    <a:latin typeface="Courier New" panose="02070309020205020404" pitchFamily="49" charset="0"/>
+                    <a:ea typeface="Cambria Math" panose="02040503050406030204" pitchFamily="18" charset="0"/>
+                    <a:cs typeface="Courier New" panose="02070309020205020404" pitchFamily="49" charset="0"/>
+                  </a:rPr>
+                  <a:t>chisq.test</a:t>
+                </a:r>
+                <a:r>
+                  <a:rPr lang="en-GB" sz="1200" dirty="0">
+                    <a:latin typeface="Courier New" panose="02070309020205020404" pitchFamily="49" charset="0"/>
+                    <a:ea typeface="Cambria Math" panose="02040503050406030204" pitchFamily="18" charset="0"/>
+                    <a:cs typeface="Courier New" panose="02070309020205020404" pitchFamily="49" charset="0"/>
+                  </a:rPr>
+                  <a:t>(), </a:t>
+                </a:r>
+                <a:r>
+                  <a:rPr lang="en-GB" sz="1200" dirty="0" err="1">
+                    <a:latin typeface="Courier New" panose="02070309020205020404" pitchFamily="49" charset="0"/>
+                    <a:ea typeface="Cambria Math" panose="02040503050406030204" pitchFamily="18" charset="0"/>
+                    <a:cs typeface="Courier New" panose="02070309020205020404" pitchFamily="49" charset="0"/>
+                  </a:rPr>
+                  <a:t>fisher.test</a:t>
+                </a:r>
+                <a:r>
+                  <a:rPr lang="en-GB" sz="1200" dirty="0">
+                    <a:latin typeface="Courier New" panose="02070309020205020404" pitchFamily="49" charset="0"/>
+                    <a:ea typeface="Cambria Math" panose="02040503050406030204" pitchFamily="18" charset="0"/>
+                    <a:cs typeface="Courier New" panose="02070309020205020404" pitchFamily="49" charset="0"/>
+                  </a:rPr>
+                  <a:t>() </a:t>
+                </a:r>
+              </a:p>
+            </p:txBody>
+          </p:sp>
+          <mc:AlternateContent xmlns:mc="http://schemas.openxmlformats.org/markup-compatibility/2006">
+            <mc:Choice xmlns:a14="http://schemas.microsoft.com/office/drawing/2010/main" Requires="a14">
+              <p:sp>
+                <p:nvSpPr>
+                  <p:cNvPr id="5" name="Textfeld 4">
+                    <a:extLst>
+                      <a:ext uri="{FF2B5EF4-FFF2-40B4-BE49-F238E27FC236}">
+                        <a16:creationId xmlns:a16="http://schemas.microsoft.com/office/drawing/2014/main" id="{D88560B6-0A0F-0760-6149-6FF3B7B24210}"/>
+                      </a:ext>
+                    </a:extLst>
+                  </p:cNvPr>
+                  <p:cNvSpPr txBox="1"/>
+                  <p:nvPr/>
+                </p:nvSpPr>
+                <p:spPr>
+                  <a:xfrm>
+                    <a:off x="749760" y="1913458"/>
+                    <a:ext cx="4329205" cy="646331"/>
+                  </a:xfrm>
+                  <a:prstGeom prst="rect">
+                    <a:avLst/>
+                  </a:prstGeom>
+                  <a:noFill/>
+                  <a:ln w="12700">
+                    <a:solidFill>
+                      <a:schemeClr val="tx1"/>
+                    </a:solidFill>
+                  </a:ln>
+                </p:spPr>
+                <p:txBody>
+                  <a:bodyPr wrap="square">
+                    <a:spAutoFit/>
+                  </a:bodyPr>
+                  <a:lstStyle/>
+                  <a:p>
+                    <a:r>
+                      <a:rPr lang="en-GB" sz="1200" dirty="0">
+                        <a:latin typeface="Calibri" panose="020F0502020204030204" pitchFamily="34" charset="0"/>
+                        <a:ea typeface="Cambria Math" panose="02040503050406030204" pitchFamily="18" charset="0"/>
+                        <a:cs typeface="Calibri" panose="020F0502020204030204" pitchFamily="34" charset="0"/>
+                      </a:rPr>
+                      <a:t>Categorical predictor of </a:t>
+                    </a:r>
+                    <a:r>
+                      <a:rPr lang="en-GB" sz="1200" dirty="0">
+                        <a:latin typeface="Courier New" panose="02070309020205020404" pitchFamily="49" charset="0"/>
+                        <a:ea typeface="Cambria Math" panose="02040503050406030204" pitchFamily="18" charset="0"/>
+                        <a:cs typeface="Courier New" panose="02070309020205020404" pitchFamily="49" charset="0"/>
+                      </a:rPr>
+                      <a:t>class </a:t>
+                    </a:r>
+                    <a:r>
+                      <a:rPr lang="en-GB" sz="1200" dirty="0">
+                        <a:latin typeface="Calibri" panose="020F0502020204030204" pitchFamily="34" charset="0"/>
+                        <a:ea typeface="Cambria Math" panose="02040503050406030204" pitchFamily="18" charset="0"/>
+                        <a:cs typeface="Calibri" panose="020F0502020204030204" pitchFamily="34" charset="0"/>
+                      </a:rPr>
+                      <a:t>“</a:t>
+                    </a:r>
+                    <a:r>
+                      <a:rPr lang="en-GB" sz="1200" dirty="0">
+                        <a:latin typeface="Courier New" panose="02070309020205020404" pitchFamily="49" charset="0"/>
+                        <a:ea typeface="Cambria Math" panose="02040503050406030204" pitchFamily="18" charset="0"/>
+                        <a:cs typeface="Courier New" panose="02070309020205020404" pitchFamily="49" charset="0"/>
+                      </a:rPr>
+                      <a:t>factor</a:t>
+                    </a:r>
+                    <a:r>
+                      <a:rPr lang="en-GB" sz="1200" dirty="0">
+                        <a:latin typeface="Calibri" panose="020F0502020204030204" pitchFamily="34" charset="0"/>
+                        <a:ea typeface="Cambria Math" panose="02040503050406030204" pitchFamily="18" charset="0"/>
+                        <a:cs typeface="Calibri" panose="020F0502020204030204" pitchFamily="34" charset="0"/>
+                      </a:rPr>
+                      <a:t>“  with </a:t>
+                    </a:r>
+                    <a14:m>
+                      <m:oMath xmlns:m="http://schemas.openxmlformats.org/officeDocument/2006/math">
+                        <m:r>
+                          <a:rPr lang="en-US" sz="1200" b="0" i="1" smtClean="0">
+                            <a:latin typeface="Cambria Math" panose="02040503050406030204" pitchFamily="18" charset="0"/>
+                            <a:ea typeface="Cambria Math" panose="02040503050406030204" pitchFamily="18" charset="0"/>
+                            <a:cs typeface="Calibri" panose="020F0502020204030204" pitchFamily="34" charset="0"/>
+                          </a:rPr>
+                          <m:t>𝑘</m:t>
+                        </m:r>
+                      </m:oMath>
+                    </a14:m>
+                    <a:r>
+                      <a:rPr lang="en-GB" sz="1200" dirty="0">
+                        <a:latin typeface="Calibri" panose="020F0502020204030204" pitchFamily="34" charset="0"/>
+                        <a:ea typeface="Cambria Math" panose="02040503050406030204" pitchFamily="18" charset="0"/>
+                        <a:cs typeface="Calibri" panose="020F0502020204030204" pitchFamily="34" charset="0"/>
+                      </a:rPr>
+                      <a:t> levels</a:t>
+                    </a:r>
+                  </a:p>
+                  <a:p>
+                    <a:r>
+                      <a:rPr lang="en-GB" sz="1200" dirty="0">
+                        <a:latin typeface="Calibri" panose="020F0502020204030204" pitchFamily="34" charset="0"/>
+                        <a:ea typeface="Cambria Math" panose="02040503050406030204" pitchFamily="18" charset="0"/>
+                        <a:cs typeface="Calibri" panose="020F0502020204030204" pitchFamily="34" charset="0"/>
+                      </a:rPr>
+                      <a:t>Categorical response of </a:t>
+                    </a:r>
+                    <a:r>
+                      <a:rPr lang="en-GB" sz="1200" dirty="0">
+                        <a:latin typeface="Courier New" panose="02070309020205020404" pitchFamily="49" charset="0"/>
+                        <a:ea typeface="Cambria Math" panose="02040503050406030204" pitchFamily="18" charset="0"/>
+                        <a:cs typeface="Courier New" panose="02070309020205020404" pitchFamily="49" charset="0"/>
+                      </a:rPr>
+                      <a:t>class </a:t>
+                    </a:r>
+                    <a:r>
+                      <a:rPr lang="en-GB" sz="1200" dirty="0">
+                        <a:latin typeface="Calibri" panose="020F0502020204030204" pitchFamily="34" charset="0"/>
+                        <a:ea typeface="Cambria Math" panose="02040503050406030204" pitchFamily="18" charset="0"/>
+                        <a:cs typeface="Calibri" panose="020F0502020204030204" pitchFamily="34" charset="0"/>
+                      </a:rPr>
+                      <a:t>“</a:t>
+                    </a:r>
+                    <a:r>
+                      <a:rPr lang="en-GB" sz="1200" dirty="0">
+                        <a:latin typeface="Courier New" panose="02070309020205020404" pitchFamily="49" charset="0"/>
+                        <a:ea typeface="Cambria Math" panose="02040503050406030204" pitchFamily="18" charset="0"/>
+                        <a:cs typeface="Courier New" panose="02070309020205020404" pitchFamily="49" charset="0"/>
+                      </a:rPr>
+                      <a:t>factor</a:t>
+                    </a:r>
+                    <a:r>
+                      <a:rPr lang="en-GB" sz="1200" dirty="0">
+                        <a:latin typeface="Calibri" panose="020F0502020204030204" pitchFamily="34" charset="0"/>
+                        <a:ea typeface="Cambria Math" panose="02040503050406030204" pitchFamily="18" charset="0"/>
+                        <a:cs typeface="Calibri" panose="020F0502020204030204" pitchFamily="34" charset="0"/>
+                      </a:rPr>
+                      <a:t>“   and</a:t>
+                    </a:r>
+                    <a:br>
+                      <a:rPr lang="en-GB" sz="1200" dirty="0">
+                        <a:latin typeface="Calibri" panose="020F0502020204030204" pitchFamily="34" charset="0"/>
+                        <a:ea typeface="Cambria Math" panose="02040503050406030204" pitchFamily="18" charset="0"/>
+                        <a:cs typeface="Calibri" panose="020F0502020204030204" pitchFamily="34" charset="0"/>
+                      </a:rPr>
+                    </a:br>
+                    <a:r>
+                      <a:rPr lang="en-GB" sz="1200" dirty="0">
+                        <a:latin typeface="Calibri" panose="020F0502020204030204" pitchFamily="34" charset="0"/>
+                        <a:ea typeface="Cambria Math" panose="02040503050406030204" pitchFamily="18" charset="0"/>
+                        <a:cs typeface="Calibri" panose="020F0502020204030204" pitchFamily="34" charset="0"/>
+                      </a:rPr>
+                      <a:t>                                                         “</a:t>
+                    </a:r>
+                    <a:r>
+                      <a:rPr lang="en-GB" sz="1200" dirty="0">
+                        <a:latin typeface="Courier New" panose="02070309020205020404" pitchFamily="49" charset="0"/>
+                        <a:ea typeface="Cambria Math" panose="02040503050406030204" pitchFamily="18" charset="0"/>
+                        <a:cs typeface="Courier New" panose="02070309020205020404" pitchFamily="49" charset="0"/>
+                      </a:rPr>
+                      <a:t>ordered</a:t>
+                    </a:r>
+                    <a:r>
+                      <a:rPr lang="en-GB" sz="1200" dirty="0">
+                        <a:latin typeface="Calibri" panose="020F0502020204030204" pitchFamily="34" charset="0"/>
+                        <a:ea typeface="Cambria Math" panose="02040503050406030204" pitchFamily="18" charset="0"/>
+                        <a:cs typeface="Calibri" panose="020F0502020204030204" pitchFamily="34" charset="0"/>
+                      </a:rPr>
+                      <a:t>“ with </a:t>
+                    </a:r>
+                    <a14:m>
+                      <m:oMath xmlns:m="http://schemas.openxmlformats.org/officeDocument/2006/math">
+                        <m:r>
+                          <a:rPr lang="en-US" sz="1200" b="0" i="1" smtClean="0">
+                            <a:latin typeface="Cambria Math" panose="02040503050406030204" pitchFamily="18" charset="0"/>
+                            <a:ea typeface="Cambria Math" panose="02040503050406030204" pitchFamily="18" charset="0"/>
+                            <a:cs typeface="Calibri" panose="020F0502020204030204" pitchFamily="34" charset="0"/>
+                          </a:rPr>
+                          <m:t>𝑗</m:t>
+                        </m:r>
+                      </m:oMath>
+                    </a14:m>
+                    <a:r>
+                      <a:rPr lang="en-GB" sz="1200" dirty="0">
+                        <a:latin typeface="Calibri" panose="020F0502020204030204" pitchFamily="34" charset="0"/>
+                        <a:ea typeface="Cambria Math" panose="02040503050406030204" pitchFamily="18" charset="0"/>
+                        <a:cs typeface="Calibri" panose="020F0502020204030204" pitchFamily="34" charset="0"/>
+                      </a:rPr>
+                      <a:t> levels</a:t>
+                    </a:r>
+                  </a:p>
+                </p:txBody>
+              </p:sp>
+            </mc:Choice>
+            <mc:Fallback>
+              <p:sp>
+                <p:nvSpPr>
+                  <p:cNvPr id="5" name="Textfeld 4">
+                    <a:extLst>
+                      <a:ext uri="{FF2B5EF4-FFF2-40B4-BE49-F238E27FC236}">
+                        <a16:creationId xmlns:a16="http://schemas.microsoft.com/office/drawing/2014/main" id="{D88560B6-0A0F-0760-6149-6FF3B7B24210}"/>
+                      </a:ext>
+                    </a:extLst>
+                  </p:cNvPr>
+                  <p:cNvSpPr txBox="1">
+                    <a:spLocks noRot="1" noChangeAspect="1" noMove="1" noResize="1" noEditPoints="1" noAdjustHandles="1" noChangeArrowheads="1" noChangeShapeType="1" noTextEdit="1"/>
+                  </p:cNvSpPr>
+                  <p:nvPr/>
+                </p:nvSpPr>
+                <p:spPr>
+                  <a:xfrm>
+                    <a:off x="749760" y="1913458"/>
+                    <a:ext cx="4329205" cy="646331"/>
+                  </a:xfrm>
+                  <a:prstGeom prst="rect">
+                    <a:avLst/>
+                  </a:prstGeom>
+                  <a:blipFill>
+                    <a:blip r:embed="rId6"/>
+                    <a:stretch>
+                      <a:fillRect b="-7547"/>
+                    </a:stretch>
+                  </a:blipFill>
+                  <a:ln w="12700">
+                    <a:solidFill>
+                      <a:schemeClr val="tx1"/>
+                    </a:solidFill>
+                  </a:ln>
+                </p:spPr>
+                <p:txBody>
+                  <a:bodyPr/>
+                  <a:lstStyle/>
+                  <a:p>
+                    <a:r>
+                      <a:rPr lang="de-DE">
+                        <a:noFill/>
+                      </a:rPr>
+                      <a:t> </a:t>
+                    </a:r>
+                  </a:p>
+                </p:txBody>
+              </p:sp>
+            </mc:Fallback>
+          </mc:AlternateContent>
+          <p:cxnSp>
+            <p:nvCxnSpPr>
+              <p:cNvPr id="10" name="Gerade Verbindung mit Pfeil 9">
+                <a:extLst>
+                  <a:ext uri="{FF2B5EF4-FFF2-40B4-BE49-F238E27FC236}">
+                    <a16:creationId xmlns:a16="http://schemas.microsoft.com/office/drawing/2014/main" id="{7FFB23BA-1A56-EA09-897C-EAA0A7C46798}"/>
+                  </a:ext>
+                </a:extLst>
+              </p:cNvPr>
+              <p:cNvCxnSpPr>
+                <a:cxnSpLocks/>
+                <a:stCxn id="7" idx="3"/>
+              </p:cNvCxnSpPr>
+              <p:nvPr/>
+            </p:nvCxnSpPr>
+            <p:spPr>
+              <a:xfrm>
+                <a:off x="5092625" y="1140739"/>
+                <a:ext cx="477082" cy="1077246"/>
+              </a:xfrm>
+              <a:prstGeom prst="straightConnector1">
+                <a:avLst/>
+              </a:prstGeom>
+              <a:ln w="12700">
+                <a:solidFill>
+                  <a:schemeClr val="tx1"/>
+                </a:solidFill>
+                <a:tailEnd type="triangle"/>
+              </a:ln>
+            </p:spPr>
+            <p:style>
+              <a:lnRef idx="1">
+                <a:schemeClr val="accent1"/>
+              </a:lnRef>
+              <a:fillRef idx="0">
+                <a:schemeClr val="accent1"/>
+              </a:fillRef>
+              <a:effectRef idx="0">
+                <a:schemeClr val="accent1"/>
+              </a:effectRef>
+              <a:fontRef idx="minor">
+                <a:schemeClr val="tx1"/>
+              </a:fontRef>
+            </p:style>
+          </p:cxnSp>
+          <p:cxnSp>
+            <p:nvCxnSpPr>
+              <p:cNvPr id="16" name="Gerade Verbindung mit Pfeil 15">
+                <a:extLst>
+                  <a:ext uri="{FF2B5EF4-FFF2-40B4-BE49-F238E27FC236}">
+                    <a16:creationId xmlns:a16="http://schemas.microsoft.com/office/drawing/2014/main" id="{95EE3751-2F94-DC07-D76A-B01575DBC8AF}"/>
+                  </a:ext>
+                </a:extLst>
+              </p:cNvPr>
+              <p:cNvCxnSpPr>
+                <a:cxnSpLocks/>
+              </p:cNvCxnSpPr>
+              <p:nvPr/>
+            </p:nvCxnSpPr>
+            <p:spPr>
+              <a:xfrm>
+                <a:off x="5101829" y="2286234"/>
+                <a:ext cx="512499" cy="5057"/>
+              </a:xfrm>
+              <a:prstGeom prst="straightConnector1">
+                <a:avLst/>
+              </a:prstGeom>
+              <a:ln w="12700">
+                <a:solidFill>
+                  <a:schemeClr val="tx1"/>
+                </a:solidFill>
+                <a:tailEnd type="triangle"/>
+              </a:ln>
+            </p:spPr>
+            <p:style>
+              <a:lnRef idx="1">
+                <a:schemeClr val="accent1"/>
+              </a:lnRef>
+              <a:fillRef idx="0">
+                <a:schemeClr val="accent1"/>
+              </a:fillRef>
+              <a:effectRef idx="0">
+                <a:schemeClr val="accent1"/>
+              </a:effectRef>
+              <a:fontRef idx="minor">
+                <a:schemeClr val="tx1"/>
+              </a:fontRef>
+            </p:style>
+          </p:cxnSp>
+          <p:cxnSp>
+            <p:nvCxnSpPr>
+              <p:cNvPr id="49" name="Gerade Verbindung mit Pfeil 48">
+                <a:extLst>
+                  <a:ext uri="{FF2B5EF4-FFF2-40B4-BE49-F238E27FC236}">
+                    <a16:creationId xmlns:a16="http://schemas.microsoft.com/office/drawing/2014/main" id="{C057720C-4C0C-4DDC-5805-67C405AC5729}"/>
+                  </a:ext>
+                </a:extLst>
+              </p:cNvPr>
+              <p:cNvCxnSpPr>
+                <a:cxnSpLocks/>
+              </p:cNvCxnSpPr>
+              <p:nvPr/>
+            </p:nvCxnSpPr>
+            <p:spPr>
+              <a:xfrm>
+                <a:off x="5073167" y="3198964"/>
+                <a:ext cx="512499" cy="5057"/>
+              </a:xfrm>
+              <a:prstGeom prst="straightConnector1">
+                <a:avLst/>
+              </a:prstGeom>
+              <a:ln w="12700">
+                <a:solidFill>
+                  <a:schemeClr val="tx1"/>
+                </a:solidFill>
+                <a:tailEnd type="triangle"/>
+              </a:ln>
+            </p:spPr>
+            <p:style>
+              <a:lnRef idx="1">
+                <a:schemeClr val="accent1"/>
+              </a:lnRef>
+              <a:fillRef idx="0">
+                <a:schemeClr val="accent1"/>
+              </a:fillRef>
+              <a:effectRef idx="0">
+                <a:schemeClr val="accent1"/>
+              </a:effectRef>
+              <a:fontRef idx="minor">
+                <a:schemeClr val="tx1"/>
+              </a:fontRef>
+            </p:style>
+          </p:cxnSp>
+          <mc:AlternateContent xmlns:mc="http://schemas.openxmlformats.org/markup-compatibility/2006">
+            <mc:Choice xmlns:a14="http://schemas.microsoft.com/office/drawing/2010/main" Requires="a14">
+              <p:sp>
+                <p:nvSpPr>
+                  <p:cNvPr id="11" name="Textfeld 10">
+                    <a:extLst>
+                      <a:ext uri="{FF2B5EF4-FFF2-40B4-BE49-F238E27FC236}">
+                        <a16:creationId xmlns:a16="http://schemas.microsoft.com/office/drawing/2014/main" id="{FB9B848B-7023-14FC-D384-3530FD90ECCA}"/>
+                      </a:ext>
+                    </a:extLst>
+                  </p:cNvPr>
+                  <p:cNvSpPr txBox="1">
+                    <a:spLocks noChangeAspect="1"/>
+                  </p:cNvSpPr>
+                  <p:nvPr/>
+                </p:nvSpPr>
+                <p:spPr>
+                  <a:xfrm>
+                    <a:off x="749761" y="4157944"/>
+                    <a:ext cx="4329205" cy="830997"/>
+                  </a:xfrm>
+                  <a:prstGeom prst="rect">
+                    <a:avLst/>
+                  </a:prstGeom>
+                  <a:solidFill>
+                    <a:schemeClr val="accent6">
+                      <a:lumMod val="20000"/>
+                      <a:lumOff val="80000"/>
+                    </a:schemeClr>
+                  </a:solidFill>
+                  <a:ln w="12700">
+                    <a:solidFill>
+                      <a:schemeClr val="tx1"/>
+                    </a:solidFill>
+                  </a:ln>
+                </p:spPr>
+                <p:txBody>
+                  <a:bodyPr wrap="square">
+                    <a:spAutoFit/>
+                  </a:bodyPr>
+                  <a:lstStyle/>
+                  <a:p>
+                    <a:pPr marL="171450" indent="-171450">
+                      <a:buFont typeface="Arial" panose="020B0604020202020204" pitchFamily="34" charset="0"/>
+                      <a:buChar char="•"/>
+                    </a:pPr>
+                    <a:r>
+                      <a:rPr lang="en-GB" sz="1200" dirty="0">
+                        <a:latin typeface="Calibri" panose="020F0502020204030204" pitchFamily="34" charset="0"/>
+                        <a:ea typeface="Cambria Math" panose="02040503050406030204" pitchFamily="18" charset="0"/>
+                        <a:cs typeface="Calibri" panose="020F0502020204030204" pitchFamily="34" charset="0"/>
+                      </a:rPr>
+                      <a:t>Categorical predictor  of </a:t>
+                    </a:r>
+                    <a:r>
+                      <a:rPr lang="en-GB" sz="1200" dirty="0">
+                        <a:latin typeface="Courier New" panose="02070309020205020404" pitchFamily="49" charset="0"/>
+                        <a:ea typeface="Cambria Math" panose="02040503050406030204" pitchFamily="18" charset="0"/>
+                        <a:cs typeface="Courier New" panose="02070309020205020404" pitchFamily="49" charset="0"/>
+                      </a:rPr>
+                      <a:t>class </a:t>
+                    </a:r>
+                    <a:r>
+                      <a:rPr lang="en-GB" sz="1200" dirty="0">
+                        <a:latin typeface="Calibri" panose="020F0502020204030204" pitchFamily="34" charset="0"/>
+                        <a:ea typeface="Cambria Math" panose="02040503050406030204" pitchFamily="18" charset="0"/>
+                        <a:cs typeface="Calibri" panose="020F0502020204030204" pitchFamily="34" charset="0"/>
+                      </a:rPr>
+                      <a:t>“</a:t>
+                    </a:r>
+                    <a:r>
+                      <a:rPr lang="en-GB" sz="1200" dirty="0">
+                        <a:latin typeface="Courier New" panose="02070309020205020404" pitchFamily="49" charset="0"/>
+                        <a:ea typeface="Cambria Math" panose="02040503050406030204" pitchFamily="18" charset="0"/>
+                        <a:cs typeface="Courier New" panose="02070309020205020404" pitchFamily="49" charset="0"/>
+                      </a:rPr>
+                      <a:t>factor</a:t>
+                    </a:r>
+                    <a:r>
+                      <a:rPr lang="en-GB" sz="1200" dirty="0">
+                        <a:latin typeface="Calibri" panose="020F0502020204030204" pitchFamily="34" charset="0"/>
+                        <a:ea typeface="Cambria Math" panose="02040503050406030204" pitchFamily="18" charset="0"/>
+                        <a:cs typeface="Calibri" panose="020F0502020204030204" pitchFamily="34" charset="0"/>
+                      </a:rPr>
+                      <a:t>“  </a:t>
+                    </a:r>
+                    <a:r>
+                      <a:rPr lang="en-GB" sz="1200" b="1" dirty="0">
+                        <a:latin typeface="Calibri" panose="020F0502020204030204" pitchFamily="34" charset="0"/>
+                        <a:ea typeface="Cambria Math" panose="02040503050406030204" pitchFamily="18" charset="0"/>
+                        <a:cs typeface="Calibri" panose="020F0502020204030204" pitchFamily="34" charset="0"/>
+                      </a:rPr>
+                      <a:t>and</a:t>
+                    </a:r>
+                    <a:br>
+                      <a:rPr lang="en-GB" sz="1200" dirty="0">
+                        <a:latin typeface="Calibri" panose="020F0502020204030204" pitchFamily="34" charset="0"/>
+                        <a:ea typeface="Cambria Math" panose="02040503050406030204" pitchFamily="18" charset="0"/>
+                        <a:cs typeface="Calibri" panose="020F0502020204030204" pitchFamily="34" charset="0"/>
+                      </a:rPr>
+                    </a:br>
+                    <a:r>
+                      <a:rPr lang="en-GB" sz="1200" dirty="0">
+                        <a:latin typeface="Calibri" panose="020F0502020204030204" pitchFamily="34" charset="0"/>
+                        <a:ea typeface="Cambria Math" panose="02040503050406030204" pitchFamily="18" charset="0"/>
+                        <a:cs typeface="Calibri" panose="020F0502020204030204" pitchFamily="34" charset="0"/>
+                      </a:rPr>
+                      <a:t>                                                         “</a:t>
+                    </a:r>
+                    <a:r>
+                      <a:rPr lang="en-GB" sz="1200" dirty="0">
+                        <a:latin typeface="Courier New" panose="02070309020205020404" pitchFamily="49" charset="0"/>
+                        <a:ea typeface="Cambria Math" panose="02040503050406030204" pitchFamily="18" charset="0"/>
+                        <a:cs typeface="Courier New" panose="02070309020205020404" pitchFamily="49" charset="0"/>
+                      </a:rPr>
+                      <a:t>ordered</a:t>
+                    </a:r>
+                    <a:r>
+                      <a:rPr lang="en-GB" sz="1200" dirty="0">
+                        <a:latin typeface="Calibri" panose="020F0502020204030204" pitchFamily="34" charset="0"/>
+                        <a:ea typeface="Cambria Math" panose="02040503050406030204" pitchFamily="18" charset="0"/>
+                        <a:cs typeface="Calibri" panose="020F0502020204030204" pitchFamily="34" charset="0"/>
+                      </a:rPr>
+                      <a:t>“ with </a:t>
+                    </a:r>
+                    <a14:m>
+                      <m:oMath xmlns:m="http://schemas.openxmlformats.org/officeDocument/2006/math">
+                        <m:r>
+                          <a:rPr lang="en-US" sz="1200" b="0" i="1" smtClean="0">
+                            <a:latin typeface="Cambria Math" panose="02040503050406030204" pitchFamily="18" charset="0"/>
+                            <a:ea typeface="Cambria Math" panose="02040503050406030204" pitchFamily="18" charset="0"/>
+                            <a:cs typeface="Calibri" panose="020F0502020204030204" pitchFamily="34" charset="0"/>
+                          </a:rPr>
+                          <m:t>𝑘</m:t>
+                        </m:r>
+                      </m:oMath>
+                    </a14:m>
+                    <a:r>
+                      <a:rPr lang="en-GB" sz="1200" dirty="0">
+                        <a:latin typeface="Calibri" panose="020F0502020204030204" pitchFamily="34" charset="0"/>
+                        <a:ea typeface="Cambria Math" panose="02040503050406030204" pitchFamily="18" charset="0"/>
+                        <a:cs typeface="Calibri" panose="020F0502020204030204" pitchFamily="34" charset="0"/>
+                      </a:rPr>
+                      <a:t> levels</a:t>
+                    </a:r>
+                  </a:p>
+                  <a:p>
+                    <a:pPr marL="171450" indent="-171450">
+                      <a:buFont typeface="Arial" panose="020B0604020202020204" pitchFamily="34" charset="0"/>
+                      <a:buChar char="•"/>
+                    </a:pPr>
+                    <a:r>
+                      <a:rPr lang="en-GB" sz="1200" dirty="0">
+                        <a:latin typeface="Calibri" panose="020F0502020204030204" pitchFamily="34" charset="0"/>
+                        <a:ea typeface="Cambria Math" panose="02040503050406030204" pitchFamily="18" charset="0"/>
+                        <a:cs typeface="Calibri" panose="020F0502020204030204" pitchFamily="34" charset="0"/>
+                      </a:rPr>
+                      <a:t>Categorical response of </a:t>
+                    </a:r>
+                    <a:r>
+                      <a:rPr lang="en-GB" sz="1200" dirty="0">
+                        <a:latin typeface="Courier New" panose="02070309020205020404" pitchFamily="49" charset="0"/>
+                        <a:ea typeface="Cambria Math" panose="02040503050406030204" pitchFamily="18" charset="0"/>
+                        <a:cs typeface="Courier New" panose="02070309020205020404" pitchFamily="49" charset="0"/>
+                      </a:rPr>
+                      <a:t>class </a:t>
+                    </a:r>
+                    <a:r>
+                      <a:rPr lang="en-GB" sz="1200" dirty="0">
+                        <a:latin typeface="Calibri" panose="020F0502020204030204" pitchFamily="34" charset="0"/>
+                        <a:ea typeface="Cambria Math" panose="02040503050406030204" pitchFamily="18" charset="0"/>
+                        <a:cs typeface="Calibri" panose="020F0502020204030204" pitchFamily="34" charset="0"/>
+                      </a:rPr>
+                      <a:t>“</a:t>
+                    </a:r>
+                    <a:r>
+                      <a:rPr lang="en-GB" sz="1200" dirty="0">
+                        <a:latin typeface="Courier New" panose="02070309020205020404" pitchFamily="49" charset="0"/>
+                        <a:ea typeface="Cambria Math" panose="02040503050406030204" pitchFamily="18" charset="0"/>
+                        <a:cs typeface="Courier New" panose="02070309020205020404" pitchFamily="49" charset="0"/>
+                      </a:rPr>
+                      <a:t>factor</a:t>
+                    </a:r>
+                    <a:r>
+                      <a:rPr lang="en-GB" sz="1200" dirty="0">
+                        <a:latin typeface="Calibri" panose="020F0502020204030204" pitchFamily="34" charset="0"/>
+                        <a:ea typeface="Cambria Math" panose="02040503050406030204" pitchFamily="18" charset="0"/>
+                        <a:cs typeface="Calibri" panose="020F0502020204030204" pitchFamily="34" charset="0"/>
+                      </a:rPr>
+                      <a:t>“  </a:t>
+                    </a:r>
+                    <a:r>
+                      <a:rPr lang="en-GB" sz="1200" b="1" dirty="0">
+                        <a:latin typeface="Calibri" panose="020F0502020204030204" pitchFamily="34" charset="0"/>
+                        <a:ea typeface="Cambria Math" panose="02040503050406030204" pitchFamily="18" charset="0"/>
+                        <a:cs typeface="Calibri" panose="020F0502020204030204" pitchFamily="34" charset="0"/>
+                      </a:rPr>
+                      <a:t>and</a:t>
+                    </a:r>
+                    <a:br>
+                      <a:rPr lang="en-GB" sz="1200" dirty="0">
+                        <a:latin typeface="Calibri" panose="020F0502020204030204" pitchFamily="34" charset="0"/>
+                        <a:ea typeface="Cambria Math" panose="02040503050406030204" pitchFamily="18" charset="0"/>
+                        <a:cs typeface="Calibri" panose="020F0502020204030204" pitchFamily="34" charset="0"/>
+                      </a:rPr>
+                    </a:br>
+                    <a:r>
+                      <a:rPr lang="en-GB" sz="1200" dirty="0">
+                        <a:latin typeface="Calibri" panose="020F0502020204030204" pitchFamily="34" charset="0"/>
+                        <a:ea typeface="Cambria Math" panose="02040503050406030204" pitchFamily="18" charset="0"/>
+                        <a:cs typeface="Calibri" panose="020F0502020204030204" pitchFamily="34" charset="0"/>
+                      </a:rPr>
+                      <a:t>                                                         “</a:t>
+                    </a:r>
+                    <a:r>
+                      <a:rPr lang="en-GB" sz="1200" dirty="0">
+                        <a:latin typeface="Courier New" panose="02070309020205020404" pitchFamily="49" charset="0"/>
+                        <a:ea typeface="Cambria Math" panose="02040503050406030204" pitchFamily="18" charset="0"/>
+                        <a:cs typeface="Courier New" panose="02070309020205020404" pitchFamily="49" charset="0"/>
+                      </a:rPr>
+                      <a:t>ordered</a:t>
+                    </a:r>
+                    <a:r>
+                      <a:rPr lang="en-GB" sz="1200" dirty="0">
+                        <a:latin typeface="Calibri" panose="020F0502020204030204" pitchFamily="34" charset="0"/>
+                        <a:ea typeface="Cambria Math" panose="02040503050406030204" pitchFamily="18" charset="0"/>
+                        <a:cs typeface="Calibri" panose="020F0502020204030204" pitchFamily="34" charset="0"/>
+                      </a:rPr>
+                      <a:t>“ with levels</a:t>
+                    </a:r>
+                  </a:p>
+                </p:txBody>
+              </p:sp>
+            </mc:Choice>
+            <mc:Fallback>
+              <p:sp>
+                <p:nvSpPr>
+                  <p:cNvPr id="11" name="Textfeld 10">
+                    <a:extLst>
+                      <a:ext uri="{FF2B5EF4-FFF2-40B4-BE49-F238E27FC236}">
+                        <a16:creationId xmlns:a16="http://schemas.microsoft.com/office/drawing/2014/main" id="{FB9B848B-7023-14FC-D384-3530FD90ECCA}"/>
+                      </a:ext>
+                    </a:extLst>
+                  </p:cNvPr>
+                  <p:cNvSpPr txBox="1">
+                    <a:spLocks noRot="1" noChangeAspect="1" noMove="1" noResize="1" noEditPoints="1" noAdjustHandles="1" noChangeArrowheads="1" noChangeShapeType="1" noTextEdit="1"/>
+                  </p:cNvSpPr>
+                  <p:nvPr/>
+                </p:nvSpPr>
+                <p:spPr>
+                  <a:xfrm>
+                    <a:off x="749761" y="4157944"/>
+                    <a:ext cx="4329205" cy="830997"/>
+                  </a:xfrm>
+                  <a:prstGeom prst="rect">
+                    <a:avLst/>
+                  </a:prstGeom>
+                  <a:blipFill>
+                    <a:blip r:embed="rId7"/>
+                    <a:stretch>
+                      <a:fillRect b="-4478"/>
+                    </a:stretch>
+                  </a:blipFill>
+                  <a:ln w="12700">
+                    <a:solidFill>
+                      <a:schemeClr val="tx1"/>
+                    </a:solidFill>
+                  </a:ln>
+                </p:spPr>
+                <p:txBody>
+                  <a:bodyPr/>
+                  <a:lstStyle/>
+                  <a:p>
+                    <a:r>
+                      <a:rPr lang="de-DE">
+                        <a:noFill/>
+                      </a:rPr>
+                      <a:t> </a:t>
+                    </a:r>
+                  </a:p>
+                </p:txBody>
+              </p:sp>
+            </mc:Fallback>
+          </mc:AlternateContent>
+          <p:sp>
+            <p:nvSpPr>
+              <p:cNvPr id="14" name="Textfeld 13">
+                <a:extLst>
+                  <a:ext uri="{FF2B5EF4-FFF2-40B4-BE49-F238E27FC236}">
+                    <a16:creationId xmlns:a16="http://schemas.microsoft.com/office/drawing/2014/main" id="{C93B1E64-77B3-996B-0C03-74605808B38D}"/>
+                  </a:ext>
+                </a:extLst>
+              </p:cNvPr>
+              <p:cNvSpPr txBox="1"/>
+              <p:nvPr/>
+            </p:nvSpPr>
+            <p:spPr>
+              <a:xfrm>
+                <a:off x="5614328" y="3564125"/>
+                <a:ext cx="5719853" cy="276999"/>
+              </a:xfrm>
+              <a:prstGeom prst="rect">
+                <a:avLst/>
+              </a:prstGeom>
+              <a:solidFill>
+                <a:schemeClr val="accent6">
+                  <a:lumMod val="20000"/>
+                  <a:lumOff val="80000"/>
+                </a:schemeClr>
+              </a:solidFill>
+              <a:ln w="12700">
+                <a:solidFill>
+                  <a:schemeClr val="tx1"/>
+                </a:solidFill>
+              </a:ln>
+            </p:spPr>
+            <p:txBody>
+              <a:bodyPr wrap="square">
+                <a:spAutoFit/>
+              </a:bodyPr>
+              <a:lstStyle>
+                <a:defPPr>
+                  <a:defRPr lang="de-DE"/>
+                </a:defPPr>
+              </a:lstStyle>
+              <a:p>
+                <a:pPr lvl="1"/>
+                <a:r>
+                  <a:rPr lang="en-GB" sz="1200" dirty="0">
+                    <a:latin typeface="Calibri" panose="020F0502020204030204" pitchFamily="34" charset="0"/>
+                    <a:ea typeface="Cambria Math" panose="02040503050406030204" pitchFamily="18" charset="0"/>
+                    <a:cs typeface="Calibri" panose="020F0502020204030204" pitchFamily="34" charset="0"/>
+                  </a:rPr>
+                  <a:t>Spearman rank correlation : </a:t>
+                </a:r>
+                <a:r>
+                  <a:rPr lang="en-GB" sz="1200" dirty="0" err="1">
+                    <a:latin typeface="Courier New" panose="02070309020205020404" pitchFamily="49" charset="0"/>
+                    <a:ea typeface="Cambria Math" panose="02040503050406030204" pitchFamily="18" charset="0"/>
+                    <a:cs typeface="Courier New" panose="02070309020205020404" pitchFamily="49" charset="0"/>
+                  </a:rPr>
+                  <a:t>cor.test</a:t>
+                </a:r>
+                <a:r>
+                  <a:rPr lang="en-GB" sz="1200" dirty="0">
+                    <a:latin typeface="Courier New" panose="02070309020205020404" pitchFamily="49" charset="0"/>
+                    <a:ea typeface="Cambria Math" panose="02040503050406030204" pitchFamily="18" charset="0"/>
+                    <a:cs typeface="Courier New" panose="02070309020205020404" pitchFamily="49" charset="0"/>
+                  </a:rPr>
+                  <a:t>(…,method=“spearman”)</a:t>
+                </a:r>
+              </a:p>
+            </p:txBody>
+          </p:sp>
+          <p:cxnSp>
+            <p:nvCxnSpPr>
+              <p:cNvPr id="15" name="Gerade Verbindung mit Pfeil 14">
+                <a:extLst>
+                  <a:ext uri="{FF2B5EF4-FFF2-40B4-BE49-F238E27FC236}">
+                    <a16:creationId xmlns:a16="http://schemas.microsoft.com/office/drawing/2014/main" id="{A6B56266-E50F-E630-DFBD-3065C4177F4D}"/>
+                  </a:ext>
+                </a:extLst>
+              </p:cNvPr>
+              <p:cNvCxnSpPr>
+                <a:cxnSpLocks/>
+              </p:cNvCxnSpPr>
+              <p:nvPr/>
+            </p:nvCxnSpPr>
+            <p:spPr>
+              <a:xfrm>
+                <a:off x="5078966" y="4627524"/>
+                <a:ext cx="512499" cy="5057"/>
+              </a:xfrm>
+              <a:prstGeom prst="straightConnector1">
+                <a:avLst/>
+              </a:prstGeom>
+              <a:ln w="12700">
+                <a:solidFill>
+                  <a:schemeClr val="tx1"/>
+                </a:solidFill>
+                <a:tailEnd type="triangle"/>
+              </a:ln>
+            </p:spPr>
+            <p:style>
+              <a:lnRef idx="1">
+                <a:schemeClr val="accent1"/>
+              </a:lnRef>
+              <a:fillRef idx="0">
+                <a:schemeClr val="accent1"/>
+              </a:fillRef>
+              <a:effectRef idx="0">
+                <a:schemeClr val="accent1"/>
+              </a:effectRef>
+              <a:fontRef idx="minor">
+                <a:schemeClr val="tx1"/>
+              </a:fontRef>
+            </p:style>
+          </p:cxnSp>
+          <p:cxnSp>
+            <p:nvCxnSpPr>
+              <p:cNvPr id="67" name="Gerade Verbindung mit Pfeil 66">
+                <a:extLst>
+                  <a:ext uri="{FF2B5EF4-FFF2-40B4-BE49-F238E27FC236}">
+                    <a16:creationId xmlns:a16="http://schemas.microsoft.com/office/drawing/2014/main" id="{90D9A013-B638-2CFA-D596-D590570520DD}"/>
+                  </a:ext>
+                </a:extLst>
+              </p:cNvPr>
+              <p:cNvCxnSpPr>
+                <a:cxnSpLocks/>
+              </p:cNvCxnSpPr>
+              <p:nvPr/>
+            </p:nvCxnSpPr>
+            <p:spPr>
+              <a:xfrm>
+                <a:off x="5076449" y="3688678"/>
+                <a:ext cx="512499" cy="5057"/>
+              </a:xfrm>
+              <a:prstGeom prst="straightConnector1">
+                <a:avLst/>
+              </a:prstGeom>
+              <a:ln w="12700">
+                <a:solidFill>
+                  <a:schemeClr val="tx1"/>
+                </a:solidFill>
+                <a:tailEnd type="triangle"/>
+              </a:ln>
+            </p:spPr>
+            <p:style>
+              <a:lnRef idx="1">
+                <a:schemeClr val="accent1"/>
+              </a:lnRef>
+              <a:fillRef idx="0">
+                <a:schemeClr val="accent1"/>
+              </a:fillRef>
+              <a:effectRef idx="0">
+                <a:schemeClr val="accent1"/>
+              </a:effectRef>
+              <a:fontRef idx="minor">
+                <a:schemeClr val="tx1"/>
+              </a:fontRef>
+            </p:style>
+          </p:cxnSp>
+          <p:sp>
+            <p:nvSpPr>
+              <p:cNvPr id="68" name="Textfeld 67">
+                <a:extLst>
+                  <a:ext uri="{FF2B5EF4-FFF2-40B4-BE49-F238E27FC236}">
+                    <a16:creationId xmlns:a16="http://schemas.microsoft.com/office/drawing/2014/main" id="{E005EFC1-18B1-0452-D704-9026052FF006}"/>
+                  </a:ext>
+                </a:extLst>
+              </p:cNvPr>
+              <p:cNvSpPr txBox="1"/>
+              <p:nvPr/>
+            </p:nvSpPr>
+            <p:spPr>
+              <a:xfrm>
+                <a:off x="5637195" y="4504894"/>
+                <a:ext cx="5719853" cy="276999"/>
+              </a:xfrm>
+              <a:prstGeom prst="rect">
+                <a:avLst/>
+              </a:prstGeom>
+              <a:solidFill>
+                <a:schemeClr val="accent6">
+                  <a:lumMod val="20000"/>
+                  <a:lumOff val="80000"/>
+                </a:schemeClr>
+              </a:solidFill>
+              <a:ln w="12700">
+                <a:solidFill>
+                  <a:schemeClr val="tx1"/>
+                </a:solidFill>
+              </a:ln>
+            </p:spPr>
+            <p:txBody>
+              <a:bodyPr wrap="square">
+                <a:spAutoFit/>
+              </a:bodyPr>
+              <a:lstStyle>
+                <a:defPPr>
+                  <a:defRPr lang="de-DE"/>
+                </a:defPPr>
+              </a:lstStyle>
+              <a:p>
+                <a:pPr lvl="1"/>
+                <a:r>
+                  <a:rPr lang="en-GB" sz="1200" dirty="0">
+                    <a:latin typeface="Calibri" panose="020F0502020204030204" pitchFamily="34" charset="0"/>
+                    <a:ea typeface="Cambria Math" panose="02040503050406030204" pitchFamily="18" charset="0"/>
+                    <a:cs typeface="Calibri" panose="020F0502020204030204" pitchFamily="34" charset="0"/>
+                  </a:rPr>
+                  <a:t>Kendall rank correlation : </a:t>
+                </a:r>
+                <a:r>
+                  <a:rPr lang="en-GB" sz="1200" dirty="0" err="1">
+                    <a:latin typeface="Courier New" panose="02070309020205020404" pitchFamily="49" charset="0"/>
+                    <a:ea typeface="Cambria Math" panose="02040503050406030204" pitchFamily="18" charset="0"/>
+                    <a:cs typeface="Courier New" panose="02070309020205020404" pitchFamily="49" charset="0"/>
+                  </a:rPr>
+                  <a:t>cor.test</a:t>
+                </a:r>
+                <a:r>
+                  <a:rPr lang="en-GB" sz="1200" dirty="0">
+                    <a:latin typeface="Courier New" panose="02070309020205020404" pitchFamily="49" charset="0"/>
+                    <a:ea typeface="Cambria Math" panose="02040503050406030204" pitchFamily="18" charset="0"/>
+                    <a:cs typeface="Courier New" panose="02070309020205020404" pitchFamily="49" charset="0"/>
+                  </a:rPr>
+                  <a:t>(…,method=“</a:t>
+                </a:r>
+                <a:r>
+                  <a:rPr lang="en-GB" sz="1200" dirty="0" err="1">
+                    <a:latin typeface="Courier New" panose="02070309020205020404" pitchFamily="49" charset="0"/>
+                    <a:ea typeface="Cambria Math" panose="02040503050406030204" pitchFamily="18" charset="0"/>
+                    <a:cs typeface="Courier New" panose="02070309020205020404" pitchFamily="49" charset="0"/>
+                  </a:rPr>
+                  <a:t>kendall</a:t>
+                </a:r>
+                <a:r>
+                  <a:rPr lang="en-GB" sz="1200" dirty="0">
+                    <a:latin typeface="Courier New" panose="02070309020205020404" pitchFamily="49" charset="0"/>
+                    <a:ea typeface="Cambria Math" panose="02040503050406030204" pitchFamily="18" charset="0"/>
+                    <a:cs typeface="Courier New" panose="02070309020205020404" pitchFamily="49" charset="0"/>
+                  </a:rPr>
+                  <a:t>”)</a:t>
+                </a:r>
+              </a:p>
+            </p:txBody>
+          </p:sp>
+        </p:grpSp>
+        <p:cxnSp>
+          <p:nvCxnSpPr>
+            <p:cNvPr id="83" name="Gerade Verbindung mit Pfeil 82">
+              <a:extLst>
+                <a:ext uri="{FF2B5EF4-FFF2-40B4-BE49-F238E27FC236}">
+                  <a16:creationId xmlns:a16="http://schemas.microsoft.com/office/drawing/2014/main" id="{277F9311-EB83-9B97-DA2A-A783B756E3C6}"/>
+                </a:ext>
+              </a:extLst>
+            </p:cNvPr>
+            <p:cNvCxnSpPr>
+              <a:cxnSpLocks/>
+            </p:cNvCxnSpPr>
+            <p:nvPr/>
+          </p:nvCxnSpPr>
+          <p:spPr>
+            <a:xfrm>
+              <a:off x="5084085" y="1240615"/>
+              <a:ext cx="512499" cy="5057"/>
+            </a:xfrm>
+            <a:prstGeom prst="straightConnector1">
+              <a:avLst/>
+            </a:prstGeom>
+            <a:ln w="12700">
+              <a:solidFill>
+                <a:schemeClr val="tx1"/>
+              </a:solidFill>
+              <a:tailEnd type="triangle"/>
+            </a:ln>
+          </p:spPr>
+          <p:style>
+            <a:lnRef idx="1">
+              <a:schemeClr val="accent1"/>
+            </a:lnRef>
+            <a:fillRef idx="0">
+              <a:schemeClr val="accent1"/>
+            </a:fillRef>
+            <a:effectRef idx="0">
+              <a:schemeClr val="accent1"/>
+            </a:effectRef>
+            <a:fontRef idx="minor">
+              <a:schemeClr val="tx1"/>
+            </a:fontRef>
+          </p:style>
+        </p:cxnSp>
+      </p:grpSp>
+    </p:spTree>
+    <p:extLst>
+      <p:ext uri="{BB962C8B-B14F-4D97-AF65-F5344CB8AC3E}">
+        <p14:creationId xmlns:p14="http://schemas.microsoft.com/office/powerpoint/2010/main" val="3987773869"/>
+      </p:ext>
+    </p:extLst>
+  </p:cSld>
+  <p:clrMapOvr>
+    <a:masterClrMapping/>
+  </p:clrMapOvr>
+</p:sld>
+</file>
+
 <file path=ppt/theme/theme1.xml><?xml version="1.0" encoding="utf-8"?>
 <a:theme xmlns:a="http://schemas.openxmlformats.org/drawingml/2006/main" name="Office">
   <a:themeElements>

--- a/vignettes/figures/overview.pptx
+++ b/vignettes/figures/overview.pptx
@@ -5,11 +5,12 @@
     <p:sldMasterId id="2147483648" r:id="rId1"/>
   </p:sldMasterIdLst>
   <p:notesMasterIdLst>
-    <p:notesMasterId r:id="rId4"/>
+    <p:notesMasterId r:id="rId5"/>
   </p:notesMasterIdLst>
   <p:sldIdLst>
     <p:sldId id="273" r:id="rId2"/>
     <p:sldId id="274" r:id="rId3"/>
+    <p:sldId id="275" r:id="rId4"/>
   </p:sldIdLst>
   <p:sldSz cx="12192000" cy="6858000"/>
   <p:notesSz cx="6858000" cy="9144000"/>
@@ -130,500 +131,9 @@
 <file path=ppt/revisionInfo.xml><?xml version="1.0" encoding="utf-8"?>
 <p1510:revInfo xmlns:a="http://schemas.openxmlformats.org/drawingml/2006/main" xmlns:r="http://schemas.openxmlformats.org/officeDocument/2006/relationships" xmlns:p1510="http://schemas.microsoft.com/office/powerpoint/2015/10/main">
   <p1510:revLst>
-    <p1510:client id="{4AA116FE-460E-754C-A3BF-FE57C3E35162}" v="122" dt="2026-05-09T21:38:50.659"/>
+    <p1510:client id="{4AA116FE-460E-754C-A3BF-FE57C3E35162}" v="125" dt="2026-05-18T18:57:55.547"/>
   </p1510:revLst>
 </p1510:revInfo>
-</file>
-
-<file path=ppt/changesInfos/changesInfo1.xml><?xml version="1.0" encoding="utf-8"?>
-<pc:chgInfo xmlns:a="http://schemas.openxmlformats.org/drawingml/2006/main" xmlns:r="http://schemas.openxmlformats.org/officeDocument/2006/relationships" xmlns:ac="http://schemas.microsoft.com/office/drawing/2013/main/command" xmlns:pc="http://schemas.microsoft.com/office/powerpoint/2013/main/command">
-  <pc:docChgLst>
-    <pc:chgData name="Schilling Sabine HSLU W" userId="b0e2af5c-9187-4900-883a-c96514cd8e15" providerId="ADAL" clId="{5E51067F-94D7-505D-9735-0698788361AC}"/>
-    <pc:docChg chg="undo custSel addSld delSld modSld">
-      <pc:chgData name="Schilling Sabine HSLU W" userId="b0e2af5c-9187-4900-883a-c96514cd8e15" providerId="ADAL" clId="{5E51067F-94D7-505D-9735-0698788361AC}" dt="2026-05-09T21:38:50.659" v="2341" actId="164"/>
-      <pc:docMkLst>
-        <pc:docMk/>
-      </pc:docMkLst>
-      <pc:sldChg chg="addSp delSp modSp add mod">
-        <pc:chgData name="Schilling Sabine HSLU W" userId="b0e2af5c-9187-4900-883a-c96514cd8e15" providerId="ADAL" clId="{5E51067F-94D7-505D-9735-0698788361AC}" dt="2026-05-06T19:22:14.838" v="1842" actId="20577"/>
-        <pc:sldMkLst>
-          <pc:docMk/>
-          <pc:sldMk cId="211450528" sldId="273"/>
-        </pc:sldMkLst>
-        <pc:spChg chg="mod">
-          <ac:chgData name="Schilling Sabine HSLU W" userId="b0e2af5c-9187-4900-883a-c96514cd8e15" providerId="ADAL" clId="{5E51067F-94D7-505D-9735-0698788361AC}" dt="2026-05-06T19:18:36.355" v="1782" actId="20577"/>
-          <ac:spMkLst>
-            <pc:docMk/>
-            <pc:sldMk cId="211450528" sldId="273"/>
-            <ac:spMk id="5" creationId="{746F3D3D-30AE-C976-B294-DB7D9B8FB409}"/>
-          </ac:spMkLst>
-        </pc:spChg>
-        <pc:spChg chg="mod topLvl">
-          <ac:chgData name="Schilling Sabine HSLU W" userId="b0e2af5c-9187-4900-883a-c96514cd8e15" providerId="ADAL" clId="{5E51067F-94D7-505D-9735-0698788361AC}" dt="2026-05-06T19:18:36.355" v="1782" actId="20577"/>
-          <ac:spMkLst>
-            <pc:docMk/>
-            <pc:sldMk cId="211450528" sldId="273"/>
-            <ac:spMk id="6" creationId="{C52BE3A2-0408-78DD-3115-287BDBDD4277}"/>
-          </ac:spMkLst>
-        </pc:spChg>
-        <pc:spChg chg="mod">
-          <ac:chgData name="Schilling Sabine HSLU W" userId="b0e2af5c-9187-4900-883a-c96514cd8e15" providerId="ADAL" clId="{5E51067F-94D7-505D-9735-0698788361AC}" dt="2026-05-06T19:18:36.355" v="1782" actId="20577"/>
-          <ac:spMkLst>
-            <pc:docMk/>
-            <pc:sldMk cId="211450528" sldId="273"/>
-            <ac:spMk id="7" creationId="{283DBAF9-59AF-350E-62E3-D9DC7ADACC0D}"/>
-          </ac:spMkLst>
-        </pc:spChg>
-        <pc:spChg chg="mod">
-          <ac:chgData name="Schilling Sabine HSLU W" userId="b0e2af5c-9187-4900-883a-c96514cd8e15" providerId="ADAL" clId="{5E51067F-94D7-505D-9735-0698788361AC}" dt="2026-05-06T19:20:11.622" v="1808" actId="20577"/>
-          <ac:spMkLst>
-            <pc:docMk/>
-            <pc:sldMk cId="211450528" sldId="273"/>
-            <ac:spMk id="8" creationId="{B1B10A6C-E857-2AC7-9CD4-9F6187F56B57}"/>
-          </ac:spMkLst>
-        </pc:spChg>
-        <pc:spChg chg="mod">
-          <ac:chgData name="Schilling Sabine HSLU W" userId="b0e2af5c-9187-4900-883a-c96514cd8e15" providerId="ADAL" clId="{5E51067F-94D7-505D-9735-0698788361AC}" dt="2026-05-06T19:18:36.355" v="1782" actId="20577"/>
-          <ac:spMkLst>
-            <pc:docMk/>
-            <pc:sldMk cId="211450528" sldId="273"/>
-            <ac:spMk id="9" creationId="{7C5757D2-6CA8-B513-DC52-7F09F857A4C7}"/>
-          </ac:spMkLst>
-        </pc:spChg>
-        <pc:spChg chg="add mod">
-          <ac:chgData name="Schilling Sabine HSLU W" userId="b0e2af5c-9187-4900-883a-c96514cd8e15" providerId="ADAL" clId="{5E51067F-94D7-505D-9735-0698788361AC}" dt="2026-05-06T19:18:36.355" v="1782" actId="20577"/>
-          <ac:spMkLst>
-            <pc:docMk/>
-            <pc:sldMk cId="211450528" sldId="273"/>
-            <ac:spMk id="12" creationId="{C1981550-83BB-9397-710A-8F2694DD3EA9}"/>
-          </ac:spMkLst>
-        </pc:spChg>
-        <pc:spChg chg="mod">
-          <ac:chgData name="Schilling Sabine HSLU W" userId="b0e2af5c-9187-4900-883a-c96514cd8e15" providerId="ADAL" clId="{5E51067F-94D7-505D-9735-0698788361AC}" dt="2026-05-06T19:22:14.838" v="1842" actId="20577"/>
-          <ac:spMkLst>
-            <pc:docMk/>
-            <pc:sldMk cId="211450528" sldId="273"/>
-            <ac:spMk id="19" creationId="{5B16A604-2B7C-E85E-0A91-CC96741BDB01}"/>
-          </ac:spMkLst>
-        </pc:spChg>
-        <pc:spChg chg="mod">
-          <ac:chgData name="Schilling Sabine HSLU W" userId="b0e2af5c-9187-4900-883a-c96514cd8e15" providerId="ADAL" clId="{5E51067F-94D7-505D-9735-0698788361AC}" dt="2026-05-06T19:19:42.567" v="1804" actId="1036"/>
-          <ac:spMkLst>
-            <pc:docMk/>
-            <pc:sldMk cId="211450528" sldId="273"/>
-            <ac:spMk id="36" creationId="{85AF650F-788E-C688-388F-D4F5F7ACE59B}"/>
-          </ac:spMkLst>
-        </pc:spChg>
-        <pc:spChg chg="mod">
-          <ac:chgData name="Schilling Sabine HSLU W" userId="b0e2af5c-9187-4900-883a-c96514cd8e15" providerId="ADAL" clId="{5E51067F-94D7-505D-9735-0698788361AC}" dt="2026-05-06T19:19:42.567" v="1804" actId="1036"/>
-          <ac:spMkLst>
-            <pc:docMk/>
-            <pc:sldMk cId="211450528" sldId="273"/>
-            <ac:spMk id="40" creationId="{24589715-130D-1803-FC06-FD5A8DB9FD73}"/>
-          </ac:spMkLst>
-        </pc:spChg>
-        <pc:grpChg chg="add mod">
-          <ac:chgData name="Schilling Sabine HSLU W" userId="b0e2af5c-9187-4900-883a-c96514cd8e15" providerId="ADAL" clId="{5E51067F-94D7-505D-9735-0698788361AC}" dt="2026-05-06T19:18:36.355" v="1782" actId="20577"/>
-          <ac:grpSpMkLst>
-            <pc:docMk/>
-            <pc:sldMk cId="211450528" sldId="273"/>
-            <ac:grpSpMk id="51" creationId="{44770507-76CA-649E-2FC1-1F7141E749B8}"/>
-          </ac:grpSpMkLst>
-        </pc:grpChg>
-        <pc:cxnChg chg="mod">
-          <ac:chgData name="Schilling Sabine HSLU W" userId="b0e2af5c-9187-4900-883a-c96514cd8e15" providerId="ADAL" clId="{5E51067F-94D7-505D-9735-0698788361AC}" dt="2026-05-04T13:28:57.693" v="1423" actId="1076"/>
-          <ac:cxnSpMkLst>
-            <pc:docMk/>
-            <pc:sldMk cId="211450528" sldId="273"/>
-            <ac:cxnSpMk id="2" creationId="{3C415C7F-748B-C1ED-EE4E-BD64FBAA5934}"/>
-          </ac:cxnSpMkLst>
-        </pc:cxnChg>
-        <pc:cxnChg chg="mod">
-          <ac:chgData name="Schilling Sabine HSLU W" userId="b0e2af5c-9187-4900-883a-c96514cd8e15" providerId="ADAL" clId="{5E51067F-94D7-505D-9735-0698788361AC}" dt="2026-05-04T13:15:36.033" v="1388" actId="20577"/>
-          <ac:cxnSpMkLst>
-            <pc:docMk/>
-            <pc:sldMk cId="211450528" sldId="273"/>
-            <ac:cxnSpMk id="10" creationId="{70C9F5FC-AF03-27DA-5350-C58CCEDDBC03}"/>
-          </ac:cxnSpMkLst>
-        </pc:cxnChg>
-        <pc:cxnChg chg="mod">
-          <ac:chgData name="Schilling Sabine HSLU W" userId="b0e2af5c-9187-4900-883a-c96514cd8e15" providerId="ADAL" clId="{5E51067F-94D7-505D-9735-0698788361AC}" dt="2026-05-04T13:03:32.506" v="1370" actId="14100"/>
-          <ac:cxnSpMkLst>
-            <pc:docMk/>
-            <pc:sldMk cId="211450528" sldId="273"/>
-            <ac:cxnSpMk id="16" creationId="{3DDE1A43-F7C7-70FB-7017-DCD87C3E884D}"/>
-          </ac:cxnSpMkLst>
-        </pc:cxnChg>
-        <pc:cxnChg chg="mod">
-          <ac:chgData name="Schilling Sabine HSLU W" userId="b0e2af5c-9187-4900-883a-c96514cd8e15" providerId="ADAL" clId="{5E51067F-94D7-505D-9735-0698788361AC}" dt="2026-05-06T19:19:42.567" v="1804" actId="1036"/>
-          <ac:cxnSpMkLst>
-            <pc:docMk/>
-            <pc:sldMk cId="211450528" sldId="273"/>
-            <ac:cxnSpMk id="37" creationId="{39566372-3240-2CF2-23D0-16FAC566260E}"/>
-          </ac:cxnSpMkLst>
-        </pc:cxnChg>
-        <pc:cxnChg chg="add mod">
-          <ac:chgData name="Schilling Sabine HSLU W" userId="b0e2af5c-9187-4900-883a-c96514cd8e15" providerId="ADAL" clId="{5E51067F-94D7-505D-9735-0698788361AC}" dt="2026-05-06T19:20:16.733" v="1809" actId="1076"/>
-          <ac:cxnSpMkLst>
-            <pc:docMk/>
-            <pc:sldMk cId="211450528" sldId="273"/>
-            <ac:cxnSpMk id="49" creationId="{B5C5DBDB-04E0-3BA1-F10B-880665C4834B}"/>
-          </ac:cxnSpMkLst>
-        </pc:cxnChg>
-      </pc:sldChg>
-      <pc:sldChg chg="addSp delSp modSp add mod setBg">
-        <pc:chgData name="Schilling Sabine HSLU W" userId="b0e2af5c-9187-4900-883a-c96514cd8e15" providerId="ADAL" clId="{5E51067F-94D7-505D-9735-0698788361AC}" dt="2026-05-09T21:38:50.659" v="2341" actId="164"/>
-        <pc:sldMkLst>
-          <pc:docMk/>
-          <pc:sldMk cId="3987773869" sldId="274"/>
-        </pc:sldMkLst>
-        <pc:spChg chg="mod topLvl">
-          <ac:chgData name="Schilling Sabine HSLU W" userId="b0e2af5c-9187-4900-883a-c96514cd8e15" providerId="ADAL" clId="{5E51067F-94D7-505D-9735-0698788361AC}" dt="2026-05-09T21:25:10.552" v="2159" actId="1076"/>
-          <ac:spMkLst>
-            <pc:docMk/>
-            <pc:sldMk cId="3987773869" sldId="274"/>
-            <ac:spMk id="5" creationId="{D88560B6-0A0F-0760-6149-6FF3B7B24210}"/>
-          </ac:spMkLst>
-        </pc:spChg>
-        <pc:spChg chg="mod topLvl">
-          <ac:chgData name="Schilling Sabine HSLU W" userId="b0e2af5c-9187-4900-883a-c96514cd8e15" providerId="ADAL" clId="{5E51067F-94D7-505D-9735-0698788361AC}" dt="2026-05-09T21:37:25.428" v="2311" actId="167"/>
-          <ac:spMkLst>
-            <pc:docMk/>
-            <pc:sldMk cId="3987773869" sldId="274"/>
-            <ac:spMk id="6" creationId="{850F5D96-EAD6-2EF1-FC49-CD5ADD5C2CF4}"/>
-          </ac:spMkLst>
-        </pc:spChg>
-        <pc:spChg chg="mod topLvl">
-          <ac:chgData name="Schilling Sabine HSLU W" userId="b0e2af5c-9187-4900-883a-c96514cd8e15" providerId="ADAL" clId="{5E51067F-94D7-505D-9735-0698788361AC}" dt="2026-05-09T21:37:00.663" v="2306" actId="207"/>
-          <ac:spMkLst>
-            <pc:docMk/>
-            <pc:sldMk cId="3987773869" sldId="274"/>
-            <ac:spMk id="7" creationId="{F15C4A27-3FC3-4E72-00C0-8FCD121A3D3F}"/>
-          </ac:spMkLst>
-        </pc:spChg>
-        <pc:spChg chg="mod topLvl">
-          <ac:chgData name="Schilling Sabine HSLU W" userId="b0e2af5c-9187-4900-883a-c96514cd8e15" providerId="ADAL" clId="{5E51067F-94D7-505D-9735-0698788361AC}" dt="2026-05-09T21:32:12.782" v="2242" actId="20577"/>
-          <ac:spMkLst>
-            <pc:docMk/>
-            <pc:sldMk cId="3987773869" sldId="274"/>
-            <ac:spMk id="8" creationId="{1259E59C-91A3-35E8-5F00-0D83BB6F2314}"/>
-          </ac:spMkLst>
-        </pc:spChg>
-        <pc:spChg chg="mod topLvl">
-          <ac:chgData name="Schilling Sabine HSLU W" userId="b0e2af5c-9187-4900-883a-c96514cd8e15" providerId="ADAL" clId="{5E51067F-94D7-505D-9735-0698788361AC}" dt="2026-05-09T21:35:45.040" v="2300" actId="552"/>
-          <ac:spMkLst>
-            <pc:docMk/>
-            <pc:sldMk cId="3987773869" sldId="274"/>
-            <ac:spMk id="9" creationId="{2C733A43-BA90-EED8-6758-242898D59516}"/>
-          </ac:spMkLst>
-        </pc:spChg>
-        <pc:spChg chg="add mod">
-          <ac:chgData name="Schilling Sabine HSLU W" userId="b0e2af5c-9187-4900-883a-c96514cd8e15" providerId="ADAL" clId="{5E51067F-94D7-505D-9735-0698788361AC}" dt="2026-05-09T21:34:01.860" v="2269" actId="1035"/>
-          <ac:spMkLst>
-            <pc:docMk/>
-            <pc:sldMk cId="3987773869" sldId="274"/>
-            <ac:spMk id="11" creationId="{FB9B848B-7023-14FC-D384-3530FD90ECCA}"/>
-          </ac:spMkLst>
-        </pc:spChg>
-        <pc:spChg chg="add del mod topLvl">
-          <ac:chgData name="Schilling Sabine HSLU W" userId="b0e2af5c-9187-4900-883a-c96514cd8e15" providerId="ADAL" clId="{5E51067F-94D7-505D-9735-0698788361AC}" dt="2026-05-09T21:37:44.716" v="2313" actId="14100"/>
-          <ac:spMkLst>
-            <pc:docMk/>
-            <pc:sldMk cId="3987773869" sldId="274"/>
-            <ac:spMk id="12" creationId="{4E91C313-141B-C0EB-7458-C988F814755D}"/>
-          </ac:spMkLst>
-        </pc:spChg>
-        <pc:spChg chg="add del mod">
-          <ac:chgData name="Schilling Sabine HSLU W" userId="b0e2af5c-9187-4900-883a-c96514cd8e15" providerId="ADAL" clId="{5E51067F-94D7-505D-9735-0698788361AC}" dt="2026-05-09T17:31:30.283" v="1884" actId="478"/>
-          <ac:spMkLst>
-            <pc:docMk/>
-            <pc:sldMk cId="3987773869" sldId="274"/>
-            <ac:spMk id="13" creationId="{BCA24DFF-631D-46F5-C48C-653D355D2FB3}"/>
-          </ac:spMkLst>
-        </pc:spChg>
-        <pc:spChg chg="add mod">
-          <ac:chgData name="Schilling Sabine HSLU W" userId="b0e2af5c-9187-4900-883a-c96514cd8e15" providerId="ADAL" clId="{5E51067F-94D7-505D-9735-0698788361AC}" dt="2026-05-09T21:33:39.864" v="2252" actId="1076"/>
-          <ac:spMkLst>
-            <pc:docMk/>
-            <pc:sldMk cId="3987773869" sldId="274"/>
-            <ac:spMk id="14" creationId="{C93B1E64-77B3-996B-0C03-74605808B38D}"/>
-          </ac:spMkLst>
-        </pc:spChg>
-        <pc:spChg chg="add del mod">
-          <ac:chgData name="Schilling Sabine HSLU W" userId="b0e2af5c-9187-4900-883a-c96514cd8e15" providerId="ADAL" clId="{5E51067F-94D7-505D-9735-0698788361AC}" dt="2026-05-09T17:47:03.185" v="2009" actId="478"/>
-          <ac:spMkLst>
-            <pc:docMk/>
-            <pc:sldMk cId="3987773869" sldId="274"/>
-            <ac:spMk id="17" creationId="{AF5CA990-E584-E49B-E758-98FBA01897F3}"/>
-          </ac:spMkLst>
-        </pc:spChg>
-        <pc:spChg chg="mod topLvl">
-          <ac:chgData name="Schilling Sabine HSLU W" userId="b0e2af5c-9187-4900-883a-c96514cd8e15" providerId="ADAL" clId="{5E51067F-94D7-505D-9735-0698788361AC}" dt="2026-05-09T21:35:45.040" v="2300" actId="552"/>
-          <ac:spMkLst>
-            <pc:docMk/>
-            <pc:sldMk cId="3987773869" sldId="274"/>
-            <ac:spMk id="19" creationId="{0F5D9D80-C8ED-1D5F-7CBA-0A72C71AD571}"/>
-          </ac:spMkLst>
-        </pc:spChg>
-        <pc:spChg chg="mod topLvl">
-          <ac:chgData name="Schilling Sabine HSLU W" userId="b0e2af5c-9187-4900-883a-c96514cd8e15" providerId="ADAL" clId="{5E51067F-94D7-505D-9735-0698788361AC}" dt="2026-05-09T21:34:12.069" v="2291" actId="1035"/>
-          <ac:spMkLst>
-            <pc:docMk/>
-            <pc:sldMk cId="3987773869" sldId="274"/>
-            <ac:spMk id="36" creationId="{E4B8EE02-0F90-3F09-7990-89B6B3DCBB2E}"/>
-          </ac:spMkLst>
-        </pc:spChg>
-        <pc:spChg chg="mod topLvl">
-          <ac:chgData name="Schilling Sabine HSLU W" userId="b0e2af5c-9187-4900-883a-c96514cd8e15" providerId="ADAL" clId="{5E51067F-94D7-505D-9735-0698788361AC}" dt="2026-05-09T21:34:12.069" v="2291" actId="1035"/>
-          <ac:spMkLst>
-            <pc:docMk/>
-            <pc:sldMk cId="3987773869" sldId="274"/>
-            <ac:spMk id="40" creationId="{50FC18BF-DA43-100C-15F7-046360CBE26F}"/>
-          </ac:spMkLst>
-        </pc:spChg>
-        <pc:spChg chg="add del mod">
-          <ac:chgData name="Schilling Sabine HSLU W" userId="b0e2af5c-9187-4900-883a-c96514cd8e15" providerId="ADAL" clId="{5E51067F-94D7-505D-9735-0698788361AC}" dt="2026-05-09T17:50:41.989" v="2029" actId="478"/>
-          <ac:spMkLst>
-            <pc:docMk/>
-            <pc:sldMk cId="3987773869" sldId="274"/>
-            <ac:spMk id="48" creationId="{E131DD3E-232D-FD1D-84AC-1082CF6D5BFA}"/>
-          </ac:spMkLst>
-        </pc:spChg>
-        <pc:spChg chg="add mod">
-          <ac:chgData name="Schilling Sabine HSLU W" userId="b0e2af5c-9187-4900-883a-c96514cd8e15" providerId="ADAL" clId="{5E51067F-94D7-505D-9735-0698788361AC}" dt="2026-05-09T21:25:30.467" v="2163" actId="1076"/>
-          <ac:spMkLst>
-            <pc:docMk/>
-            <pc:sldMk cId="3987773869" sldId="274"/>
-            <ac:spMk id="57" creationId="{8994B425-65B2-49E4-F84C-57A25705E933}"/>
-          </ac:spMkLst>
-        </pc:spChg>
-        <pc:spChg chg="add mod">
-          <ac:chgData name="Schilling Sabine HSLU W" userId="b0e2af5c-9187-4900-883a-c96514cd8e15" providerId="ADAL" clId="{5E51067F-94D7-505D-9735-0698788361AC}" dt="2026-05-09T21:38:26.498" v="2340" actId="20577"/>
-          <ac:spMkLst>
-            <pc:docMk/>
-            <pc:sldMk cId="3987773869" sldId="274"/>
-            <ac:spMk id="68" creationId="{E005EFC1-18B1-0452-D704-9026052FF006}"/>
-          </ac:spMkLst>
-        </pc:spChg>
-        <pc:grpChg chg="del mod">
-          <ac:chgData name="Schilling Sabine HSLU W" userId="b0e2af5c-9187-4900-883a-c96514cd8e15" providerId="ADAL" clId="{5E51067F-94D7-505D-9735-0698788361AC}" dt="2026-05-09T17:29:01.489" v="1868" actId="165"/>
-          <ac:grpSpMkLst>
-            <pc:docMk/>
-            <pc:sldMk cId="3987773869" sldId="274"/>
-            <ac:grpSpMk id="51" creationId="{6BB2D7E7-76E1-4A1B-2C49-6E7EAC145B7F}"/>
-          </ac:grpSpMkLst>
-        </pc:grpChg>
-        <pc:grpChg chg="mod">
-          <ac:chgData name="Schilling Sabine HSLU W" userId="b0e2af5c-9187-4900-883a-c96514cd8e15" providerId="ADAL" clId="{5E51067F-94D7-505D-9735-0698788361AC}" dt="2026-05-09T21:38:50.659" v="2341" actId="164"/>
-          <ac:grpSpMkLst>
-            <pc:docMk/>
-            <pc:sldMk cId="3987773869" sldId="274"/>
-            <ac:grpSpMk id="69" creationId="{44009903-A0FE-1610-A44A-7945B84624B2}"/>
-          </ac:grpSpMkLst>
-        </pc:grpChg>
-        <pc:grpChg chg="add mod">
-          <ac:chgData name="Schilling Sabine HSLU W" userId="b0e2af5c-9187-4900-883a-c96514cd8e15" providerId="ADAL" clId="{5E51067F-94D7-505D-9735-0698788361AC}" dt="2026-05-09T21:38:50.659" v="2341" actId="164"/>
-          <ac:grpSpMkLst>
-            <pc:docMk/>
-            <pc:sldMk cId="3987773869" sldId="274"/>
-            <ac:grpSpMk id="84" creationId="{E03D655E-9CD9-685D-7B91-6B5945795D4E}"/>
-          </ac:grpSpMkLst>
-        </pc:grpChg>
-        <pc:cxnChg chg="del mod">
-          <ac:chgData name="Schilling Sabine HSLU W" userId="b0e2af5c-9187-4900-883a-c96514cd8e15" providerId="ADAL" clId="{5E51067F-94D7-505D-9735-0698788361AC}" dt="2026-05-09T21:35:10.345" v="2296" actId="478"/>
-          <ac:cxnSpMkLst>
-            <pc:docMk/>
-            <pc:sldMk cId="3987773869" sldId="274"/>
-            <ac:cxnSpMk id="2" creationId="{F9C22910-8F70-1D49-07A9-1AAACFEF61DB}"/>
-          </ac:cxnSpMkLst>
-        </pc:cxnChg>
-        <pc:cxnChg chg="mod">
-          <ac:chgData name="Schilling Sabine HSLU W" userId="b0e2af5c-9187-4900-883a-c96514cd8e15" providerId="ADAL" clId="{5E51067F-94D7-505D-9735-0698788361AC}" dt="2026-05-09T21:35:04.675" v="2295" actId="12789"/>
-          <ac:cxnSpMkLst>
-            <pc:docMk/>
-            <pc:sldMk cId="3987773869" sldId="274"/>
-            <ac:cxnSpMk id="10" creationId="{7FFB23BA-1A56-EA09-897C-EAA0A7C46798}"/>
-          </ac:cxnSpMkLst>
-        </pc:cxnChg>
-        <pc:cxnChg chg="add mod">
-          <ac:chgData name="Schilling Sabine HSLU W" userId="b0e2af5c-9187-4900-883a-c96514cd8e15" providerId="ADAL" clId="{5E51067F-94D7-505D-9735-0698788361AC}" dt="2026-05-09T21:34:01.860" v="2269" actId="1035"/>
-          <ac:cxnSpMkLst>
-            <pc:docMk/>
-            <pc:sldMk cId="3987773869" sldId="274"/>
-            <ac:cxnSpMk id="15" creationId="{A6B56266-E50F-E630-DFBD-3065C4177F4D}"/>
-          </ac:cxnSpMkLst>
-        </pc:cxnChg>
-        <pc:cxnChg chg="mod">
-          <ac:chgData name="Schilling Sabine HSLU W" userId="b0e2af5c-9187-4900-883a-c96514cd8e15" providerId="ADAL" clId="{5E51067F-94D7-505D-9735-0698788361AC}" dt="2026-05-09T21:29:54.798" v="2222" actId="1076"/>
-          <ac:cxnSpMkLst>
-            <pc:docMk/>
-            <pc:sldMk cId="3987773869" sldId="274"/>
-            <ac:cxnSpMk id="16" creationId="{95EE3751-2F94-DC07-D76A-B01575DBC8AF}"/>
-          </ac:cxnSpMkLst>
-        </pc:cxnChg>
-        <pc:cxnChg chg="add del mod">
-          <ac:chgData name="Schilling Sabine HSLU W" userId="b0e2af5c-9187-4900-883a-c96514cd8e15" providerId="ADAL" clId="{5E51067F-94D7-505D-9735-0698788361AC}" dt="2026-05-09T17:48:12.843" v="2019" actId="478"/>
-          <ac:cxnSpMkLst>
-            <pc:docMk/>
-            <pc:sldMk cId="3987773869" sldId="274"/>
-            <ac:cxnSpMk id="18" creationId="{2F1D6734-909E-4516-3F31-0E296F304B43}"/>
-          </ac:cxnSpMkLst>
-        </pc:cxnChg>
-        <pc:cxnChg chg="add del mod">
-          <ac:chgData name="Schilling Sabine HSLU W" userId="b0e2af5c-9187-4900-883a-c96514cd8e15" providerId="ADAL" clId="{5E51067F-94D7-505D-9735-0698788361AC}" dt="2026-05-09T17:47:09.914" v="2011" actId="478"/>
-          <ac:cxnSpMkLst>
-            <pc:docMk/>
-            <pc:sldMk cId="3987773869" sldId="274"/>
-            <ac:cxnSpMk id="23" creationId="{304AE12C-FF0A-DDD0-5941-2AC0BA9359C5}"/>
-          </ac:cxnSpMkLst>
-        </pc:cxnChg>
-        <pc:cxnChg chg="mod">
-          <ac:chgData name="Schilling Sabine HSLU W" userId="b0e2af5c-9187-4900-883a-c96514cd8e15" providerId="ADAL" clId="{5E51067F-94D7-505D-9735-0698788361AC}" dt="2026-05-09T21:34:12.069" v="2291" actId="1035"/>
-          <ac:cxnSpMkLst>
-            <pc:docMk/>
-            <pc:sldMk cId="3987773869" sldId="274"/>
-            <ac:cxnSpMk id="37" creationId="{D0C86A91-FDA7-431A-A97E-45AB5F8F86AC}"/>
-          </ac:cxnSpMkLst>
-        </pc:cxnChg>
-        <pc:cxnChg chg="mod">
-          <ac:chgData name="Schilling Sabine HSLU W" userId="b0e2af5c-9187-4900-883a-c96514cd8e15" providerId="ADAL" clId="{5E51067F-94D7-505D-9735-0698788361AC}" dt="2026-05-09T21:33:36.447" v="2251" actId="1076"/>
-          <ac:cxnSpMkLst>
-            <pc:docMk/>
-            <pc:sldMk cId="3987773869" sldId="274"/>
-            <ac:cxnSpMk id="49" creationId="{C057720C-4C0C-4DDC-5805-67C405AC5729}"/>
-          </ac:cxnSpMkLst>
-        </pc:cxnChg>
-        <pc:cxnChg chg="add del mod">
-          <ac:chgData name="Schilling Sabine HSLU W" userId="b0e2af5c-9187-4900-883a-c96514cd8e15" providerId="ADAL" clId="{5E51067F-94D7-505D-9735-0698788361AC}" dt="2026-05-09T17:52:27.322" v="2035" actId="478"/>
-          <ac:cxnSpMkLst>
-            <pc:docMk/>
-            <pc:sldMk cId="3987773869" sldId="274"/>
-            <ac:cxnSpMk id="50" creationId="{844FCB7D-07C7-05A6-B469-AB9A86C8A16D}"/>
-          </ac:cxnSpMkLst>
-        </pc:cxnChg>
-        <pc:cxnChg chg="add del mod">
-          <ac:chgData name="Schilling Sabine HSLU W" userId="b0e2af5c-9187-4900-883a-c96514cd8e15" providerId="ADAL" clId="{5E51067F-94D7-505D-9735-0698788361AC}" dt="2026-05-09T17:52:25.632" v="2034" actId="478"/>
-          <ac:cxnSpMkLst>
-            <pc:docMk/>
-            <pc:sldMk cId="3987773869" sldId="274"/>
-            <ac:cxnSpMk id="55" creationId="{CDBDD451-D597-84E8-6AC7-BC097B795C4B}"/>
-          </ac:cxnSpMkLst>
-        </pc:cxnChg>
-        <pc:cxnChg chg="add del mod">
-          <ac:chgData name="Schilling Sabine HSLU W" userId="b0e2af5c-9187-4900-883a-c96514cd8e15" providerId="ADAL" clId="{5E51067F-94D7-505D-9735-0698788361AC}" dt="2026-05-09T18:34:25.920" v="2130" actId="478"/>
-          <ac:cxnSpMkLst>
-            <pc:docMk/>
-            <pc:sldMk cId="3987773869" sldId="274"/>
-            <ac:cxnSpMk id="61" creationId="{93E41B99-2FE0-8454-F08B-13B6822D3E6C}"/>
-          </ac:cxnSpMkLst>
-        </pc:cxnChg>
-        <pc:cxnChg chg="add mod">
-          <ac:chgData name="Schilling Sabine HSLU W" userId="b0e2af5c-9187-4900-883a-c96514cd8e15" providerId="ADAL" clId="{5E51067F-94D7-505D-9735-0698788361AC}" dt="2026-05-09T21:33:42.548" v="2253" actId="1076"/>
-          <ac:cxnSpMkLst>
-            <pc:docMk/>
-            <pc:sldMk cId="3987773869" sldId="274"/>
-            <ac:cxnSpMk id="67" creationId="{90D9A013-B638-2CFA-D596-D590570520DD}"/>
-          </ac:cxnSpMkLst>
-        </pc:cxnChg>
-        <pc:cxnChg chg="add mod">
-          <ac:chgData name="Schilling Sabine HSLU W" userId="b0e2af5c-9187-4900-883a-c96514cd8e15" providerId="ADAL" clId="{5E51067F-94D7-505D-9735-0698788361AC}" dt="2026-05-09T21:38:50.659" v="2341" actId="164"/>
-          <ac:cxnSpMkLst>
-            <pc:docMk/>
-            <pc:sldMk cId="3987773869" sldId="274"/>
-            <ac:cxnSpMk id="83" creationId="{277F9311-EB83-9B97-DA2A-A783B756E3C6}"/>
-          </ac:cxnSpMkLst>
-        </pc:cxnChg>
-      </pc:sldChg>
-      <pc:sldChg chg="modSp add del mod">
-        <pc:chgData name="Schilling Sabine HSLU W" userId="b0e2af5c-9187-4900-883a-c96514cd8e15" providerId="ADAL" clId="{5E51067F-94D7-505D-9735-0698788361AC}" dt="2026-05-09T17:32:50.935" v="1891" actId="2696"/>
-        <pc:sldMkLst>
-          <pc:docMk/>
-          <pc:sldMk cId="2301579658" sldId="275"/>
-        </pc:sldMkLst>
-        <pc:spChg chg="mod">
-          <ac:chgData name="Schilling Sabine HSLU W" userId="b0e2af5c-9187-4900-883a-c96514cd8e15" providerId="ADAL" clId="{5E51067F-94D7-505D-9735-0698788361AC}" dt="2026-05-09T17:27:59.106" v="1860" actId="20577"/>
-          <ac:spMkLst>
-            <pc:docMk/>
-            <pc:sldMk cId="2301579658" sldId="275"/>
-            <ac:spMk id="5" creationId="{1BA2DBBD-EF00-0AA5-56C7-D5449A181778}"/>
-          </ac:spMkLst>
-        </pc:spChg>
-        <pc:spChg chg="mod">
-          <ac:chgData name="Schilling Sabine HSLU W" userId="b0e2af5c-9187-4900-883a-c96514cd8e15" providerId="ADAL" clId="{5E51067F-94D7-505D-9735-0698788361AC}" dt="2026-05-09T17:27:59.106" v="1860" actId="20577"/>
-          <ac:spMkLst>
-            <pc:docMk/>
-            <pc:sldMk cId="2301579658" sldId="275"/>
-            <ac:spMk id="6" creationId="{D717D2A7-2DDE-DBEB-6ADE-E8F61B52E3FB}"/>
-          </ac:spMkLst>
-        </pc:spChg>
-        <pc:spChg chg="mod">
-          <ac:chgData name="Schilling Sabine HSLU W" userId="b0e2af5c-9187-4900-883a-c96514cd8e15" providerId="ADAL" clId="{5E51067F-94D7-505D-9735-0698788361AC}" dt="2026-05-09T17:27:59.106" v="1860" actId="20577"/>
-          <ac:spMkLst>
-            <pc:docMk/>
-            <pc:sldMk cId="2301579658" sldId="275"/>
-            <ac:spMk id="7" creationId="{CE12E117-1508-006F-3A9F-EF836987C197}"/>
-          </ac:spMkLst>
-        </pc:spChg>
-        <pc:spChg chg="mod">
-          <ac:chgData name="Schilling Sabine HSLU W" userId="b0e2af5c-9187-4900-883a-c96514cd8e15" providerId="ADAL" clId="{5E51067F-94D7-505D-9735-0698788361AC}" dt="2026-05-09T17:27:59.106" v="1860" actId="20577"/>
-          <ac:spMkLst>
-            <pc:docMk/>
-            <pc:sldMk cId="2301579658" sldId="275"/>
-            <ac:spMk id="8" creationId="{F3659B89-9F95-B722-5248-F1A3329247EC}"/>
-          </ac:spMkLst>
-        </pc:spChg>
-        <pc:spChg chg="mod">
-          <ac:chgData name="Schilling Sabine HSLU W" userId="b0e2af5c-9187-4900-883a-c96514cd8e15" providerId="ADAL" clId="{5E51067F-94D7-505D-9735-0698788361AC}" dt="2026-05-09T17:27:59.106" v="1860" actId="20577"/>
-          <ac:spMkLst>
-            <pc:docMk/>
-            <pc:sldMk cId="2301579658" sldId="275"/>
-            <ac:spMk id="9" creationId="{1337C1CE-6671-90F8-C10E-4DA3EDDAACED}"/>
-          </ac:spMkLst>
-        </pc:spChg>
-        <pc:spChg chg="mod">
-          <ac:chgData name="Schilling Sabine HSLU W" userId="b0e2af5c-9187-4900-883a-c96514cd8e15" providerId="ADAL" clId="{5E51067F-94D7-505D-9735-0698788361AC}" dt="2026-05-09T17:27:59.106" v="1860" actId="20577"/>
-          <ac:spMkLst>
-            <pc:docMk/>
-            <pc:sldMk cId="2301579658" sldId="275"/>
-            <ac:spMk id="12" creationId="{E6EB28DF-E9A7-6041-B1A7-927E907C77C6}"/>
-          </ac:spMkLst>
-        </pc:spChg>
-        <pc:spChg chg="mod">
-          <ac:chgData name="Schilling Sabine HSLU W" userId="b0e2af5c-9187-4900-883a-c96514cd8e15" providerId="ADAL" clId="{5E51067F-94D7-505D-9735-0698788361AC}" dt="2026-05-09T17:27:59.106" v="1860" actId="20577"/>
-          <ac:spMkLst>
-            <pc:docMk/>
-            <pc:sldMk cId="2301579658" sldId="275"/>
-            <ac:spMk id="19" creationId="{63EAAFBC-95FE-349D-8CF3-362DEEEE0E39}"/>
-          </ac:spMkLst>
-        </pc:spChg>
-        <pc:spChg chg="mod">
-          <ac:chgData name="Schilling Sabine HSLU W" userId="b0e2af5c-9187-4900-883a-c96514cd8e15" providerId="ADAL" clId="{5E51067F-94D7-505D-9735-0698788361AC}" dt="2026-05-09T17:27:59.106" v="1860" actId="20577"/>
-          <ac:spMkLst>
-            <pc:docMk/>
-            <pc:sldMk cId="2301579658" sldId="275"/>
-            <ac:spMk id="36" creationId="{2B44A6FE-D441-C71D-8CAE-FE019CD55DAF}"/>
-          </ac:spMkLst>
-        </pc:spChg>
-        <pc:spChg chg="mod">
-          <ac:chgData name="Schilling Sabine HSLU W" userId="b0e2af5c-9187-4900-883a-c96514cd8e15" providerId="ADAL" clId="{5E51067F-94D7-505D-9735-0698788361AC}" dt="2026-05-09T17:27:59.106" v="1860" actId="20577"/>
-          <ac:spMkLst>
-            <pc:docMk/>
-            <pc:sldMk cId="2301579658" sldId="275"/>
-            <ac:spMk id="40" creationId="{B71AD9BD-DD5E-0889-BBC5-EDF6027DE37E}"/>
-          </ac:spMkLst>
-        </pc:spChg>
-        <pc:grpChg chg="mod">
-          <ac:chgData name="Schilling Sabine HSLU W" userId="b0e2af5c-9187-4900-883a-c96514cd8e15" providerId="ADAL" clId="{5E51067F-94D7-505D-9735-0698788361AC}" dt="2026-05-09T17:27:59.106" v="1860" actId="20577"/>
-          <ac:grpSpMkLst>
-            <pc:docMk/>
-            <pc:sldMk cId="2301579658" sldId="275"/>
-            <ac:grpSpMk id="51" creationId="{001F8610-FCAD-306A-777D-224A41C5C1A4}"/>
-          </ac:grpSpMkLst>
-        </pc:grpChg>
-      </pc:sldChg>
-    </pc:docChg>
-  </pc:docChgLst>
-</pc:chgInfo>
 </file>
 
 <file path=ppt/notesMasters/notesMaster1.xml><?xml version="1.0" encoding="utf-8"?>
@@ -708,7 +218,7 @@
           <a:p>
             <a:fld id="{0AECA108-3915-9043-8428-B4BE4472B821}" type="datetimeFigureOut">
               <a:rPr lang="de-DE" smtClean="0"/>
-              <a:t>09.05.26</a:t>
+              <a:t>18.05.26</a:t>
             </a:fld>
             <a:endParaRPr lang="de-DE"/>
           </a:p>
@@ -1191,6 +701,174 @@
 </p:notes>
 </file>
 
+<file path=ppt/notesSlides/notesSlide3.xml><?xml version="1.0" encoding="utf-8"?>
+<p:notes xmlns:a="http://schemas.openxmlformats.org/drawingml/2006/main" xmlns:r="http://schemas.openxmlformats.org/officeDocument/2006/relationships" xmlns:p="http://schemas.openxmlformats.org/presentationml/2006/main">
+  <p:cSld>
+    <p:spTree>
+      <p:nvGrpSpPr>
+        <p:cNvPr id="1" name="">
+          <a:extLst>
+            <a:ext uri="{FF2B5EF4-FFF2-40B4-BE49-F238E27FC236}">
+              <a16:creationId xmlns:a16="http://schemas.microsoft.com/office/drawing/2014/main" id="{77E677AA-2D02-C294-F1F2-EEB3F2EB2ACF}"/>
+            </a:ext>
+          </a:extLst>
+        </p:cNvPr>
+        <p:cNvGrpSpPr/>
+        <p:nvPr/>
+      </p:nvGrpSpPr>
+      <p:grpSpPr>
+        <a:xfrm>
+          <a:off x="0" y="0"/>
+          <a:ext cx="0" cy="0"/>
+          <a:chOff x="0" y="0"/>
+          <a:chExt cx="0" cy="0"/>
+        </a:xfrm>
+      </p:grpSpPr>
+      <p:sp>
+        <p:nvSpPr>
+          <p:cNvPr id="2" name="Folienbildplatzhalter 1">
+            <a:extLst>
+              <a:ext uri="{FF2B5EF4-FFF2-40B4-BE49-F238E27FC236}">
+                <a16:creationId xmlns:a16="http://schemas.microsoft.com/office/drawing/2014/main" id="{C08177B2-679D-B01E-6976-DA06E15A359D}"/>
+              </a:ext>
+            </a:extLst>
+          </p:cNvPr>
+          <p:cNvSpPr>
+            <a:spLocks noGrp="1" noRot="1" noChangeAspect="1"/>
+          </p:cNvSpPr>
+          <p:nvPr>
+            <p:ph type="sldImg"/>
+          </p:nvPr>
+        </p:nvSpPr>
+        <p:spPr/>
+      </p:sp>
+      <p:sp>
+        <p:nvSpPr>
+          <p:cNvPr id="3" name="Notizenplatzhalter 2">
+            <a:extLst>
+              <a:ext uri="{FF2B5EF4-FFF2-40B4-BE49-F238E27FC236}">
+                <a16:creationId xmlns:a16="http://schemas.microsoft.com/office/drawing/2014/main" id="{06B5C141-7E16-2F0E-B8F6-2F29BF01266D}"/>
+              </a:ext>
+            </a:extLst>
+          </p:cNvPr>
+          <p:cNvSpPr>
+            <a:spLocks noGrp="1"/>
+          </p:cNvSpPr>
+          <p:nvPr>
+            <p:ph type="body" idx="1"/>
+          </p:nvPr>
+        </p:nvSpPr>
+        <p:spPr/>
+        <p:txBody>
+          <a:bodyPr/>
+          <a:lstStyle/>
+          <a:p>
+            <a:endParaRPr lang="de-DE" dirty="0"/>
+          </a:p>
+        </p:txBody>
+      </p:sp>
+      <p:sp>
+        <p:nvSpPr>
+          <p:cNvPr id="4" name="Foliennummernplatzhalter 3">
+            <a:extLst>
+              <a:ext uri="{FF2B5EF4-FFF2-40B4-BE49-F238E27FC236}">
+                <a16:creationId xmlns:a16="http://schemas.microsoft.com/office/drawing/2014/main" id="{13C38E17-2F54-5C54-9FFF-C56E170153EA}"/>
+              </a:ext>
+            </a:extLst>
+          </p:cNvPr>
+          <p:cNvSpPr>
+            <a:spLocks noGrp="1"/>
+          </p:cNvSpPr>
+          <p:nvPr>
+            <p:ph type="sldNum" sz="quarter" idx="5"/>
+          </p:nvPr>
+        </p:nvSpPr>
+        <p:spPr/>
+        <p:txBody>
+          <a:bodyPr/>
+          <a:lstStyle/>
+          <a:p>
+            <a:pPr marL="0" marR="0" lvl="0" indent="0" algn="r" defTabSz="914400" rtl="0" eaLnBrk="1" fontAlgn="auto" latinLnBrk="0" hangingPunct="1">
+              <a:lnSpc>
+                <a:spcPct val="100000"/>
+              </a:lnSpc>
+              <a:spcBef>
+                <a:spcPts val="0"/>
+              </a:spcBef>
+              <a:spcAft>
+                <a:spcPts val="0"/>
+              </a:spcAft>
+              <a:buClrTx/>
+              <a:buSzTx/>
+              <a:buFontTx/>
+              <a:buNone/>
+              <a:tabLst/>
+              <a:defRPr/>
+            </a:pPr>
+            <a:fld id="{67B21A6D-3249-074E-BBD6-BCFA95367850}" type="slidenum">
+              <a:rPr kumimoji="0" lang="de-DE" sz="1200" b="0" i="0" u="none" strike="noStrike" kern="1200" cap="none" spc="0" normalizeH="0" baseline="0" noProof="0" smtClean="0">
+                <a:ln>
+                  <a:noFill/>
+                </a:ln>
+                <a:solidFill>
+                  <a:prstClr val="black"/>
+                </a:solidFill>
+                <a:effectLst/>
+                <a:uLnTx/>
+                <a:uFillTx/>
+                <a:latin typeface="Calibri" panose="020F0502020204030204"/>
+                <a:ea typeface="+mn-ea"/>
+                <a:cs typeface="+mn-cs"/>
+              </a:rPr>
+              <a:pPr marL="0" marR="0" lvl="0" indent="0" algn="r" defTabSz="914400" rtl="0" eaLnBrk="1" fontAlgn="auto" latinLnBrk="0" hangingPunct="1">
+                <a:lnSpc>
+                  <a:spcPct val="100000"/>
+                </a:lnSpc>
+                <a:spcBef>
+                  <a:spcPts val="0"/>
+                </a:spcBef>
+                <a:spcAft>
+                  <a:spcPts val="0"/>
+                </a:spcAft>
+                <a:buClrTx/>
+                <a:buSzTx/>
+                <a:buFontTx/>
+                <a:buNone/>
+                <a:tabLst/>
+                <a:defRPr/>
+              </a:pPr>
+              <a:t>3</a:t>
+            </a:fld>
+            <a:endParaRPr kumimoji="0" lang="de-DE" sz="1200" b="0" i="0" u="none" strike="noStrike" kern="1200" cap="none" spc="0" normalizeH="0" baseline="0" noProof="0">
+              <a:ln>
+                <a:noFill/>
+              </a:ln>
+              <a:solidFill>
+                <a:prstClr val="black"/>
+              </a:solidFill>
+              <a:effectLst/>
+              <a:uLnTx/>
+              <a:uFillTx/>
+              <a:latin typeface="Calibri" panose="020F0502020204030204"/>
+              <a:ea typeface="+mn-ea"/>
+              <a:cs typeface="+mn-cs"/>
+            </a:endParaRPr>
+          </a:p>
+        </p:txBody>
+      </p:sp>
+    </p:spTree>
+    <p:extLst>
+      <p:ext uri="{BB962C8B-B14F-4D97-AF65-F5344CB8AC3E}">
+        <p14:creationId xmlns:p14="http://schemas.microsoft.com/office/powerpoint/2010/main" val="3583171411"/>
+      </p:ext>
+    </p:extLst>
+  </p:cSld>
+  <p:clrMapOvr>
+    <a:masterClrMapping/>
+  </p:clrMapOvr>
+</p:notes>
+</file>
+
 <file path=ppt/slideLayouts/slideLayout1.xml><?xml version="1.0" encoding="utf-8"?>
 <p:sldLayout xmlns:a="http://schemas.openxmlformats.org/drawingml/2006/main" xmlns:r="http://schemas.openxmlformats.org/officeDocument/2006/relationships" xmlns:p="http://schemas.openxmlformats.org/presentationml/2006/main" type="title" preserve="1">
   <p:cSld name="Titelfolie">
@@ -1338,7 +1016,7 @@
           <a:p>
             <a:fld id="{43497422-92ED-3D47-BF28-17000E80E497}" type="datetimeFigureOut">
               <a:rPr lang="de-DE" smtClean="0"/>
-              <a:t>09.05.26</a:t>
+              <a:t>18.05.26</a:t>
             </a:fld>
             <a:endParaRPr lang="de-DE"/>
           </a:p>
@@ -1536,7 +1214,7 @@
           <a:p>
             <a:fld id="{43497422-92ED-3D47-BF28-17000E80E497}" type="datetimeFigureOut">
               <a:rPr lang="de-DE" smtClean="0"/>
-              <a:t>09.05.26</a:t>
+              <a:t>18.05.26</a:t>
             </a:fld>
             <a:endParaRPr lang="de-DE"/>
           </a:p>
@@ -1744,7 +1422,7 @@
           <a:p>
             <a:fld id="{43497422-92ED-3D47-BF28-17000E80E497}" type="datetimeFigureOut">
               <a:rPr lang="de-DE" smtClean="0"/>
-              <a:t>09.05.26</a:t>
+              <a:t>18.05.26</a:t>
             </a:fld>
             <a:endParaRPr lang="de-DE"/>
           </a:p>
@@ -1942,7 +1620,7 @@
           <a:p>
             <a:fld id="{43497422-92ED-3D47-BF28-17000E80E497}" type="datetimeFigureOut">
               <a:rPr lang="de-DE" smtClean="0"/>
-              <a:t>09.05.26</a:t>
+              <a:t>18.05.26</a:t>
             </a:fld>
             <a:endParaRPr lang="de-DE"/>
           </a:p>
@@ -2217,7 +1895,7 @@
           <a:p>
             <a:fld id="{43497422-92ED-3D47-BF28-17000E80E497}" type="datetimeFigureOut">
               <a:rPr lang="de-DE" smtClean="0"/>
-              <a:t>09.05.26</a:t>
+              <a:t>18.05.26</a:t>
             </a:fld>
             <a:endParaRPr lang="de-DE"/>
           </a:p>
@@ -2482,7 +2160,7 @@
           <a:p>
             <a:fld id="{43497422-92ED-3D47-BF28-17000E80E497}" type="datetimeFigureOut">
               <a:rPr lang="de-DE" smtClean="0"/>
-              <a:t>09.05.26</a:t>
+              <a:t>18.05.26</a:t>
             </a:fld>
             <a:endParaRPr lang="de-DE"/>
           </a:p>
@@ -2894,7 +2572,7 @@
           <a:p>
             <a:fld id="{43497422-92ED-3D47-BF28-17000E80E497}" type="datetimeFigureOut">
               <a:rPr lang="de-DE" smtClean="0"/>
-              <a:t>09.05.26</a:t>
+              <a:t>18.05.26</a:t>
             </a:fld>
             <a:endParaRPr lang="de-DE"/>
           </a:p>
@@ -3035,7 +2713,7 @@
           <a:p>
             <a:fld id="{43497422-92ED-3D47-BF28-17000E80E497}" type="datetimeFigureOut">
               <a:rPr lang="de-DE" smtClean="0"/>
-              <a:t>09.05.26</a:t>
+              <a:t>18.05.26</a:t>
             </a:fld>
             <a:endParaRPr lang="de-DE"/>
           </a:p>
@@ -3148,7 +2826,7 @@
           <a:p>
             <a:fld id="{43497422-92ED-3D47-BF28-17000E80E497}" type="datetimeFigureOut">
               <a:rPr lang="de-DE" smtClean="0"/>
-              <a:t>09.05.26</a:t>
+              <a:t>18.05.26</a:t>
             </a:fld>
             <a:endParaRPr lang="de-DE"/>
           </a:p>
@@ -3459,7 +3137,7 @@
           <a:p>
             <a:fld id="{43497422-92ED-3D47-BF28-17000E80E497}" type="datetimeFigureOut">
               <a:rPr lang="de-DE" smtClean="0"/>
-              <a:t>09.05.26</a:t>
+              <a:t>18.05.26</a:t>
             </a:fld>
             <a:endParaRPr lang="de-DE"/>
           </a:p>
@@ -3747,7 +3425,7 @@
           <a:p>
             <a:fld id="{43497422-92ED-3D47-BF28-17000E80E497}" type="datetimeFigureOut">
               <a:rPr lang="de-DE" smtClean="0"/>
-              <a:t>09.05.26</a:t>
+              <a:t>18.05.26</a:t>
             </a:fld>
             <a:endParaRPr lang="de-DE"/>
           </a:p>
@@ -3988,7 +3666,7 @@
           <a:p>
             <a:fld id="{43497422-92ED-3D47-BF28-17000E80E497}" type="datetimeFigureOut">
               <a:rPr lang="de-DE" smtClean="0"/>
-              <a:t>09.05.26</a:t>
+              <a:t>18.05.26</a:t>
             </a:fld>
             <a:endParaRPr lang="de-DE"/>
           </a:p>
@@ -6591,8 +6269,8 @@
               </a:p>
             </p:txBody>
           </p:sp>
-          <mc:AlternateContent xmlns:mc="http://schemas.openxmlformats.org/markup-compatibility/2006">
-            <mc:Choice xmlns:a14="http://schemas.microsoft.com/office/drawing/2010/main" Requires="a14">
+          <mc:AlternateContent xmlns:mc="http://schemas.openxmlformats.org/markup-compatibility/2006" xmlns:a14="http://schemas.microsoft.com/office/drawing/2010/main">
+            <mc:Choice Requires="a14">
               <p:sp>
                 <p:nvSpPr>
                   <p:cNvPr id="6" name="Textfeld 5">
@@ -6749,7 +6427,7 @@
                 </p:txBody>
               </p:sp>
             </mc:Choice>
-            <mc:Fallback>
+            <mc:Fallback xmlns="">
               <p:sp>
                 <p:nvSpPr>
                   <p:cNvPr id="6" name="Textfeld 5">
@@ -7196,8 +6874,8 @@
               </a:p>
             </p:txBody>
           </p:sp>
-          <mc:AlternateContent xmlns:mc="http://schemas.openxmlformats.org/markup-compatibility/2006">
-            <mc:Choice xmlns:a14="http://schemas.microsoft.com/office/drawing/2010/main" Requires="a14">
+          <mc:AlternateContent xmlns:mc="http://schemas.openxmlformats.org/markup-compatibility/2006" xmlns:a14="http://schemas.microsoft.com/office/drawing/2010/main">
+            <mc:Choice Requires="a14">
               <p:sp>
                 <p:nvSpPr>
                   <p:cNvPr id="9" name="Textfeld 8">
@@ -7349,7 +7027,7 @@
                 </p:txBody>
               </p:sp>
             </mc:Choice>
-            <mc:Fallback>
+            <mc:Fallback xmlns="">
               <p:sp>
                 <p:nvSpPr>
                   <p:cNvPr id="9" name="Textfeld 8">
@@ -7469,8 +7147,8 @@
               </a:p>
             </p:txBody>
           </p:sp>
-          <mc:AlternateContent xmlns:mc="http://schemas.openxmlformats.org/markup-compatibility/2006">
-            <mc:Choice xmlns:a14="http://schemas.microsoft.com/office/drawing/2010/main" Requires="a14">
+          <mc:AlternateContent xmlns:mc="http://schemas.openxmlformats.org/markup-compatibility/2006" xmlns:a14="http://schemas.microsoft.com/office/drawing/2010/main">
+            <mc:Choice Requires="a14">
               <p:sp>
                 <p:nvSpPr>
                   <p:cNvPr id="7" name="Textfeld 6">
@@ -7690,7 +7368,7 @@
                 </p:txBody>
               </p:sp>
             </mc:Choice>
-            <mc:Fallback>
+            <mc:Fallback xmlns="">
               <p:sp>
                 <p:nvSpPr>
                   <p:cNvPr id="7" name="Textfeld 6">
@@ -7975,8 +7653,8 @@
               </a:p>
             </p:txBody>
           </p:sp>
-          <mc:AlternateContent xmlns:mc="http://schemas.openxmlformats.org/markup-compatibility/2006">
-            <mc:Choice xmlns:a14="http://schemas.microsoft.com/office/drawing/2010/main" Requires="a14">
+          <mc:AlternateContent xmlns:mc="http://schemas.openxmlformats.org/markup-compatibility/2006" xmlns:a14="http://schemas.microsoft.com/office/drawing/2010/main">
+            <mc:Choice Requires="a14">
               <p:sp>
                 <p:nvSpPr>
                   <p:cNvPr id="5" name="Textfeld 4">
@@ -8167,7 +7845,7 @@
                 </p:txBody>
               </p:sp>
             </mc:Choice>
-            <mc:Fallback>
+            <mc:Fallback xmlns="">
               <p:sp>
                 <p:nvSpPr>
                   <p:cNvPr id="5" name="Textfeld 4">
@@ -8350,8 +8028,8 @@
               </a:fontRef>
             </p:style>
           </p:cxnSp>
-          <mc:AlternateContent xmlns:mc="http://schemas.openxmlformats.org/markup-compatibility/2006">
-            <mc:Choice xmlns:a14="http://schemas.microsoft.com/office/drawing/2010/main" Requires="a14">
+          <mc:AlternateContent xmlns:mc="http://schemas.openxmlformats.org/markup-compatibility/2006" xmlns:a14="http://schemas.microsoft.com/office/drawing/2010/main">
+            <mc:Choice Requires="a14">
               <p:sp>
                 <p:nvSpPr>
                   <p:cNvPr id="11" name="Textfeld 10">
@@ -8584,7 +8262,7 @@
                 </p:txBody>
               </p:sp>
             </mc:Choice>
-            <mc:Fallback>
+            <mc:Fallback xmlns="">
               <p:sp>
                 <p:nvSpPr>
                   <p:cNvPr id="11" name="Textfeld 10">
@@ -8928,6 +8606,4647 @@
     <p:extLst>
       <p:ext uri="{BB962C8B-B14F-4D97-AF65-F5344CB8AC3E}">
         <p14:creationId xmlns:p14="http://schemas.microsoft.com/office/powerpoint/2010/main" val="3987773869"/>
+      </p:ext>
+    </p:extLst>
+  </p:cSld>
+  <p:clrMapOvr>
+    <a:masterClrMapping/>
+  </p:clrMapOvr>
+</p:sld>
+</file>
+
+<file path=ppt/slides/slide3.xml><?xml version="1.0" encoding="utf-8"?>
+<p:sld xmlns:a="http://schemas.openxmlformats.org/drawingml/2006/main" xmlns:r="http://schemas.openxmlformats.org/officeDocument/2006/relationships" xmlns:p="http://schemas.openxmlformats.org/presentationml/2006/main">
+  <p:cSld>
+    <p:spTree>
+      <p:nvGrpSpPr>
+        <p:cNvPr id="1" name="">
+          <a:extLst>
+            <a:ext uri="{FF2B5EF4-FFF2-40B4-BE49-F238E27FC236}">
+              <a16:creationId xmlns:a16="http://schemas.microsoft.com/office/drawing/2014/main" id="{7E0540CC-8A73-C021-D968-04CBBCB7F34E}"/>
+            </a:ext>
+          </a:extLst>
+        </p:cNvPr>
+        <p:cNvGrpSpPr/>
+        <p:nvPr/>
+      </p:nvGrpSpPr>
+      <p:grpSpPr>
+        <a:xfrm>
+          <a:off x="0" y="0"/>
+          <a:ext cx="0" cy="0"/>
+          <a:chOff x="0" y="0"/>
+          <a:chExt cx="0" cy="0"/>
+        </a:xfrm>
+      </p:grpSpPr>
+      <p:grpSp>
+        <p:nvGrpSpPr>
+          <p:cNvPr id="93" name="Gruppieren 92">
+            <a:extLst>
+              <a:ext uri="{FF2B5EF4-FFF2-40B4-BE49-F238E27FC236}">
+                <a16:creationId xmlns:a16="http://schemas.microsoft.com/office/drawing/2014/main" id="{D9C5F2F4-F1A3-6259-67A6-B6637B2F9F71}"/>
+              </a:ext>
+            </a:extLst>
+          </p:cNvPr>
+          <p:cNvGrpSpPr/>
+          <p:nvPr/>
+        </p:nvGrpSpPr>
+        <p:grpSpPr>
+          <a:xfrm>
+            <a:off x="716606" y="679404"/>
+            <a:ext cx="10237484" cy="5109277"/>
+            <a:chOff x="716606" y="679404"/>
+            <a:chExt cx="10237484" cy="5109277"/>
+          </a:xfrm>
+        </p:grpSpPr>
+        <p:sp>
+          <p:nvSpPr>
+            <p:cNvPr id="57" name="Textfeld 56">
+              <a:extLst>
+                <a:ext uri="{FF2B5EF4-FFF2-40B4-BE49-F238E27FC236}">
+                  <a16:creationId xmlns:a16="http://schemas.microsoft.com/office/drawing/2014/main" id="{8994B425-65B2-49E4-F84C-57A25705E933}"/>
+                </a:ext>
+              </a:extLst>
+            </p:cNvPr>
+            <p:cNvSpPr txBox="1"/>
+            <p:nvPr/>
+          </p:nvSpPr>
+          <p:spPr>
+            <a:xfrm>
+              <a:off x="716606" y="4765816"/>
+              <a:ext cx="4320000" cy="276999"/>
+            </a:xfrm>
+            <a:prstGeom prst="rect">
+              <a:avLst/>
+            </a:prstGeom>
+            <a:solidFill>
+              <a:schemeClr val="accent6">
+                <a:lumMod val="60000"/>
+                <a:lumOff val="40000"/>
+                <a:alpha val="19758"/>
+              </a:schemeClr>
+            </a:solidFill>
+            <a:ln w="12700">
+              <a:solidFill>
+                <a:schemeClr val="tx1"/>
+              </a:solidFill>
+            </a:ln>
+          </p:spPr>
+          <p:txBody>
+            <a:bodyPr wrap="square" rtlCol="0">
+              <a:spAutoFit/>
+            </a:bodyPr>
+            <a:lstStyle/>
+            <a:p>
+              <a:pPr marL="0" marR="0" lvl="0" indent="0" algn="ctr" defTabSz="914400" rtl="0" eaLnBrk="1" fontAlgn="auto" latinLnBrk="0" hangingPunct="1">
+                <a:lnSpc>
+                  <a:spcPct val="100000"/>
+                </a:lnSpc>
+                <a:spcBef>
+                  <a:spcPts val="0"/>
+                </a:spcBef>
+                <a:spcAft>
+                  <a:spcPts val="0"/>
+                </a:spcAft>
+                <a:buClrTx/>
+                <a:buSzTx/>
+                <a:buFontTx/>
+                <a:buNone/>
+                <a:tabLst/>
+                <a:defRPr/>
+              </a:pPr>
+              <a:r>
+                <a:rPr kumimoji="0" lang="en-GB" sz="1200" b="1" i="0" u="none" strike="noStrike" kern="1200" cap="none" spc="0" normalizeH="0" baseline="0" noProof="0" dirty="0">
+                  <a:ln>
+                    <a:noFill/>
+                  </a:ln>
+                  <a:solidFill>
+                    <a:prstClr val="black"/>
+                  </a:solidFill>
+                  <a:effectLst/>
+                  <a:uLnTx/>
+                  <a:uFillTx/>
+                  <a:latin typeface="Calibri" panose="020F0502020204030204" pitchFamily="34" charset="0"/>
+                  <a:ea typeface="Cambria Math" panose="02040503050406030204" pitchFamily="18" charset="0"/>
+                  <a:cs typeface="Calibri" panose="020F0502020204030204" pitchFamily="34" charset="0"/>
+                </a:rPr>
+                <a:t>+ flag</a:t>
+              </a:r>
+              <a:r>
+                <a:rPr kumimoji="0" lang="en-GB" sz="1200" b="0" i="0" u="none" strike="noStrike" kern="1200" cap="none" spc="0" normalizeH="0" baseline="0" noProof="0" dirty="0">
+                  <a:ln>
+                    <a:noFill/>
+                  </a:ln>
+                  <a:solidFill>
+                    <a:prstClr val="black"/>
+                  </a:solidFill>
+                  <a:effectLst/>
+                  <a:uLnTx/>
+                  <a:uFillTx/>
+                  <a:latin typeface="Calibri" panose="020F0502020204030204" pitchFamily="34" charset="0"/>
+                  <a:ea typeface="Cambria Math" panose="02040503050406030204" pitchFamily="18" charset="0"/>
+                  <a:cs typeface="Calibri" panose="020F0502020204030204" pitchFamily="34" charset="0"/>
+                </a:rPr>
+                <a:t>: </a:t>
+              </a:r>
+              <a:r>
+                <a:rPr kumimoji="0" lang="en-GB" sz="1200" b="0" i="0" u="none" strike="noStrike" kern="1200" cap="none" spc="0" normalizeH="0" baseline="0" noProof="0" dirty="0" err="1">
+                  <a:ln>
+                    <a:noFill/>
+                  </a:ln>
+                  <a:solidFill>
+                    <a:prstClr val="black"/>
+                  </a:solidFill>
+                  <a:effectLst/>
+                  <a:uLnTx/>
+                  <a:uFillTx/>
+                  <a:latin typeface="Courier New" panose="02070309020205020404" pitchFamily="49" charset="0"/>
+                  <a:ea typeface="Cambria Math" panose="02040503050406030204" pitchFamily="18" charset="0"/>
+                  <a:cs typeface="Courier New" panose="02070309020205020404" pitchFamily="49" charset="0"/>
+                </a:rPr>
+                <a:t>visstat</a:t>
+              </a:r>
+              <a:r>
+                <a:rPr kumimoji="0" lang="en-GB" sz="1200" b="0" i="0" u="none" strike="noStrike" kern="1200" cap="none" spc="0" normalizeH="0" baseline="0" noProof="0" dirty="0">
+                  <a:ln>
+                    <a:noFill/>
+                  </a:ln>
+                  <a:solidFill>
+                    <a:prstClr val="black"/>
+                  </a:solidFill>
+                  <a:effectLst/>
+                  <a:uLnTx/>
+                  <a:uFillTx/>
+                  <a:latin typeface="Courier New" panose="02070309020205020404" pitchFamily="49" charset="0"/>
+                  <a:ea typeface="Cambria Math" panose="02040503050406030204" pitchFamily="18" charset="0"/>
+                  <a:cs typeface="Courier New" panose="02070309020205020404" pitchFamily="49" charset="0"/>
+                </a:rPr>
+                <a:t>(…,</a:t>
+              </a:r>
+              <a:r>
+                <a:rPr kumimoji="0" lang="en-GB" sz="1200" b="1" i="0" u="none" strike="noStrike" kern="1200" cap="none" spc="0" normalizeH="0" baseline="0" noProof="0" dirty="0">
+                  <a:ln>
+                    <a:noFill/>
+                  </a:ln>
+                  <a:solidFill>
+                    <a:prstClr val="black"/>
+                  </a:solidFill>
+                  <a:effectLst/>
+                  <a:uLnTx/>
+                  <a:uFillTx/>
+                  <a:latin typeface="Courier New" panose="02070309020205020404" pitchFamily="49" charset="0"/>
+                  <a:ea typeface="Cambria Math" panose="02040503050406030204" pitchFamily="18" charset="0"/>
+                  <a:cs typeface="Courier New" panose="02070309020205020404" pitchFamily="49" charset="0"/>
+                </a:rPr>
+                <a:t>correlation=TRUE</a:t>
+              </a:r>
+              <a:r>
+                <a:rPr kumimoji="0" lang="en-GB" sz="1200" b="0" i="0" u="none" strike="noStrike" kern="1200" cap="none" spc="0" normalizeH="0" baseline="0" noProof="0" dirty="0">
+                  <a:ln>
+                    <a:noFill/>
+                  </a:ln>
+                  <a:solidFill>
+                    <a:prstClr val="black"/>
+                  </a:solidFill>
+                  <a:effectLst/>
+                  <a:uLnTx/>
+                  <a:uFillTx/>
+                  <a:latin typeface="Courier New" panose="02070309020205020404" pitchFamily="49" charset="0"/>
+                  <a:ea typeface="Cambria Math" panose="02040503050406030204" pitchFamily="18" charset="0"/>
+                  <a:cs typeface="Courier New" panose="02070309020205020404" pitchFamily="49" charset="0"/>
+                </a:rPr>
+                <a:t>)</a:t>
+              </a:r>
+              <a:endParaRPr kumimoji="0" lang="de-DE" sz="800" b="0" i="0" u="none" strike="noStrike" kern="1200" cap="none" spc="0" normalizeH="0" baseline="0" noProof="0" dirty="0">
+                <a:ln>
+                  <a:noFill/>
+                </a:ln>
+                <a:solidFill>
+                  <a:prstClr val="black"/>
+                </a:solidFill>
+                <a:effectLst/>
+                <a:uLnTx/>
+                <a:uFillTx/>
+                <a:latin typeface="Calibri" panose="020F0502020204030204" pitchFamily="34" charset="0"/>
+                <a:ea typeface="Cambria Math" panose="02040503050406030204" pitchFamily="18" charset="0"/>
+                <a:cs typeface="Calibri" panose="020F0502020204030204" pitchFamily="34" charset="0"/>
+              </a:endParaRPr>
+            </a:p>
+          </p:txBody>
+        </p:sp>
+        <p:sp>
+          <p:nvSpPr>
+            <p:cNvPr id="12" name="Textfeld 11">
+              <a:extLst>
+                <a:ext uri="{FF2B5EF4-FFF2-40B4-BE49-F238E27FC236}">
+                  <a16:creationId xmlns:a16="http://schemas.microsoft.com/office/drawing/2014/main" id="{4E91C313-141B-C0EB-7458-C988F814755D}"/>
+                </a:ext>
+              </a:extLst>
+            </p:cNvPr>
+            <p:cNvSpPr txBox="1"/>
+            <p:nvPr/>
+          </p:nvSpPr>
+          <p:spPr>
+            <a:xfrm>
+              <a:off x="5540910" y="679404"/>
+              <a:ext cx="5413180" cy="2862322"/>
+            </a:xfrm>
+            <a:prstGeom prst="rect">
+              <a:avLst/>
+            </a:prstGeom>
+            <a:solidFill>
+              <a:schemeClr val="bg1">
+                <a:lumMod val="85000"/>
+              </a:schemeClr>
+            </a:solidFill>
+            <a:ln w="12700">
+              <a:solidFill>
+                <a:schemeClr val="bg1">
+                  <a:lumMod val="65000"/>
+                </a:schemeClr>
+              </a:solidFill>
+            </a:ln>
+          </p:spPr>
+          <p:txBody>
+            <a:bodyPr wrap="square">
+              <a:spAutoFit/>
+            </a:bodyPr>
+            <a:lstStyle>
+              <a:defPPr>
+                <a:defRPr lang="de-DE"/>
+              </a:defPPr>
+            </a:lstStyle>
+            <a:p>
+              <a:pPr marL="0" marR="0" lvl="0" indent="0" algn="ctr" defTabSz="914400" rtl="0" eaLnBrk="1" fontAlgn="auto" latinLnBrk="0" hangingPunct="1">
+                <a:lnSpc>
+                  <a:spcPct val="100000"/>
+                </a:lnSpc>
+                <a:spcBef>
+                  <a:spcPts val="0"/>
+                </a:spcBef>
+                <a:spcAft>
+                  <a:spcPts val="0"/>
+                </a:spcAft>
+                <a:buClrTx/>
+                <a:buSzTx/>
+                <a:buFontTx/>
+                <a:buNone/>
+                <a:tabLst/>
+                <a:defRPr/>
+              </a:pPr>
+              <a:r>
+                <a:rPr kumimoji="0" lang="en-GB" sz="1200" b="0" i="0" u="none" strike="noStrike" kern="1200" cap="none" spc="0" normalizeH="0" baseline="0" noProof="0" dirty="0">
+                  <a:ln>
+                    <a:noFill/>
+                  </a:ln>
+                  <a:solidFill>
+                    <a:prstClr val="black"/>
+                  </a:solidFill>
+                  <a:effectLst/>
+                  <a:uLnTx/>
+                  <a:uFillTx/>
+                  <a:latin typeface="Calibri" panose="020F0502020204030204" pitchFamily="34" charset="0"/>
+                  <a:ea typeface="Cambria Math" panose="02040503050406030204" pitchFamily="18" charset="0"/>
+                  <a:cs typeface="Calibri" panose="020F0502020204030204" pitchFamily="34" charset="0"/>
+                </a:rPr>
+                <a:t>               Tests of central tendencies</a:t>
+              </a:r>
+            </a:p>
+            <a:p>
+              <a:pPr marL="0" marR="0" lvl="0" indent="0" algn="ctr" defTabSz="914400" rtl="0" eaLnBrk="1" fontAlgn="auto" latinLnBrk="0" hangingPunct="1">
+                <a:lnSpc>
+                  <a:spcPct val="100000"/>
+                </a:lnSpc>
+                <a:spcBef>
+                  <a:spcPts val="0"/>
+                </a:spcBef>
+                <a:spcAft>
+                  <a:spcPts val="0"/>
+                </a:spcAft>
+                <a:buClrTx/>
+                <a:buSzTx/>
+                <a:buFontTx/>
+                <a:buNone/>
+                <a:tabLst/>
+                <a:defRPr/>
+              </a:pPr>
+              <a:endParaRPr kumimoji="0" lang="en-GB" sz="1200" b="0" i="0" u="none" strike="noStrike" kern="1200" cap="none" spc="0" normalizeH="0" baseline="0" noProof="0" dirty="0">
+                <a:ln>
+                  <a:noFill/>
+                </a:ln>
+                <a:solidFill>
+                  <a:prstClr val="black"/>
+                </a:solidFill>
+                <a:effectLst/>
+                <a:uLnTx/>
+                <a:uFillTx/>
+                <a:latin typeface="Calibri" panose="020F0502020204030204" pitchFamily="34" charset="0"/>
+                <a:ea typeface="Cambria Math" panose="02040503050406030204" pitchFamily="18" charset="0"/>
+                <a:cs typeface="Calibri" panose="020F0502020204030204" pitchFamily="34" charset="0"/>
+              </a:endParaRPr>
+            </a:p>
+            <a:p>
+              <a:pPr marL="0" marR="0" lvl="0" indent="0" algn="ctr" defTabSz="914400" rtl="0" eaLnBrk="1" fontAlgn="auto" latinLnBrk="0" hangingPunct="1">
+                <a:lnSpc>
+                  <a:spcPct val="100000"/>
+                </a:lnSpc>
+                <a:spcBef>
+                  <a:spcPts val="0"/>
+                </a:spcBef>
+                <a:spcAft>
+                  <a:spcPts val="0"/>
+                </a:spcAft>
+                <a:buClrTx/>
+                <a:buSzTx/>
+                <a:buFontTx/>
+                <a:buNone/>
+                <a:tabLst/>
+                <a:defRPr/>
+              </a:pPr>
+              <a:endParaRPr kumimoji="0" lang="en-GB" sz="1200" b="0" i="0" u="none" strike="noStrike" kern="1200" cap="none" spc="0" normalizeH="0" baseline="0" noProof="0" dirty="0">
+                <a:ln>
+                  <a:noFill/>
+                </a:ln>
+                <a:solidFill>
+                  <a:prstClr val="black"/>
+                </a:solidFill>
+                <a:effectLst/>
+                <a:uLnTx/>
+                <a:uFillTx/>
+                <a:latin typeface="Calibri" panose="020F0502020204030204" pitchFamily="34" charset="0"/>
+                <a:ea typeface="Cambria Math" panose="02040503050406030204" pitchFamily="18" charset="0"/>
+                <a:cs typeface="Calibri" panose="020F0502020204030204" pitchFamily="34" charset="0"/>
+              </a:endParaRPr>
+            </a:p>
+            <a:p>
+              <a:pPr marL="0" marR="0" lvl="0" indent="0" algn="ctr" defTabSz="914400" rtl="0" eaLnBrk="1" fontAlgn="auto" latinLnBrk="0" hangingPunct="1">
+                <a:lnSpc>
+                  <a:spcPct val="100000"/>
+                </a:lnSpc>
+                <a:spcBef>
+                  <a:spcPts val="0"/>
+                </a:spcBef>
+                <a:spcAft>
+                  <a:spcPts val="0"/>
+                </a:spcAft>
+                <a:buClrTx/>
+                <a:buSzTx/>
+                <a:buFontTx/>
+                <a:buNone/>
+                <a:tabLst/>
+                <a:defRPr/>
+              </a:pPr>
+              <a:endParaRPr kumimoji="0" lang="en-GB" sz="1200" b="0" i="0" u="none" strike="noStrike" kern="1200" cap="none" spc="0" normalizeH="0" baseline="0" noProof="0" dirty="0">
+                <a:ln>
+                  <a:noFill/>
+                </a:ln>
+                <a:solidFill>
+                  <a:prstClr val="black"/>
+                </a:solidFill>
+                <a:effectLst/>
+                <a:uLnTx/>
+                <a:uFillTx/>
+                <a:latin typeface="Calibri" panose="020F0502020204030204" pitchFamily="34" charset="0"/>
+                <a:ea typeface="Cambria Math" panose="02040503050406030204" pitchFamily="18" charset="0"/>
+                <a:cs typeface="Calibri" panose="020F0502020204030204" pitchFamily="34" charset="0"/>
+              </a:endParaRPr>
+            </a:p>
+            <a:p>
+              <a:pPr marL="0" marR="0" lvl="0" indent="0" algn="ctr" defTabSz="914400" rtl="0" eaLnBrk="1" fontAlgn="auto" latinLnBrk="0" hangingPunct="1">
+                <a:lnSpc>
+                  <a:spcPct val="100000"/>
+                </a:lnSpc>
+                <a:spcBef>
+                  <a:spcPts val="0"/>
+                </a:spcBef>
+                <a:spcAft>
+                  <a:spcPts val="0"/>
+                </a:spcAft>
+                <a:buClrTx/>
+                <a:buSzTx/>
+                <a:buFontTx/>
+                <a:buNone/>
+                <a:tabLst/>
+                <a:defRPr/>
+              </a:pPr>
+              <a:endParaRPr kumimoji="0" lang="en-GB" sz="1200" b="0" i="0" u="none" strike="noStrike" kern="1200" cap="none" spc="0" normalizeH="0" baseline="0" noProof="0" dirty="0">
+                <a:ln>
+                  <a:noFill/>
+                </a:ln>
+                <a:solidFill>
+                  <a:prstClr val="black"/>
+                </a:solidFill>
+                <a:effectLst/>
+                <a:uLnTx/>
+                <a:uFillTx/>
+                <a:latin typeface="Calibri" panose="020F0502020204030204" pitchFamily="34" charset="0"/>
+                <a:ea typeface="Cambria Math" panose="02040503050406030204" pitchFamily="18" charset="0"/>
+                <a:cs typeface="Calibri" panose="020F0502020204030204" pitchFamily="34" charset="0"/>
+              </a:endParaRPr>
+            </a:p>
+            <a:p>
+              <a:pPr marL="0" marR="0" lvl="0" indent="0" algn="ctr" defTabSz="914400" rtl="0" eaLnBrk="1" fontAlgn="auto" latinLnBrk="0" hangingPunct="1">
+                <a:lnSpc>
+                  <a:spcPct val="100000"/>
+                </a:lnSpc>
+                <a:spcBef>
+                  <a:spcPts val="0"/>
+                </a:spcBef>
+                <a:spcAft>
+                  <a:spcPts val="0"/>
+                </a:spcAft>
+                <a:buClrTx/>
+                <a:buSzTx/>
+                <a:buFontTx/>
+                <a:buNone/>
+                <a:tabLst/>
+                <a:defRPr/>
+              </a:pPr>
+              <a:endParaRPr kumimoji="0" lang="en-GB" sz="1200" b="0" i="0" u="none" strike="noStrike" kern="1200" cap="none" spc="0" normalizeH="0" baseline="0" noProof="0" dirty="0">
+                <a:ln>
+                  <a:noFill/>
+                </a:ln>
+                <a:solidFill>
+                  <a:prstClr val="black"/>
+                </a:solidFill>
+                <a:effectLst/>
+                <a:uLnTx/>
+                <a:uFillTx/>
+                <a:latin typeface="Calibri" panose="020F0502020204030204" pitchFamily="34" charset="0"/>
+                <a:ea typeface="Cambria Math" panose="02040503050406030204" pitchFamily="18" charset="0"/>
+                <a:cs typeface="Calibri" panose="020F0502020204030204" pitchFamily="34" charset="0"/>
+              </a:endParaRPr>
+            </a:p>
+            <a:p>
+              <a:pPr marL="0" marR="0" lvl="0" indent="0" algn="ctr" defTabSz="914400" rtl="0" eaLnBrk="1" fontAlgn="auto" latinLnBrk="0" hangingPunct="1">
+                <a:lnSpc>
+                  <a:spcPct val="100000"/>
+                </a:lnSpc>
+                <a:spcBef>
+                  <a:spcPts val="0"/>
+                </a:spcBef>
+                <a:spcAft>
+                  <a:spcPts val="0"/>
+                </a:spcAft>
+                <a:buClrTx/>
+                <a:buSzTx/>
+                <a:buFontTx/>
+                <a:buNone/>
+                <a:tabLst/>
+                <a:defRPr/>
+              </a:pPr>
+              <a:endParaRPr kumimoji="0" lang="en-GB" sz="1200" b="0" i="0" u="none" strike="noStrike" kern="1200" cap="none" spc="0" normalizeH="0" baseline="0" noProof="0" dirty="0">
+                <a:ln>
+                  <a:noFill/>
+                </a:ln>
+                <a:solidFill>
+                  <a:prstClr val="black"/>
+                </a:solidFill>
+                <a:effectLst/>
+                <a:uLnTx/>
+                <a:uFillTx/>
+                <a:latin typeface="Calibri" panose="020F0502020204030204" pitchFamily="34" charset="0"/>
+                <a:ea typeface="Cambria Math" panose="02040503050406030204" pitchFamily="18" charset="0"/>
+                <a:cs typeface="Calibri" panose="020F0502020204030204" pitchFamily="34" charset="0"/>
+              </a:endParaRPr>
+            </a:p>
+            <a:p>
+              <a:pPr marL="0" marR="0" lvl="0" indent="0" algn="ctr" defTabSz="914400" rtl="0" eaLnBrk="1" fontAlgn="auto" latinLnBrk="0" hangingPunct="1">
+                <a:lnSpc>
+                  <a:spcPct val="100000"/>
+                </a:lnSpc>
+                <a:spcBef>
+                  <a:spcPts val="0"/>
+                </a:spcBef>
+                <a:spcAft>
+                  <a:spcPts val="0"/>
+                </a:spcAft>
+                <a:buClrTx/>
+                <a:buSzTx/>
+                <a:buFontTx/>
+                <a:buNone/>
+                <a:tabLst/>
+                <a:defRPr/>
+              </a:pPr>
+              <a:endParaRPr kumimoji="0" lang="en-GB" sz="1200" b="0" i="0" u="none" strike="noStrike" kern="1200" cap="none" spc="0" normalizeH="0" baseline="0" noProof="0" dirty="0">
+                <a:ln>
+                  <a:noFill/>
+                </a:ln>
+                <a:solidFill>
+                  <a:prstClr val="black"/>
+                </a:solidFill>
+                <a:effectLst/>
+                <a:uLnTx/>
+                <a:uFillTx/>
+                <a:latin typeface="Calibri" panose="020F0502020204030204" pitchFamily="34" charset="0"/>
+                <a:ea typeface="Cambria Math" panose="02040503050406030204" pitchFamily="18" charset="0"/>
+                <a:cs typeface="Calibri" panose="020F0502020204030204" pitchFamily="34" charset="0"/>
+              </a:endParaRPr>
+            </a:p>
+            <a:p>
+              <a:pPr marL="0" marR="0" lvl="0" indent="0" algn="ctr" defTabSz="914400" rtl="0" eaLnBrk="1" fontAlgn="auto" latinLnBrk="0" hangingPunct="1">
+                <a:lnSpc>
+                  <a:spcPct val="100000"/>
+                </a:lnSpc>
+                <a:spcBef>
+                  <a:spcPts val="0"/>
+                </a:spcBef>
+                <a:spcAft>
+                  <a:spcPts val="0"/>
+                </a:spcAft>
+                <a:buClrTx/>
+                <a:buSzTx/>
+                <a:buFontTx/>
+                <a:buNone/>
+                <a:tabLst/>
+                <a:defRPr/>
+              </a:pPr>
+              <a:endParaRPr kumimoji="0" lang="en-GB" sz="1200" b="0" i="0" u="none" strike="noStrike" kern="1200" cap="none" spc="0" normalizeH="0" baseline="0" noProof="0" dirty="0">
+                <a:ln>
+                  <a:noFill/>
+                </a:ln>
+                <a:solidFill>
+                  <a:prstClr val="black"/>
+                </a:solidFill>
+                <a:effectLst/>
+                <a:uLnTx/>
+                <a:uFillTx/>
+                <a:latin typeface="Calibri" panose="020F0502020204030204" pitchFamily="34" charset="0"/>
+                <a:ea typeface="Cambria Math" panose="02040503050406030204" pitchFamily="18" charset="0"/>
+                <a:cs typeface="Calibri" panose="020F0502020204030204" pitchFamily="34" charset="0"/>
+              </a:endParaRPr>
+            </a:p>
+            <a:p>
+              <a:pPr marL="0" marR="0" lvl="0" indent="0" algn="ctr" defTabSz="914400" rtl="0" eaLnBrk="1" fontAlgn="auto" latinLnBrk="0" hangingPunct="1">
+                <a:lnSpc>
+                  <a:spcPct val="100000"/>
+                </a:lnSpc>
+                <a:spcBef>
+                  <a:spcPts val="0"/>
+                </a:spcBef>
+                <a:spcAft>
+                  <a:spcPts val="0"/>
+                </a:spcAft>
+                <a:buClrTx/>
+                <a:buSzTx/>
+                <a:buFontTx/>
+                <a:buNone/>
+                <a:tabLst/>
+                <a:defRPr/>
+              </a:pPr>
+              <a:endParaRPr kumimoji="0" lang="en-GB" sz="1200" b="0" i="0" u="none" strike="noStrike" kern="1200" cap="none" spc="0" normalizeH="0" baseline="0" noProof="0" dirty="0">
+                <a:ln>
+                  <a:noFill/>
+                </a:ln>
+                <a:solidFill>
+                  <a:prstClr val="black"/>
+                </a:solidFill>
+                <a:effectLst/>
+                <a:uLnTx/>
+                <a:uFillTx/>
+                <a:latin typeface="Calibri" panose="020F0502020204030204" pitchFamily="34" charset="0"/>
+                <a:ea typeface="Cambria Math" panose="02040503050406030204" pitchFamily="18" charset="0"/>
+                <a:cs typeface="Calibri" panose="020F0502020204030204" pitchFamily="34" charset="0"/>
+              </a:endParaRPr>
+            </a:p>
+            <a:p>
+              <a:pPr marL="0" marR="0" lvl="0" indent="0" algn="ctr" defTabSz="914400" rtl="0" eaLnBrk="1" fontAlgn="auto" latinLnBrk="0" hangingPunct="1">
+                <a:lnSpc>
+                  <a:spcPct val="100000"/>
+                </a:lnSpc>
+                <a:spcBef>
+                  <a:spcPts val="0"/>
+                </a:spcBef>
+                <a:spcAft>
+                  <a:spcPts val="0"/>
+                </a:spcAft>
+                <a:buClrTx/>
+                <a:buSzTx/>
+                <a:buFontTx/>
+                <a:buNone/>
+                <a:tabLst/>
+                <a:defRPr/>
+              </a:pPr>
+              <a:endParaRPr kumimoji="0" lang="en-GB" sz="1200" b="0" i="0" u="none" strike="noStrike" kern="1200" cap="none" spc="0" normalizeH="0" baseline="0" noProof="0" dirty="0">
+                <a:ln>
+                  <a:noFill/>
+                </a:ln>
+                <a:solidFill>
+                  <a:prstClr val="black"/>
+                </a:solidFill>
+                <a:effectLst/>
+                <a:uLnTx/>
+                <a:uFillTx/>
+                <a:latin typeface="Calibri" panose="020F0502020204030204" pitchFamily="34" charset="0"/>
+                <a:ea typeface="Cambria Math" panose="02040503050406030204" pitchFamily="18" charset="0"/>
+                <a:cs typeface="Calibri" panose="020F0502020204030204" pitchFamily="34" charset="0"/>
+              </a:endParaRPr>
+            </a:p>
+            <a:p>
+              <a:pPr marL="0" marR="0" lvl="0" indent="0" algn="ctr" defTabSz="914400" rtl="0" eaLnBrk="1" fontAlgn="auto" latinLnBrk="0" hangingPunct="1">
+                <a:lnSpc>
+                  <a:spcPct val="100000"/>
+                </a:lnSpc>
+                <a:spcBef>
+                  <a:spcPts val="0"/>
+                </a:spcBef>
+                <a:spcAft>
+                  <a:spcPts val="0"/>
+                </a:spcAft>
+                <a:buClrTx/>
+                <a:buSzTx/>
+                <a:buFontTx/>
+                <a:buNone/>
+                <a:tabLst/>
+                <a:defRPr/>
+              </a:pPr>
+              <a:endParaRPr kumimoji="0" lang="en-GB" sz="1200" b="0" i="0" u="none" strike="noStrike" kern="1200" cap="none" spc="0" normalizeH="0" baseline="0" noProof="0" dirty="0">
+                <a:ln>
+                  <a:noFill/>
+                </a:ln>
+                <a:solidFill>
+                  <a:prstClr val="black"/>
+                </a:solidFill>
+                <a:effectLst/>
+                <a:uLnTx/>
+                <a:uFillTx/>
+                <a:latin typeface="Calibri" panose="020F0502020204030204" pitchFamily="34" charset="0"/>
+                <a:ea typeface="Cambria Math" panose="02040503050406030204" pitchFamily="18" charset="0"/>
+                <a:cs typeface="Calibri" panose="020F0502020204030204" pitchFamily="34" charset="0"/>
+              </a:endParaRPr>
+            </a:p>
+            <a:p>
+              <a:pPr marL="0" marR="0" lvl="0" indent="0" algn="ctr" defTabSz="914400" rtl="0" eaLnBrk="1" fontAlgn="auto" latinLnBrk="0" hangingPunct="1">
+                <a:lnSpc>
+                  <a:spcPct val="100000"/>
+                </a:lnSpc>
+                <a:spcBef>
+                  <a:spcPts val="0"/>
+                </a:spcBef>
+                <a:spcAft>
+                  <a:spcPts val="0"/>
+                </a:spcAft>
+                <a:buClrTx/>
+                <a:buSzTx/>
+                <a:buFontTx/>
+                <a:buNone/>
+                <a:tabLst/>
+                <a:defRPr/>
+              </a:pPr>
+              <a:endParaRPr kumimoji="0" lang="en-GB" sz="1200" b="0" i="0" u="none" strike="noStrike" kern="1200" cap="none" spc="0" normalizeH="0" baseline="0" noProof="0" dirty="0">
+                <a:ln>
+                  <a:noFill/>
+                </a:ln>
+                <a:solidFill>
+                  <a:prstClr val="black"/>
+                </a:solidFill>
+                <a:effectLst/>
+                <a:uLnTx/>
+                <a:uFillTx/>
+                <a:latin typeface="Calibri" panose="020F0502020204030204" pitchFamily="34" charset="0"/>
+                <a:ea typeface="Cambria Math" panose="02040503050406030204" pitchFamily="18" charset="0"/>
+                <a:cs typeface="Calibri" panose="020F0502020204030204" pitchFamily="34" charset="0"/>
+              </a:endParaRPr>
+            </a:p>
+            <a:p>
+              <a:pPr marL="0" marR="0" lvl="0" indent="0" algn="ctr" defTabSz="914400" rtl="0" eaLnBrk="1" fontAlgn="auto" latinLnBrk="0" hangingPunct="1">
+                <a:lnSpc>
+                  <a:spcPct val="100000"/>
+                </a:lnSpc>
+                <a:spcBef>
+                  <a:spcPts val="0"/>
+                </a:spcBef>
+                <a:spcAft>
+                  <a:spcPts val="0"/>
+                </a:spcAft>
+                <a:buClrTx/>
+                <a:buSzTx/>
+                <a:buFontTx/>
+                <a:buNone/>
+                <a:tabLst/>
+                <a:defRPr/>
+              </a:pPr>
+              <a:endParaRPr kumimoji="0" lang="en-GB" sz="1200" b="0" i="0" u="none" strike="noStrike" kern="1200" cap="none" spc="0" normalizeH="0" baseline="0" noProof="0" dirty="0">
+                <a:ln>
+                  <a:noFill/>
+                </a:ln>
+                <a:solidFill>
+                  <a:prstClr val="black"/>
+                </a:solidFill>
+                <a:effectLst/>
+                <a:uLnTx/>
+                <a:uFillTx/>
+                <a:latin typeface="Calibri" panose="020F0502020204030204" pitchFamily="34" charset="0"/>
+                <a:ea typeface="Cambria Math" panose="02040503050406030204" pitchFamily="18" charset="0"/>
+                <a:cs typeface="Calibri" panose="020F0502020204030204" pitchFamily="34" charset="0"/>
+              </a:endParaRPr>
+            </a:p>
+            <a:p>
+              <a:pPr marL="0" marR="0" lvl="0" indent="0" algn="ctr" defTabSz="914400" rtl="0" eaLnBrk="1" fontAlgn="auto" latinLnBrk="0" hangingPunct="1">
+                <a:lnSpc>
+                  <a:spcPct val="100000"/>
+                </a:lnSpc>
+                <a:spcBef>
+                  <a:spcPts val="0"/>
+                </a:spcBef>
+                <a:spcAft>
+                  <a:spcPts val="0"/>
+                </a:spcAft>
+                <a:buClrTx/>
+                <a:buSzTx/>
+                <a:buFontTx/>
+                <a:buNone/>
+                <a:tabLst/>
+                <a:defRPr/>
+              </a:pPr>
+              <a:r>
+                <a:rPr kumimoji="0" lang="en-GB" sz="1200" b="0" i="0" u="none" strike="noStrike" kern="1200" cap="none" spc="0" normalizeH="0" baseline="0" noProof="0" dirty="0">
+                  <a:ln>
+                    <a:noFill/>
+                  </a:ln>
+                  <a:solidFill>
+                    <a:prstClr val="black"/>
+                  </a:solidFill>
+                  <a:effectLst/>
+                  <a:uLnTx/>
+                  <a:uFillTx/>
+                  <a:latin typeface="Calibri" panose="020F0502020204030204" pitchFamily="34" charset="0"/>
+                  <a:ea typeface="Cambria Math" panose="02040503050406030204" pitchFamily="18" charset="0"/>
+                  <a:cs typeface="Calibri" panose="020F0502020204030204" pitchFamily="34" charset="0"/>
+                </a:rPr>
+                <a:t> </a:t>
+              </a:r>
+              <a:endParaRPr kumimoji="0" lang="en-GB" sz="1200" b="0" i="0" u="none" strike="noStrike" kern="1200" cap="none" spc="0" normalizeH="0" baseline="0" noProof="0" dirty="0">
+                <a:ln>
+                  <a:noFill/>
+                </a:ln>
+                <a:solidFill>
+                  <a:prstClr val="black"/>
+                </a:solidFill>
+                <a:effectLst/>
+                <a:uLnTx/>
+                <a:uFillTx/>
+                <a:latin typeface="Courier New" panose="02070309020205020404" pitchFamily="49" charset="0"/>
+                <a:ea typeface="Cambria Math" panose="02040503050406030204" pitchFamily="18" charset="0"/>
+                <a:cs typeface="Courier New" panose="02070309020205020404" pitchFamily="49" charset="0"/>
+              </a:endParaRPr>
+            </a:p>
+          </p:txBody>
+        </p:sp>
+        <mc:AlternateContent xmlns:mc="http://schemas.openxmlformats.org/markup-compatibility/2006" xmlns:a14="http://schemas.microsoft.com/office/drawing/2010/main">
+          <mc:Choice Requires="a14">
+            <p:sp>
+              <p:nvSpPr>
+                <p:cNvPr id="6" name="Textfeld 5">
+                  <a:extLst>
+                    <a:ext uri="{FF2B5EF4-FFF2-40B4-BE49-F238E27FC236}">
+                      <a16:creationId xmlns:a16="http://schemas.microsoft.com/office/drawing/2014/main" id="{850F5D96-EAD6-2EF1-FC49-CD5ADD5C2CF4}"/>
+                    </a:ext>
+                  </a:extLst>
+                </p:cNvPr>
+                <p:cNvSpPr txBox="1"/>
+                <p:nvPr/>
+              </p:nvSpPr>
+              <p:spPr>
+                <a:xfrm>
+                  <a:off x="5554090" y="1099225"/>
+                  <a:ext cx="5400000" cy="461665"/>
+                </a:xfrm>
+                <a:prstGeom prst="rect">
+                  <a:avLst/>
+                </a:prstGeom>
+                <a:solidFill>
+                  <a:schemeClr val="accent4">
+                    <a:alpha val="20000"/>
+                  </a:schemeClr>
+                </a:solidFill>
+                <a:ln w="12700">
+                  <a:solidFill>
+                    <a:schemeClr val="tx1"/>
+                  </a:solidFill>
+                </a:ln>
+              </p:spPr>
+              <p:txBody>
+                <a:bodyPr wrap="square">
+                  <a:spAutoFit/>
+                </a:bodyPr>
+                <a:lstStyle>
+                  <a:defPPr>
+                    <a:defRPr lang="de-DE"/>
+                  </a:defPPr>
+                </a:lstStyle>
+                <a:p>
+                  <a:pPr marL="0" marR="0" lvl="0" indent="0" algn="ctr" defTabSz="914400" rtl="0" eaLnBrk="1" fontAlgn="auto" latinLnBrk="0" hangingPunct="1">
+                    <a:lnSpc>
+                      <a:spcPct val="100000"/>
+                    </a:lnSpc>
+                    <a:spcBef>
+                      <a:spcPts val="0"/>
+                    </a:spcBef>
+                    <a:spcAft>
+                      <a:spcPts val="0"/>
+                    </a:spcAft>
+                    <a:buClrTx/>
+                    <a:buSzTx/>
+                    <a:buFontTx/>
+                    <a:buNone/>
+                    <a:tabLst/>
+                    <a:defRPr/>
+                  </a:pPr>
+                  <a:r>
+                    <a:rPr kumimoji="0" lang="en-US" sz="1200" b="0" i="0" u="none" strike="noStrike" kern="1200" cap="none" spc="0" normalizeH="0" baseline="0" noProof="0" dirty="0">
+                      <a:ln>
+                        <a:noFill/>
+                      </a:ln>
+                      <a:solidFill>
+                        <a:prstClr val="black"/>
+                      </a:solidFill>
+                      <a:effectLst/>
+                      <a:uLnTx/>
+                      <a:uFillTx/>
+                      <a:latin typeface="Calibri" panose="020F0502020204030204"/>
+                      <a:ea typeface="Cambria Math" panose="02040503050406030204" pitchFamily="18" charset="0"/>
+                      <a:cs typeface="+mn-cs"/>
+                    </a:rPr>
+                    <a:t>parametric tests: </a:t>
+                  </a:r>
+                  <a14:m>
+                    <m:oMath xmlns:m="http://schemas.openxmlformats.org/officeDocument/2006/math">
+                      <m:r>
+                        <a:rPr kumimoji="0" lang="en-US" sz="1200" b="0" i="1" u="none" strike="noStrike" kern="1200" cap="none" spc="0" normalizeH="0" baseline="0" noProof="0" smtClean="0">
+                          <a:ln>
+                            <a:noFill/>
+                          </a:ln>
+                          <a:solidFill>
+                            <a:prstClr val="black"/>
+                          </a:solidFill>
+                          <a:effectLst/>
+                          <a:uLnTx/>
+                          <a:uFillTx/>
+                          <a:latin typeface="Cambria Math" panose="02040503050406030204" pitchFamily="18" charset="0"/>
+                          <a:ea typeface="Cambria Math" panose="02040503050406030204" pitchFamily="18" charset="0"/>
+                          <a:cs typeface="+mn-cs"/>
+                        </a:rPr>
+                        <m:t> </m:t>
+                      </m:r>
+                      <m:r>
+                        <a:rPr kumimoji="0" lang="en-US" sz="1200" b="0" i="1" u="none" strike="noStrike" kern="1200" cap="none" spc="0" normalizeH="0" baseline="0" noProof="0" smtClean="0">
+                          <a:ln>
+                            <a:noFill/>
+                          </a:ln>
+                          <a:solidFill>
+                            <a:prstClr val="black"/>
+                          </a:solidFill>
+                          <a:effectLst/>
+                          <a:uLnTx/>
+                          <a:uFillTx/>
+                          <a:latin typeface="Cambria Math" panose="02040503050406030204" pitchFamily="18" charset="0"/>
+                          <a:ea typeface="Cambria Math" panose="02040503050406030204" pitchFamily="18" charset="0"/>
+                          <a:cs typeface="+mn-cs"/>
+                        </a:rPr>
+                        <m:t>𝑘</m:t>
+                      </m:r>
+                      <m:r>
+                        <a:rPr kumimoji="0" lang="en-US" sz="1200" b="0" i="1" u="none" strike="noStrike" kern="1200" cap="none" spc="0" normalizeH="0" baseline="0" noProof="0">
+                          <a:ln>
+                            <a:noFill/>
+                          </a:ln>
+                          <a:solidFill>
+                            <a:prstClr val="black"/>
+                          </a:solidFill>
+                          <a:effectLst/>
+                          <a:uLnTx/>
+                          <a:uFillTx/>
+                          <a:latin typeface="Cambria Math" panose="02040503050406030204" pitchFamily="18" charset="0"/>
+                          <a:ea typeface="Cambria Math" panose="02040503050406030204" pitchFamily="18" charset="0"/>
+                          <a:cs typeface="+mn-cs"/>
+                        </a:rPr>
+                        <m:t>=2</m:t>
+                      </m:r>
+                    </m:oMath>
+                  </a14:m>
+                  <a:r>
+                    <a:rPr kumimoji="0" lang="en-GB" sz="1200" b="0" i="0" u="none" strike="noStrike" kern="1200" cap="none" spc="0" normalizeH="0" baseline="0" noProof="0" dirty="0">
+                      <a:ln>
+                        <a:noFill/>
+                      </a:ln>
+                      <a:solidFill>
+                        <a:prstClr val="black"/>
+                      </a:solidFill>
+                      <a:effectLst/>
+                      <a:uLnTx/>
+                      <a:uFillTx/>
+                      <a:latin typeface="Courier New" panose="02070309020205020404" pitchFamily="49" charset="0"/>
+                      <a:ea typeface="Cambria Math" panose="02040503050406030204" pitchFamily="18" charset="0"/>
+                      <a:cs typeface="Courier New" panose="02070309020205020404" pitchFamily="49" charset="0"/>
+                    </a:rPr>
+                    <a:t>: </a:t>
+                  </a:r>
+                  <a:r>
+                    <a:rPr kumimoji="0" lang="en-GB" sz="1200" b="0" i="0" u="none" strike="noStrike" kern="1200" cap="none" spc="0" normalizeH="0" baseline="0" noProof="0" dirty="0" err="1">
+                      <a:ln>
+                        <a:noFill/>
+                      </a:ln>
+                      <a:solidFill>
+                        <a:prstClr val="black"/>
+                      </a:solidFill>
+                      <a:effectLst/>
+                      <a:uLnTx/>
+                      <a:uFillTx/>
+                      <a:latin typeface="Courier New" panose="02070309020205020404" pitchFamily="49" charset="0"/>
+                      <a:ea typeface="Cambria Math" panose="02040503050406030204" pitchFamily="18" charset="0"/>
+                      <a:cs typeface="Courier New" panose="02070309020205020404" pitchFamily="49" charset="0"/>
+                    </a:rPr>
+                    <a:t>t.test</a:t>
+                  </a:r>
+                  <a:r>
+                    <a:rPr kumimoji="0" lang="en-GB" sz="1200" b="0" i="0" u="none" strike="noStrike" kern="1200" cap="none" spc="0" normalizeH="0" baseline="0" noProof="0" dirty="0">
+                      <a:ln>
+                        <a:noFill/>
+                      </a:ln>
+                      <a:solidFill>
+                        <a:prstClr val="black"/>
+                      </a:solidFill>
+                      <a:effectLst/>
+                      <a:uLnTx/>
+                      <a:uFillTx/>
+                      <a:latin typeface="Courier New" panose="02070309020205020404" pitchFamily="49" charset="0"/>
+                      <a:ea typeface="Cambria Math" panose="02040503050406030204" pitchFamily="18" charset="0"/>
+                      <a:cs typeface="Courier New" panose="02070309020205020404" pitchFamily="49" charset="0"/>
+                    </a:rPr>
+                    <a:t>(),</a:t>
+                  </a:r>
+                  <a:br>
+                    <a:rPr kumimoji="0" lang="en-GB" sz="1200" b="0" i="0" u="none" strike="noStrike" kern="1200" cap="none" spc="0" normalizeH="0" baseline="0" noProof="0" dirty="0">
+                      <a:ln>
+                        <a:noFill/>
+                      </a:ln>
+                      <a:solidFill>
+                        <a:prstClr val="black"/>
+                      </a:solidFill>
+                      <a:effectLst/>
+                      <a:uLnTx/>
+                      <a:uFillTx/>
+                      <a:latin typeface="Courier New" panose="02070309020205020404" pitchFamily="49" charset="0"/>
+                      <a:ea typeface="Cambria Math" panose="02040503050406030204" pitchFamily="18" charset="0"/>
+                      <a:cs typeface="Courier New" panose="02070309020205020404" pitchFamily="49" charset="0"/>
+                    </a:rPr>
+                  </a:br>
+                  <a:r>
+                    <a:rPr kumimoji="0" lang="en-GB" sz="1200" b="0" i="0" u="none" strike="noStrike" kern="1200" cap="none" spc="0" normalizeH="0" baseline="0" noProof="0" dirty="0">
+                      <a:ln>
+                        <a:noFill/>
+                      </a:ln>
+                      <a:solidFill>
+                        <a:prstClr val="black"/>
+                      </a:solidFill>
+                      <a:effectLst/>
+                      <a:uLnTx/>
+                      <a:uFillTx/>
+                      <a:latin typeface="Courier New" panose="02070309020205020404" pitchFamily="49" charset="0"/>
+                      <a:ea typeface="Cambria Math" panose="02040503050406030204" pitchFamily="18" charset="0"/>
+                      <a:cs typeface="Courier New" panose="02070309020205020404" pitchFamily="49" charset="0"/>
+                    </a:rPr>
+                    <a:t>                     </a:t>
+                  </a:r>
+                  <a14:m>
+                    <m:oMath xmlns:m="http://schemas.openxmlformats.org/officeDocument/2006/math">
+                      <m:r>
+                        <a:rPr kumimoji="0" lang="en-US" sz="1200" b="0" i="1" u="none" strike="noStrike" kern="1200" cap="none" spc="0" normalizeH="0" baseline="0" noProof="0" smtClean="0">
+                          <a:ln>
+                            <a:noFill/>
+                          </a:ln>
+                          <a:solidFill>
+                            <a:prstClr val="black"/>
+                          </a:solidFill>
+                          <a:effectLst/>
+                          <a:uLnTx/>
+                          <a:uFillTx/>
+                          <a:latin typeface="Cambria Math" panose="02040503050406030204" pitchFamily="18" charset="0"/>
+                          <a:ea typeface="Cambria Math" panose="02040503050406030204" pitchFamily="18" charset="0"/>
+                          <a:cs typeface="+mn-cs"/>
+                        </a:rPr>
+                        <m:t>𝑘</m:t>
+                      </m:r>
+                      <m:r>
+                        <a:rPr kumimoji="0" lang="en-US" sz="1200" b="0" i="1" u="none" strike="noStrike" kern="1200" cap="none" spc="0" normalizeH="0" baseline="0" noProof="0">
+                          <a:ln>
+                            <a:noFill/>
+                          </a:ln>
+                          <a:solidFill>
+                            <a:prstClr val="black"/>
+                          </a:solidFill>
+                          <a:effectLst/>
+                          <a:uLnTx/>
+                          <a:uFillTx/>
+                          <a:latin typeface="Cambria Math" panose="02040503050406030204" pitchFamily="18" charset="0"/>
+                          <a:ea typeface="Cambria Math" panose="02040503050406030204" pitchFamily="18" charset="0"/>
+                          <a:cs typeface="+mn-cs"/>
+                        </a:rPr>
+                        <m:t>&gt;2</m:t>
+                      </m:r>
+                    </m:oMath>
+                  </a14:m>
+                  <a:r>
+                    <a:rPr kumimoji="0" lang="en-GB" sz="1200" b="0" i="0" u="none" strike="noStrike" kern="1200" cap="none" spc="0" normalizeH="0" baseline="0" noProof="0" dirty="0">
+                      <a:ln>
+                        <a:noFill/>
+                      </a:ln>
+                      <a:solidFill>
+                        <a:prstClr val="black"/>
+                      </a:solidFill>
+                      <a:effectLst/>
+                      <a:uLnTx/>
+                      <a:uFillTx/>
+                      <a:latin typeface="Courier New" panose="02070309020205020404" pitchFamily="49" charset="0"/>
+                      <a:ea typeface="Cambria Math" panose="02040503050406030204" pitchFamily="18" charset="0"/>
+                      <a:cs typeface="Courier New" panose="02070309020205020404" pitchFamily="49" charset="0"/>
+                    </a:rPr>
+                    <a:t>: </a:t>
+                  </a:r>
+                  <a:r>
+                    <a:rPr kumimoji="0" lang="en-GB" sz="1200" b="0" i="0" u="none" strike="noStrike" kern="1200" cap="none" spc="0" normalizeH="0" baseline="0" noProof="0" dirty="0" err="1">
+                      <a:ln>
+                        <a:noFill/>
+                      </a:ln>
+                      <a:solidFill>
+                        <a:prstClr val="black"/>
+                      </a:solidFill>
+                      <a:effectLst/>
+                      <a:uLnTx/>
+                      <a:uFillTx/>
+                      <a:latin typeface="Courier New" panose="02070309020205020404" pitchFamily="49" charset="0"/>
+                      <a:ea typeface="Cambria Math" panose="02040503050406030204" pitchFamily="18" charset="0"/>
+                      <a:cs typeface="Courier New" panose="02070309020205020404" pitchFamily="49" charset="0"/>
+                    </a:rPr>
+                    <a:t>aov</a:t>
+                  </a:r>
+                  <a:r>
+                    <a:rPr kumimoji="0" lang="en-GB" sz="1200" b="0" i="0" u="none" strike="noStrike" kern="1200" cap="none" spc="0" normalizeH="0" baseline="0" noProof="0" dirty="0">
+                      <a:ln>
+                        <a:noFill/>
+                      </a:ln>
+                      <a:solidFill>
+                        <a:prstClr val="black"/>
+                      </a:solidFill>
+                      <a:effectLst/>
+                      <a:uLnTx/>
+                      <a:uFillTx/>
+                      <a:latin typeface="Courier New" panose="02070309020205020404" pitchFamily="49" charset="0"/>
+                      <a:ea typeface="Cambria Math" panose="02040503050406030204" pitchFamily="18" charset="0"/>
+                      <a:cs typeface="Courier New" panose="02070309020205020404" pitchFamily="49" charset="0"/>
+                    </a:rPr>
+                    <a:t>(), </a:t>
+                  </a:r>
+                  <a:r>
+                    <a:rPr kumimoji="0" lang="en-GB" sz="1200" b="0" i="0" u="none" strike="noStrike" kern="1200" cap="none" spc="0" normalizeH="0" baseline="0" noProof="0" dirty="0" err="1">
+                      <a:ln>
+                        <a:noFill/>
+                      </a:ln>
+                      <a:solidFill>
+                        <a:prstClr val="black"/>
+                      </a:solidFill>
+                      <a:effectLst/>
+                      <a:uLnTx/>
+                      <a:uFillTx/>
+                      <a:latin typeface="Courier New" panose="02070309020205020404" pitchFamily="49" charset="0"/>
+                      <a:ea typeface="Cambria Math" panose="02040503050406030204" pitchFamily="18" charset="0"/>
+                      <a:cs typeface="Courier New" panose="02070309020205020404" pitchFamily="49" charset="0"/>
+                    </a:rPr>
+                    <a:t>oneway.test</a:t>
+                  </a:r>
+                  <a:endParaRPr kumimoji="0" lang="en-GB" sz="1200" b="0" i="0" u="none" strike="noStrike" kern="1200" cap="none" spc="0" normalizeH="0" baseline="0" noProof="0" dirty="0">
+                    <a:ln>
+                      <a:noFill/>
+                    </a:ln>
+                    <a:solidFill>
+                      <a:prstClr val="black"/>
+                    </a:solidFill>
+                    <a:effectLst/>
+                    <a:uLnTx/>
+                    <a:uFillTx/>
+                    <a:latin typeface="Courier New" panose="02070309020205020404" pitchFamily="49" charset="0"/>
+                    <a:ea typeface="Cambria Math" panose="02040503050406030204" pitchFamily="18" charset="0"/>
+                    <a:cs typeface="Courier New" panose="02070309020205020404" pitchFamily="49" charset="0"/>
+                  </a:endParaRPr>
+                </a:p>
+              </p:txBody>
+            </p:sp>
+          </mc:Choice>
+          <mc:Fallback xmlns="">
+            <p:sp>
+              <p:nvSpPr>
+                <p:cNvPr id="6" name="Textfeld 5">
+                  <a:extLst>
+                    <a:ext uri="{FF2B5EF4-FFF2-40B4-BE49-F238E27FC236}">
+                      <a16:creationId xmlns:a16="http://schemas.microsoft.com/office/drawing/2014/main" id="{850F5D96-EAD6-2EF1-FC49-CD5ADD5C2CF4}"/>
+                    </a:ext>
+                  </a:extLst>
+                </p:cNvPr>
+                <p:cNvSpPr txBox="1">
+                  <a:spLocks noRot="1" noChangeAspect="1" noMove="1" noResize="1" noEditPoints="1" noAdjustHandles="1" noChangeArrowheads="1" noChangeShapeType="1" noTextEdit="1"/>
+                </p:cNvSpPr>
+                <p:nvPr/>
+              </p:nvSpPr>
+              <p:spPr>
+                <a:xfrm>
+                  <a:off x="5554090" y="1099225"/>
+                  <a:ext cx="5400000" cy="461665"/>
+                </a:xfrm>
+                <a:prstGeom prst="rect">
+                  <a:avLst/>
+                </a:prstGeom>
+                <a:blipFill>
+                  <a:blip r:embed="rId3"/>
+                  <a:stretch>
+                    <a:fillRect b="-7692"/>
+                  </a:stretch>
+                </a:blipFill>
+                <a:ln w="12700">
+                  <a:solidFill>
+                    <a:schemeClr val="tx1"/>
+                  </a:solidFill>
+                </a:ln>
+              </p:spPr>
+              <p:txBody>
+                <a:bodyPr/>
+                <a:lstStyle/>
+                <a:p>
+                  <a:r>
+                    <a:rPr lang="de-DE">
+                      <a:noFill/>
+                    </a:rPr>
+                    <a:t> </a:t>
+                  </a:r>
+                </a:p>
+              </p:txBody>
+            </p:sp>
+          </mc:Fallback>
+        </mc:AlternateContent>
+        <p:sp>
+          <p:nvSpPr>
+            <p:cNvPr id="8" name="Textfeld 7">
+              <a:extLst>
+                <a:ext uri="{FF2B5EF4-FFF2-40B4-BE49-F238E27FC236}">
+                  <a16:creationId xmlns:a16="http://schemas.microsoft.com/office/drawing/2014/main" id="{1259E59C-91A3-35E8-5F00-0D83BB6F2314}"/>
+                </a:ext>
+              </a:extLst>
+            </p:cNvPr>
+            <p:cNvSpPr txBox="1">
+              <a:spLocks/>
+            </p:cNvSpPr>
+            <p:nvPr/>
+          </p:nvSpPr>
+          <p:spPr>
+            <a:xfrm>
+              <a:off x="732015" y="4040348"/>
+              <a:ext cx="4320000" cy="720000"/>
+            </a:xfrm>
+            <a:prstGeom prst="rect">
+              <a:avLst/>
+            </a:prstGeom>
+            <a:solidFill>
+              <a:schemeClr val="accent2">
+                <a:lumMod val="20000"/>
+                <a:lumOff val="80000"/>
+              </a:schemeClr>
+            </a:solidFill>
+            <a:ln w="12700">
+              <a:solidFill>
+                <a:schemeClr val="tx1"/>
+              </a:solidFill>
+            </a:ln>
+          </p:spPr>
+          <p:txBody>
+            <a:bodyPr wrap="square">
+              <a:spAutoFit/>
+            </a:bodyPr>
+            <a:lstStyle/>
+            <a:p>
+              <a:pPr marL="171450" marR="0" lvl="0" indent="-171450" algn="l" defTabSz="914400" rtl="0" eaLnBrk="1" fontAlgn="auto" latinLnBrk="0" hangingPunct="1">
+                <a:lnSpc>
+                  <a:spcPct val="100000"/>
+                </a:lnSpc>
+                <a:spcBef>
+                  <a:spcPts val="0"/>
+                </a:spcBef>
+                <a:spcAft>
+                  <a:spcPts val="0"/>
+                </a:spcAft>
+                <a:buClrTx/>
+                <a:buSzTx/>
+                <a:buFont typeface="Arial" panose="020B0604020202020204" pitchFamily="34" charset="0"/>
+                <a:buChar char="•"/>
+                <a:tabLst/>
+                <a:defRPr/>
+              </a:pPr>
+              <a:r>
+                <a:rPr kumimoji="0" lang="en-GB" sz="1200" b="0" i="0" u="none" strike="noStrike" kern="1200" cap="none" spc="0" normalizeH="0" baseline="0" noProof="0" dirty="0">
+                  <a:ln>
+                    <a:noFill/>
+                  </a:ln>
+                  <a:solidFill>
+                    <a:prstClr val="black"/>
+                  </a:solidFill>
+                  <a:effectLst/>
+                  <a:uLnTx/>
+                  <a:uFillTx/>
+                  <a:latin typeface="Calibri" panose="020F0502020204030204" pitchFamily="34" charset="0"/>
+                  <a:ea typeface="Cambria Math" panose="02040503050406030204" pitchFamily="18" charset="0"/>
+                  <a:cs typeface="Calibri" panose="020F0502020204030204" pitchFamily="34" charset="0"/>
+                </a:rPr>
+                <a:t>Numeric  predictor of </a:t>
+              </a:r>
+              <a:r>
+                <a:rPr kumimoji="0" lang="en-GB" sz="1200" b="0" i="0" u="none" strike="noStrike" kern="1200" cap="none" spc="0" normalizeH="0" baseline="0" noProof="0" dirty="0">
+                  <a:ln>
+                    <a:noFill/>
+                  </a:ln>
+                  <a:solidFill>
+                    <a:prstClr val="black"/>
+                  </a:solidFill>
+                  <a:effectLst/>
+                  <a:uLnTx/>
+                  <a:uFillTx/>
+                  <a:latin typeface="Courier New" panose="02070309020205020404" pitchFamily="49" charset="0"/>
+                  <a:ea typeface="Cambria Math" panose="02040503050406030204" pitchFamily="18" charset="0"/>
+                  <a:cs typeface="Courier New" panose="02070309020205020404" pitchFamily="49" charset="0"/>
+                </a:rPr>
+                <a:t>class </a:t>
+              </a:r>
+              <a:r>
+                <a:rPr kumimoji="0" lang="en-GB" sz="1200" b="0" i="0" u="none" strike="noStrike" kern="1200" cap="none" spc="0" normalizeH="0" baseline="0" noProof="0" dirty="0">
+                  <a:ln>
+                    <a:noFill/>
+                  </a:ln>
+                  <a:solidFill>
+                    <a:prstClr val="black"/>
+                  </a:solidFill>
+                  <a:effectLst/>
+                  <a:uLnTx/>
+                  <a:uFillTx/>
+                  <a:latin typeface="Calibri" panose="020F0502020204030204" pitchFamily="34" charset="0"/>
+                  <a:ea typeface="Cambria Math" panose="02040503050406030204" pitchFamily="18" charset="0"/>
+                  <a:cs typeface="Calibri" panose="020F0502020204030204" pitchFamily="34" charset="0"/>
+                </a:rPr>
+                <a:t>“</a:t>
+              </a:r>
+              <a:r>
+                <a:rPr kumimoji="0" lang="en-GB" sz="1200" b="0" i="0" u="none" strike="noStrike" kern="1200" cap="none" spc="0" normalizeH="0" baseline="0" noProof="0" dirty="0">
+                  <a:ln>
+                    <a:noFill/>
+                  </a:ln>
+                  <a:solidFill>
+                    <a:prstClr val="black"/>
+                  </a:solidFill>
+                  <a:effectLst/>
+                  <a:uLnTx/>
+                  <a:uFillTx/>
+                  <a:latin typeface="Courier New" panose="02070309020205020404" pitchFamily="49" charset="0"/>
+                  <a:ea typeface="Cambria Math" panose="02040503050406030204" pitchFamily="18" charset="0"/>
+                  <a:cs typeface="Courier New" panose="02070309020205020404" pitchFamily="49" charset="0"/>
+                </a:rPr>
+                <a:t>numeric</a:t>
+              </a:r>
+              <a:r>
+                <a:rPr kumimoji="0" lang="en-GB" sz="1200" b="0" i="0" u="none" strike="noStrike" kern="1200" cap="none" spc="0" normalizeH="0" baseline="0" noProof="0" dirty="0">
+                  <a:ln>
+                    <a:noFill/>
+                  </a:ln>
+                  <a:solidFill>
+                    <a:prstClr val="black"/>
+                  </a:solidFill>
+                  <a:effectLst/>
+                  <a:uLnTx/>
+                  <a:uFillTx/>
+                  <a:latin typeface="Calibri" panose="020F0502020204030204" pitchFamily="34" charset="0"/>
+                  <a:ea typeface="Cambria Math" panose="02040503050406030204" pitchFamily="18" charset="0"/>
+                  <a:cs typeface="Calibri" panose="020F0502020204030204" pitchFamily="34" charset="0"/>
+                </a:rPr>
+                <a:t>”</a:t>
+              </a:r>
+              <a:r>
+                <a:rPr kumimoji="0" lang="en-GB" sz="1200" b="0" i="0" u="none" strike="noStrike" kern="1200" cap="none" spc="0" normalizeH="0" baseline="0" noProof="0" dirty="0">
+                  <a:ln>
+                    <a:noFill/>
+                  </a:ln>
+                  <a:solidFill>
+                    <a:prstClr val="black"/>
+                  </a:solidFill>
+                  <a:effectLst/>
+                  <a:uLnTx/>
+                  <a:uFillTx/>
+                  <a:latin typeface="Courier New" panose="02070309020205020404" pitchFamily="49" charset="0"/>
+                  <a:ea typeface="Cambria Math" panose="02040503050406030204" pitchFamily="18" charset="0"/>
+                  <a:cs typeface="Courier New" panose="02070309020205020404" pitchFamily="49" charset="0"/>
+                </a:rPr>
+                <a:t> </a:t>
+              </a:r>
+              <a:r>
+                <a:rPr kumimoji="0" lang="en-GB" sz="1200" b="0" i="0" u="none" strike="noStrike" kern="1200" cap="none" spc="0" normalizeH="0" baseline="0" noProof="0" dirty="0">
+                  <a:ln>
+                    <a:noFill/>
+                  </a:ln>
+                  <a:solidFill>
+                    <a:prstClr val="black"/>
+                  </a:solidFill>
+                  <a:effectLst/>
+                  <a:uLnTx/>
+                  <a:uFillTx/>
+                  <a:latin typeface="Calibri" panose="020F0502020204030204" pitchFamily="34" charset="0"/>
+                  <a:ea typeface="Cambria Math" panose="02040503050406030204" pitchFamily="18" charset="0"/>
+                  <a:cs typeface="Calibri" panose="020F0502020204030204" pitchFamily="34" charset="0"/>
+                </a:rPr>
+                <a:t>or “</a:t>
+              </a:r>
+              <a:r>
+                <a:rPr kumimoji="0" lang="en-GB" sz="1200" b="0" i="0" u="none" strike="noStrike" kern="1200" cap="none" spc="0" normalizeH="0" baseline="0" noProof="0" dirty="0">
+                  <a:ln>
+                    <a:noFill/>
+                  </a:ln>
+                  <a:solidFill>
+                    <a:prstClr val="black"/>
+                  </a:solidFill>
+                  <a:effectLst/>
+                  <a:uLnTx/>
+                  <a:uFillTx/>
+                  <a:latin typeface="Courier New" panose="02070309020205020404" pitchFamily="49" charset="0"/>
+                  <a:ea typeface="Cambria Math" panose="02040503050406030204" pitchFamily="18" charset="0"/>
+                  <a:cs typeface="Courier New" panose="02070309020205020404" pitchFamily="49" charset="0"/>
+                </a:rPr>
+                <a:t>integer</a:t>
+              </a:r>
+              <a:r>
+                <a:rPr kumimoji="0" lang="en-GB" sz="1200" b="0" i="0" u="none" strike="noStrike" kern="1200" cap="none" spc="0" normalizeH="0" baseline="0" noProof="0" dirty="0">
+                  <a:ln>
+                    <a:noFill/>
+                  </a:ln>
+                  <a:solidFill>
+                    <a:prstClr val="black"/>
+                  </a:solidFill>
+                  <a:effectLst/>
+                  <a:uLnTx/>
+                  <a:uFillTx/>
+                  <a:latin typeface="Calibri" panose="020F0502020204030204" pitchFamily="34" charset="0"/>
+                  <a:ea typeface="Cambria Math" panose="02040503050406030204" pitchFamily="18" charset="0"/>
+                  <a:cs typeface="Calibri" panose="020F0502020204030204" pitchFamily="34" charset="0"/>
+                </a:rPr>
+                <a:t>”</a:t>
+              </a:r>
+              <a:br>
+                <a:rPr kumimoji="0" lang="en-GB" sz="1200" b="0" i="0" u="none" strike="noStrike" kern="1200" cap="none" spc="0" normalizeH="0" baseline="0" noProof="0" dirty="0">
+                  <a:ln>
+                    <a:noFill/>
+                  </a:ln>
+                  <a:solidFill>
+                    <a:prstClr val="black"/>
+                  </a:solidFill>
+                  <a:effectLst/>
+                  <a:uLnTx/>
+                  <a:uFillTx/>
+                  <a:latin typeface="Calibri" panose="020F0502020204030204" pitchFamily="34" charset="0"/>
+                  <a:ea typeface="Cambria Math" panose="02040503050406030204" pitchFamily="18" charset="0"/>
+                  <a:cs typeface="Calibri" panose="020F0502020204030204" pitchFamily="34" charset="0"/>
+                </a:rPr>
+              </a:br>
+              <a:endParaRPr kumimoji="0" lang="en-GB" sz="1200" b="0" i="0" u="none" strike="noStrike" kern="1200" cap="none" spc="0" normalizeH="0" baseline="0" noProof="0" dirty="0">
+                <a:ln>
+                  <a:noFill/>
+                </a:ln>
+                <a:solidFill>
+                  <a:prstClr val="black"/>
+                </a:solidFill>
+                <a:effectLst/>
+                <a:uLnTx/>
+                <a:uFillTx/>
+                <a:latin typeface="Calibri" panose="020F0502020204030204" pitchFamily="34" charset="0"/>
+                <a:ea typeface="Cambria Math" panose="02040503050406030204" pitchFamily="18" charset="0"/>
+                <a:cs typeface="Calibri" panose="020F0502020204030204" pitchFamily="34" charset="0"/>
+              </a:endParaRPr>
+            </a:p>
+            <a:p>
+              <a:pPr marL="171450" marR="0" lvl="0" indent="-171450" algn="l" defTabSz="914400" rtl="0" eaLnBrk="1" fontAlgn="auto" latinLnBrk="0" hangingPunct="1">
+                <a:lnSpc>
+                  <a:spcPct val="100000"/>
+                </a:lnSpc>
+                <a:spcBef>
+                  <a:spcPts val="0"/>
+                </a:spcBef>
+                <a:spcAft>
+                  <a:spcPts val="0"/>
+                </a:spcAft>
+                <a:buClrTx/>
+                <a:buSzTx/>
+                <a:buFont typeface="Arial" panose="020B0604020202020204" pitchFamily="34" charset="0"/>
+                <a:buChar char="•"/>
+                <a:tabLst/>
+                <a:defRPr/>
+              </a:pPr>
+              <a:r>
+                <a:rPr kumimoji="0" lang="en-GB" sz="1200" b="0" i="0" u="none" strike="noStrike" kern="1200" cap="none" spc="0" normalizeH="0" baseline="0" noProof="0" dirty="0">
+                  <a:ln>
+                    <a:noFill/>
+                  </a:ln>
+                  <a:solidFill>
+                    <a:prstClr val="black"/>
+                  </a:solidFill>
+                  <a:effectLst/>
+                  <a:uLnTx/>
+                  <a:uFillTx/>
+                  <a:latin typeface="Calibri" panose="020F0502020204030204" pitchFamily="34" charset="0"/>
+                  <a:ea typeface="Cambria Math" panose="02040503050406030204" pitchFamily="18" charset="0"/>
+                  <a:cs typeface="Calibri" panose="020F0502020204030204" pitchFamily="34" charset="0"/>
+                </a:rPr>
+                <a:t>N</a:t>
+              </a:r>
+              <a:r>
+                <a:rPr kumimoji="0" lang="en-GB" sz="1200" b="0" i="0" u="none" strike="noStrike" kern="1200" cap="none" spc="0" normalizeH="0" baseline="0" noProof="0" dirty="0" err="1">
+                  <a:ln>
+                    <a:noFill/>
+                  </a:ln>
+                  <a:solidFill>
+                    <a:prstClr val="black"/>
+                  </a:solidFill>
+                  <a:effectLst/>
+                  <a:uLnTx/>
+                  <a:uFillTx/>
+                  <a:latin typeface="Calibri" panose="020F0502020204030204" pitchFamily="34" charset="0"/>
+                  <a:ea typeface="Cambria Math" panose="02040503050406030204" pitchFamily="18" charset="0"/>
+                  <a:cs typeface="Calibri" panose="020F0502020204030204" pitchFamily="34" charset="0"/>
+                </a:rPr>
+                <a:t>umeric</a:t>
+              </a:r>
+              <a:r>
+                <a:rPr kumimoji="0" lang="en-GB" sz="1200" b="0" i="0" u="none" strike="noStrike" kern="1200" cap="none" spc="0" normalizeH="0" baseline="0" noProof="0" dirty="0">
+                  <a:ln>
+                    <a:noFill/>
+                  </a:ln>
+                  <a:solidFill>
+                    <a:prstClr val="black"/>
+                  </a:solidFill>
+                  <a:effectLst/>
+                  <a:uLnTx/>
+                  <a:uFillTx/>
+                  <a:latin typeface="Calibri" panose="020F0502020204030204" pitchFamily="34" charset="0"/>
+                  <a:ea typeface="Cambria Math" panose="02040503050406030204" pitchFamily="18" charset="0"/>
+                  <a:cs typeface="Calibri" panose="020F0502020204030204" pitchFamily="34" charset="0"/>
+                </a:rPr>
+                <a:t> response of </a:t>
+              </a:r>
+              <a:r>
+                <a:rPr kumimoji="0" lang="en-GB" sz="1200" b="0" i="0" u="none" strike="noStrike" kern="1200" cap="none" spc="0" normalizeH="0" baseline="0" noProof="0" dirty="0">
+                  <a:ln>
+                    <a:noFill/>
+                  </a:ln>
+                  <a:solidFill>
+                    <a:prstClr val="black"/>
+                  </a:solidFill>
+                  <a:effectLst/>
+                  <a:uLnTx/>
+                  <a:uFillTx/>
+                  <a:latin typeface="Courier New" panose="02070309020205020404" pitchFamily="49" charset="0"/>
+                  <a:ea typeface="Cambria Math" panose="02040503050406030204" pitchFamily="18" charset="0"/>
+                  <a:cs typeface="Courier New" panose="02070309020205020404" pitchFamily="49" charset="0"/>
+                </a:rPr>
+                <a:t>class </a:t>
+              </a:r>
+              <a:r>
+                <a:rPr kumimoji="0" lang="en-GB" sz="1200" b="0" i="0" u="none" strike="noStrike" kern="1200" cap="none" spc="0" normalizeH="0" baseline="0" noProof="0" dirty="0">
+                  <a:ln>
+                    <a:noFill/>
+                  </a:ln>
+                  <a:solidFill>
+                    <a:prstClr val="black"/>
+                  </a:solidFill>
+                  <a:effectLst/>
+                  <a:uLnTx/>
+                  <a:uFillTx/>
+                  <a:latin typeface="Calibri" panose="020F0502020204030204" pitchFamily="34" charset="0"/>
+                  <a:ea typeface="Cambria Math" panose="02040503050406030204" pitchFamily="18" charset="0"/>
+                  <a:cs typeface="Calibri" panose="020F0502020204030204" pitchFamily="34" charset="0"/>
+                </a:rPr>
+                <a:t>“</a:t>
+              </a:r>
+              <a:r>
+                <a:rPr kumimoji="0" lang="en-GB" sz="1200" b="0" i="0" u="none" strike="noStrike" kern="1200" cap="none" spc="0" normalizeH="0" baseline="0" noProof="0" dirty="0">
+                  <a:ln>
+                    <a:noFill/>
+                  </a:ln>
+                  <a:solidFill>
+                    <a:prstClr val="black"/>
+                  </a:solidFill>
+                  <a:effectLst/>
+                  <a:uLnTx/>
+                  <a:uFillTx/>
+                  <a:latin typeface="Courier New" panose="02070309020205020404" pitchFamily="49" charset="0"/>
+                  <a:ea typeface="Cambria Math" panose="02040503050406030204" pitchFamily="18" charset="0"/>
+                  <a:cs typeface="Courier New" panose="02070309020205020404" pitchFamily="49" charset="0"/>
+                </a:rPr>
+                <a:t>numeric</a:t>
+              </a:r>
+              <a:r>
+                <a:rPr kumimoji="0" lang="en-GB" sz="1200" b="0" i="0" u="none" strike="noStrike" kern="1200" cap="none" spc="0" normalizeH="0" baseline="0" noProof="0" dirty="0">
+                  <a:ln>
+                    <a:noFill/>
+                  </a:ln>
+                  <a:solidFill>
+                    <a:prstClr val="black"/>
+                  </a:solidFill>
+                  <a:effectLst/>
+                  <a:uLnTx/>
+                  <a:uFillTx/>
+                  <a:latin typeface="Calibri" panose="020F0502020204030204" pitchFamily="34" charset="0"/>
+                  <a:ea typeface="Cambria Math" panose="02040503050406030204" pitchFamily="18" charset="0"/>
+                  <a:cs typeface="Calibri" panose="020F0502020204030204" pitchFamily="34" charset="0"/>
+                </a:rPr>
+                <a:t>”</a:t>
+              </a:r>
+              <a:r>
+                <a:rPr kumimoji="0" lang="en-GB" sz="1200" b="0" i="0" u="none" strike="noStrike" kern="1200" cap="none" spc="0" normalizeH="0" baseline="0" noProof="0" dirty="0">
+                  <a:ln>
+                    <a:noFill/>
+                  </a:ln>
+                  <a:solidFill>
+                    <a:prstClr val="black"/>
+                  </a:solidFill>
+                  <a:effectLst/>
+                  <a:uLnTx/>
+                  <a:uFillTx/>
+                  <a:latin typeface="Courier New" panose="02070309020205020404" pitchFamily="49" charset="0"/>
+                  <a:ea typeface="Cambria Math" panose="02040503050406030204" pitchFamily="18" charset="0"/>
+                  <a:cs typeface="Courier New" panose="02070309020205020404" pitchFamily="49" charset="0"/>
+                </a:rPr>
+                <a:t> </a:t>
+              </a:r>
+              <a:r>
+                <a:rPr kumimoji="0" lang="en-GB" sz="1200" b="0" i="0" u="none" strike="noStrike" kern="1200" cap="none" spc="0" normalizeH="0" baseline="0" noProof="0" dirty="0">
+                  <a:ln>
+                    <a:noFill/>
+                  </a:ln>
+                  <a:solidFill>
+                    <a:prstClr val="black"/>
+                  </a:solidFill>
+                  <a:effectLst/>
+                  <a:uLnTx/>
+                  <a:uFillTx/>
+                  <a:latin typeface="Calibri" panose="020F0502020204030204" pitchFamily="34" charset="0"/>
+                  <a:ea typeface="Cambria Math" panose="02040503050406030204" pitchFamily="18" charset="0"/>
+                  <a:cs typeface="Calibri" panose="020F0502020204030204" pitchFamily="34" charset="0"/>
+                </a:rPr>
+                <a:t>or “</a:t>
+              </a:r>
+              <a:r>
+                <a:rPr kumimoji="0" lang="en-GB" sz="1200" b="0" i="0" u="none" strike="noStrike" kern="1200" cap="none" spc="0" normalizeH="0" baseline="0" noProof="0" dirty="0">
+                  <a:ln>
+                    <a:noFill/>
+                  </a:ln>
+                  <a:solidFill>
+                    <a:prstClr val="black"/>
+                  </a:solidFill>
+                  <a:effectLst/>
+                  <a:uLnTx/>
+                  <a:uFillTx/>
+                  <a:latin typeface="Courier New" panose="02070309020205020404" pitchFamily="49" charset="0"/>
+                  <a:ea typeface="Cambria Math" panose="02040503050406030204" pitchFamily="18" charset="0"/>
+                  <a:cs typeface="Courier New" panose="02070309020205020404" pitchFamily="49" charset="0"/>
+                </a:rPr>
+                <a:t>integer</a:t>
+              </a:r>
+              <a:r>
+                <a:rPr kumimoji="0" lang="en-GB" sz="1200" b="0" i="0" u="none" strike="noStrike" kern="1200" cap="none" spc="0" normalizeH="0" baseline="0" noProof="0" dirty="0">
+                  <a:ln>
+                    <a:noFill/>
+                  </a:ln>
+                  <a:solidFill>
+                    <a:prstClr val="black"/>
+                  </a:solidFill>
+                  <a:effectLst/>
+                  <a:uLnTx/>
+                  <a:uFillTx/>
+                  <a:latin typeface="Calibri" panose="020F0502020204030204" pitchFamily="34" charset="0"/>
+                  <a:ea typeface="Cambria Math" panose="02040503050406030204" pitchFamily="18" charset="0"/>
+                  <a:cs typeface="Calibri" panose="020F0502020204030204" pitchFamily="34" charset="0"/>
+                </a:rPr>
+                <a:t>”</a:t>
+              </a:r>
+            </a:p>
+          </p:txBody>
+        </p:sp>
+        <mc:AlternateContent xmlns:mc="http://schemas.openxmlformats.org/markup-compatibility/2006" xmlns:a14="http://schemas.microsoft.com/office/drawing/2010/main">
+          <mc:Choice Requires="a14">
+            <p:sp>
+              <p:nvSpPr>
+                <p:cNvPr id="9" name="Textfeld 8">
+                  <a:extLst>
+                    <a:ext uri="{FF2B5EF4-FFF2-40B4-BE49-F238E27FC236}">
+                      <a16:creationId xmlns:a16="http://schemas.microsoft.com/office/drawing/2014/main" id="{2C733A43-BA90-EED8-6758-242898D59516}"/>
+                    </a:ext>
+                  </a:extLst>
+                </p:cNvPr>
+                <p:cNvSpPr txBox="1"/>
+                <p:nvPr/>
+              </p:nvSpPr>
+              <p:spPr>
+                <a:xfrm>
+                  <a:off x="5554090" y="2172920"/>
+                  <a:ext cx="5400000" cy="276999"/>
+                </a:xfrm>
+                <a:prstGeom prst="rect">
+                  <a:avLst/>
+                </a:prstGeom>
+                <a:solidFill>
+                  <a:schemeClr val="accent5">
+                    <a:lumMod val="40000"/>
+                    <a:lumOff val="60000"/>
+                  </a:schemeClr>
+                </a:solidFill>
+                <a:ln w="12700">
+                  <a:solidFill>
+                    <a:schemeClr val="tx1"/>
+                  </a:solidFill>
+                </a:ln>
+              </p:spPr>
+              <p:txBody>
+                <a:bodyPr wrap="square">
+                  <a:spAutoFit/>
+                </a:bodyPr>
+                <a:lstStyle>
+                  <a:defPPr>
+                    <a:defRPr lang="de-DE"/>
+                  </a:defPPr>
+                </a:lstStyle>
+                <a:p>
+                  <a:pPr marL="0" marR="0" lvl="0" indent="0" algn="ctr" defTabSz="914400" rtl="0" eaLnBrk="1" fontAlgn="auto" latinLnBrk="0" hangingPunct="1">
+                    <a:lnSpc>
+                      <a:spcPct val="100000"/>
+                    </a:lnSpc>
+                    <a:spcBef>
+                      <a:spcPts val="0"/>
+                    </a:spcBef>
+                    <a:spcAft>
+                      <a:spcPts val="0"/>
+                    </a:spcAft>
+                    <a:buClrTx/>
+                    <a:buSzTx/>
+                    <a:buFontTx/>
+                    <a:buNone/>
+                    <a:tabLst/>
+                    <a:defRPr/>
+                  </a:pPr>
+                  <a:r>
+                    <a:rPr kumimoji="0" lang="en-US" sz="1200" b="0" i="0" u="none" strike="noStrike" kern="1200" cap="none" spc="0" normalizeH="0" baseline="0" noProof="0" dirty="0">
+                      <a:ln>
+                        <a:noFill/>
+                      </a:ln>
+                      <a:solidFill>
+                        <a:prstClr val="black"/>
+                      </a:solidFill>
+                      <a:effectLst/>
+                      <a:uLnTx/>
+                      <a:uFillTx/>
+                      <a:latin typeface="Calibri" panose="020F0502020204030204"/>
+                      <a:ea typeface="Cambria Math" panose="02040503050406030204" pitchFamily="18" charset="0"/>
+                      <a:cs typeface="+mn-cs"/>
+                    </a:rPr>
+                    <a:t>non-parametric tests:</a:t>
+                  </a:r>
+                  <a:r>
+                    <a:rPr kumimoji="0" lang="en-GB" sz="1200" b="0" i="0" u="none" strike="noStrike" kern="1200" cap="none" spc="0" normalizeH="0" baseline="0" noProof="0" dirty="0">
+                      <a:ln>
+                        <a:noFill/>
+                      </a:ln>
+                      <a:solidFill>
+                        <a:prstClr val="black"/>
+                      </a:solidFill>
+                      <a:effectLst/>
+                      <a:uLnTx/>
+                      <a:uFillTx/>
+                      <a:latin typeface="Courier New" panose="02070309020205020404" pitchFamily="49" charset="0"/>
+                      <a:ea typeface="Cambria Math" panose="02040503050406030204" pitchFamily="18" charset="0"/>
+                      <a:cs typeface="Courier New" panose="02070309020205020404" pitchFamily="49" charset="0"/>
+                    </a:rPr>
+                    <a:t> </a:t>
+                  </a:r>
+                  <a14:m>
+                    <m:oMath xmlns:m="http://schemas.openxmlformats.org/officeDocument/2006/math">
+                      <m:r>
+                        <a:rPr kumimoji="0" lang="en-US" sz="1200" b="0" i="1" u="none" strike="noStrike" kern="1200" cap="none" spc="0" normalizeH="0" baseline="0" noProof="0" smtClean="0">
+                          <a:ln>
+                            <a:noFill/>
+                          </a:ln>
+                          <a:solidFill>
+                            <a:prstClr val="black"/>
+                          </a:solidFill>
+                          <a:effectLst/>
+                          <a:uLnTx/>
+                          <a:uFillTx/>
+                          <a:latin typeface="Cambria Math" panose="02040503050406030204" pitchFamily="18" charset="0"/>
+                          <a:ea typeface="Cambria Math" panose="02040503050406030204" pitchFamily="18" charset="0"/>
+                          <a:cs typeface="+mn-cs"/>
+                        </a:rPr>
+                        <m:t>𝑘</m:t>
+                      </m:r>
+                      <m:r>
+                        <a:rPr kumimoji="0" lang="en-US" sz="1200" b="0" i="1" u="none" strike="noStrike" kern="1200" cap="none" spc="0" normalizeH="0" baseline="0" noProof="0" smtClean="0">
+                          <a:ln>
+                            <a:noFill/>
+                          </a:ln>
+                          <a:solidFill>
+                            <a:prstClr val="black"/>
+                          </a:solidFill>
+                          <a:effectLst/>
+                          <a:uLnTx/>
+                          <a:uFillTx/>
+                          <a:latin typeface="Cambria Math" panose="02040503050406030204" pitchFamily="18" charset="0"/>
+                          <a:ea typeface="Cambria Math" panose="02040503050406030204" pitchFamily="18" charset="0"/>
+                          <a:cs typeface="+mn-cs"/>
+                        </a:rPr>
+                        <m:t>=2</m:t>
+                      </m:r>
+                    </m:oMath>
+                  </a14:m>
+                  <a:r>
+                    <a:rPr kumimoji="0" lang="en-GB" sz="1200" b="0" i="0" u="none" strike="noStrike" kern="1200" cap="none" spc="0" normalizeH="0" baseline="0" noProof="0" dirty="0">
+                      <a:ln>
+                        <a:noFill/>
+                      </a:ln>
+                      <a:solidFill>
+                        <a:prstClr val="black"/>
+                      </a:solidFill>
+                      <a:effectLst/>
+                      <a:uLnTx/>
+                      <a:uFillTx/>
+                      <a:latin typeface="Courier New" panose="02070309020205020404" pitchFamily="49" charset="0"/>
+                      <a:ea typeface="Cambria Math" panose="02040503050406030204" pitchFamily="18" charset="0"/>
+                      <a:cs typeface="Courier New" panose="02070309020205020404" pitchFamily="49" charset="0"/>
+                    </a:rPr>
+                    <a:t>: </a:t>
+                  </a:r>
+                  <a:r>
+                    <a:rPr kumimoji="0" lang="en-GB" sz="1200" b="0" i="0" u="none" strike="noStrike" kern="1200" cap="none" spc="0" normalizeH="0" baseline="0" noProof="0" dirty="0" err="1">
+                      <a:ln>
+                        <a:noFill/>
+                      </a:ln>
+                      <a:solidFill>
+                        <a:prstClr val="black"/>
+                      </a:solidFill>
+                      <a:effectLst/>
+                      <a:uLnTx/>
+                      <a:uFillTx/>
+                      <a:latin typeface="Courier New" panose="02070309020205020404" pitchFamily="49" charset="0"/>
+                      <a:ea typeface="Cambria Math" panose="02040503050406030204" pitchFamily="18" charset="0"/>
+                      <a:cs typeface="Courier New" panose="02070309020205020404" pitchFamily="49" charset="0"/>
+                    </a:rPr>
+                    <a:t>wilcox.test</a:t>
+                  </a:r>
+                  <a:r>
+                    <a:rPr kumimoji="0" lang="en-GB" sz="1200" b="0" i="0" u="none" strike="noStrike" kern="1200" cap="none" spc="0" normalizeH="0" baseline="0" noProof="0" dirty="0">
+                      <a:ln>
+                        <a:noFill/>
+                      </a:ln>
+                      <a:solidFill>
+                        <a:prstClr val="black"/>
+                      </a:solidFill>
+                      <a:effectLst/>
+                      <a:uLnTx/>
+                      <a:uFillTx/>
+                      <a:latin typeface="Courier New" panose="02070309020205020404" pitchFamily="49" charset="0"/>
+                      <a:ea typeface="Cambria Math" panose="02040503050406030204" pitchFamily="18" charset="0"/>
+                      <a:cs typeface="Courier New" panose="02070309020205020404" pitchFamily="49" charset="0"/>
+                    </a:rPr>
+                    <a:t>(),</a:t>
+                  </a:r>
+                  <a:r>
+                    <a:rPr kumimoji="0" lang="en-GB" sz="1200" b="0" i="0" u="none" strike="noStrike" kern="1200" cap="none" spc="0" normalizeH="0" baseline="0" noProof="0" dirty="0">
+                      <a:ln>
+                        <a:noFill/>
+                      </a:ln>
+                      <a:solidFill>
+                        <a:prstClr val="black"/>
+                      </a:solidFill>
+                      <a:effectLst/>
+                      <a:uLnTx/>
+                      <a:uFillTx/>
+                      <a:latin typeface="Calibri" panose="020F0502020204030204"/>
+                      <a:ea typeface="Cambria Math" panose="02040503050406030204" pitchFamily="18" charset="0"/>
+                      <a:cs typeface="+mn-cs"/>
+                    </a:rPr>
+                    <a:t> </a:t>
+                  </a:r>
+                  <a14:m>
+                    <m:oMath xmlns:m="http://schemas.openxmlformats.org/officeDocument/2006/math">
+                      <m:r>
+                        <a:rPr kumimoji="0" lang="en-US" sz="1200" b="0" i="1" u="none" strike="noStrike" kern="1200" cap="none" spc="0" normalizeH="0" baseline="0" noProof="0" smtClean="0">
+                          <a:ln>
+                            <a:noFill/>
+                          </a:ln>
+                          <a:solidFill>
+                            <a:prstClr val="black"/>
+                          </a:solidFill>
+                          <a:effectLst/>
+                          <a:uLnTx/>
+                          <a:uFillTx/>
+                          <a:latin typeface="Cambria Math" panose="02040503050406030204" pitchFamily="18" charset="0"/>
+                          <a:ea typeface="Cambria Math" panose="02040503050406030204" pitchFamily="18" charset="0"/>
+                          <a:cs typeface="+mn-cs"/>
+                        </a:rPr>
+                        <m:t>𝑘</m:t>
+                      </m:r>
+                      <m:r>
+                        <a:rPr kumimoji="0" lang="en-US" sz="1200" b="0" i="1" u="none" strike="noStrike" kern="1200" cap="none" spc="0" normalizeH="0" baseline="0" noProof="0" smtClean="0">
+                          <a:ln>
+                            <a:noFill/>
+                          </a:ln>
+                          <a:solidFill>
+                            <a:prstClr val="black"/>
+                          </a:solidFill>
+                          <a:effectLst/>
+                          <a:uLnTx/>
+                          <a:uFillTx/>
+                          <a:latin typeface="Cambria Math" panose="02040503050406030204" pitchFamily="18" charset="0"/>
+                          <a:ea typeface="Cambria Math" panose="02040503050406030204" pitchFamily="18" charset="0"/>
+                          <a:cs typeface="+mn-cs"/>
+                        </a:rPr>
+                        <m:t>&gt;2</m:t>
+                      </m:r>
+                    </m:oMath>
+                  </a14:m>
+                  <a:r>
+                    <a:rPr kumimoji="0" lang="en-GB" sz="1200" b="0" i="0" u="none" strike="noStrike" kern="1200" cap="none" spc="0" normalizeH="0" baseline="0" noProof="0" dirty="0">
+                      <a:ln>
+                        <a:noFill/>
+                      </a:ln>
+                      <a:solidFill>
+                        <a:prstClr val="black"/>
+                      </a:solidFill>
+                      <a:effectLst/>
+                      <a:uLnTx/>
+                      <a:uFillTx/>
+                      <a:latin typeface="Courier New" panose="02070309020205020404" pitchFamily="49" charset="0"/>
+                      <a:ea typeface="Cambria Math" panose="02040503050406030204" pitchFamily="18" charset="0"/>
+                      <a:cs typeface="Courier New" panose="02070309020205020404" pitchFamily="49" charset="0"/>
+                    </a:rPr>
+                    <a:t>: </a:t>
+                  </a:r>
+                  <a:r>
+                    <a:rPr kumimoji="0" lang="en-GB" sz="1200" b="0" i="0" u="none" strike="noStrike" kern="1200" cap="none" spc="0" normalizeH="0" baseline="0" noProof="0" dirty="0" err="1">
+                      <a:ln>
+                        <a:noFill/>
+                      </a:ln>
+                      <a:solidFill>
+                        <a:prstClr val="black"/>
+                      </a:solidFill>
+                      <a:effectLst/>
+                      <a:uLnTx/>
+                      <a:uFillTx/>
+                      <a:latin typeface="Courier New" panose="02070309020205020404" pitchFamily="49" charset="0"/>
+                      <a:ea typeface="Cambria Math" panose="02040503050406030204" pitchFamily="18" charset="0"/>
+                      <a:cs typeface="Courier New" panose="02070309020205020404" pitchFamily="49" charset="0"/>
+                    </a:rPr>
+                    <a:t>kruskal.test</a:t>
+                  </a:r>
+                  <a:r>
+                    <a:rPr kumimoji="0" lang="en-GB" sz="1200" b="0" i="0" u="none" strike="noStrike" kern="1200" cap="none" spc="0" normalizeH="0" baseline="0" noProof="0" dirty="0">
+                      <a:ln>
+                        <a:noFill/>
+                      </a:ln>
+                      <a:solidFill>
+                        <a:prstClr val="black"/>
+                      </a:solidFill>
+                      <a:effectLst/>
+                      <a:uLnTx/>
+                      <a:uFillTx/>
+                      <a:latin typeface="Courier New" panose="02070309020205020404" pitchFamily="49" charset="0"/>
+                      <a:ea typeface="Cambria Math" panose="02040503050406030204" pitchFamily="18" charset="0"/>
+                      <a:cs typeface="Courier New" panose="02070309020205020404" pitchFamily="49" charset="0"/>
+                    </a:rPr>
+                    <a:t>()</a:t>
+                  </a:r>
+                </a:p>
+              </p:txBody>
+            </p:sp>
+          </mc:Choice>
+          <mc:Fallback xmlns="">
+            <p:sp>
+              <p:nvSpPr>
+                <p:cNvPr id="9" name="Textfeld 8">
+                  <a:extLst>
+                    <a:ext uri="{FF2B5EF4-FFF2-40B4-BE49-F238E27FC236}">
+                      <a16:creationId xmlns:a16="http://schemas.microsoft.com/office/drawing/2014/main" id="{2C733A43-BA90-EED8-6758-242898D59516}"/>
+                    </a:ext>
+                  </a:extLst>
+                </p:cNvPr>
+                <p:cNvSpPr txBox="1">
+                  <a:spLocks noRot="1" noChangeAspect="1" noMove="1" noResize="1" noEditPoints="1" noAdjustHandles="1" noChangeArrowheads="1" noChangeShapeType="1" noTextEdit="1"/>
+                </p:cNvSpPr>
+                <p:nvPr/>
+              </p:nvSpPr>
+              <p:spPr>
+                <a:xfrm>
+                  <a:off x="5554090" y="2172920"/>
+                  <a:ext cx="5400000" cy="276999"/>
+                </a:xfrm>
+                <a:prstGeom prst="rect">
+                  <a:avLst/>
+                </a:prstGeom>
+                <a:blipFill>
+                  <a:blip r:embed="rId4"/>
+                  <a:stretch>
+                    <a:fillRect b="-12500"/>
+                  </a:stretch>
+                </a:blipFill>
+                <a:ln w="12700">
+                  <a:solidFill>
+                    <a:schemeClr val="tx1"/>
+                  </a:solidFill>
+                </a:ln>
+              </p:spPr>
+              <p:txBody>
+                <a:bodyPr/>
+                <a:lstStyle/>
+                <a:p>
+                  <a:r>
+                    <a:rPr lang="de-DE">
+                      <a:noFill/>
+                    </a:rPr>
+                    <a:t> </a:t>
+                  </a:r>
+                </a:p>
+              </p:txBody>
+            </p:sp>
+          </mc:Fallback>
+        </mc:AlternateContent>
+        <p:sp>
+          <p:nvSpPr>
+            <p:cNvPr id="19" name="Textfeld 18">
+              <a:extLst>
+                <a:ext uri="{FF2B5EF4-FFF2-40B4-BE49-F238E27FC236}">
+                  <a16:creationId xmlns:a16="http://schemas.microsoft.com/office/drawing/2014/main" id="{0F5D9D80-C8ED-1D5F-7CBA-0A72C71AD571}"/>
+                </a:ext>
+              </a:extLst>
+            </p:cNvPr>
+            <p:cNvSpPr txBox="1"/>
+            <p:nvPr/>
+          </p:nvSpPr>
+          <p:spPr>
+            <a:xfrm>
+              <a:off x="5554090" y="4127088"/>
+              <a:ext cx="5400000" cy="276999"/>
+            </a:xfrm>
+            <a:prstGeom prst="rect">
+              <a:avLst/>
+            </a:prstGeom>
+            <a:solidFill>
+              <a:schemeClr val="accent2">
+                <a:lumMod val="20000"/>
+                <a:lumOff val="80000"/>
+              </a:schemeClr>
+            </a:solidFill>
+            <a:ln w="12700">
+              <a:solidFill>
+                <a:schemeClr val="tx1"/>
+              </a:solidFill>
+            </a:ln>
+          </p:spPr>
+          <p:txBody>
+            <a:bodyPr wrap="square">
+              <a:spAutoFit/>
+            </a:bodyPr>
+            <a:lstStyle>
+              <a:defPPr>
+                <a:defRPr lang="de-DE"/>
+              </a:defPPr>
+            </a:lstStyle>
+            <a:p>
+              <a:pPr marL="457200" marR="0" lvl="1" indent="0" algn="l" defTabSz="914400" rtl="0" eaLnBrk="1" fontAlgn="auto" latinLnBrk="0" hangingPunct="1">
+                <a:lnSpc>
+                  <a:spcPct val="100000"/>
+                </a:lnSpc>
+                <a:spcBef>
+                  <a:spcPts val="0"/>
+                </a:spcBef>
+                <a:spcAft>
+                  <a:spcPts val="0"/>
+                </a:spcAft>
+                <a:buClrTx/>
+                <a:buSzTx/>
+                <a:buFontTx/>
+                <a:buNone/>
+                <a:tabLst/>
+                <a:defRPr/>
+              </a:pPr>
+              <a:r>
+                <a:rPr kumimoji="0" lang="en-GB" sz="1200" b="0" i="0" u="none" strike="noStrike" kern="1200" cap="none" spc="0" normalizeH="0" baseline="0" noProof="0" dirty="0">
+                  <a:ln>
+                    <a:noFill/>
+                  </a:ln>
+                  <a:solidFill>
+                    <a:prstClr val="black"/>
+                  </a:solidFill>
+                  <a:effectLst/>
+                  <a:uLnTx/>
+                  <a:uFillTx/>
+                  <a:latin typeface="Calibri" panose="020F0502020204030204" pitchFamily="34" charset="0"/>
+                  <a:ea typeface="Cambria Math" panose="02040503050406030204" pitchFamily="18" charset="0"/>
+                  <a:cs typeface="Calibri" panose="020F0502020204030204" pitchFamily="34" charset="0"/>
+                </a:rPr>
+                <a:t>Simple linear regression:   </a:t>
+              </a:r>
+              <a:r>
+                <a:rPr kumimoji="0" lang="en-GB" sz="1200" b="0" i="0" u="none" strike="noStrike" kern="1200" cap="none" spc="0" normalizeH="0" baseline="0" noProof="0" dirty="0" err="1">
+                  <a:ln>
+                    <a:noFill/>
+                  </a:ln>
+                  <a:solidFill>
+                    <a:prstClr val="black"/>
+                  </a:solidFill>
+                  <a:effectLst/>
+                  <a:uLnTx/>
+                  <a:uFillTx/>
+                  <a:latin typeface="Courier New" panose="02070309020205020404" pitchFamily="49" charset="0"/>
+                  <a:ea typeface="Cambria Math" panose="02040503050406030204" pitchFamily="18" charset="0"/>
+                  <a:cs typeface="Courier New" panose="02070309020205020404" pitchFamily="49" charset="0"/>
+                </a:rPr>
+                <a:t>lm</a:t>
+              </a:r>
+              <a:r>
+                <a:rPr kumimoji="0" lang="en-GB" sz="1200" b="0" i="0" u="none" strike="noStrike" kern="1200" cap="none" spc="0" normalizeH="0" baseline="0" noProof="0" dirty="0">
+                  <a:ln>
+                    <a:noFill/>
+                  </a:ln>
+                  <a:solidFill>
+                    <a:prstClr val="black"/>
+                  </a:solidFill>
+                  <a:effectLst/>
+                  <a:uLnTx/>
+                  <a:uFillTx/>
+                  <a:latin typeface="Courier New" panose="02070309020205020404" pitchFamily="49" charset="0"/>
+                  <a:ea typeface="Cambria Math" panose="02040503050406030204" pitchFamily="18" charset="0"/>
+                  <a:cs typeface="Courier New" panose="02070309020205020404" pitchFamily="49" charset="0"/>
+                </a:rPr>
+                <a:t>()</a:t>
+              </a:r>
+            </a:p>
+          </p:txBody>
+        </p:sp>
+        <mc:AlternateContent xmlns:mc="http://schemas.openxmlformats.org/markup-compatibility/2006" xmlns:a14="http://schemas.microsoft.com/office/drawing/2010/main">
+          <mc:Choice Requires="a14">
+            <p:sp>
+              <p:nvSpPr>
+                <p:cNvPr id="7" name="Textfeld 6">
+                  <a:extLst>
+                    <a:ext uri="{FF2B5EF4-FFF2-40B4-BE49-F238E27FC236}">
+                      <a16:creationId xmlns:a16="http://schemas.microsoft.com/office/drawing/2014/main" id="{F15C4A27-3FC3-4E72-00C0-8FCD121A3D3F}"/>
+                    </a:ext>
+                  </a:extLst>
+                </p:cNvPr>
+                <p:cNvSpPr txBox="1"/>
+                <p:nvPr/>
+              </p:nvSpPr>
+              <p:spPr>
+                <a:xfrm>
+                  <a:off x="743828" y="1006892"/>
+                  <a:ext cx="4320000" cy="461665"/>
+                </a:xfrm>
+                <a:prstGeom prst="rect">
+                  <a:avLst/>
+                </a:prstGeom>
+                <a:solidFill>
+                  <a:schemeClr val="bg2">
+                    <a:lumMod val="90000"/>
+                  </a:schemeClr>
+                </a:solidFill>
+                <a:ln w="12700">
+                  <a:solidFill>
+                    <a:schemeClr val="tx1"/>
+                  </a:solidFill>
+                </a:ln>
+              </p:spPr>
+              <p:txBody>
+                <a:bodyPr wrap="square">
+                  <a:spAutoFit/>
+                </a:bodyPr>
+                <a:lstStyle/>
+                <a:p>
+                  <a:pPr marL="0" marR="0" lvl="0" indent="0" algn="l" defTabSz="914400" rtl="0" eaLnBrk="1" fontAlgn="auto" latinLnBrk="0" hangingPunct="1">
+                    <a:lnSpc>
+                      <a:spcPct val="100000"/>
+                    </a:lnSpc>
+                    <a:spcBef>
+                      <a:spcPts val="0"/>
+                    </a:spcBef>
+                    <a:spcAft>
+                      <a:spcPts val="0"/>
+                    </a:spcAft>
+                    <a:buClrTx/>
+                    <a:buSzTx/>
+                    <a:buFontTx/>
+                    <a:buNone/>
+                    <a:tabLst/>
+                    <a:defRPr/>
+                  </a:pPr>
+                  <a:r>
+                    <a:rPr kumimoji="0" lang="en-GB" sz="1200" b="0" i="0" u="none" strike="noStrike" kern="1200" cap="none" spc="0" normalizeH="0" baseline="0" noProof="0" dirty="0">
+                      <a:ln>
+                        <a:noFill/>
+                      </a:ln>
+                      <a:solidFill>
+                        <a:prstClr val="black"/>
+                      </a:solidFill>
+                      <a:effectLst/>
+                      <a:uLnTx/>
+                      <a:uFillTx/>
+                      <a:latin typeface="Calibri" panose="020F0502020204030204" pitchFamily="34" charset="0"/>
+                      <a:ea typeface="Cambria Math" panose="02040503050406030204" pitchFamily="18" charset="0"/>
+                      <a:cs typeface="Calibri" panose="020F0502020204030204" pitchFamily="34" charset="0"/>
+                    </a:rPr>
+                    <a:t>C</a:t>
+                  </a:r>
+                  <a:r>
+                    <a:rPr kumimoji="0" lang="en-GB" sz="1200" b="0" i="0" u="none" strike="noStrike" kern="1200" cap="none" spc="0" normalizeH="0" baseline="0" noProof="0" dirty="0" err="1">
+                      <a:ln>
+                        <a:noFill/>
+                      </a:ln>
+                      <a:solidFill>
+                        <a:prstClr val="black"/>
+                      </a:solidFill>
+                      <a:effectLst/>
+                      <a:uLnTx/>
+                      <a:uFillTx/>
+                      <a:latin typeface="Calibri" panose="020F0502020204030204" pitchFamily="34" charset="0"/>
+                      <a:ea typeface="Cambria Math" panose="02040503050406030204" pitchFamily="18" charset="0"/>
+                      <a:cs typeface="Calibri" panose="020F0502020204030204" pitchFamily="34" charset="0"/>
+                    </a:rPr>
+                    <a:t>ategorical</a:t>
+                  </a:r>
+                  <a:r>
+                    <a:rPr kumimoji="0" lang="en-GB" sz="1200" b="0" i="0" u="none" strike="noStrike" kern="1200" cap="none" spc="0" normalizeH="0" baseline="0" noProof="0" dirty="0">
+                      <a:ln>
+                        <a:noFill/>
+                      </a:ln>
+                      <a:solidFill>
+                        <a:prstClr val="black"/>
+                      </a:solidFill>
+                      <a:effectLst/>
+                      <a:uLnTx/>
+                      <a:uFillTx/>
+                      <a:latin typeface="Calibri" panose="020F0502020204030204" pitchFamily="34" charset="0"/>
+                      <a:ea typeface="Cambria Math" panose="02040503050406030204" pitchFamily="18" charset="0"/>
+                      <a:cs typeface="Calibri" panose="020F0502020204030204" pitchFamily="34" charset="0"/>
+                    </a:rPr>
+                    <a:t> predictor of </a:t>
+                  </a:r>
+                  <a:r>
+                    <a:rPr kumimoji="0" lang="en-GB" sz="1200" b="0" i="0" u="none" strike="noStrike" kern="1200" cap="none" spc="0" normalizeH="0" baseline="0" noProof="0" dirty="0">
+                      <a:ln>
+                        <a:noFill/>
+                      </a:ln>
+                      <a:solidFill>
+                        <a:prstClr val="black"/>
+                      </a:solidFill>
+                      <a:effectLst/>
+                      <a:uLnTx/>
+                      <a:uFillTx/>
+                      <a:latin typeface="Courier New" panose="02070309020205020404" pitchFamily="49" charset="0"/>
+                      <a:ea typeface="Cambria Math" panose="02040503050406030204" pitchFamily="18" charset="0"/>
+                      <a:cs typeface="Courier New" panose="02070309020205020404" pitchFamily="49" charset="0"/>
+                    </a:rPr>
+                    <a:t>class </a:t>
+                  </a:r>
+                  <a:r>
+                    <a:rPr kumimoji="0" lang="en-GB" sz="1200" b="0" i="0" u="none" strike="noStrike" kern="1200" cap="none" spc="0" normalizeH="0" baseline="0" noProof="0" dirty="0">
+                      <a:ln>
+                        <a:noFill/>
+                      </a:ln>
+                      <a:solidFill>
+                        <a:prstClr val="black"/>
+                      </a:solidFill>
+                      <a:effectLst/>
+                      <a:uLnTx/>
+                      <a:uFillTx/>
+                      <a:latin typeface="Calibri" panose="020F0502020204030204" pitchFamily="34" charset="0"/>
+                      <a:ea typeface="Cambria Math" panose="02040503050406030204" pitchFamily="18" charset="0"/>
+                      <a:cs typeface="Calibri" panose="020F0502020204030204" pitchFamily="34" charset="0"/>
+                    </a:rPr>
+                    <a:t>“</a:t>
+                  </a:r>
+                  <a:r>
+                    <a:rPr kumimoji="0" lang="en-GB" sz="1200" b="0" i="0" u="none" strike="noStrike" kern="1200" cap="none" spc="0" normalizeH="0" baseline="0" noProof="0" dirty="0">
+                      <a:ln>
+                        <a:noFill/>
+                      </a:ln>
+                      <a:solidFill>
+                        <a:prstClr val="black"/>
+                      </a:solidFill>
+                      <a:effectLst/>
+                      <a:uLnTx/>
+                      <a:uFillTx/>
+                      <a:latin typeface="Courier New" panose="02070309020205020404" pitchFamily="49" charset="0"/>
+                      <a:ea typeface="Cambria Math" panose="02040503050406030204" pitchFamily="18" charset="0"/>
+                      <a:cs typeface="Courier New" panose="02070309020205020404" pitchFamily="49" charset="0"/>
+                    </a:rPr>
+                    <a:t>factor</a:t>
+                  </a:r>
+                  <a:r>
+                    <a:rPr kumimoji="0" lang="en-GB" sz="1200" b="0" i="0" u="none" strike="noStrike" kern="1200" cap="none" spc="0" normalizeH="0" baseline="0" noProof="0" dirty="0">
+                      <a:ln>
+                        <a:noFill/>
+                      </a:ln>
+                      <a:solidFill>
+                        <a:prstClr val="black"/>
+                      </a:solidFill>
+                      <a:effectLst/>
+                      <a:uLnTx/>
+                      <a:uFillTx/>
+                      <a:latin typeface="Calibri" panose="020F0502020204030204" pitchFamily="34" charset="0"/>
+                      <a:ea typeface="Cambria Math" panose="02040503050406030204" pitchFamily="18" charset="0"/>
+                      <a:cs typeface="Calibri" panose="020F0502020204030204" pitchFamily="34" charset="0"/>
+                    </a:rPr>
+                    <a:t>“  with </a:t>
+                  </a:r>
+                  <a14:m>
+                    <m:oMath xmlns:m="http://schemas.openxmlformats.org/officeDocument/2006/math">
+                      <m:r>
+                        <a:rPr kumimoji="0" lang="en-US" sz="1200" b="0" i="1" u="none" strike="noStrike" kern="1200" cap="none" spc="0" normalizeH="0" baseline="0" noProof="0" smtClean="0">
+                          <a:ln>
+                            <a:noFill/>
+                          </a:ln>
+                          <a:solidFill>
+                            <a:prstClr val="black"/>
+                          </a:solidFill>
+                          <a:effectLst/>
+                          <a:uLnTx/>
+                          <a:uFillTx/>
+                          <a:latin typeface="Cambria Math" panose="02040503050406030204" pitchFamily="18" charset="0"/>
+                          <a:ea typeface="Cambria Math" panose="02040503050406030204" pitchFamily="18" charset="0"/>
+                          <a:cs typeface="Calibri" panose="020F0502020204030204" pitchFamily="34" charset="0"/>
+                        </a:rPr>
+                        <m:t>𝑘</m:t>
+                      </m:r>
+                    </m:oMath>
+                  </a14:m>
+                  <a:r>
+                    <a:rPr kumimoji="0" lang="en-GB" sz="1200" b="0" i="0" u="none" strike="noStrike" kern="1200" cap="none" spc="0" normalizeH="0" baseline="0" noProof="0" dirty="0">
+                      <a:ln>
+                        <a:noFill/>
+                      </a:ln>
+                      <a:solidFill>
+                        <a:prstClr val="black"/>
+                      </a:solidFill>
+                      <a:effectLst/>
+                      <a:uLnTx/>
+                      <a:uFillTx/>
+                      <a:latin typeface="Calibri" panose="020F0502020204030204" pitchFamily="34" charset="0"/>
+                      <a:ea typeface="Cambria Math" panose="02040503050406030204" pitchFamily="18" charset="0"/>
+                      <a:cs typeface="Calibri" panose="020F0502020204030204" pitchFamily="34" charset="0"/>
+                    </a:rPr>
+                    <a:t> levels</a:t>
+                  </a:r>
+                </a:p>
+                <a:p>
+                  <a:pPr marL="171450" marR="0" lvl="0" indent="-171450" algn="l" defTabSz="914400" rtl="0" eaLnBrk="1" fontAlgn="auto" latinLnBrk="0" hangingPunct="1">
+                    <a:lnSpc>
+                      <a:spcPct val="100000"/>
+                    </a:lnSpc>
+                    <a:spcBef>
+                      <a:spcPts val="0"/>
+                    </a:spcBef>
+                    <a:spcAft>
+                      <a:spcPts val="0"/>
+                    </a:spcAft>
+                    <a:buClrTx/>
+                    <a:buSzTx/>
+                    <a:buFont typeface="Arial" panose="020B0604020202020204" pitchFamily="34" charset="0"/>
+                    <a:buChar char="•"/>
+                    <a:tabLst/>
+                    <a:defRPr/>
+                  </a:pPr>
+                  <a:r>
+                    <a:rPr kumimoji="0" lang="en-GB" sz="1200" b="0" i="0" u="none" strike="noStrike" kern="1200" cap="none" spc="0" normalizeH="0" baseline="0" noProof="0" dirty="0">
+                      <a:ln>
+                        <a:noFill/>
+                      </a:ln>
+                      <a:solidFill>
+                        <a:prstClr val="black"/>
+                      </a:solidFill>
+                      <a:effectLst/>
+                      <a:uLnTx/>
+                      <a:uFillTx/>
+                      <a:latin typeface="Calibri" panose="020F0502020204030204" pitchFamily="34" charset="0"/>
+                      <a:ea typeface="Cambria Math" panose="02040503050406030204" pitchFamily="18" charset="0"/>
+                      <a:cs typeface="Calibri" panose="020F0502020204030204" pitchFamily="34" charset="0"/>
+                    </a:rPr>
+                    <a:t>N</a:t>
+                  </a:r>
+                  <a:r>
+                    <a:rPr kumimoji="0" lang="en-GB" sz="1200" b="0" i="0" u="none" strike="noStrike" kern="1200" cap="none" spc="0" normalizeH="0" baseline="0" noProof="0" dirty="0" err="1">
+                      <a:ln>
+                        <a:noFill/>
+                      </a:ln>
+                      <a:solidFill>
+                        <a:prstClr val="black"/>
+                      </a:solidFill>
+                      <a:effectLst/>
+                      <a:uLnTx/>
+                      <a:uFillTx/>
+                      <a:latin typeface="Calibri" panose="020F0502020204030204" pitchFamily="34" charset="0"/>
+                      <a:ea typeface="Cambria Math" panose="02040503050406030204" pitchFamily="18" charset="0"/>
+                      <a:cs typeface="Calibri" panose="020F0502020204030204" pitchFamily="34" charset="0"/>
+                    </a:rPr>
+                    <a:t>umeric</a:t>
+                  </a:r>
+                  <a:r>
+                    <a:rPr kumimoji="0" lang="en-GB" sz="1200" b="0" i="0" u="none" strike="noStrike" kern="1200" cap="none" spc="0" normalizeH="0" baseline="0" noProof="0" dirty="0">
+                      <a:ln>
+                        <a:noFill/>
+                      </a:ln>
+                      <a:solidFill>
+                        <a:prstClr val="black"/>
+                      </a:solidFill>
+                      <a:effectLst/>
+                      <a:uLnTx/>
+                      <a:uFillTx/>
+                      <a:latin typeface="Calibri" panose="020F0502020204030204" pitchFamily="34" charset="0"/>
+                      <a:ea typeface="Cambria Math" panose="02040503050406030204" pitchFamily="18" charset="0"/>
+                      <a:cs typeface="Calibri" panose="020F0502020204030204" pitchFamily="34" charset="0"/>
+                    </a:rPr>
+                    <a:t> response of </a:t>
+                  </a:r>
+                  <a:r>
+                    <a:rPr kumimoji="0" lang="en-GB" sz="1200" b="0" i="0" u="none" strike="noStrike" kern="1200" cap="none" spc="0" normalizeH="0" baseline="0" noProof="0" dirty="0">
+                      <a:ln>
+                        <a:noFill/>
+                      </a:ln>
+                      <a:solidFill>
+                        <a:prstClr val="black"/>
+                      </a:solidFill>
+                      <a:effectLst/>
+                      <a:uLnTx/>
+                      <a:uFillTx/>
+                      <a:latin typeface="Courier New" panose="02070309020205020404" pitchFamily="49" charset="0"/>
+                      <a:ea typeface="Cambria Math" panose="02040503050406030204" pitchFamily="18" charset="0"/>
+                      <a:cs typeface="Courier New" panose="02070309020205020404" pitchFamily="49" charset="0"/>
+                    </a:rPr>
+                    <a:t>class </a:t>
+                  </a:r>
+                  <a:r>
+                    <a:rPr kumimoji="0" lang="en-GB" sz="1200" b="0" i="0" u="none" strike="noStrike" kern="1200" cap="none" spc="0" normalizeH="0" baseline="0" noProof="0" dirty="0">
+                      <a:ln>
+                        <a:noFill/>
+                      </a:ln>
+                      <a:solidFill>
+                        <a:prstClr val="black"/>
+                      </a:solidFill>
+                      <a:effectLst/>
+                      <a:uLnTx/>
+                      <a:uFillTx/>
+                      <a:latin typeface="Calibri" panose="020F0502020204030204" pitchFamily="34" charset="0"/>
+                      <a:ea typeface="Cambria Math" panose="02040503050406030204" pitchFamily="18" charset="0"/>
+                      <a:cs typeface="Calibri" panose="020F0502020204030204" pitchFamily="34" charset="0"/>
+                    </a:rPr>
+                    <a:t>“</a:t>
+                  </a:r>
+                  <a:r>
+                    <a:rPr kumimoji="0" lang="en-GB" sz="1200" b="0" i="0" u="none" strike="noStrike" kern="1200" cap="none" spc="0" normalizeH="0" baseline="0" noProof="0" dirty="0">
+                      <a:ln>
+                        <a:noFill/>
+                      </a:ln>
+                      <a:solidFill>
+                        <a:prstClr val="black"/>
+                      </a:solidFill>
+                      <a:effectLst/>
+                      <a:uLnTx/>
+                      <a:uFillTx/>
+                      <a:latin typeface="Courier New" panose="02070309020205020404" pitchFamily="49" charset="0"/>
+                      <a:ea typeface="Cambria Math" panose="02040503050406030204" pitchFamily="18" charset="0"/>
+                      <a:cs typeface="Courier New" panose="02070309020205020404" pitchFamily="49" charset="0"/>
+                    </a:rPr>
+                    <a:t>numeric</a:t>
+                  </a:r>
+                  <a:r>
+                    <a:rPr kumimoji="0" lang="en-GB" sz="1200" b="0" i="0" u="none" strike="noStrike" kern="1200" cap="none" spc="0" normalizeH="0" baseline="0" noProof="0" dirty="0">
+                      <a:ln>
+                        <a:noFill/>
+                      </a:ln>
+                      <a:solidFill>
+                        <a:prstClr val="black"/>
+                      </a:solidFill>
+                      <a:effectLst/>
+                      <a:uLnTx/>
+                      <a:uFillTx/>
+                      <a:latin typeface="Calibri" panose="020F0502020204030204" pitchFamily="34" charset="0"/>
+                      <a:ea typeface="Cambria Math" panose="02040503050406030204" pitchFamily="18" charset="0"/>
+                      <a:cs typeface="Calibri" panose="020F0502020204030204" pitchFamily="34" charset="0"/>
+                    </a:rPr>
+                    <a:t>”</a:t>
+                  </a:r>
+                  <a:r>
+                    <a:rPr kumimoji="0" lang="en-GB" sz="1200" b="0" i="0" u="none" strike="noStrike" kern="1200" cap="none" spc="0" normalizeH="0" baseline="0" noProof="0" dirty="0">
+                      <a:ln>
+                        <a:noFill/>
+                      </a:ln>
+                      <a:solidFill>
+                        <a:prstClr val="black"/>
+                      </a:solidFill>
+                      <a:effectLst/>
+                      <a:uLnTx/>
+                      <a:uFillTx/>
+                      <a:latin typeface="Courier New" panose="02070309020205020404" pitchFamily="49" charset="0"/>
+                      <a:ea typeface="Cambria Math" panose="02040503050406030204" pitchFamily="18" charset="0"/>
+                      <a:cs typeface="Courier New" panose="02070309020205020404" pitchFamily="49" charset="0"/>
+                    </a:rPr>
+                    <a:t> </a:t>
+                  </a:r>
+                  <a:r>
+                    <a:rPr kumimoji="0" lang="en-GB" sz="1200" b="0" i="0" u="none" strike="noStrike" kern="1200" cap="none" spc="0" normalizeH="0" baseline="0" noProof="0" dirty="0">
+                      <a:ln>
+                        <a:noFill/>
+                      </a:ln>
+                      <a:solidFill>
+                        <a:prstClr val="black"/>
+                      </a:solidFill>
+                      <a:effectLst/>
+                      <a:uLnTx/>
+                      <a:uFillTx/>
+                      <a:latin typeface="Calibri" panose="020F0502020204030204" pitchFamily="34" charset="0"/>
+                      <a:ea typeface="Cambria Math" panose="02040503050406030204" pitchFamily="18" charset="0"/>
+                      <a:cs typeface="Calibri" panose="020F0502020204030204" pitchFamily="34" charset="0"/>
+                    </a:rPr>
+                    <a:t>or “</a:t>
+                  </a:r>
+                  <a:r>
+                    <a:rPr kumimoji="0" lang="en-GB" sz="1200" b="0" i="0" u="none" strike="noStrike" kern="1200" cap="none" spc="0" normalizeH="0" baseline="0" noProof="0" dirty="0">
+                      <a:ln>
+                        <a:noFill/>
+                      </a:ln>
+                      <a:solidFill>
+                        <a:prstClr val="black"/>
+                      </a:solidFill>
+                      <a:effectLst/>
+                      <a:uLnTx/>
+                      <a:uFillTx/>
+                      <a:latin typeface="Courier New" panose="02070309020205020404" pitchFamily="49" charset="0"/>
+                      <a:ea typeface="Cambria Math" panose="02040503050406030204" pitchFamily="18" charset="0"/>
+                      <a:cs typeface="Courier New" panose="02070309020205020404" pitchFamily="49" charset="0"/>
+                    </a:rPr>
+                    <a:t>integer</a:t>
+                  </a:r>
+                  <a:r>
+                    <a:rPr kumimoji="0" lang="en-GB" sz="1200" b="0" i="0" u="none" strike="noStrike" kern="1200" cap="none" spc="0" normalizeH="0" baseline="0" noProof="0" dirty="0">
+                      <a:ln>
+                        <a:noFill/>
+                      </a:ln>
+                      <a:solidFill>
+                        <a:prstClr val="black"/>
+                      </a:solidFill>
+                      <a:effectLst/>
+                      <a:uLnTx/>
+                      <a:uFillTx/>
+                      <a:latin typeface="Calibri" panose="020F0502020204030204" pitchFamily="34" charset="0"/>
+                      <a:ea typeface="Cambria Math" panose="02040503050406030204" pitchFamily="18" charset="0"/>
+                      <a:cs typeface="Calibri" panose="020F0502020204030204" pitchFamily="34" charset="0"/>
+                    </a:rPr>
+                    <a:t>”</a:t>
+                  </a:r>
+                </a:p>
+              </p:txBody>
+            </p:sp>
+          </mc:Choice>
+          <mc:Fallback xmlns="">
+            <p:sp>
+              <p:nvSpPr>
+                <p:cNvPr id="7" name="Textfeld 6">
+                  <a:extLst>
+                    <a:ext uri="{FF2B5EF4-FFF2-40B4-BE49-F238E27FC236}">
+                      <a16:creationId xmlns:a16="http://schemas.microsoft.com/office/drawing/2014/main" id="{F15C4A27-3FC3-4E72-00C0-8FCD121A3D3F}"/>
+                    </a:ext>
+                  </a:extLst>
+                </p:cNvPr>
+                <p:cNvSpPr txBox="1">
+                  <a:spLocks noRot="1" noChangeAspect="1" noMove="1" noResize="1" noEditPoints="1" noAdjustHandles="1" noChangeArrowheads="1" noChangeShapeType="1" noTextEdit="1"/>
+                </p:cNvSpPr>
+                <p:nvPr/>
+              </p:nvSpPr>
+              <p:spPr>
+                <a:xfrm>
+                  <a:off x="743828" y="1006892"/>
+                  <a:ext cx="4320000" cy="461665"/>
+                </a:xfrm>
+                <a:prstGeom prst="rect">
+                  <a:avLst/>
+                </a:prstGeom>
+                <a:blipFill>
+                  <a:blip r:embed="rId5"/>
+                  <a:stretch>
+                    <a:fillRect b="-7692"/>
+                  </a:stretch>
+                </a:blipFill>
+                <a:ln w="12700">
+                  <a:solidFill>
+                    <a:schemeClr val="tx1"/>
+                  </a:solidFill>
+                </a:ln>
+              </p:spPr>
+              <p:txBody>
+                <a:bodyPr/>
+                <a:lstStyle/>
+                <a:p>
+                  <a:r>
+                    <a:rPr lang="de-DE">
+                      <a:noFill/>
+                    </a:rPr>
+                    <a:t> </a:t>
+                  </a:r>
+                </a:p>
+              </p:txBody>
+            </p:sp>
+          </mc:Fallback>
+        </mc:AlternateContent>
+        <p:sp>
+          <p:nvSpPr>
+            <p:cNvPr id="36" name="Textfeld 35">
+              <a:extLst>
+                <a:ext uri="{FF2B5EF4-FFF2-40B4-BE49-F238E27FC236}">
+                  <a16:creationId xmlns:a16="http://schemas.microsoft.com/office/drawing/2014/main" id="{E4B8EE02-0F90-3F09-7990-89B6B3DCBB2E}"/>
+                </a:ext>
+              </a:extLst>
+            </p:cNvPr>
+            <p:cNvSpPr txBox="1"/>
+            <p:nvPr/>
+          </p:nvSpPr>
+          <p:spPr>
+            <a:xfrm>
+              <a:off x="743828" y="5327016"/>
+              <a:ext cx="4320000" cy="461665"/>
+            </a:xfrm>
+            <a:prstGeom prst="rect">
+              <a:avLst/>
+            </a:prstGeom>
+            <a:solidFill>
+              <a:schemeClr val="accent4">
+                <a:lumMod val="20000"/>
+                <a:lumOff val="80000"/>
+              </a:schemeClr>
+            </a:solidFill>
+            <a:ln w="12700">
+              <a:solidFill>
+                <a:schemeClr val="tx1"/>
+              </a:solidFill>
+            </a:ln>
+          </p:spPr>
+          <p:txBody>
+            <a:bodyPr wrap="square">
+              <a:spAutoFit/>
+            </a:bodyPr>
+            <a:lstStyle/>
+            <a:p>
+              <a:pPr marL="171450" marR="0" lvl="0" indent="-171450" algn="l" defTabSz="914400" rtl="0" eaLnBrk="1" fontAlgn="auto" latinLnBrk="0" hangingPunct="1">
+                <a:lnSpc>
+                  <a:spcPct val="100000"/>
+                </a:lnSpc>
+                <a:spcBef>
+                  <a:spcPts val="0"/>
+                </a:spcBef>
+                <a:spcAft>
+                  <a:spcPts val="0"/>
+                </a:spcAft>
+                <a:buClrTx/>
+                <a:buSzTx/>
+                <a:buFont typeface="Arial" panose="020B0604020202020204" pitchFamily="34" charset="0"/>
+                <a:buChar char="•"/>
+                <a:tabLst/>
+                <a:defRPr/>
+              </a:pPr>
+              <a:r>
+                <a:rPr kumimoji="0" lang="en-GB" sz="1200" b="0" i="0" u="none" strike="noStrike" kern="1200" cap="none" spc="0" normalizeH="0" baseline="0" noProof="0" dirty="0">
+                  <a:ln>
+                    <a:noFill/>
+                  </a:ln>
+                  <a:solidFill>
+                    <a:prstClr val="black"/>
+                  </a:solidFill>
+                  <a:effectLst/>
+                  <a:uLnTx/>
+                  <a:uFillTx/>
+                  <a:latin typeface="Calibri" panose="020F0502020204030204" pitchFamily="34" charset="0"/>
+                  <a:ea typeface="Cambria Math" panose="02040503050406030204" pitchFamily="18" charset="0"/>
+                  <a:cs typeface="Calibri" panose="020F0502020204030204" pitchFamily="34" charset="0"/>
+                </a:rPr>
+                <a:t>Both variables  of  </a:t>
+              </a:r>
+              <a:r>
+                <a:rPr kumimoji="0" lang="en-GB" sz="1200" b="0" i="0" u="none" strike="noStrike" kern="1200" cap="none" spc="0" normalizeH="0" baseline="0" noProof="0" dirty="0">
+                  <a:ln>
+                    <a:noFill/>
+                  </a:ln>
+                  <a:solidFill>
+                    <a:prstClr val="black"/>
+                  </a:solidFill>
+                  <a:effectLst/>
+                  <a:uLnTx/>
+                  <a:uFillTx/>
+                  <a:latin typeface="Courier New" panose="02070309020205020404" pitchFamily="49" charset="0"/>
+                  <a:ea typeface="Cambria Math" panose="02040503050406030204" pitchFamily="18" charset="0"/>
+                  <a:cs typeface="Courier New" panose="02070309020205020404" pitchFamily="49" charset="0"/>
+                </a:rPr>
+                <a:t>class </a:t>
+              </a:r>
+              <a:r>
+                <a:rPr kumimoji="0" lang="en-GB" sz="1200" b="0" i="0" u="none" strike="noStrike" kern="1200" cap="none" spc="0" normalizeH="0" baseline="0" noProof="0" dirty="0">
+                  <a:ln>
+                    <a:noFill/>
+                  </a:ln>
+                  <a:solidFill>
+                    <a:prstClr val="black"/>
+                  </a:solidFill>
+                  <a:effectLst/>
+                  <a:uLnTx/>
+                  <a:uFillTx/>
+                  <a:latin typeface="Calibri" panose="020F0502020204030204" pitchFamily="34" charset="0"/>
+                  <a:ea typeface="Cambria Math" panose="02040503050406030204" pitchFamily="18" charset="0"/>
+                  <a:cs typeface="Calibri" panose="020F0502020204030204" pitchFamily="34" charset="0"/>
+                </a:rPr>
+                <a:t>“</a:t>
+              </a:r>
+              <a:r>
+                <a:rPr kumimoji="0" lang="en-GB" sz="1200" b="0" i="0" u="none" strike="noStrike" kern="1200" cap="none" spc="0" normalizeH="0" baseline="0" noProof="0" dirty="0">
+                  <a:ln>
+                    <a:noFill/>
+                  </a:ln>
+                  <a:solidFill>
+                    <a:prstClr val="black"/>
+                  </a:solidFill>
+                  <a:effectLst/>
+                  <a:uLnTx/>
+                  <a:uFillTx/>
+                  <a:latin typeface="Courier New" panose="02070309020205020404" pitchFamily="49" charset="0"/>
+                  <a:ea typeface="Cambria Math" panose="02040503050406030204" pitchFamily="18" charset="0"/>
+                  <a:cs typeface="Courier New" panose="02070309020205020404" pitchFamily="49" charset="0"/>
+                </a:rPr>
+                <a:t>factor</a:t>
+              </a:r>
+              <a:r>
+                <a:rPr kumimoji="0" lang="en-GB" sz="1200" b="0" i="0" u="none" strike="noStrike" kern="1200" cap="none" spc="0" normalizeH="0" baseline="0" noProof="0" dirty="0">
+                  <a:ln>
+                    <a:noFill/>
+                  </a:ln>
+                  <a:solidFill>
+                    <a:prstClr val="black"/>
+                  </a:solidFill>
+                  <a:effectLst/>
+                  <a:uLnTx/>
+                  <a:uFillTx/>
+                  <a:latin typeface="Calibri" panose="020F0502020204030204" pitchFamily="34" charset="0"/>
+                  <a:ea typeface="Cambria Math" panose="02040503050406030204" pitchFamily="18" charset="0"/>
+                  <a:cs typeface="Calibri" panose="020F0502020204030204" pitchFamily="34" charset="0"/>
+                </a:rPr>
+                <a:t> “</a:t>
+              </a:r>
+            </a:p>
+            <a:p>
+              <a:pPr marL="171450" marR="0" lvl="0" indent="-171450" algn="l" defTabSz="914400" rtl="0" eaLnBrk="1" fontAlgn="auto" latinLnBrk="0" hangingPunct="1">
+                <a:lnSpc>
+                  <a:spcPct val="100000"/>
+                </a:lnSpc>
+                <a:spcBef>
+                  <a:spcPts val="0"/>
+                </a:spcBef>
+                <a:spcAft>
+                  <a:spcPts val="0"/>
+                </a:spcAft>
+                <a:buClrTx/>
+                <a:buSzTx/>
+                <a:buFont typeface="Arial" panose="020B0604020202020204" pitchFamily="34" charset="0"/>
+                <a:buChar char="•"/>
+                <a:tabLst/>
+                <a:defRPr/>
+              </a:pPr>
+              <a:endParaRPr kumimoji="0" lang="en-GB" sz="1200" b="0" i="0" u="none" strike="noStrike" kern="1200" cap="none" spc="0" normalizeH="0" baseline="0" noProof="0" dirty="0">
+                <a:ln>
+                  <a:noFill/>
+                </a:ln>
+                <a:solidFill>
+                  <a:prstClr val="black"/>
+                </a:solidFill>
+                <a:effectLst/>
+                <a:uLnTx/>
+                <a:uFillTx/>
+                <a:latin typeface="Calibri" panose="020F0502020204030204" pitchFamily="34" charset="0"/>
+                <a:ea typeface="Cambria Math" panose="02040503050406030204" pitchFamily="18" charset="0"/>
+                <a:cs typeface="Calibri" panose="020F0502020204030204" pitchFamily="34" charset="0"/>
+              </a:endParaRPr>
+            </a:p>
+          </p:txBody>
+        </p:sp>
+        <p:cxnSp>
+          <p:nvCxnSpPr>
+            <p:cNvPr id="37" name="Gerade Verbindung mit Pfeil 36">
+              <a:extLst>
+                <a:ext uri="{FF2B5EF4-FFF2-40B4-BE49-F238E27FC236}">
+                  <a16:creationId xmlns:a16="http://schemas.microsoft.com/office/drawing/2014/main" id="{D0C86A91-FDA7-431A-A97E-45AB5F8F86AC}"/>
+                </a:ext>
+              </a:extLst>
+            </p:cNvPr>
+            <p:cNvCxnSpPr>
+              <a:cxnSpLocks/>
+              <a:stCxn id="36" idx="3"/>
+              <a:endCxn id="40" idx="1"/>
+            </p:cNvCxnSpPr>
+            <p:nvPr/>
+          </p:nvCxnSpPr>
+          <p:spPr>
+            <a:xfrm>
+              <a:off x="5063828" y="5557849"/>
+              <a:ext cx="490262" cy="0"/>
+            </a:xfrm>
+            <a:prstGeom prst="straightConnector1">
+              <a:avLst/>
+            </a:prstGeom>
+            <a:ln w="12700">
+              <a:solidFill>
+                <a:schemeClr val="tx1"/>
+              </a:solidFill>
+              <a:tailEnd type="triangle"/>
+            </a:ln>
+          </p:spPr>
+          <p:style>
+            <a:lnRef idx="1">
+              <a:schemeClr val="accent1"/>
+            </a:lnRef>
+            <a:fillRef idx="0">
+              <a:schemeClr val="accent1"/>
+            </a:fillRef>
+            <a:effectRef idx="0">
+              <a:schemeClr val="accent1"/>
+            </a:effectRef>
+            <a:fontRef idx="minor">
+              <a:schemeClr val="tx1"/>
+            </a:fontRef>
+          </p:style>
+        </p:cxnSp>
+        <p:sp>
+          <p:nvSpPr>
+            <p:cNvPr id="40" name="Textfeld 39">
+              <a:extLst>
+                <a:ext uri="{FF2B5EF4-FFF2-40B4-BE49-F238E27FC236}">
+                  <a16:creationId xmlns:a16="http://schemas.microsoft.com/office/drawing/2014/main" id="{50FC18BF-DA43-100C-15F7-046360CBE26F}"/>
+                </a:ext>
+              </a:extLst>
+            </p:cNvPr>
+            <p:cNvSpPr txBox="1"/>
+            <p:nvPr/>
+          </p:nvSpPr>
+          <p:spPr>
+            <a:xfrm>
+              <a:off x="5554090" y="5327016"/>
+              <a:ext cx="5400000" cy="461665"/>
+            </a:xfrm>
+            <a:prstGeom prst="rect">
+              <a:avLst/>
+            </a:prstGeom>
+            <a:solidFill>
+              <a:schemeClr val="accent4">
+                <a:lumMod val="20000"/>
+                <a:lumOff val="80000"/>
+              </a:schemeClr>
+            </a:solidFill>
+            <a:ln w="12700">
+              <a:solidFill>
+                <a:schemeClr val="tx1"/>
+              </a:solidFill>
+            </a:ln>
+          </p:spPr>
+          <p:txBody>
+            <a:bodyPr wrap="square">
+              <a:spAutoFit/>
+            </a:bodyPr>
+            <a:lstStyle>
+              <a:defPPr>
+                <a:defRPr lang="de-DE"/>
+              </a:defPPr>
+            </a:lstStyle>
+            <a:p>
+              <a:pPr marL="0" marR="0" lvl="0" indent="0" algn="ctr" defTabSz="914400" rtl="0" eaLnBrk="1" fontAlgn="auto" latinLnBrk="0" hangingPunct="1">
+                <a:lnSpc>
+                  <a:spcPct val="100000"/>
+                </a:lnSpc>
+                <a:spcBef>
+                  <a:spcPts val="0"/>
+                </a:spcBef>
+                <a:spcAft>
+                  <a:spcPts val="0"/>
+                </a:spcAft>
+                <a:buClrTx/>
+                <a:buSzTx/>
+                <a:buFontTx/>
+                <a:buNone/>
+                <a:tabLst/>
+                <a:defRPr/>
+              </a:pPr>
+              <a:r>
+                <a:rPr kumimoji="0" lang="en-GB" sz="1200" b="0" i="0" u="none" strike="noStrike" kern="1200" cap="none" spc="0" normalizeH="0" baseline="0" noProof="0" dirty="0">
+                  <a:ln>
+                    <a:noFill/>
+                  </a:ln>
+                  <a:solidFill>
+                    <a:prstClr val="black"/>
+                  </a:solidFill>
+                  <a:effectLst/>
+                  <a:uLnTx/>
+                  <a:uFillTx/>
+                  <a:latin typeface="Calibri" panose="020F0502020204030204" pitchFamily="34" charset="0"/>
+                  <a:ea typeface="Cambria Math" panose="02040503050406030204" pitchFamily="18" charset="0"/>
+                  <a:cs typeface="Calibri" panose="020F0502020204030204" pitchFamily="34" charset="0"/>
+                </a:rPr>
+                <a:t>            Comparing proportions:</a:t>
+              </a:r>
+              <a:br>
+                <a:rPr kumimoji="0" lang="en-GB" sz="1200" b="0" i="0" u="none" strike="noStrike" kern="1200" cap="none" spc="0" normalizeH="0" baseline="0" noProof="0" dirty="0">
+                  <a:ln>
+                    <a:noFill/>
+                  </a:ln>
+                  <a:solidFill>
+                    <a:prstClr val="black"/>
+                  </a:solidFill>
+                  <a:effectLst/>
+                  <a:uLnTx/>
+                  <a:uFillTx/>
+                  <a:latin typeface="Calibri" panose="020F0502020204030204" pitchFamily="34" charset="0"/>
+                  <a:ea typeface="Cambria Math" panose="02040503050406030204" pitchFamily="18" charset="0"/>
+                  <a:cs typeface="Calibri" panose="020F0502020204030204" pitchFamily="34" charset="0"/>
+                </a:rPr>
+              </a:br>
+              <a:r>
+                <a:rPr kumimoji="0" lang="en-GB" sz="1200" b="0" i="0" u="none" strike="noStrike" kern="1200" cap="none" spc="0" normalizeH="0" baseline="0" noProof="0" dirty="0" err="1">
+                  <a:ln>
+                    <a:noFill/>
+                  </a:ln>
+                  <a:solidFill>
+                    <a:prstClr val="black"/>
+                  </a:solidFill>
+                  <a:effectLst/>
+                  <a:uLnTx/>
+                  <a:uFillTx/>
+                  <a:latin typeface="Courier New" panose="02070309020205020404" pitchFamily="49" charset="0"/>
+                  <a:ea typeface="Cambria Math" panose="02040503050406030204" pitchFamily="18" charset="0"/>
+                  <a:cs typeface="Courier New" panose="02070309020205020404" pitchFamily="49" charset="0"/>
+                </a:rPr>
+                <a:t>chisq.test</a:t>
+              </a:r>
+              <a:r>
+                <a:rPr kumimoji="0" lang="en-GB" sz="1200" b="0" i="0" u="none" strike="noStrike" kern="1200" cap="none" spc="0" normalizeH="0" baseline="0" noProof="0" dirty="0">
+                  <a:ln>
+                    <a:noFill/>
+                  </a:ln>
+                  <a:solidFill>
+                    <a:prstClr val="black"/>
+                  </a:solidFill>
+                  <a:effectLst/>
+                  <a:uLnTx/>
+                  <a:uFillTx/>
+                  <a:latin typeface="Courier New" panose="02070309020205020404" pitchFamily="49" charset="0"/>
+                  <a:ea typeface="Cambria Math" panose="02040503050406030204" pitchFamily="18" charset="0"/>
+                  <a:cs typeface="Courier New" panose="02070309020205020404" pitchFamily="49" charset="0"/>
+                </a:rPr>
+                <a:t>(), </a:t>
+              </a:r>
+              <a:r>
+                <a:rPr kumimoji="0" lang="en-GB" sz="1200" b="0" i="0" u="none" strike="noStrike" kern="1200" cap="none" spc="0" normalizeH="0" baseline="0" noProof="0" dirty="0" err="1">
+                  <a:ln>
+                    <a:noFill/>
+                  </a:ln>
+                  <a:solidFill>
+                    <a:prstClr val="black"/>
+                  </a:solidFill>
+                  <a:effectLst/>
+                  <a:uLnTx/>
+                  <a:uFillTx/>
+                  <a:latin typeface="Courier New" panose="02070309020205020404" pitchFamily="49" charset="0"/>
+                  <a:ea typeface="Cambria Math" panose="02040503050406030204" pitchFamily="18" charset="0"/>
+                  <a:cs typeface="Courier New" panose="02070309020205020404" pitchFamily="49" charset="0"/>
+                </a:rPr>
+                <a:t>fisher.test</a:t>
+              </a:r>
+              <a:r>
+                <a:rPr kumimoji="0" lang="en-GB" sz="1200" b="0" i="0" u="none" strike="noStrike" kern="1200" cap="none" spc="0" normalizeH="0" baseline="0" noProof="0" dirty="0">
+                  <a:ln>
+                    <a:noFill/>
+                  </a:ln>
+                  <a:solidFill>
+                    <a:prstClr val="black"/>
+                  </a:solidFill>
+                  <a:effectLst/>
+                  <a:uLnTx/>
+                  <a:uFillTx/>
+                  <a:latin typeface="Courier New" panose="02070309020205020404" pitchFamily="49" charset="0"/>
+                  <a:ea typeface="Cambria Math" panose="02040503050406030204" pitchFamily="18" charset="0"/>
+                  <a:cs typeface="Courier New" panose="02070309020205020404" pitchFamily="49" charset="0"/>
+                </a:rPr>
+                <a:t>() </a:t>
+              </a:r>
+            </a:p>
+          </p:txBody>
+        </p:sp>
+        <mc:AlternateContent xmlns:mc="http://schemas.openxmlformats.org/markup-compatibility/2006" xmlns:a14="http://schemas.microsoft.com/office/drawing/2010/main">
+          <mc:Choice Requires="a14">
+            <p:sp>
+              <p:nvSpPr>
+                <p:cNvPr id="5" name="Textfeld 4">
+                  <a:extLst>
+                    <a:ext uri="{FF2B5EF4-FFF2-40B4-BE49-F238E27FC236}">
+                      <a16:creationId xmlns:a16="http://schemas.microsoft.com/office/drawing/2014/main" id="{D88560B6-0A0F-0760-6149-6FF3B7B24210}"/>
+                    </a:ext>
+                  </a:extLst>
+                </p:cNvPr>
+                <p:cNvSpPr txBox="1"/>
+                <p:nvPr/>
+              </p:nvSpPr>
+              <p:spPr>
+                <a:xfrm>
+                  <a:off x="720963" y="2010444"/>
+                  <a:ext cx="4320000" cy="646331"/>
+                </a:xfrm>
+                <a:prstGeom prst="rect">
+                  <a:avLst/>
+                </a:prstGeom>
+                <a:solidFill>
+                  <a:schemeClr val="accent5">
+                    <a:lumMod val="40000"/>
+                    <a:lumOff val="60000"/>
+                  </a:schemeClr>
+                </a:solidFill>
+                <a:ln w="12700">
+                  <a:solidFill>
+                    <a:schemeClr val="tx1"/>
+                  </a:solidFill>
+                </a:ln>
+              </p:spPr>
+              <p:txBody>
+                <a:bodyPr wrap="square">
+                  <a:spAutoFit/>
+                </a:bodyPr>
+                <a:lstStyle/>
+                <a:p>
+                  <a:pPr marL="0" marR="0" lvl="0" indent="0" algn="l" defTabSz="914400" rtl="0" eaLnBrk="1" fontAlgn="auto" latinLnBrk="0" hangingPunct="1">
+                    <a:lnSpc>
+                      <a:spcPct val="100000"/>
+                    </a:lnSpc>
+                    <a:spcBef>
+                      <a:spcPts val="0"/>
+                    </a:spcBef>
+                    <a:spcAft>
+                      <a:spcPts val="0"/>
+                    </a:spcAft>
+                    <a:buClrTx/>
+                    <a:buSzTx/>
+                    <a:buFontTx/>
+                    <a:buNone/>
+                    <a:tabLst/>
+                    <a:defRPr/>
+                  </a:pPr>
+                  <a:r>
+                    <a:rPr kumimoji="0" lang="en-GB" sz="1200" b="0" i="0" u="none" strike="noStrike" kern="1200" cap="none" spc="0" normalizeH="0" baseline="0" noProof="0" dirty="0">
+                      <a:ln>
+                        <a:noFill/>
+                      </a:ln>
+                      <a:solidFill>
+                        <a:prstClr val="black"/>
+                      </a:solidFill>
+                      <a:effectLst/>
+                      <a:uLnTx/>
+                      <a:uFillTx/>
+                      <a:latin typeface="Calibri" panose="020F0502020204030204" pitchFamily="34" charset="0"/>
+                      <a:ea typeface="Cambria Math" panose="02040503050406030204" pitchFamily="18" charset="0"/>
+                      <a:cs typeface="Calibri" panose="020F0502020204030204" pitchFamily="34" charset="0"/>
+                    </a:rPr>
+                    <a:t>Categorical predictor of </a:t>
+                  </a:r>
+                  <a:r>
+                    <a:rPr kumimoji="0" lang="en-GB" sz="1200" b="0" i="0" u="none" strike="noStrike" kern="1200" cap="none" spc="0" normalizeH="0" baseline="0" noProof="0" dirty="0">
+                      <a:ln>
+                        <a:noFill/>
+                      </a:ln>
+                      <a:solidFill>
+                        <a:prstClr val="black"/>
+                      </a:solidFill>
+                      <a:effectLst/>
+                      <a:uLnTx/>
+                      <a:uFillTx/>
+                      <a:latin typeface="Courier New" panose="02070309020205020404" pitchFamily="49" charset="0"/>
+                      <a:ea typeface="Cambria Math" panose="02040503050406030204" pitchFamily="18" charset="0"/>
+                      <a:cs typeface="Courier New" panose="02070309020205020404" pitchFamily="49" charset="0"/>
+                    </a:rPr>
+                    <a:t>class </a:t>
+                  </a:r>
+                  <a:r>
+                    <a:rPr kumimoji="0" lang="en-GB" sz="1200" b="0" i="0" u="none" strike="noStrike" kern="1200" cap="none" spc="0" normalizeH="0" baseline="0" noProof="0" dirty="0">
+                      <a:ln>
+                        <a:noFill/>
+                      </a:ln>
+                      <a:solidFill>
+                        <a:prstClr val="black"/>
+                      </a:solidFill>
+                      <a:effectLst/>
+                      <a:uLnTx/>
+                      <a:uFillTx/>
+                      <a:latin typeface="Calibri" panose="020F0502020204030204" pitchFamily="34" charset="0"/>
+                      <a:ea typeface="Cambria Math" panose="02040503050406030204" pitchFamily="18" charset="0"/>
+                      <a:cs typeface="Calibri" panose="020F0502020204030204" pitchFamily="34" charset="0"/>
+                    </a:rPr>
+                    <a:t>“</a:t>
+                  </a:r>
+                  <a:r>
+                    <a:rPr kumimoji="0" lang="en-GB" sz="1200" b="0" i="0" u="none" strike="noStrike" kern="1200" cap="none" spc="0" normalizeH="0" baseline="0" noProof="0" dirty="0">
+                      <a:ln>
+                        <a:noFill/>
+                      </a:ln>
+                      <a:solidFill>
+                        <a:prstClr val="black"/>
+                      </a:solidFill>
+                      <a:effectLst/>
+                      <a:uLnTx/>
+                      <a:uFillTx/>
+                      <a:latin typeface="Courier New" panose="02070309020205020404" pitchFamily="49" charset="0"/>
+                      <a:ea typeface="Cambria Math" panose="02040503050406030204" pitchFamily="18" charset="0"/>
+                      <a:cs typeface="Courier New" panose="02070309020205020404" pitchFamily="49" charset="0"/>
+                    </a:rPr>
+                    <a:t>factor</a:t>
+                  </a:r>
+                  <a:r>
+                    <a:rPr kumimoji="0" lang="en-GB" sz="1200" b="0" i="0" u="none" strike="noStrike" kern="1200" cap="none" spc="0" normalizeH="0" baseline="0" noProof="0" dirty="0">
+                      <a:ln>
+                        <a:noFill/>
+                      </a:ln>
+                      <a:solidFill>
+                        <a:prstClr val="black"/>
+                      </a:solidFill>
+                      <a:effectLst/>
+                      <a:uLnTx/>
+                      <a:uFillTx/>
+                      <a:latin typeface="Calibri" panose="020F0502020204030204" pitchFamily="34" charset="0"/>
+                      <a:ea typeface="Cambria Math" panose="02040503050406030204" pitchFamily="18" charset="0"/>
+                      <a:cs typeface="Calibri" panose="020F0502020204030204" pitchFamily="34" charset="0"/>
+                    </a:rPr>
+                    <a:t>“  with </a:t>
+                  </a:r>
+                  <a14:m>
+                    <m:oMath xmlns:m="http://schemas.openxmlformats.org/officeDocument/2006/math">
+                      <m:r>
+                        <a:rPr kumimoji="0" lang="en-US" sz="1200" b="0" i="1" u="none" strike="noStrike" kern="1200" cap="none" spc="0" normalizeH="0" baseline="0" noProof="0" smtClean="0">
+                          <a:ln>
+                            <a:noFill/>
+                          </a:ln>
+                          <a:solidFill>
+                            <a:prstClr val="black"/>
+                          </a:solidFill>
+                          <a:effectLst/>
+                          <a:uLnTx/>
+                          <a:uFillTx/>
+                          <a:latin typeface="Cambria Math" panose="02040503050406030204" pitchFamily="18" charset="0"/>
+                          <a:ea typeface="Cambria Math" panose="02040503050406030204" pitchFamily="18" charset="0"/>
+                          <a:cs typeface="Calibri" panose="020F0502020204030204" pitchFamily="34" charset="0"/>
+                        </a:rPr>
+                        <m:t>𝑘</m:t>
+                      </m:r>
+                    </m:oMath>
+                  </a14:m>
+                  <a:r>
+                    <a:rPr kumimoji="0" lang="en-GB" sz="1200" b="0" i="0" u="none" strike="noStrike" kern="1200" cap="none" spc="0" normalizeH="0" baseline="0" noProof="0" dirty="0">
+                      <a:ln>
+                        <a:noFill/>
+                      </a:ln>
+                      <a:solidFill>
+                        <a:prstClr val="black"/>
+                      </a:solidFill>
+                      <a:effectLst/>
+                      <a:uLnTx/>
+                      <a:uFillTx/>
+                      <a:latin typeface="Calibri" panose="020F0502020204030204" pitchFamily="34" charset="0"/>
+                      <a:ea typeface="Cambria Math" panose="02040503050406030204" pitchFamily="18" charset="0"/>
+                      <a:cs typeface="Calibri" panose="020F0502020204030204" pitchFamily="34" charset="0"/>
+                    </a:rPr>
+                    <a:t> levels</a:t>
+                  </a:r>
+                </a:p>
+                <a:p>
+                  <a:pPr marL="0" marR="0" lvl="0" indent="0" algn="l" defTabSz="914400" rtl="0" eaLnBrk="1" fontAlgn="auto" latinLnBrk="0" hangingPunct="1">
+                    <a:lnSpc>
+                      <a:spcPct val="100000"/>
+                    </a:lnSpc>
+                    <a:spcBef>
+                      <a:spcPts val="0"/>
+                    </a:spcBef>
+                    <a:spcAft>
+                      <a:spcPts val="0"/>
+                    </a:spcAft>
+                    <a:buClrTx/>
+                    <a:buSzTx/>
+                    <a:buFontTx/>
+                    <a:buNone/>
+                    <a:tabLst/>
+                    <a:defRPr/>
+                  </a:pPr>
+                  <a:r>
+                    <a:rPr kumimoji="0" lang="en-GB" sz="1200" b="0" i="0" u="none" strike="noStrike" kern="1200" cap="none" spc="0" normalizeH="0" baseline="0" noProof="0" dirty="0">
+                      <a:ln>
+                        <a:noFill/>
+                      </a:ln>
+                      <a:solidFill>
+                        <a:prstClr val="black"/>
+                      </a:solidFill>
+                      <a:effectLst/>
+                      <a:uLnTx/>
+                      <a:uFillTx/>
+                      <a:latin typeface="Calibri" panose="020F0502020204030204" pitchFamily="34" charset="0"/>
+                      <a:ea typeface="Cambria Math" panose="02040503050406030204" pitchFamily="18" charset="0"/>
+                      <a:cs typeface="Calibri" panose="020F0502020204030204" pitchFamily="34" charset="0"/>
+                    </a:rPr>
+                    <a:t>Categorical response of </a:t>
+                  </a:r>
+                  <a:r>
+                    <a:rPr kumimoji="0" lang="en-GB" sz="1200" b="0" i="0" u="none" strike="noStrike" kern="1200" cap="none" spc="0" normalizeH="0" baseline="0" noProof="0" dirty="0">
+                      <a:ln>
+                        <a:noFill/>
+                      </a:ln>
+                      <a:solidFill>
+                        <a:prstClr val="black"/>
+                      </a:solidFill>
+                      <a:effectLst/>
+                      <a:uLnTx/>
+                      <a:uFillTx/>
+                      <a:latin typeface="Courier New" panose="02070309020205020404" pitchFamily="49" charset="0"/>
+                      <a:ea typeface="Cambria Math" panose="02040503050406030204" pitchFamily="18" charset="0"/>
+                      <a:cs typeface="Courier New" panose="02070309020205020404" pitchFamily="49" charset="0"/>
+                    </a:rPr>
+                    <a:t>class </a:t>
+                  </a:r>
+                  <a:r>
+                    <a:rPr kumimoji="0" lang="en-GB" sz="1200" b="0" i="0" u="none" strike="noStrike" kern="1200" cap="none" spc="0" normalizeH="0" baseline="0" noProof="0" dirty="0">
+                      <a:ln>
+                        <a:noFill/>
+                      </a:ln>
+                      <a:solidFill>
+                        <a:prstClr val="black"/>
+                      </a:solidFill>
+                      <a:effectLst/>
+                      <a:uLnTx/>
+                      <a:uFillTx/>
+                      <a:latin typeface="Calibri" panose="020F0502020204030204" pitchFamily="34" charset="0"/>
+                      <a:ea typeface="Cambria Math" panose="02040503050406030204" pitchFamily="18" charset="0"/>
+                      <a:cs typeface="Calibri" panose="020F0502020204030204" pitchFamily="34" charset="0"/>
+                    </a:rPr>
+                    <a:t>“</a:t>
+                  </a:r>
+                  <a:r>
+                    <a:rPr kumimoji="0" lang="en-GB" sz="1200" b="0" i="0" u="none" strike="noStrike" kern="1200" cap="none" spc="0" normalizeH="0" baseline="0" noProof="0" dirty="0">
+                      <a:ln>
+                        <a:noFill/>
+                      </a:ln>
+                      <a:solidFill>
+                        <a:prstClr val="black"/>
+                      </a:solidFill>
+                      <a:effectLst/>
+                      <a:uLnTx/>
+                      <a:uFillTx/>
+                      <a:latin typeface="Courier New" panose="02070309020205020404" pitchFamily="49" charset="0"/>
+                      <a:ea typeface="Cambria Math" panose="02040503050406030204" pitchFamily="18" charset="0"/>
+                      <a:cs typeface="Courier New" panose="02070309020205020404" pitchFamily="49" charset="0"/>
+                    </a:rPr>
+                    <a:t>factor</a:t>
+                  </a:r>
+                  <a:r>
+                    <a:rPr kumimoji="0" lang="en-GB" sz="1200" b="0" i="0" u="none" strike="noStrike" kern="1200" cap="none" spc="0" normalizeH="0" baseline="0" noProof="0" dirty="0">
+                      <a:ln>
+                        <a:noFill/>
+                      </a:ln>
+                      <a:solidFill>
+                        <a:prstClr val="black"/>
+                      </a:solidFill>
+                      <a:effectLst/>
+                      <a:uLnTx/>
+                      <a:uFillTx/>
+                      <a:latin typeface="Calibri" panose="020F0502020204030204" pitchFamily="34" charset="0"/>
+                      <a:ea typeface="Cambria Math" panose="02040503050406030204" pitchFamily="18" charset="0"/>
+                      <a:cs typeface="Calibri" panose="020F0502020204030204" pitchFamily="34" charset="0"/>
+                    </a:rPr>
+                    <a:t>“   and</a:t>
+                  </a:r>
+                  <a:br>
+                    <a:rPr kumimoji="0" lang="en-GB" sz="1200" b="0" i="0" u="none" strike="noStrike" kern="1200" cap="none" spc="0" normalizeH="0" baseline="0" noProof="0" dirty="0">
+                      <a:ln>
+                        <a:noFill/>
+                      </a:ln>
+                      <a:solidFill>
+                        <a:prstClr val="black"/>
+                      </a:solidFill>
+                      <a:effectLst/>
+                      <a:uLnTx/>
+                      <a:uFillTx/>
+                      <a:latin typeface="Calibri" panose="020F0502020204030204" pitchFamily="34" charset="0"/>
+                      <a:ea typeface="Cambria Math" panose="02040503050406030204" pitchFamily="18" charset="0"/>
+                      <a:cs typeface="Calibri" panose="020F0502020204030204" pitchFamily="34" charset="0"/>
+                    </a:rPr>
+                  </a:br>
+                  <a:r>
+                    <a:rPr kumimoji="0" lang="en-GB" sz="1200" b="0" i="0" u="none" strike="noStrike" kern="1200" cap="none" spc="0" normalizeH="0" baseline="0" noProof="0" dirty="0">
+                      <a:ln>
+                        <a:noFill/>
+                      </a:ln>
+                      <a:solidFill>
+                        <a:prstClr val="black"/>
+                      </a:solidFill>
+                      <a:effectLst/>
+                      <a:uLnTx/>
+                      <a:uFillTx/>
+                      <a:latin typeface="Calibri" panose="020F0502020204030204" pitchFamily="34" charset="0"/>
+                      <a:ea typeface="Cambria Math" panose="02040503050406030204" pitchFamily="18" charset="0"/>
+                      <a:cs typeface="Calibri" panose="020F0502020204030204" pitchFamily="34" charset="0"/>
+                    </a:rPr>
+                    <a:t>                                                         “</a:t>
+                  </a:r>
+                  <a:r>
+                    <a:rPr kumimoji="0" lang="en-GB" sz="1200" b="0" i="0" u="none" strike="noStrike" kern="1200" cap="none" spc="0" normalizeH="0" baseline="0" noProof="0" dirty="0">
+                      <a:ln>
+                        <a:noFill/>
+                      </a:ln>
+                      <a:solidFill>
+                        <a:prstClr val="black"/>
+                      </a:solidFill>
+                      <a:effectLst/>
+                      <a:uLnTx/>
+                      <a:uFillTx/>
+                      <a:latin typeface="Courier New" panose="02070309020205020404" pitchFamily="49" charset="0"/>
+                      <a:ea typeface="Cambria Math" panose="02040503050406030204" pitchFamily="18" charset="0"/>
+                      <a:cs typeface="Courier New" panose="02070309020205020404" pitchFamily="49" charset="0"/>
+                    </a:rPr>
+                    <a:t>ordered</a:t>
+                  </a:r>
+                  <a:r>
+                    <a:rPr kumimoji="0" lang="en-GB" sz="1200" b="0" i="0" u="none" strike="noStrike" kern="1200" cap="none" spc="0" normalizeH="0" baseline="0" noProof="0" dirty="0">
+                      <a:ln>
+                        <a:noFill/>
+                      </a:ln>
+                      <a:solidFill>
+                        <a:prstClr val="black"/>
+                      </a:solidFill>
+                      <a:effectLst/>
+                      <a:uLnTx/>
+                      <a:uFillTx/>
+                      <a:latin typeface="Calibri" panose="020F0502020204030204" pitchFamily="34" charset="0"/>
+                      <a:ea typeface="Cambria Math" panose="02040503050406030204" pitchFamily="18" charset="0"/>
+                      <a:cs typeface="Calibri" panose="020F0502020204030204" pitchFamily="34" charset="0"/>
+                    </a:rPr>
+                    <a:t>“ with </a:t>
+                  </a:r>
+                  <a14:m>
+                    <m:oMath xmlns:m="http://schemas.openxmlformats.org/officeDocument/2006/math">
+                      <m:r>
+                        <a:rPr kumimoji="0" lang="en-US" sz="1200" b="0" i="1" u="none" strike="noStrike" kern="1200" cap="none" spc="0" normalizeH="0" baseline="0" noProof="0" smtClean="0">
+                          <a:ln>
+                            <a:noFill/>
+                          </a:ln>
+                          <a:solidFill>
+                            <a:prstClr val="black"/>
+                          </a:solidFill>
+                          <a:effectLst/>
+                          <a:uLnTx/>
+                          <a:uFillTx/>
+                          <a:latin typeface="Cambria Math" panose="02040503050406030204" pitchFamily="18" charset="0"/>
+                          <a:ea typeface="Cambria Math" panose="02040503050406030204" pitchFamily="18" charset="0"/>
+                          <a:cs typeface="Calibri" panose="020F0502020204030204" pitchFamily="34" charset="0"/>
+                        </a:rPr>
+                        <m:t>𝑗</m:t>
+                      </m:r>
+                    </m:oMath>
+                  </a14:m>
+                  <a:r>
+                    <a:rPr kumimoji="0" lang="en-GB" sz="1200" b="0" i="0" u="none" strike="noStrike" kern="1200" cap="none" spc="0" normalizeH="0" baseline="0" noProof="0" dirty="0">
+                      <a:ln>
+                        <a:noFill/>
+                      </a:ln>
+                      <a:solidFill>
+                        <a:prstClr val="black"/>
+                      </a:solidFill>
+                      <a:effectLst/>
+                      <a:uLnTx/>
+                      <a:uFillTx/>
+                      <a:latin typeface="Calibri" panose="020F0502020204030204" pitchFamily="34" charset="0"/>
+                      <a:ea typeface="Cambria Math" panose="02040503050406030204" pitchFamily="18" charset="0"/>
+                      <a:cs typeface="Calibri" panose="020F0502020204030204" pitchFamily="34" charset="0"/>
+                    </a:rPr>
+                    <a:t> levels</a:t>
+                  </a:r>
+                </a:p>
+              </p:txBody>
+            </p:sp>
+          </mc:Choice>
+          <mc:Fallback xmlns="">
+            <p:sp>
+              <p:nvSpPr>
+                <p:cNvPr id="5" name="Textfeld 4">
+                  <a:extLst>
+                    <a:ext uri="{FF2B5EF4-FFF2-40B4-BE49-F238E27FC236}">
+                      <a16:creationId xmlns:a16="http://schemas.microsoft.com/office/drawing/2014/main" id="{D88560B6-0A0F-0760-6149-6FF3B7B24210}"/>
+                    </a:ext>
+                  </a:extLst>
+                </p:cNvPr>
+                <p:cNvSpPr txBox="1">
+                  <a:spLocks noRot="1" noChangeAspect="1" noMove="1" noResize="1" noEditPoints="1" noAdjustHandles="1" noChangeArrowheads="1" noChangeShapeType="1" noTextEdit="1"/>
+                </p:cNvSpPr>
+                <p:nvPr/>
+              </p:nvSpPr>
+              <p:spPr>
+                <a:xfrm>
+                  <a:off x="720963" y="2010444"/>
+                  <a:ext cx="4320000" cy="646331"/>
+                </a:xfrm>
+                <a:prstGeom prst="rect">
+                  <a:avLst/>
+                </a:prstGeom>
+                <a:blipFill>
+                  <a:blip r:embed="rId6"/>
+                  <a:stretch>
+                    <a:fillRect b="-7547"/>
+                  </a:stretch>
+                </a:blipFill>
+                <a:ln w="12700">
+                  <a:solidFill>
+                    <a:schemeClr val="tx1"/>
+                  </a:solidFill>
+                </a:ln>
+              </p:spPr>
+              <p:txBody>
+                <a:bodyPr/>
+                <a:lstStyle/>
+                <a:p>
+                  <a:r>
+                    <a:rPr lang="de-DE">
+                      <a:noFill/>
+                    </a:rPr>
+                    <a:t> </a:t>
+                  </a:r>
+                </a:p>
+              </p:txBody>
+            </p:sp>
+          </mc:Fallback>
+        </mc:AlternateContent>
+        <p:cxnSp>
+          <p:nvCxnSpPr>
+            <p:cNvPr id="10" name="Gerade Verbindung mit Pfeil 9">
+              <a:extLst>
+                <a:ext uri="{FF2B5EF4-FFF2-40B4-BE49-F238E27FC236}">
+                  <a16:creationId xmlns:a16="http://schemas.microsoft.com/office/drawing/2014/main" id="{7FFB23BA-1A56-EA09-897C-EAA0A7C46798}"/>
+                </a:ext>
+              </a:extLst>
+            </p:cNvPr>
+            <p:cNvCxnSpPr>
+              <a:cxnSpLocks/>
+              <a:stCxn id="7" idx="3"/>
+            </p:cNvCxnSpPr>
+            <p:nvPr/>
+          </p:nvCxnSpPr>
+          <p:spPr>
+            <a:xfrm>
+              <a:off x="5063828" y="1237725"/>
+              <a:ext cx="477082" cy="1077246"/>
+            </a:xfrm>
+            <a:prstGeom prst="straightConnector1">
+              <a:avLst/>
+            </a:prstGeom>
+            <a:ln w="12700">
+              <a:solidFill>
+                <a:schemeClr val="tx1"/>
+              </a:solidFill>
+              <a:tailEnd type="triangle"/>
+            </a:ln>
+          </p:spPr>
+          <p:style>
+            <a:lnRef idx="1">
+              <a:schemeClr val="accent1"/>
+            </a:lnRef>
+            <a:fillRef idx="0">
+              <a:schemeClr val="accent1"/>
+            </a:fillRef>
+            <a:effectRef idx="0">
+              <a:schemeClr val="accent1"/>
+            </a:effectRef>
+            <a:fontRef idx="minor">
+              <a:schemeClr val="tx1"/>
+            </a:fontRef>
+          </p:style>
+        </p:cxnSp>
+        <p:cxnSp>
+          <p:nvCxnSpPr>
+            <p:cNvPr id="16" name="Gerade Verbindung mit Pfeil 15">
+              <a:extLst>
+                <a:ext uri="{FF2B5EF4-FFF2-40B4-BE49-F238E27FC236}">
+                  <a16:creationId xmlns:a16="http://schemas.microsoft.com/office/drawing/2014/main" id="{95EE3751-2F94-DC07-D76A-B01575DBC8AF}"/>
+                </a:ext>
+              </a:extLst>
+            </p:cNvPr>
+            <p:cNvCxnSpPr>
+              <a:cxnSpLocks/>
+            </p:cNvCxnSpPr>
+            <p:nvPr/>
+          </p:nvCxnSpPr>
+          <p:spPr>
+            <a:xfrm>
+              <a:off x="5073032" y="2383220"/>
+              <a:ext cx="512499" cy="5057"/>
+            </a:xfrm>
+            <a:prstGeom prst="straightConnector1">
+              <a:avLst/>
+            </a:prstGeom>
+            <a:ln w="12700">
+              <a:solidFill>
+                <a:schemeClr val="tx1"/>
+              </a:solidFill>
+              <a:tailEnd type="triangle"/>
+            </a:ln>
+          </p:spPr>
+          <p:style>
+            <a:lnRef idx="1">
+              <a:schemeClr val="accent1"/>
+            </a:lnRef>
+            <a:fillRef idx="0">
+              <a:schemeClr val="accent1"/>
+            </a:fillRef>
+            <a:effectRef idx="0">
+              <a:schemeClr val="accent1"/>
+            </a:effectRef>
+            <a:fontRef idx="minor">
+              <a:schemeClr val="tx1"/>
+            </a:fontRef>
+          </p:style>
+        </p:cxnSp>
+        <p:cxnSp>
+          <p:nvCxnSpPr>
+            <p:cNvPr id="49" name="Gerade Verbindung mit Pfeil 48">
+              <a:extLst>
+                <a:ext uri="{FF2B5EF4-FFF2-40B4-BE49-F238E27FC236}">
+                  <a16:creationId xmlns:a16="http://schemas.microsoft.com/office/drawing/2014/main" id="{C057720C-4C0C-4DDC-5805-67C405AC5729}"/>
+                </a:ext>
+              </a:extLst>
+            </p:cNvPr>
+            <p:cNvCxnSpPr>
+              <a:cxnSpLocks/>
+            </p:cNvCxnSpPr>
+            <p:nvPr/>
+          </p:nvCxnSpPr>
+          <p:spPr>
+            <a:xfrm>
+              <a:off x="5055423" y="4284460"/>
+              <a:ext cx="512499" cy="5057"/>
+            </a:xfrm>
+            <a:prstGeom prst="straightConnector1">
+              <a:avLst/>
+            </a:prstGeom>
+            <a:ln w="12700">
+              <a:solidFill>
+                <a:schemeClr val="tx1"/>
+              </a:solidFill>
+              <a:tailEnd type="triangle"/>
+            </a:ln>
+          </p:spPr>
+          <p:style>
+            <a:lnRef idx="1">
+              <a:schemeClr val="accent1"/>
+            </a:lnRef>
+            <a:fillRef idx="0">
+              <a:schemeClr val="accent1"/>
+            </a:fillRef>
+            <a:effectRef idx="0">
+              <a:schemeClr val="accent1"/>
+            </a:effectRef>
+            <a:fontRef idx="minor">
+              <a:schemeClr val="tx1"/>
+            </a:fontRef>
+          </p:style>
+        </p:cxnSp>
+        <mc:AlternateContent xmlns:mc="http://schemas.openxmlformats.org/markup-compatibility/2006" xmlns:a14="http://schemas.microsoft.com/office/drawing/2010/main">
+          <mc:Choice Requires="a14">
+            <p:sp>
+              <p:nvSpPr>
+                <p:cNvPr id="11" name="Textfeld 10">
+                  <a:extLst>
+                    <a:ext uri="{FF2B5EF4-FFF2-40B4-BE49-F238E27FC236}">
+                      <a16:creationId xmlns:a16="http://schemas.microsoft.com/office/drawing/2014/main" id="{FB9B848B-7023-14FC-D384-3530FD90ECCA}"/>
+                    </a:ext>
+                  </a:extLst>
+                </p:cNvPr>
+                <p:cNvSpPr txBox="1">
+                  <a:spLocks noChangeAspect="1"/>
+                </p:cNvSpPr>
+                <p:nvPr/>
+              </p:nvSpPr>
+              <p:spPr>
+                <a:xfrm>
+                  <a:off x="716606" y="2795230"/>
+                  <a:ext cx="4320000" cy="820654"/>
+                </a:xfrm>
+                <a:prstGeom prst="rect">
+                  <a:avLst/>
+                </a:prstGeom>
+                <a:solidFill>
+                  <a:schemeClr val="accent5">
+                    <a:lumMod val="40000"/>
+                    <a:lumOff val="60000"/>
+                  </a:schemeClr>
+                </a:solidFill>
+                <a:ln w="12700">
+                  <a:solidFill>
+                    <a:schemeClr val="tx1"/>
+                  </a:solidFill>
+                </a:ln>
+              </p:spPr>
+              <p:txBody>
+                <a:bodyPr wrap="square">
+                  <a:spAutoFit/>
+                </a:bodyPr>
+                <a:lstStyle/>
+                <a:p>
+                  <a:pPr marL="171450" marR="0" lvl="0" indent="-171450" algn="l" defTabSz="914400" rtl="0" eaLnBrk="1" fontAlgn="auto" latinLnBrk="0" hangingPunct="1">
+                    <a:lnSpc>
+                      <a:spcPct val="100000"/>
+                    </a:lnSpc>
+                    <a:spcBef>
+                      <a:spcPts val="0"/>
+                    </a:spcBef>
+                    <a:spcAft>
+                      <a:spcPts val="0"/>
+                    </a:spcAft>
+                    <a:buClrTx/>
+                    <a:buSzTx/>
+                    <a:buFont typeface="Arial" panose="020B0604020202020204" pitchFamily="34" charset="0"/>
+                    <a:buChar char="•"/>
+                    <a:tabLst/>
+                    <a:defRPr/>
+                  </a:pPr>
+                  <a:r>
+                    <a:rPr kumimoji="0" lang="en-GB" sz="1200" b="0" i="0" u="none" strike="noStrike" kern="1200" cap="none" spc="0" normalizeH="0" baseline="0" noProof="0" dirty="0">
+                      <a:ln>
+                        <a:noFill/>
+                      </a:ln>
+                      <a:solidFill>
+                        <a:prstClr val="black"/>
+                      </a:solidFill>
+                      <a:effectLst/>
+                      <a:uLnTx/>
+                      <a:uFillTx/>
+                      <a:latin typeface="Calibri" panose="020F0502020204030204" pitchFamily="34" charset="0"/>
+                      <a:ea typeface="Cambria Math" panose="02040503050406030204" pitchFamily="18" charset="0"/>
+                      <a:cs typeface="Calibri" panose="020F0502020204030204" pitchFamily="34" charset="0"/>
+                    </a:rPr>
+                    <a:t>Categorical predictor  of </a:t>
+                  </a:r>
+                  <a:r>
+                    <a:rPr kumimoji="0" lang="en-GB" sz="1200" b="0" i="0" u="none" strike="noStrike" kern="1200" cap="none" spc="0" normalizeH="0" baseline="0" noProof="0" dirty="0">
+                      <a:ln>
+                        <a:noFill/>
+                      </a:ln>
+                      <a:solidFill>
+                        <a:prstClr val="black"/>
+                      </a:solidFill>
+                      <a:effectLst/>
+                      <a:uLnTx/>
+                      <a:uFillTx/>
+                      <a:latin typeface="Courier New" panose="02070309020205020404" pitchFamily="49" charset="0"/>
+                      <a:ea typeface="Cambria Math" panose="02040503050406030204" pitchFamily="18" charset="0"/>
+                      <a:cs typeface="Courier New" panose="02070309020205020404" pitchFamily="49" charset="0"/>
+                    </a:rPr>
+                    <a:t>class </a:t>
+                  </a:r>
+                  <a:r>
+                    <a:rPr kumimoji="0" lang="en-GB" sz="1200" b="0" i="0" u="none" strike="noStrike" kern="1200" cap="none" spc="0" normalizeH="0" baseline="0" noProof="0" dirty="0">
+                      <a:ln>
+                        <a:noFill/>
+                      </a:ln>
+                      <a:solidFill>
+                        <a:prstClr val="black"/>
+                      </a:solidFill>
+                      <a:effectLst/>
+                      <a:uLnTx/>
+                      <a:uFillTx/>
+                      <a:latin typeface="Calibri" panose="020F0502020204030204" pitchFamily="34" charset="0"/>
+                      <a:ea typeface="Cambria Math" panose="02040503050406030204" pitchFamily="18" charset="0"/>
+                      <a:cs typeface="Calibri" panose="020F0502020204030204" pitchFamily="34" charset="0"/>
+                    </a:rPr>
+                    <a:t>“</a:t>
+                  </a:r>
+                  <a:r>
+                    <a:rPr kumimoji="0" lang="en-GB" sz="1200" b="0" i="0" u="none" strike="noStrike" kern="1200" cap="none" spc="0" normalizeH="0" baseline="0" noProof="0" dirty="0">
+                      <a:ln>
+                        <a:noFill/>
+                      </a:ln>
+                      <a:solidFill>
+                        <a:prstClr val="black"/>
+                      </a:solidFill>
+                      <a:effectLst/>
+                      <a:uLnTx/>
+                      <a:uFillTx/>
+                      <a:latin typeface="Courier New" panose="02070309020205020404" pitchFamily="49" charset="0"/>
+                      <a:ea typeface="Cambria Math" panose="02040503050406030204" pitchFamily="18" charset="0"/>
+                      <a:cs typeface="Courier New" panose="02070309020205020404" pitchFamily="49" charset="0"/>
+                    </a:rPr>
+                    <a:t>factor</a:t>
+                  </a:r>
+                  <a:r>
+                    <a:rPr kumimoji="0" lang="en-GB" sz="1200" b="0" i="0" u="none" strike="noStrike" kern="1200" cap="none" spc="0" normalizeH="0" baseline="0" noProof="0" dirty="0">
+                      <a:ln>
+                        <a:noFill/>
+                      </a:ln>
+                      <a:solidFill>
+                        <a:prstClr val="black"/>
+                      </a:solidFill>
+                      <a:effectLst/>
+                      <a:uLnTx/>
+                      <a:uFillTx/>
+                      <a:latin typeface="Calibri" panose="020F0502020204030204" pitchFamily="34" charset="0"/>
+                      <a:ea typeface="Cambria Math" panose="02040503050406030204" pitchFamily="18" charset="0"/>
+                      <a:cs typeface="Calibri" panose="020F0502020204030204" pitchFamily="34" charset="0"/>
+                    </a:rPr>
+                    <a:t>“  </a:t>
+                  </a:r>
+                  <a:r>
+                    <a:rPr kumimoji="0" lang="en-GB" sz="1200" b="1" i="0" u="none" strike="noStrike" kern="1200" cap="none" spc="0" normalizeH="0" baseline="0" noProof="0" dirty="0">
+                      <a:ln>
+                        <a:noFill/>
+                      </a:ln>
+                      <a:solidFill>
+                        <a:prstClr val="black"/>
+                      </a:solidFill>
+                      <a:effectLst/>
+                      <a:uLnTx/>
+                      <a:uFillTx/>
+                      <a:latin typeface="Calibri" panose="020F0502020204030204" pitchFamily="34" charset="0"/>
+                      <a:ea typeface="Cambria Math" panose="02040503050406030204" pitchFamily="18" charset="0"/>
+                      <a:cs typeface="Calibri" panose="020F0502020204030204" pitchFamily="34" charset="0"/>
+                    </a:rPr>
+                    <a:t>and</a:t>
+                  </a:r>
+                  <a:br>
+                    <a:rPr kumimoji="0" lang="en-GB" sz="1200" b="0" i="0" u="none" strike="noStrike" kern="1200" cap="none" spc="0" normalizeH="0" baseline="0" noProof="0" dirty="0">
+                      <a:ln>
+                        <a:noFill/>
+                      </a:ln>
+                      <a:solidFill>
+                        <a:prstClr val="black"/>
+                      </a:solidFill>
+                      <a:effectLst/>
+                      <a:uLnTx/>
+                      <a:uFillTx/>
+                      <a:latin typeface="Calibri" panose="020F0502020204030204" pitchFamily="34" charset="0"/>
+                      <a:ea typeface="Cambria Math" panose="02040503050406030204" pitchFamily="18" charset="0"/>
+                      <a:cs typeface="Calibri" panose="020F0502020204030204" pitchFamily="34" charset="0"/>
+                    </a:rPr>
+                  </a:br>
+                  <a:r>
+                    <a:rPr kumimoji="0" lang="en-GB" sz="1200" b="0" i="0" u="none" strike="noStrike" kern="1200" cap="none" spc="0" normalizeH="0" baseline="0" noProof="0" dirty="0">
+                      <a:ln>
+                        <a:noFill/>
+                      </a:ln>
+                      <a:solidFill>
+                        <a:prstClr val="black"/>
+                      </a:solidFill>
+                      <a:effectLst/>
+                      <a:uLnTx/>
+                      <a:uFillTx/>
+                      <a:latin typeface="Calibri" panose="020F0502020204030204" pitchFamily="34" charset="0"/>
+                      <a:ea typeface="Cambria Math" panose="02040503050406030204" pitchFamily="18" charset="0"/>
+                      <a:cs typeface="Calibri" panose="020F0502020204030204" pitchFamily="34" charset="0"/>
+                    </a:rPr>
+                    <a:t>                                                         “</a:t>
+                  </a:r>
+                  <a:r>
+                    <a:rPr kumimoji="0" lang="en-GB" sz="1200" b="0" i="0" u="none" strike="noStrike" kern="1200" cap="none" spc="0" normalizeH="0" baseline="0" noProof="0" dirty="0">
+                      <a:ln>
+                        <a:noFill/>
+                      </a:ln>
+                      <a:solidFill>
+                        <a:prstClr val="black"/>
+                      </a:solidFill>
+                      <a:effectLst/>
+                      <a:uLnTx/>
+                      <a:uFillTx/>
+                      <a:latin typeface="Courier New" panose="02070309020205020404" pitchFamily="49" charset="0"/>
+                      <a:ea typeface="Cambria Math" panose="02040503050406030204" pitchFamily="18" charset="0"/>
+                      <a:cs typeface="Courier New" panose="02070309020205020404" pitchFamily="49" charset="0"/>
+                    </a:rPr>
+                    <a:t>ordered</a:t>
+                  </a:r>
+                  <a:r>
+                    <a:rPr kumimoji="0" lang="en-GB" sz="1200" b="0" i="0" u="none" strike="noStrike" kern="1200" cap="none" spc="0" normalizeH="0" baseline="0" noProof="0" dirty="0">
+                      <a:ln>
+                        <a:noFill/>
+                      </a:ln>
+                      <a:solidFill>
+                        <a:prstClr val="black"/>
+                      </a:solidFill>
+                      <a:effectLst/>
+                      <a:uLnTx/>
+                      <a:uFillTx/>
+                      <a:latin typeface="Calibri" panose="020F0502020204030204" pitchFamily="34" charset="0"/>
+                      <a:ea typeface="Cambria Math" panose="02040503050406030204" pitchFamily="18" charset="0"/>
+                      <a:cs typeface="Calibri" panose="020F0502020204030204" pitchFamily="34" charset="0"/>
+                    </a:rPr>
+                    <a:t>“ with </a:t>
+                  </a:r>
+                  <a14:m>
+                    <m:oMath xmlns:m="http://schemas.openxmlformats.org/officeDocument/2006/math">
+                      <m:r>
+                        <a:rPr kumimoji="0" lang="en-US" sz="1200" b="0" i="1" u="none" strike="noStrike" kern="1200" cap="none" spc="0" normalizeH="0" baseline="0" noProof="0" smtClean="0">
+                          <a:ln>
+                            <a:noFill/>
+                          </a:ln>
+                          <a:solidFill>
+                            <a:prstClr val="black"/>
+                          </a:solidFill>
+                          <a:effectLst/>
+                          <a:uLnTx/>
+                          <a:uFillTx/>
+                          <a:latin typeface="Cambria Math" panose="02040503050406030204" pitchFamily="18" charset="0"/>
+                          <a:ea typeface="Cambria Math" panose="02040503050406030204" pitchFamily="18" charset="0"/>
+                          <a:cs typeface="Calibri" panose="020F0502020204030204" pitchFamily="34" charset="0"/>
+                        </a:rPr>
+                        <m:t>𝑘</m:t>
+                      </m:r>
+                    </m:oMath>
+                  </a14:m>
+                  <a:r>
+                    <a:rPr kumimoji="0" lang="en-GB" sz="1200" b="0" i="0" u="none" strike="noStrike" kern="1200" cap="none" spc="0" normalizeH="0" baseline="0" noProof="0" dirty="0">
+                      <a:ln>
+                        <a:noFill/>
+                      </a:ln>
+                      <a:solidFill>
+                        <a:prstClr val="black"/>
+                      </a:solidFill>
+                      <a:effectLst/>
+                      <a:uLnTx/>
+                      <a:uFillTx/>
+                      <a:latin typeface="Calibri" panose="020F0502020204030204" pitchFamily="34" charset="0"/>
+                      <a:ea typeface="Cambria Math" panose="02040503050406030204" pitchFamily="18" charset="0"/>
+                      <a:cs typeface="Calibri" panose="020F0502020204030204" pitchFamily="34" charset="0"/>
+                    </a:rPr>
+                    <a:t> levels</a:t>
+                  </a:r>
+                </a:p>
+                <a:p>
+                  <a:pPr marL="171450" marR="0" lvl="0" indent="-171450" algn="l" defTabSz="914400" rtl="0" eaLnBrk="1" fontAlgn="auto" latinLnBrk="0" hangingPunct="1">
+                    <a:lnSpc>
+                      <a:spcPct val="100000"/>
+                    </a:lnSpc>
+                    <a:spcBef>
+                      <a:spcPts val="0"/>
+                    </a:spcBef>
+                    <a:spcAft>
+                      <a:spcPts val="0"/>
+                    </a:spcAft>
+                    <a:buClrTx/>
+                    <a:buSzTx/>
+                    <a:buFont typeface="Arial" panose="020B0604020202020204" pitchFamily="34" charset="0"/>
+                    <a:buChar char="•"/>
+                    <a:tabLst/>
+                    <a:defRPr/>
+                  </a:pPr>
+                  <a:r>
+                    <a:rPr kumimoji="0" lang="en-GB" sz="1200" b="0" i="0" u="none" strike="noStrike" kern="1200" cap="none" spc="0" normalizeH="0" baseline="0" noProof="0" dirty="0">
+                      <a:ln>
+                        <a:noFill/>
+                      </a:ln>
+                      <a:solidFill>
+                        <a:prstClr val="black"/>
+                      </a:solidFill>
+                      <a:effectLst/>
+                      <a:uLnTx/>
+                      <a:uFillTx/>
+                      <a:latin typeface="Calibri" panose="020F0502020204030204" pitchFamily="34" charset="0"/>
+                      <a:ea typeface="Cambria Math" panose="02040503050406030204" pitchFamily="18" charset="0"/>
+                      <a:cs typeface="Calibri" panose="020F0502020204030204" pitchFamily="34" charset="0"/>
+                    </a:rPr>
+                    <a:t>Categorical response of </a:t>
+                  </a:r>
+                  <a:r>
+                    <a:rPr kumimoji="0" lang="en-GB" sz="1200" b="0" i="0" u="none" strike="noStrike" kern="1200" cap="none" spc="0" normalizeH="0" baseline="0" noProof="0" dirty="0">
+                      <a:ln>
+                        <a:noFill/>
+                      </a:ln>
+                      <a:solidFill>
+                        <a:prstClr val="black"/>
+                      </a:solidFill>
+                      <a:effectLst/>
+                      <a:uLnTx/>
+                      <a:uFillTx/>
+                      <a:latin typeface="Courier New" panose="02070309020205020404" pitchFamily="49" charset="0"/>
+                      <a:ea typeface="Cambria Math" panose="02040503050406030204" pitchFamily="18" charset="0"/>
+                      <a:cs typeface="Courier New" panose="02070309020205020404" pitchFamily="49" charset="0"/>
+                    </a:rPr>
+                    <a:t>class </a:t>
+                  </a:r>
+                  <a:r>
+                    <a:rPr kumimoji="0" lang="en-GB" sz="1200" b="0" i="0" u="none" strike="noStrike" kern="1200" cap="none" spc="0" normalizeH="0" baseline="0" noProof="0" dirty="0">
+                      <a:ln>
+                        <a:noFill/>
+                      </a:ln>
+                      <a:solidFill>
+                        <a:prstClr val="black"/>
+                      </a:solidFill>
+                      <a:effectLst/>
+                      <a:uLnTx/>
+                      <a:uFillTx/>
+                      <a:latin typeface="Calibri" panose="020F0502020204030204" pitchFamily="34" charset="0"/>
+                      <a:ea typeface="Cambria Math" panose="02040503050406030204" pitchFamily="18" charset="0"/>
+                      <a:cs typeface="Calibri" panose="020F0502020204030204" pitchFamily="34" charset="0"/>
+                    </a:rPr>
+                    <a:t>“</a:t>
+                  </a:r>
+                  <a:r>
+                    <a:rPr kumimoji="0" lang="en-GB" sz="1200" b="0" i="0" u="none" strike="noStrike" kern="1200" cap="none" spc="0" normalizeH="0" baseline="0" noProof="0" dirty="0">
+                      <a:ln>
+                        <a:noFill/>
+                      </a:ln>
+                      <a:solidFill>
+                        <a:prstClr val="black"/>
+                      </a:solidFill>
+                      <a:effectLst/>
+                      <a:uLnTx/>
+                      <a:uFillTx/>
+                      <a:latin typeface="Courier New" panose="02070309020205020404" pitchFamily="49" charset="0"/>
+                      <a:ea typeface="Cambria Math" panose="02040503050406030204" pitchFamily="18" charset="0"/>
+                      <a:cs typeface="Courier New" panose="02070309020205020404" pitchFamily="49" charset="0"/>
+                    </a:rPr>
+                    <a:t>factor</a:t>
+                  </a:r>
+                  <a:r>
+                    <a:rPr kumimoji="0" lang="en-GB" sz="1200" b="0" i="0" u="none" strike="noStrike" kern="1200" cap="none" spc="0" normalizeH="0" baseline="0" noProof="0" dirty="0">
+                      <a:ln>
+                        <a:noFill/>
+                      </a:ln>
+                      <a:solidFill>
+                        <a:prstClr val="black"/>
+                      </a:solidFill>
+                      <a:effectLst/>
+                      <a:uLnTx/>
+                      <a:uFillTx/>
+                      <a:latin typeface="Calibri" panose="020F0502020204030204" pitchFamily="34" charset="0"/>
+                      <a:ea typeface="Cambria Math" panose="02040503050406030204" pitchFamily="18" charset="0"/>
+                      <a:cs typeface="Calibri" panose="020F0502020204030204" pitchFamily="34" charset="0"/>
+                    </a:rPr>
+                    <a:t>“  </a:t>
+                  </a:r>
+                  <a:r>
+                    <a:rPr kumimoji="0" lang="en-GB" sz="1200" b="1" i="0" u="none" strike="noStrike" kern="1200" cap="none" spc="0" normalizeH="0" baseline="0" noProof="0" dirty="0">
+                      <a:ln>
+                        <a:noFill/>
+                      </a:ln>
+                      <a:solidFill>
+                        <a:prstClr val="black"/>
+                      </a:solidFill>
+                      <a:effectLst/>
+                      <a:uLnTx/>
+                      <a:uFillTx/>
+                      <a:latin typeface="Calibri" panose="020F0502020204030204" pitchFamily="34" charset="0"/>
+                      <a:ea typeface="Cambria Math" panose="02040503050406030204" pitchFamily="18" charset="0"/>
+                      <a:cs typeface="Calibri" panose="020F0502020204030204" pitchFamily="34" charset="0"/>
+                    </a:rPr>
+                    <a:t>and</a:t>
+                  </a:r>
+                  <a:br>
+                    <a:rPr kumimoji="0" lang="en-GB" sz="1200" b="0" i="0" u="none" strike="noStrike" kern="1200" cap="none" spc="0" normalizeH="0" baseline="0" noProof="0" dirty="0">
+                      <a:ln>
+                        <a:noFill/>
+                      </a:ln>
+                      <a:solidFill>
+                        <a:prstClr val="black"/>
+                      </a:solidFill>
+                      <a:effectLst/>
+                      <a:uLnTx/>
+                      <a:uFillTx/>
+                      <a:latin typeface="Calibri" panose="020F0502020204030204" pitchFamily="34" charset="0"/>
+                      <a:ea typeface="Cambria Math" panose="02040503050406030204" pitchFamily="18" charset="0"/>
+                      <a:cs typeface="Calibri" panose="020F0502020204030204" pitchFamily="34" charset="0"/>
+                    </a:rPr>
+                  </a:br>
+                  <a:r>
+                    <a:rPr kumimoji="0" lang="en-GB" sz="1200" b="0" i="0" u="none" strike="noStrike" kern="1200" cap="none" spc="0" normalizeH="0" baseline="0" noProof="0" dirty="0">
+                      <a:ln>
+                        <a:noFill/>
+                      </a:ln>
+                      <a:solidFill>
+                        <a:prstClr val="black"/>
+                      </a:solidFill>
+                      <a:effectLst/>
+                      <a:uLnTx/>
+                      <a:uFillTx/>
+                      <a:latin typeface="Calibri" panose="020F0502020204030204" pitchFamily="34" charset="0"/>
+                      <a:ea typeface="Cambria Math" panose="02040503050406030204" pitchFamily="18" charset="0"/>
+                      <a:cs typeface="Calibri" panose="020F0502020204030204" pitchFamily="34" charset="0"/>
+                    </a:rPr>
+                    <a:t>                                                         “</a:t>
+                  </a:r>
+                  <a:r>
+                    <a:rPr kumimoji="0" lang="en-GB" sz="1200" b="0" i="0" u="none" strike="noStrike" kern="1200" cap="none" spc="0" normalizeH="0" baseline="0" noProof="0" dirty="0">
+                      <a:ln>
+                        <a:noFill/>
+                      </a:ln>
+                      <a:solidFill>
+                        <a:prstClr val="black"/>
+                      </a:solidFill>
+                      <a:effectLst/>
+                      <a:uLnTx/>
+                      <a:uFillTx/>
+                      <a:latin typeface="Courier New" panose="02070309020205020404" pitchFamily="49" charset="0"/>
+                      <a:ea typeface="Cambria Math" panose="02040503050406030204" pitchFamily="18" charset="0"/>
+                      <a:cs typeface="Courier New" panose="02070309020205020404" pitchFamily="49" charset="0"/>
+                    </a:rPr>
+                    <a:t>ordered</a:t>
+                  </a:r>
+                  <a:r>
+                    <a:rPr kumimoji="0" lang="en-GB" sz="1200" b="0" i="0" u="none" strike="noStrike" kern="1200" cap="none" spc="0" normalizeH="0" baseline="0" noProof="0" dirty="0">
+                      <a:ln>
+                        <a:noFill/>
+                      </a:ln>
+                      <a:solidFill>
+                        <a:prstClr val="black"/>
+                      </a:solidFill>
+                      <a:effectLst/>
+                      <a:uLnTx/>
+                      <a:uFillTx/>
+                      <a:latin typeface="Calibri" panose="020F0502020204030204" pitchFamily="34" charset="0"/>
+                      <a:ea typeface="Cambria Math" panose="02040503050406030204" pitchFamily="18" charset="0"/>
+                      <a:cs typeface="Calibri" panose="020F0502020204030204" pitchFamily="34" charset="0"/>
+                    </a:rPr>
+                    <a:t>“ with j levels</a:t>
+                  </a:r>
+                </a:p>
+              </p:txBody>
+            </p:sp>
+          </mc:Choice>
+          <mc:Fallback xmlns="">
+            <p:sp>
+              <p:nvSpPr>
+                <p:cNvPr id="11" name="Textfeld 10">
+                  <a:extLst>
+                    <a:ext uri="{FF2B5EF4-FFF2-40B4-BE49-F238E27FC236}">
+                      <a16:creationId xmlns:a16="http://schemas.microsoft.com/office/drawing/2014/main" id="{FB9B848B-7023-14FC-D384-3530FD90ECCA}"/>
+                    </a:ext>
+                  </a:extLst>
+                </p:cNvPr>
+                <p:cNvSpPr txBox="1">
+                  <a:spLocks noRot="1" noChangeAspect="1" noMove="1" noResize="1" noEditPoints="1" noAdjustHandles="1" noChangeArrowheads="1" noChangeShapeType="1" noTextEdit="1"/>
+                </p:cNvSpPr>
+                <p:nvPr/>
+              </p:nvSpPr>
+              <p:spPr>
+                <a:xfrm>
+                  <a:off x="716606" y="2795230"/>
+                  <a:ext cx="4320000" cy="820654"/>
+                </a:xfrm>
+                <a:prstGeom prst="rect">
+                  <a:avLst/>
+                </a:prstGeom>
+                <a:blipFill>
+                  <a:blip r:embed="rId7"/>
+                  <a:stretch>
+                    <a:fillRect b="-4478"/>
+                  </a:stretch>
+                </a:blipFill>
+                <a:ln w="12700">
+                  <a:solidFill>
+                    <a:schemeClr val="tx1"/>
+                  </a:solidFill>
+                </a:ln>
+              </p:spPr>
+              <p:txBody>
+                <a:bodyPr/>
+                <a:lstStyle/>
+                <a:p>
+                  <a:r>
+                    <a:rPr lang="de-DE">
+                      <a:noFill/>
+                    </a:rPr>
+                    <a:t> </a:t>
+                  </a:r>
+                </a:p>
+              </p:txBody>
+            </p:sp>
+          </mc:Fallback>
+        </mc:AlternateContent>
+        <p:sp>
+          <p:nvSpPr>
+            <p:cNvPr id="14" name="Textfeld 13">
+              <a:extLst>
+                <a:ext uri="{FF2B5EF4-FFF2-40B4-BE49-F238E27FC236}">
+                  <a16:creationId xmlns:a16="http://schemas.microsoft.com/office/drawing/2014/main" id="{C93B1E64-77B3-996B-0C03-74605808B38D}"/>
+                </a:ext>
+              </a:extLst>
+            </p:cNvPr>
+            <p:cNvSpPr txBox="1"/>
+            <p:nvPr/>
+          </p:nvSpPr>
+          <p:spPr>
+            <a:xfrm>
+              <a:off x="5554090" y="4765816"/>
+              <a:ext cx="5400000" cy="276999"/>
+            </a:xfrm>
+            <a:prstGeom prst="rect">
+              <a:avLst/>
+            </a:prstGeom>
+            <a:solidFill>
+              <a:schemeClr val="accent6">
+                <a:lumMod val="20000"/>
+                <a:lumOff val="80000"/>
+              </a:schemeClr>
+            </a:solidFill>
+            <a:ln w="12700">
+              <a:solidFill>
+                <a:schemeClr val="tx1"/>
+              </a:solidFill>
+            </a:ln>
+          </p:spPr>
+          <p:txBody>
+            <a:bodyPr wrap="square">
+              <a:spAutoFit/>
+            </a:bodyPr>
+            <a:lstStyle>
+              <a:defPPr>
+                <a:defRPr lang="de-DE"/>
+              </a:defPPr>
+            </a:lstStyle>
+            <a:p>
+              <a:pPr marL="457200" marR="0" lvl="1" indent="0" algn="l" defTabSz="914400" rtl="0" eaLnBrk="1" fontAlgn="auto" latinLnBrk="0" hangingPunct="1">
+                <a:lnSpc>
+                  <a:spcPct val="100000"/>
+                </a:lnSpc>
+                <a:spcBef>
+                  <a:spcPts val="0"/>
+                </a:spcBef>
+                <a:spcAft>
+                  <a:spcPts val="0"/>
+                </a:spcAft>
+                <a:buClrTx/>
+                <a:buSzTx/>
+                <a:buFontTx/>
+                <a:buNone/>
+                <a:tabLst/>
+                <a:defRPr/>
+              </a:pPr>
+              <a:r>
+                <a:rPr kumimoji="0" lang="en-GB" sz="1200" b="0" i="0" u="none" strike="noStrike" kern="1200" cap="none" spc="0" normalizeH="0" baseline="0" noProof="0" dirty="0">
+                  <a:ln>
+                    <a:noFill/>
+                  </a:ln>
+                  <a:solidFill>
+                    <a:prstClr val="black"/>
+                  </a:solidFill>
+                  <a:effectLst/>
+                  <a:uLnTx/>
+                  <a:uFillTx/>
+                  <a:latin typeface="Calibri" panose="020F0502020204030204" pitchFamily="34" charset="0"/>
+                  <a:ea typeface="Cambria Math" panose="02040503050406030204" pitchFamily="18" charset="0"/>
+                  <a:cs typeface="Calibri" panose="020F0502020204030204" pitchFamily="34" charset="0"/>
+                </a:rPr>
+                <a:t>Spearman rank correlation : </a:t>
+              </a:r>
+              <a:r>
+                <a:rPr kumimoji="0" lang="en-GB" sz="1200" b="0" i="0" u="none" strike="noStrike" kern="1200" cap="none" spc="0" normalizeH="0" baseline="0" noProof="0" dirty="0" err="1">
+                  <a:ln>
+                    <a:noFill/>
+                  </a:ln>
+                  <a:solidFill>
+                    <a:prstClr val="black"/>
+                  </a:solidFill>
+                  <a:effectLst/>
+                  <a:uLnTx/>
+                  <a:uFillTx/>
+                  <a:latin typeface="Courier New" panose="02070309020205020404" pitchFamily="49" charset="0"/>
+                  <a:ea typeface="Cambria Math" panose="02040503050406030204" pitchFamily="18" charset="0"/>
+                  <a:cs typeface="Courier New" panose="02070309020205020404" pitchFamily="49" charset="0"/>
+                </a:rPr>
+                <a:t>cor.test</a:t>
+              </a:r>
+              <a:r>
+                <a:rPr kumimoji="0" lang="en-GB" sz="1200" b="0" i="0" u="none" strike="noStrike" kern="1200" cap="none" spc="0" normalizeH="0" baseline="0" noProof="0" dirty="0">
+                  <a:ln>
+                    <a:noFill/>
+                  </a:ln>
+                  <a:solidFill>
+                    <a:prstClr val="black"/>
+                  </a:solidFill>
+                  <a:effectLst/>
+                  <a:uLnTx/>
+                  <a:uFillTx/>
+                  <a:latin typeface="Courier New" panose="02070309020205020404" pitchFamily="49" charset="0"/>
+                  <a:ea typeface="Cambria Math" panose="02040503050406030204" pitchFamily="18" charset="0"/>
+                  <a:cs typeface="Courier New" panose="02070309020205020404" pitchFamily="49" charset="0"/>
+                </a:rPr>
+                <a:t>(…,method=“spearman”)</a:t>
+              </a:r>
+            </a:p>
+          </p:txBody>
+        </p:sp>
+        <p:cxnSp>
+          <p:nvCxnSpPr>
+            <p:cNvPr id="15" name="Gerade Verbindung mit Pfeil 14">
+              <a:extLst>
+                <a:ext uri="{FF2B5EF4-FFF2-40B4-BE49-F238E27FC236}">
+                  <a16:creationId xmlns:a16="http://schemas.microsoft.com/office/drawing/2014/main" id="{A6B56266-E50F-E630-DFBD-3065C4177F4D}"/>
+                </a:ext>
+              </a:extLst>
+            </p:cNvPr>
+            <p:cNvCxnSpPr>
+              <a:cxnSpLocks/>
+            </p:cNvCxnSpPr>
+            <p:nvPr/>
+          </p:nvCxnSpPr>
+          <p:spPr>
+            <a:xfrm>
+              <a:off x="5054061" y="3712358"/>
+              <a:ext cx="512499" cy="5057"/>
+            </a:xfrm>
+            <a:prstGeom prst="straightConnector1">
+              <a:avLst/>
+            </a:prstGeom>
+            <a:ln w="12700">
+              <a:solidFill>
+                <a:schemeClr val="tx1"/>
+              </a:solidFill>
+              <a:tailEnd type="triangle"/>
+            </a:ln>
+          </p:spPr>
+          <p:style>
+            <a:lnRef idx="1">
+              <a:schemeClr val="accent1"/>
+            </a:lnRef>
+            <a:fillRef idx="0">
+              <a:schemeClr val="accent1"/>
+            </a:fillRef>
+            <a:effectRef idx="0">
+              <a:schemeClr val="accent1"/>
+            </a:effectRef>
+            <a:fontRef idx="minor">
+              <a:schemeClr val="tx1"/>
+            </a:fontRef>
+          </p:style>
+        </p:cxnSp>
+        <p:cxnSp>
+          <p:nvCxnSpPr>
+            <p:cNvPr id="67" name="Gerade Verbindung mit Pfeil 66">
+              <a:extLst>
+                <a:ext uri="{FF2B5EF4-FFF2-40B4-BE49-F238E27FC236}">
+                  <a16:creationId xmlns:a16="http://schemas.microsoft.com/office/drawing/2014/main" id="{90D9A013-B638-2CFA-D596-D590570520DD}"/>
+                </a:ext>
+              </a:extLst>
+            </p:cNvPr>
+            <p:cNvCxnSpPr>
+              <a:cxnSpLocks/>
+            </p:cNvCxnSpPr>
+            <p:nvPr/>
+          </p:nvCxnSpPr>
+          <p:spPr>
+            <a:xfrm>
+              <a:off x="5055423" y="4930815"/>
+              <a:ext cx="512499" cy="5057"/>
+            </a:xfrm>
+            <a:prstGeom prst="straightConnector1">
+              <a:avLst/>
+            </a:prstGeom>
+            <a:ln w="12700">
+              <a:solidFill>
+                <a:schemeClr val="tx1"/>
+              </a:solidFill>
+              <a:tailEnd type="triangle"/>
+            </a:ln>
+          </p:spPr>
+          <p:style>
+            <a:lnRef idx="1">
+              <a:schemeClr val="accent1"/>
+            </a:lnRef>
+            <a:fillRef idx="0">
+              <a:schemeClr val="accent1"/>
+            </a:fillRef>
+            <a:effectRef idx="0">
+              <a:schemeClr val="accent1"/>
+            </a:effectRef>
+            <a:fontRef idx="minor">
+              <a:schemeClr val="tx1"/>
+            </a:fontRef>
+          </p:style>
+        </p:cxnSp>
+        <p:sp>
+          <p:nvSpPr>
+            <p:cNvPr id="68" name="Textfeld 67">
+              <a:extLst>
+                <a:ext uri="{FF2B5EF4-FFF2-40B4-BE49-F238E27FC236}">
+                  <a16:creationId xmlns:a16="http://schemas.microsoft.com/office/drawing/2014/main" id="{E005EFC1-18B1-0452-D704-9026052FF006}"/>
+                </a:ext>
+              </a:extLst>
+            </p:cNvPr>
+            <p:cNvSpPr txBox="1"/>
+            <p:nvPr/>
+          </p:nvSpPr>
+          <p:spPr>
+            <a:xfrm>
+              <a:off x="5554090" y="3605381"/>
+              <a:ext cx="5400000" cy="276999"/>
+            </a:xfrm>
+            <a:prstGeom prst="rect">
+              <a:avLst/>
+            </a:prstGeom>
+            <a:solidFill>
+              <a:schemeClr val="accent6">
+                <a:lumMod val="20000"/>
+                <a:lumOff val="80000"/>
+              </a:schemeClr>
+            </a:solidFill>
+            <a:ln w="12700">
+              <a:solidFill>
+                <a:schemeClr val="tx1"/>
+              </a:solidFill>
+            </a:ln>
+          </p:spPr>
+          <p:txBody>
+            <a:bodyPr wrap="square">
+              <a:spAutoFit/>
+            </a:bodyPr>
+            <a:lstStyle>
+              <a:defPPr>
+                <a:defRPr lang="de-DE"/>
+              </a:defPPr>
+            </a:lstStyle>
+            <a:p>
+              <a:pPr marL="457200" marR="0" lvl="1" indent="0" algn="l" defTabSz="914400" rtl="0" eaLnBrk="1" fontAlgn="auto" latinLnBrk="0" hangingPunct="1">
+                <a:lnSpc>
+                  <a:spcPct val="100000"/>
+                </a:lnSpc>
+                <a:spcBef>
+                  <a:spcPts val="0"/>
+                </a:spcBef>
+                <a:spcAft>
+                  <a:spcPts val="0"/>
+                </a:spcAft>
+                <a:buClrTx/>
+                <a:buSzTx/>
+                <a:buFontTx/>
+                <a:buNone/>
+                <a:tabLst/>
+                <a:defRPr/>
+              </a:pPr>
+              <a:r>
+                <a:rPr kumimoji="0" lang="en-GB" sz="1200" b="0" i="0" u="none" strike="noStrike" kern="1200" cap="none" spc="0" normalizeH="0" baseline="0" noProof="0" dirty="0">
+                  <a:ln>
+                    <a:noFill/>
+                  </a:ln>
+                  <a:solidFill>
+                    <a:prstClr val="black"/>
+                  </a:solidFill>
+                  <a:effectLst/>
+                  <a:uLnTx/>
+                  <a:uFillTx/>
+                  <a:latin typeface="Calibri" panose="020F0502020204030204" pitchFamily="34" charset="0"/>
+                  <a:ea typeface="Cambria Math" panose="02040503050406030204" pitchFamily="18" charset="0"/>
+                  <a:cs typeface="Calibri" panose="020F0502020204030204" pitchFamily="34" charset="0"/>
+                </a:rPr>
+                <a:t>Kendall rank correlation : </a:t>
+              </a:r>
+              <a:r>
+                <a:rPr kumimoji="0" lang="en-GB" sz="1200" b="0" i="0" u="none" strike="noStrike" kern="1200" cap="none" spc="0" normalizeH="0" baseline="0" noProof="0" dirty="0" err="1">
+                  <a:ln>
+                    <a:noFill/>
+                  </a:ln>
+                  <a:solidFill>
+                    <a:prstClr val="black"/>
+                  </a:solidFill>
+                  <a:effectLst/>
+                  <a:uLnTx/>
+                  <a:uFillTx/>
+                  <a:latin typeface="Courier New" panose="02070309020205020404" pitchFamily="49" charset="0"/>
+                  <a:ea typeface="Cambria Math" panose="02040503050406030204" pitchFamily="18" charset="0"/>
+                  <a:cs typeface="Courier New" panose="02070309020205020404" pitchFamily="49" charset="0"/>
+                </a:rPr>
+                <a:t>cor.test</a:t>
+              </a:r>
+              <a:r>
+                <a:rPr kumimoji="0" lang="en-GB" sz="1200" b="0" i="0" u="none" strike="noStrike" kern="1200" cap="none" spc="0" normalizeH="0" baseline="0" noProof="0" dirty="0">
+                  <a:ln>
+                    <a:noFill/>
+                  </a:ln>
+                  <a:solidFill>
+                    <a:prstClr val="black"/>
+                  </a:solidFill>
+                  <a:effectLst/>
+                  <a:uLnTx/>
+                  <a:uFillTx/>
+                  <a:latin typeface="Courier New" panose="02070309020205020404" pitchFamily="49" charset="0"/>
+                  <a:ea typeface="Cambria Math" panose="02040503050406030204" pitchFamily="18" charset="0"/>
+                  <a:cs typeface="Courier New" panose="02070309020205020404" pitchFamily="49" charset="0"/>
+                </a:rPr>
+                <a:t>(…,method=“</a:t>
+              </a:r>
+              <a:r>
+                <a:rPr kumimoji="0" lang="en-GB" sz="1200" b="0" i="0" u="none" strike="noStrike" kern="1200" cap="none" spc="0" normalizeH="0" baseline="0" noProof="0" dirty="0" err="1">
+                  <a:ln>
+                    <a:noFill/>
+                  </a:ln>
+                  <a:solidFill>
+                    <a:prstClr val="black"/>
+                  </a:solidFill>
+                  <a:effectLst/>
+                  <a:uLnTx/>
+                  <a:uFillTx/>
+                  <a:latin typeface="Courier New" panose="02070309020205020404" pitchFamily="49" charset="0"/>
+                  <a:ea typeface="Cambria Math" panose="02040503050406030204" pitchFamily="18" charset="0"/>
+                  <a:cs typeface="Courier New" panose="02070309020205020404" pitchFamily="49" charset="0"/>
+                </a:rPr>
+                <a:t>kendall</a:t>
+              </a:r>
+              <a:r>
+                <a:rPr kumimoji="0" lang="en-GB" sz="1200" b="0" i="0" u="none" strike="noStrike" kern="1200" cap="none" spc="0" normalizeH="0" baseline="0" noProof="0" dirty="0">
+                  <a:ln>
+                    <a:noFill/>
+                  </a:ln>
+                  <a:solidFill>
+                    <a:prstClr val="black"/>
+                  </a:solidFill>
+                  <a:effectLst/>
+                  <a:uLnTx/>
+                  <a:uFillTx/>
+                  <a:latin typeface="Courier New" panose="02070309020205020404" pitchFamily="49" charset="0"/>
+                  <a:ea typeface="Cambria Math" panose="02040503050406030204" pitchFamily="18" charset="0"/>
+                  <a:cs typeface="Courier New" panose="02070309020205020404" pitchFamily="49" charset="0"/>
+                </a:rPr>
+                <a:t>”)</a:t>
+              </a:r>
+            </a:p>
+          </p:txBody>
+        </p:sp>
+        <p:cxnSp>
+          <p:nvCxnSpPr>
+            <p:cNvPr id="83" name="Gerade Verbindung mit Pfeil 82">
+              <a:extLst>
+                <a:ext uri="{FF2B5EF4-FFF2-40B4-BE49-F238E27FC236}">
+                  <a16:creationId xmlns:a16="http://schemas.microsoft.com/office/drawing/2014/main" id="{277F9311-EB83-9B97-DA2A-A783B756E3C6}"/>
+                </a:ext>
+              </a:extLst>
+            </p:cNvPr>
+            <p:cNvCxnSpPr>
+              <a:cxnSpLocks/>
+              <a:endCxn id="6" idx="1"/>
+            </p:cNvCxnSpPr>
+            <p:nvPr/>
+          </p:nvCxnSpPr>
+          <p:spPr>
+            <a:xfrm>
+              <a:off x="5084085" y="1240615"/>
+              <a:ext cx="470005" cy="89443"/>
+            </a:xfrm>
+            <a:prstGeom prst="straightConnector1">
+              <a:avLst/>
+            </a:prstGeom>
+            <a:ln w="12700">
+              <a:solidFill>
+                <a:schemeClr val="tx1"/>
+              </a:solidFill>
+              <a:tailEnd type="triangle"/>
+            </a:ln>
+          </p:spPr>
+          <p:style>
+            <a:lnRef idx="1">
+              <a:schemeClr val="accent1"/>
+            </a:lnRef>
+            <a:fillRef idx="0">
+              <a:schemeClr val="accent1"/>
+            </a:fillRef>
+            <a:effectRef idx="0">
+              <a:schemeClr val="accent1"/>
+            </a:effectRef>
+            <a:fontRef idx="minor">
+              <a:schemeClr val="tx1"/>
+            </a:fontRef>
+          </p:style>
+        </p:cxnSp>
+        <p:sp>
+          <p:nvSpPr>
+            <p:cNvPr id="85" name="Textfeld 84">
+              <a:extLst>
+                <a:ext uri="{FF2B5EF4-FFF2-40B4-BE49-F238E27FC236}">
+                  <a16:creationId xmlns:a16="http://schemas.microsoft.com/office/drawing/2014/main" id="{7A4D2BFC-D9DC-E3A8-A99F-C8E1E1FB67D8}"/>
+                </a:ext>
+              </a:extLst>
+            </p:cNvPr>
+            <p:cNvSpPr txBox="1"/>
+            <p:nvPr/>
+          </p:nvSpPr>
+          <p:spPr>
+            <a:xfrm>
+              <a:off x="720803" y="3591556"/>
+              <a:ext cx="4320000" cy="276999"/>
+            </a:xfrm>
+            <a:prstGeom prst="rect">
+              <a:avLst/>
+            </a:prstGeom>
+            <a:solidFill>
+              <a:schemeClr val="accent6">
+                <a:lumMod val="20000"/>
+                <a:lumOff val="80000"/>
+              </a:schemeClr>
+            </a:solidFill>
+            <a:ln w="12700">
+              <a:solidFill>
+                <a:schemeClr val="tx1"/>
+              </a:solidFill>
+            </a:ln>
+          </p:spPr>
+          <p:txBody>
+            <a:bodyPr wrap="square" rtlCol="0">
+              <a:spAutoFit/>
+            </a:bodyPr>
+            <a:lstStyle/>
+            <a:p>
+              <a:pPr marL="0" marR="0" lvl="0" indent="0" algn="ctr" defTabSz="914400" rtl="0" eaLnBrk="1" fontAlgn="auto" latinLnBrk="0" hangingPunct="1">
+                <a:lnSpc>
+                  <a:spcPct val="100000"/>
+                </a:lnSpc>
+                <a:spcBef>
+                  <a:spcPts val="0"/>
+                </a:spcBef>
+                <a:spcAft>
+                  <a:spcPts val="0"/>
+                </a:spcAft>
+                <a:buClrTx/>
+                <a:buSzTx/>
+                <a:buFontTx/>
+                <a:buNone/>
+                <a:tabLst/>
+                <a:defRPr/>
+              </a:pPr>
+              <a:r>
+                <a:rPr kumimoji="0" lang="en-GB" sz="1200" b="1" i="0" u="none" strike="noStrike" kern="1200" cap="none" spc="0" normalizeH="0" baseline="0" noProof="0" dirty="0">
+                  <a:ln>
+                    <a:noFill/>
+                  </a:ln>
+                  <a:solidFill>
+                    <a:prstClr val="black"/>
+                  </a:solidFill>
+                  <a:effectLst/>
+                  <a:uLnTx/>
+                  <a:uFillTx/>
+                  <a:latin typeface="Calibri" panose="020F0502020204030204" pitchFamily="34" charset="0"/>
+                  <a:ea typeface="Cambria Math" panose="02040503050406030204" pitchFamily="18" charset="0"/>
+                  <a:cs typeface="Calibri" panose="020F0502020204030204" pitchFamily="34" charset="0"/>
+                </a:rPr>
+                <a:t>+ flag</a:t>
+              </a:r>
+              <a:r>
+                <a:rPr kumimoji="0" lang="en-GB" sz="1200" b="0" i="0" u="none" strike="noStrike" kern="1200" cap="none" spc="0" normalizeH="0" baseline="0" noProof="0" dirty="0">
+                  <a:ln>
+                    <a:noFill/>
+                  </a:ln>
+                  <a:solidFill>
+                    <a:prstClr val="black"/>
+                  </a:solidFill>
+                  <a:effectLst/>
+                  <a:uLnTx/>
+                  <a:uFillTx/>
+                  <a:latin typeface="Calibri" panose="020F0502020204030204" pitchFamily="34" charset="0"/>
+                  <a:ea typeface="Cambria Math" panose="02040503050406030204" pitchFamily="18" charset="0"/>
+                  <a:cs typeface="Calibri" panose="020F0502020204030204" pitchFamily="34" charset="0"/>
+                </a:rPr>
+                <a:t>: </a:t>
+              </a:r>
+              <a:r>
+                <a:rPr kumimoji="0" lang="en-GB" sz="1200" b="0" i="0" u="none" strike="noStrike" kern="1200" cap="none" spc="0" normalizeH="0" baseline="0" noProof="0" dirty="0" err="1">
+                  <a:ln>
+                    <a:noFill/>
+                  </a:ln>
+                  <a:solidFill>
+                    <a:prstClr val="black"/>
+                  </a:solidFill>
+                  <a:effectLst/>
+                  <a:uLnTx/>
+                  <a:uFillTx/>
+                  <a:latin typeface="Courier New" panose="02070309020205020404" pitchFamily="49" charset="0"/>
+                  <a:ea typeface="Cambria Math" panose="02040503050406030204" pitchFamily="18" charset="0"/>
+                  <a:cs typeface="Courier New" panose="02070309020205020404" pitchFamily="49" charset="0"/>
+                </a:rPr>
+                <a:t>visstat</a:t>
+              </a:r>
+              <a:r>
+                <a:rPr kumimoji="0" lang="en-GB" sz="1200" b="0" i="0" u="none" strike="noStrike" kern="1200" cap="none" spc="0" normalizeH="0" baseline="0" noProof="0" dirty="0">
+                  <a:ln>
+                    <a:noFill/>
+                  </a:ln>
+                  <a:solidFill>
+                    <a:prstClr val="black"/>
+                  </a:solidFill>
+                  <a:effectLst/>
+                  <a:uLnTx/>
+                  <a:uFillTx/>
+                  <a:latin typeface="Courier New" panose="02070309020205020404" pitchFamily="49" charset="0"/>
+                  <a:ea typeface="Cambria Math" panose="02040503050406030204" pitchFamily="18" charset="0"/>
+                  <a:cs typeface="Courier New" panose="02070309020205020404" pitchFamily="49" charset="0"/>
+                </a:rPr>
+                <a:t>(…,</a:t>
+              </a:r>
+              <a:r>
+                <a:rPr kumimoji="0" lang="en-GB" sz="1200" b="1" i="0" u="none" strike="noStrike" kern="1200" cap="none" spc="0" normalizeH="0" baseline="0" noProof="0" dirty="0">
+                  <a:ln>
+                    <a:noFill/>
+                  </a:ln>
+                  <a:solidFill>
+                    <a:prstClr val="black"/>
+                  </a:solidFill>
+                  <a:effectLst/>
+                  <a:uLnTx/>
+                  <a:uFillTx/>
+                  <a:latin typeface="Courier New" panose="02070309020205020404" pitchFamily="49" charset="0"/>
+                  <a:ea typeface="Cambria Math" panose="02040503050406030204" pitchFamily="18" charset="0"/>
+                  <a:cs typeface="Courier New" panose="02070309020205020404" pitchFamily="49" charset="0"/>
+                </a:rPr>
+                <a:t>correlation=TRUE</a:t>
+              </a:r>
+              <a:r>
+                <a:rPr kumimoji="0" lang="en-GB" sz="1200" b="0" i="0" u="none" strike="noStrike" kern="1200" cap="none" spc="0" normalizeH="0" baseline="0" noProof="0" dirty="0">
+                  <a:ln>
+                    <a:noFill/>
+                  </a:ln>
+                  <a:solidFill>
+                    <a:prstClr val="black"/>
+                  </a:solidFill>
+                  <a:effectLst/>
+                  <a:uLnTx/>
+                  <a:uFillTx/>
+                  <a:latin typeface="Courier New" panose="02070309020205020404" pitchFamily="49" charset="0"/>
+                  <a:ea typeface="Cambria Math" panose="02040503050406030204" pitchFamily="18" charset="0"/>
+                  <a:cs typeface="Courier New" panose="02070309020205020404" pitchFamily="49" charset="0"/>
+                </a:rPr>
+                <a:t>)</a:t>
+              </a:r>
+              <a:endParaRPr kumimoji="0" lang="de-DE" sz="800" b="0" i="0" u="none" strike="noStrike" kern="1200" cap="none" spc="0" normalizeH="0" baseline="0" noProof="0" dirty="0">
+                <a:ln>
+                  <a:noFill/>
+                </a:ln>
+                <a:solidFill>
+                  <a:prstClr val="black"/>
+                </a:solidFill>
+                <a:effectLst/>
+                <a:uLnTx/>
+                <a:uFillTx/>
+                <a:latin typeface="Calibri" panose="020F0502020204030204" pitchFamily="34" charset="0"/>
+                <a:ea typeface="Cambria Math" panose="02040503050406030204" pitchFamily="18" charset="0"/>
+                <a:cs typeface="Calibri" panose="020F0502020204030204" pitchFamily="34" charset="0"/>
+              </a:endParaRPr>
+            </a:p>
+          </p:txBody>
+        </p:sp>
+        <p:cxnSp>
+          <p:nvCxnSpPr>
+            <p:cNvPr id="86" name="Gerade Verbindung mit Pfeil 85">
+              <a:extLst>
+                <a:ext uri="{FF2B5EF4-FFF2-40B4-BE49-F238E27FC236}">
+                  <a16:creationId xmlns:a16="http://schemas.microsoft.com/office/drawing/2014/main" id="{5E3E9684-F568-DFE2-B115-681F2311D058}"/>
+                </a:ext>
+              </a:extLst>
+            </p:cNvPr>
+            <p:cNvCxnSpPr>
+              <a:cxnSpLocks/>
+              <a:stCxn id="11" idx="3"/>
+            </p:cNvCxnSpPr>
+            <p:nvPr/>
+          </p:nvCxnSpPr>
+          <p:spPr>
+            <a:xfrm flipV="1">
+              <a:off x="5036606" y="2499111"/>
+              <a:ext cx="443285" cy="706446"/>
+            </a:xfrm>
+            <a:prstGeom prst="straightConnector1">
+              <a:avLst/>
+            </a:prstGeom>
+            <a:ln w="12700">
+              <a:solidFill>
+                <a:schemeClr val="tx1"/>
+              </a:solidFill>
+              <a:tailEnd type="triangle"/>
+            </a:ln>
+          </p:spPr>
+          <p:style>
+            <a:lnRef idx="1">
+              <a:schemeClr val="accent1"/>
+            </a:lnRef>
+            <a:fillRef idx="0">
+              <a:schemeClr val="accent1"/>
+            </a:fillRef>
+            <a:effectRef idx="0">
+              <a:schemeClr val="accent1"/>
+            </a:effectRef>
+            <a:fontRef idx="minor">
+              <a:schemeClr val="tx1"/>
+            </a:fontRef>
+          </p:style>
+        </p:cxnSp>
+      </p:grpSp>
+    </p:spTree>
+    <p:extLst>
+      <p:ext uri="{BB962C8B-B14F-4D97-AF65-F5344CB8AC3E}">
+        <p14:creationId xmlns:p14="http://schemas.microsoft.com/office/powerpoint/2010/main" val="2052569025"/>
       </p:ext>
     </p:extLst>
   </p:cSld>

--- a/vignettes/figures/overview.pptx
+++ b/vignettes/figures/overview.pptx
@@ -131,7 +131,7 @@
 <file path=ppt/revisionInfo.xml><?xml version="1.0" encoding="utf-8"?>
 <p1510:revInfo xmlns:a="http://schemas.openxmlformats.org/drawingml/2006/main" xmlns:r="http://schemas.openxmlformats.org/officeDocument/2006/relationships" xmlns:p1510="http://schemas.microsoft.com/office/powerpoint/2015/10/main">
   <p1510:revLst>
-    <p1510:client id="{4AA116FE-460E-754C-A3BF-FE57C3E35162}" v="125" dt="2026-05-18T18:57:55.547"/>
+    <p1510:client id="{029578F4-396C-7740-87A7-C4D5F9DB13DB}" v="185" dt="2026-05-22T16:13:26.705"/>
   </p1510:revLst>
 </p1510:revInfo>
 </file>
@@ -4496,7 +4496,7 @@
                   <a:ea typeface="Cambria Math" panose="02040503050406030204" pitchFamily="18" charset="0"/>
                   <a:cs typeface="Calibri" panose="020F0502020204030204" pitchFamily="34" charset="0"/>
                 </a:rPr>
-                <a:t>Numeric  predictor of </a:t>
+                <a:t>numeric  predictor of </a:t>
               </a:r>
               <a:r>
                 <a:rPr lang="en-GB" sz="1200" noProof="0" dirty="0">
@@ -4586,15 +4586,7 @@
                   <a:ea typeface="Cambria Math" panose="02040503050406030204" pitchFamily="18" charset="0"/>
                   <a:cs typeface="Calibri" panose="020F0502020204030204" pitchFamily="34" charset="0"/>
                 </a:rPr>
-                <a:t>N</a:t>
-              </a:r>
-              <a:r>
-                <a:rPr lang="en-GB" sz="1200" noProof="0" dirty="0" err="1">
-                  <a:latin typeface="Calibri" panose="020F0502020204030204" pitchFamily="34" charset="0"/>
-                  <a:ea typeface="Cambria Math" panose="02040503050406030204" pitchFamily="18" charset="0"/>
-                  <a:cs typeface="Calibri" panose="020F0502020204030204" pitchFamily="34" charset="0"/>
-                </a:rPr>
-                <a:t>umeric</a:t>
+                <a:t>numeric</a:t>
               </a:r>
               <a:r>
                 <a:rPr lang="en-GB" sz="1200" noProof="0" dirty="0">
@@ -4896,8 +4888,8 @@
             </p:sp>
           </mc:Fallback>
         </mc:AlternateContent>
-        <mc:AlternateContent xmlns:mc="http://schemas.openxmlformats.org/markup-compatibility/2006" xmlns:a14="http://schemas.microsoft.com/office/drawing/2010/main">
-          <mc:Choice Requires="a14">
+        <mc:AlternateContent xmlns:mc="http://schemas.openxmlformats.org/markup-compatibility/2006">
+          <mc:Choice xmlns:a14="http://schemas.microsoft.com/office/drawing/2010/main" Requires="a14">
             <p:sp>
               <p:nvSpPr>
                 <p:cNvPr id="7" name="Textfeld 6">
@@ -4952,15 +4944,7 @@
                       <a:ea typeface="Cambria Math" panose="02040503050406030204" pitchFamily="18" charset="0"/>
                       <a:cs typeface="Calibri" panose="020F0502020204030204" pitchFamily="34" charset="0"/>
                     </a:rPr>
-                    <a:t>C</a:t>
-                  </a:r>
-                  <a:r>
-                    <a:rPr lang="en-GB" sz="1200" noProof="0" dirty="0" err="1">
-                      <a:latin typeface="Calibri" panose="020F0502020204030204" pitchFamily="34" charset="0"/>
-                      <a:ea typeface="Cambria Math" panose="02040503050406030204" pitchFamily="18" charset="0"/>
-                      <a:cs typeface="Calibri" panose="020F0502020204030204" pitchFamily="34" charset="0"/>
-                    </a:rPr>
-                    <a:t>ategorical</a:t>
+                    <a:t>categorical</a:t>
                   </a:r>
                   <a:r>
                     <a:rPr lang="en-GB" sz="1200" noProof="0" dirty="0">
@@ -5034,23 +5018,7 @@
                       <a:ea typeface="Cambria Math" panose="02040503050406030204" pitchFamily="18" charset="0"/>
                       <a:cs typeface="Calibri" panose="020F0502020204030204" pitchFamily="34" charset="0"/>
                     </a:rPr>
-                    <a:t>N</a:t>
-                  </a:r>
-                  <a:r>
-                    <a:rPr lang="en-GB" sz="1200" noProof="0" dirty="0" err="1">
-                      <a:latin typeface="Calibri" panose="020F0502020204030204" pitchFamily="34" charset="0"/>
-                      <a:ea typeface="Cambria Math" panose="02040503050406030204" pitchFamily="18" charset="0"/>
-                      <a:cs typeface="Calibri" panose="020F0502020204030204" pitchFamily="34" charset="0"/>
-                    </a:rPr>
-                    <a:t>umeric</a:t>
-                  </a:r>
-                  <a:r>
-                    <a:rPr lang="en-GB" sz="1200" dirty="0">
-                      <a:latin typeface="Calibri" panose="020F0502020204030204" pitchFamily="34" charset="0"/>
-                      <a:ea typeface="Cambria Math" panose="02040503050406030204" pitchFamily="18" charset="0"/>
-                      <a:cs typeface="Calibri" panose="020F0502020204030204" pitchFamily="34" charset="0"/>
-                    </a:rPr>
-                    <a:t> </a:t>
+                    <a:t>numeric </a:t>
                   </a:r>
                   <a:r>
                     <a:rPr lang="en-GB" sz="1200" noProof="0" dirty="0">
@@ -5135,7 +5103,7 @@
               </p:txBody>
             </p:sp>
           </mc:Choice>
-          <mc:Fallback xmlns="">
+          <mc:Fallback>
             <p:sp>
               <p:nvSpPr>
                 <p:cNvPr id="7" name="Textfeld 6">
@@ -5674,8 +5642,8 @@
             </p:sp>
           </mc:Fallback>
         </mc:AlternateContent>
-        <mc:AlternateContent xmlns:mc="http://schemas.openxmlformats.org/markup-compatibility/2006" xmlns:a14="http://schemas.microsoft.com/office/drawing/2010/main">
-          <mc:Choice Requires="a14">
+        <mc:AlternateContent xmlns:mc="http://schemas.openxmlformats.org/markup-compatibility/2006">
+          <mc:Choice xmlns:a14="http://schemas.microsoft.com/office/drawing/2010/main" Requires="a14">
             <p:sp>
               <p:nvSpPr>
                 <p:cNvPr id="5" name="Textfeld 4">
@@ -5715,7 +5683,7 @@
                       <a:ea typeface="Cambria Math" panose="02040503050406030204" pitchFamily="18" charset="0"/>
                       <a:cs typeface="Calibri" panose="020F0502020204030204" pitchFamily="34" charset="0"/>
                     </a:rPr>
-                    <a:t>Categorical predictor of </a:t>
+                    <a:t>categorical predictor of </a:t>
                   </a:r>
                   <a:r>
                     <a:rPr lang="en-GB" sz="1200" dirty="0">
@@ -5777,7 +5745,7 @@
                       <a:ea typeface="Cambria Math" panose="02040503050406030204" pitchFamily="18" charset="0"/>
                       <a:cs typeface="Calibri" panose="020F0502020204030204" pitchFamily="34" charset="0"/>
                     </a:rPr>
-                    <a:t>Categorical response of </a:t>
+                    <a:t>categorical response of </a:t>
                   </a:r>
                   <a:r>
                     <a:rPr lang="en-GB" sz="1200" dirty="0">
@@ -5866,7 +5834,7 @@
               </p:txBody>
             </p:sp>
           </mc:Choice>
-          <mc:Fallback xmlns="">
+          <mc:Fallback>
             <p:sp>
               <p:nvSpPr>
                 <p:cNvPr id="5" name="Textfeld 4">
@@ -6100,10 +6068,10 @@
         </p:nvGrpSpPr>
         <p:grpSpPr>
           <a:xfrm>
-            <a:off x="675232" y="679404"/>
-            <a:ext cx="10841537" cy="5113384"/>
-            <a:chOff x="675232" y="679404"/>
-            <a:chExt cx="10841537" cy="5113384"/>
+            <a:off x="715930" y="679404"/>
+            <a:ext cx="10800839" cy="5113384"/>
+            <a:chOff x="715930" y="679404"/>
+            <a:chExt cx="10800839" cy="5113384"/>
           </a:xfrm>
         </p:grpSpPr>
         <p:grpSp>
@@ -6120,10 +6088,10 @@
           </p:nvGrpSpPr>
           <p:grpSpPr>
             <a:xfrm>
-              <a:off x="675232" y="679404"/>
-              <a:ext cx="10841537" cy="5113384"/>
-              <a:chOff x="704029" y="582418"/>
-              <a:chExt cx="10841537" cy="5113384"/>
+              <a:off x="715930" y="679404"/>
+              <a:ext cx="10800839" cy="5113384"/>
+              <a:chOff x="744727" y="582418"/>
+              <a:chExt cx="10800839" cy="5113384"/>
             </a:xfrm>
           </p:grpSpPr>
           <p:sp>
@@ -6527,7 +6495,7 @@
                     <a:ea typeface="Cambria Math" panose="02040503050406030204" pitchFamily="18" charset="0"/>
                     <a:cs typeface="Calibri" panose="020F0502020204030204" pitchFamily="34" charset="0"/>
                   </a:rPr>
-                  <a:t>Numeric  predictor of </a:t>
+                  <a:t>numeric  predictor of </a:t>
                 </a:r>
                 <a:r>
                   <a:rPr lang="en-GB" sz="1200" noProof="0" dirty="0">
@@ -6617,15 +6585,7 @@
                     <a:ea typeface="Cambria Math" panose="02040503050406030204" pitchFamily="18" charset="0"/>
                     <a:cs typeface="Calibri" panose="020F0502020204030204" pitchFamily="34" charset="0"/>
                   </a:rPr>
-                  <a:t>N</a:t>
-                </a:r>
-                <a:r>
-                  <a:rPr lang="en-GB" sz="1200" noProof="0" dirty="0" err="1">
-                    <a:latin typeface="Calibri" panose="020F0502020204030204" pitchFamily="34" charset="0"/>
-                    <a:ea typeface="Cambria Math" panose="02040503050406030204" pitchFamily="18" charset="0"/>
-                    <a:cs typeface="Calibri" panose="020F0502020204030204" pitchFamily="34" charset="0"/>
-                  </a:rPr>
-                  <a:t>umeric</a:t>
+                  <a:t>numeric</a:t>
                 </a:r>
                 <a:r>
                   <a:rPr lang="en-GB" sz="1200" noProof="0" dirty="0">
@@ -6723,8 +6683,8 @@
             </p:nvSpPr>
             <p:spPr>
               <a:xfrm>
-                <a:off x="704029" y="3517825"/>
-                <a:ext cx="4306342" cy="276999"/>
+                <a:off x="744727" y="3517946"/>
+                <a:ext cx="4328440" cy="276999"/>
               </a:xfrm>
               <a:prstGeom prst="rect">
                 <a:avLst/>
@@ -7147,8 +7107,8 @@
               </a:p>
             </p:txBody>
           </p:sp>
-          <mc:AlternateContent xmlns:mc="http://schemas.openxmlformats.org/markup-compatibility/2006" xmlns:a14="http://schemas.microsoft.com/office/drawing/2010/main">
-            <mc:Choice Requires="a14">
+          <mc:AlternateContent xmlns:mc="http://schemas.openxmlformats.org/markup-compatibility/2006">
+            <mc:Choice xmlns:a14="http://schemas.microsoft.com/office/drawing/2010/main" Requires="a14">
               <p:sp>
                 <p:nvSpPr>
                   <p:cNvPr id="7" name="Textfeld 6">
@@ -7192,15 +7152,7 @@
                         <a:ea typeface="Cambria Math" panose="02040503050406030204" pitchFamily="18" charset="0"/>
                         <a:cs typeface="Calibri" panose="020F0502020204030204" pitchFamily="34" charset="0"/>
                       </a:rPr>
-                      <a:t>C</a:t>
-                    </a:r>
-                    <a:r>
-                      <a:rPr lang="en-GB" sz="1200" noProof="0" dirty="0" err="1">
-                        <a:latin typeface="Calibri" panose="020F0502020204030204" pitchFamily="34" charset="0"/>
-                        <a:ea typeface="Cambria Math" panose="02040503050406030204" pitchFamily="18" charset="0"/>
-                        <a:cs typeface="Calibri" panose="020F0502020204030204" pitchFamily="34" charset="0"/>
-                      </a:rPr>
-                      <a:t>ategorical</a:t>
+                      <a:t>categorical</a:t>
                     </a:r>
                     <a:r>
                       <a:rPr lang="en-GB" sz="1200" noProof="0" dirty="0">
@@ -7274,23 +7226,7 @@
                         <a:ea typeface="Cambria Math" panose="02040503050406030204" pitchFamily="18" charset="0"/>
                         <a:cs typeface="Calibri" panose="020F0502020204030204" pitchFamily="34" charset="0"/>
                       </a:rPr>
-                      <a:t>N</a:t>
-                    </a:r>
-                    <a:r>
-                      <a:rPr lang="en-GB" sz="1200" noProof="0" dirty="0" err="1">
-                        <a:latin typeface="Calibri" panose="020F0502020204030204" pitchFamily="34" charset="0"/>
-                        <a:ea typeface="Cambria Math" panose="02040503050406030204" pitchFamily="18" charset="0"/>
-                        <a:cs typeface="Calibri" panose="020F0502020204030204" pitchFamily="34" charset="0"/>
-                      </a:rPr>
-                      <a:t>umeric</a:t>
-                    </a:r>
-                    <a:r>
-                      <a:rPr lang="en-GB" sz="1200" dirty="0">
-                        <a:latin typeface="Calibri" panose="020F0502020204030204" pitchFamily="34" charset="0"/>
-                        <a:ea typeface="Cambria Math" panose="02040503050406030204" pitchFamily="18" charset="0"/>
-                        <a:cs typeface="Calibri" panose="020F0502020204030204" pitchFamily="34" charset="0"/>
-                      </a:rPr>
-                      <a:t> </a:t>
+                      <a:t>numeric </a:t>
                     </a:r>
                     <a:r>
                       <a:rPr lang="en-GB" sz="1200" noProof="0" dirty="0">
@@ -7368,7 +7304,7 @@
                 </p:txBody>
               </p:sp>
             </mc:Choice>
-            <mc:Fallback xmlns="">
+            <mc:Fallback>
               <p:sp>
                 <p:nvSpPr>
                   <p:cNvPr id="7" name="Textfeld 6">
@@ -7653,8 +7589,8 @@
               </a:p>
             </p:txBody>
           </p:sp>
-          <mc:AlternateContent xmlns:mc="http://schemas.openxmlformats.org/markup-compatibility/2006" xmlns:a14="http://schemas.microsoft.com/office/drawing/2010/main">
-            <mc:Choice Requires="a14">
+          <mc:AlternateContent xmlns:mc="http://schemas.openxmlformats.org/markup-compatibility/2006">
+            <mc:Choice xmlns:a14="http://schemas.microsoft.com/office/drawing/2010/main" Requires="a14">
               <p:sp>
                 <p:nvSpPr>
                   <p:cNvPr id="5" name="Textfeld 4">
@@ -7694,7 +7630,7 @@
                         <a:ea typeface="Cambria Math" panose="02040503050406030204" pitchFamily="18" charset="0"/>
                         <a:cs typeface="Calibri" panose="020F0502020204030204" pitchFamily="34" charset="0"/>
                       </a:rPr>
-                      <a:t>Categorical predictor of </a:t>
+                      <a:t>categorical predictor of </a:t>
                     </a:r>
                     <a:r>
                       <a:rPr lang="en-GB" sz="1200" dirty="0">
@@ -7756,7 +7692,7 @@
                         <a:ea typeface="Cambria Math" panose="02040503050406030204" pitchFamily="18" charset="0"/>
                         <a:cs typeface="Calibri" panose="020F0502020204030204" pitchFamily="34" charset="0"/>
                       </a:rPr>
-                      <a:t>Categorical response of </a:t>
+                      <a:t>categorical response of </a:t>
                     </a:r>
                     <a:r>
                       <a:rPr lang="en-GB" sz="1200" dirty="0">
@@ -7845,7 +7781,7 @@
                 </p:txBody>
               </p:sp>
             </mc:Choice>
-            <mc:Fallback xmlns="">
+            <mc:Fallback>
               <p:sp>
                 <p:nvSpPr>
                   <p:cNvPr id="5" name="Textfeld 4">
@@ -8028,8 +7964,8 @@
               </a:fontRef>
             </p:style>
           </p:cxnSp>
-          <mc:AlternateContent xmlns:mc="http://schemas.openxmlformats.org/markup-compatibility/2006" xmlns:a14="http://schemas.microsoft.com/office/drawing/2010/main">
-            <mc:Choice Requires="a14">
+          <mc:AlternateContent xmlns:mc="http://schemas.openxmlformats.org/markup-compatibility/2006">
+            <mc:Choice xmlns:a14="http://schemas.microsoft.com/office/drawing/2010/main" Requires="a14">
               <p:sp>
                 <p:nvSpPr>
                   <p:cNvPr id="11" name="Textfeld 10">
@@ -8080,7 +8016,7 @@
                         <a:ea typeface="Cambria Math" panose="02040503050406030204" pitchFamily="18" charset="0"/>
                         <a:cs typeface="Calibri" panose="020F0502020204030204" pitchFamily="34" charset="0"/>
                       </a:rPr>
-                      <a:t>Categorical predictor  of </a:t>
+                      <a:t>categorical predictor  of </a:t>
                     </a:r>
                     <a:r>
                       <a:rPr lang="en-GB" sz="1200" dirty="0">
@@ -8185,7 +8121,7 @@
                         <a:ea typeface="Cambria Math" panose="02040503050406030204" pitchFamily="18" charset="0"/>
                         <a:cs typeface="Calibri" panose="020F0502020204030204" pitchFamily="34" charset="0"/>
                       </a:rPr>
-                      <a:t>Categorical response of </a:t>
+                      <a:t>categorical response of </a:t>
                     </a:r>
                     <a:r>
                       <a:rPr lang="en-GB" sz="1200" dirty="0">
@@ -8262,7 +8198,7 @@
                 </p:txBody>
               </p:sp>
             </mc:Choice>
-            <mc:Fallback xmlns="">
+            <mc:Fallback>
               <p:sp>
                 <p:nvSpPr>
                   <p:cNvPr id="11" name="Textfeld 10">
@@ -8640,10 +8576,10 @@
       </p:grpSpPr>
       <p:grpSp>
         <p:nvGrpSpPr>
-          <p:cNvPr id="93" name="Gruppieren 92">
+          <p:cNvPr id="25" name="Gruppieren 24">
             <a:extLst>
               <a:ext uri="{FF2B5EF4-FFF2-40B4-BE49-F238E27FC236}">
-                <a16:creationId xmlns:a16="http://schemas.microsoft.com/office/drawing/2014/main" id="{D9C5F2F4-F1A3-6259-67A6-B6637B2F9F71}"/>
+                <a16:creationId xmlns:a16="http://schemas.microsoft.com/office/drawing/2014/main" id="{6D2399E9-90CC-6575-FAB8-005DA7317D93}"/>
               </a:ext>
             </a:extLst>
           </p:cNvPr>
@@ -8652,187 +8588,12 @@
         </p:nvGrpSpPr>
         <p:grpSpPr>
           <a:xfrm>
-            <a:off x="716606" y="679404"/>
-            <a:ext cx="10237484" cy="5109277"/>
-            <a:chOff x="716606" y="679404"/>
-            <a:chExt cx="10237484" cy="5109277"/>
+            <a:off x="49953" y="571433"/>
+            <a:ext cx="10904137" cy="5362211"/>
+            <a:chOff x="49953" y="571433"/>
+            <a:chExt cx="10904137" cy="5362211"/>
           </a:xfrm>
         </p:grpSpPr>
-        <p:sp>
-          <p:nvSpPr>
-            <p:cNvPr id="57" name="Textfeld 56">
-              <a:extLst>
-                <a:ext uri="{FF2B5EF4-FFF2-40B4-BE49-F238E27FC236}">
-                  <a16:creationId xmlns:a16="http://schemas.microsoft.com/office/drawing/2014/main" id="{8994B425-65B2-49E4-F84C-57A25705E933}"/>
-                </a:ext>
-              </a:extLst>
-            </p:cNvPr>
-            <p:cNvSpPr txBox="1"/>
-            <p:nvPr/>
-          </p:nvSpPr>
-          <p:spPr>
-            <a:xfrm>
-              <a:off x="716606" y="4765816"/>
-              <a:ext cx="4320000" cy="276999"/>
-            </a:xfrm>
-            <a:prstGeom prst="rect">
-              <a:avLst/>
-            </a:prstGeom>
-            <a:solidFill>
-              <a:schemeClr val="accent6">
-                <a:lumMod val="60000"/>
-                <a:lumOff val="40000"/>
-                <a:alpha val="19758"/>
-              </a:schemeClr>
-            </a:solidFill>
-            <a:ln w="12700">
-              <a:solidFill>
-                <a:schemeClr val="tx1"/>
-              </a:solidFill>
-            </a:ln>
-          </p:spPr>
-          <p:txBody>
-            <a:bodyPr wrap="square" rtlCol="0">
-              <a:spAutoFit/>
-            </a:bodyPr>
-            <a:lstStyle/>
-            <a:p>
-              <a:pPr marL="0" marR="0" lvl="0" indent="0" algn="ctr" defTabSz="914400" rtl="0" eaLnBrk="1" fontAlgn="auto" latinLnBrk="0" hangingPunct="1">
-                <a:lnSpc>
-                  <a:spcPct val="100000"/>
-                </a:lnSpc>
-                <a:spcBef>
-                  <a:spcPts val="0"/>
-                </a:spcBef>
-                <a:spcAft>
-                  <a:spcPts val="0"/>
-                </a:spcAft>
-                <a:buClrTx/>
-                <a:buSzTx/>
-                <a:buFontTx/>
-                <a:buNone/>
-                <a:tabLst/>
-                <a:defRPr/>
-              </a:pPr>
-              <a:r>
-                <a:rPr kumimoji="0" lang="en-GB" sz="1200" b="1" i="0" u="none" strike="noStrike" kern="1200" cap="none" spc="0" normalizeH="0" baseline="0" noProof="0" dirty="0">
-                  <a:ln>
-                    <a:noFill/>
-                  </a:ln>
-                  <a:solidFill>
-                    <a:prstClr val="black"/>
-                  </a:solidFill>
-                  <a:effectLst/>
-                  <a:uLnTx/>
-                  <a:uFillTx/>
-                  <a:latin typeface="Calibri" panose="020F0502020204030204" pitchFamily="34" charset="0"/>
-                  <a:ea typeface="Cambria Math" panose="02040503050406030204" pitchFamily="18" charset="0"/>
-                  <a:cs typeface="Calibri" panose="020F0502020204030204" pitchFamily="34" charset="0"/>
-                </a:rPr>
-                <a:t>+ flag</a:t>
-              </a:r>
-              <a:r>
-                <a:rPr kumimoji="0" lang="en-GB" sz="1200" b="0" i="0" u="none" strike="noStrike" kern="1200" cap="none" spc="0" normalizeH="0" baseline="0" noProof="0" dirty="0">
-                  <a:ln>
-                    <a:noFill/>
-                  </a:ln>
-                  <a:solidFill>
-                    <a:prstClr val="black"/>
-                  </a:solidFill>
-                  <a:effectLst/>
-                  <a:uLnTx/>
-                  <a:uFillTx/>
-                  <a:latin typeface="Calibri" panose="020F0502020204030204" pitchFamily="34" charset="0"/>
-                  <a:ea typeface="Cambria Math" panose="02040503050406030204" pitchFamily="18" charset="0"/>
-                  <a:cs typeface="Calibri" panose="020F0502020204030204" pitchFamily="34" charset="0"/>
-                </a:rPr>
-                <a:t>: </a:t>
-              </a:r>
-              <a:r>
-                <a:rPr kumimoji="0" lang="en-GB" sz="1200" b="0" i="0" u="none" strike="noStrike" kern="1200" cap="none" spc="0" normalizeH="0" baseline="0" noProof="0" dirty="0" err="1">
-                  <a:ln>
-                    <a:noFill/>
-                  </a:ln>
-                  <a:solidFill>
-                    <a:prstClr val="black"/>
-                  </a:solidFill>
-                  <a:effectLst/>
-                  <a:uLnTx/>
-                  <a:uFillTx/>
-                  <a:latin typeface="Courier New" panose="02070309020205020404" pitchFamily="49" charset="0"/>
-                  <a:ea typeface="Cambria Math" panose="02040503050406030204" pitchFamily="18" charset="0"/>
-                  <a:cs typeface="Courier New" panose="02070309020205020404" pitchFamily="49" charset="0"/>
-                </a:rPr>
-                <a:t>visstat</a:t>
-              </a:r>
-              <a:r>
-                <a:rPr kumimoji="0" lang="en-GB" sz="1200" b="0" i="0" u="none" strike="noStrike" kern="1200" cap="none" spc="0" normalizeH="0" baseline="0" noProof="0" dirty="0">
-                  <a:ln>
-                    <a:noFill/>
-                  </a:ln>
-                  <a:solidFill>
-                    <a:prstClr val="black"/>
-                  </a:solidFill>
-                  <a:effectLst/>
-                  <a:uLnTx/>
-                  <a:uFillTx/>
-                  <a:latin typeface="Courier New" panose="02070309020205020404" pitchFamily="49" charset="0"/>
-                  <a:ea typeface="Cambria Math" panose="02040503050406030204" pitchFamily="18" charset="0"/>
-                  <a:cs typeface="Courier New" panose="02070309020205020404" pitchFamily="49" charset="0"/>
-                </a:rPr>
-                <a:t>(…,</a:t>
-              </a:r>
-              <a:r>
-                <a:rPr kumimoji="0" lang="en-GB" sz="1200" b="1" i="0" u="none" strike="noStrike" kern="1200" cap="none" spc="0" normalizeH="0" baseline="0" noProof="0" dirty="0">
-                  <a:ln>
-                    <a:noFill/>
-                  </a:ln>
-                  <a:solidFill>
-                    <a:prstClr val="black"/>
-                  </a:solidFill>
-                  <a:effectLst/>
-                  <a:uLnTx/>
-                  <a:uFillTx/>
-                  <a:latin typeface="Courier New" panose="02070309020205020404" pitchFamily="49" charset="0"/>
-                  <a:ea typeface="Cambria Math" panose="02040503050406030204" pitchFamily="18" charset="0"/>
-                  <a:cs typeface="Courier New" panose="02070309020205020404" pitchFamily="49" charset="0"/>
-                </a:rPr>
-                <a:t>correlation=TRUE</a:t>
-              </a:r>
-              <a:r>
-                <a:rPr kumimoji="0" lang="en-GB" sz="1200" b="0" i="0" u="none" strike="noStrike" kern="1200" cap="none" spc="0" normalizeH="0" baseline="0" noProof="0" dirty="0">
-                  <a:ln>
-                    <a:noFill/>
-                  </a:ln>
-                  <a:solidFill>
-                    <a:prstClr val="black"/>
-                  </a:solidFill>
-                  <a:effectLst/>
-                  <a:uLnTx/>
-                  <a:uFillTx/>
-                  <a:latin typeface="Courier New" panose="02070309020205020404" pitchFamily="49" charset="0"/>
-                  <a:ea typeface="Cambria Math" panose="02040503050406030204" pitchFamily="18" charset="0"/>
-                  <a:cs typeface="Courier New" panose="02070309020205020404" pitchFamily="49" charset="0"/>
-                </a:rPr>
-                <a:t>)</a:t>
-              </a:r>
-              <a:endParaRPr kumimoji="0" lang="de-DE" sz="800" b="0" i="0" u="none" strike="noStrike" kern="1200" cap="none" spc="0" normalizeH="0" baseline="0" noProof="0" dirty="0">
-                <a:ln>
-                  <a:noFill/>
-                </a:ln>
-                <a:solidFill>
-                  <a:prstClr val="black"/>
-                </a:solidFill>
-                <a:effectLst/>
-                <a:uLnTx/>
-                <a:uFillTx/>
-                <a:latin typeface="Calibri" panose="020F0502020204030204" pitchFamily="34" charset="0"/>
-                <a:ea typeface="Cambria Math" panose="02040503050406030204" pitchFamily="18" charset="0"/>
-                <a:cs typeface="Calibri" panose="020F0502020204030204" pitchFamily="34" charset="0"/>
-              </a:endParaRPr>
-            </a:p>
-          </p:txBody>
-        </p:sp>
         <p:sp>
           <p:nvSpPr>
             <p:cNvPr id="12" name="Textfeld 11">
@@ -8847,7 +8608,7 @@
           </p:nvSpPr>
           <p:spPr>
             <a:xfrm>
-              <a:off x="5540910" y="679404"/>
+              <a:off x="5533833" y="746066"/>
               <a:ext cx="5413180" cy="2862322"/>
             </a:xfrm>
             <a:prstGeom prst="rect">
@@ -9392,8 +9153,132 @@
             </a:p>
           </p:txBody>
         </p:sp>
-        <mc:AlternateContent xmlns:mc="http://schemas.openxmlformats.org/markup-compatibility/2006" xmlns:a14="http://schemas.microsoft.com/office/drawing/2010/main">
-          <mc:Choice Requires="a14">
+        <p:sp>
+          <p:nvSpPr>
+            <p:cNvPr id="57" name="Textfeld 56">
+              <a:extLst>
+                <a:ext uri="{FF2B5EF4-FFF2-40B4-BE49-F238E27FC236}">
+                  <a16:creationId xmlns:a16="http://schemas.microsoft.com/office/drawing/2014/main" id="{8994B425-65B2-49E4-F84C-57A25705E933}"/>
+                </a:ext>
+              </a:extLst>
+            </p:cNvPr>
+            <p:cNvSpPr txBox="1"/>
+            <p:nvPr/>
+          </p:nvSpPr>
+          <p:spPr>
+            <a:xfrm>
+              <a:off x="728606" y="4910779"/>
+              <a:ext cx="4320001" cy="276999"/>
+            </a:xfrm>
+            <a:prstGeom prst="rect">
+              <a:avLst/>
+            </a:prstGeom>
+            <a:solidFill>
+              <a:schemeClr val="accent6">
+                <a:lumMod val="60000"/>
+                <a:lumOff val="40000"/>
+                <a:alpha val="19758"/>
+              </a:schemeClr>
+            </a:solidFill>
+            <a:ln w="12700">
+              <a:solidFill>
+                <a:schemeClr val="tx1"/>
+              </a:solidFill>
+            </a:ln>
+          </p:spPr>
+          <p:txBody>
+            <a:bodyPr wrap="square" rtlCol="0">
+              <a:spAutoFit/>
+            </a:bodyPr>
+            <a:lstStyle/>
+            <a:p>
+              <a:pPr marL="0" marR="0" lvl="0" indent="0" algn="ctr" defTabSz="914400" rtl="0" eaLnBrk="1" fontAlgn="auto" latinLnBrk="0" hangingPunct="1">
+                <a:lnSpc>
+                  <a:spcPct val="100000"/>
+                </a:lnSpc>
+                <a:spcBef>
+                  <a:spcPts val="0"/>
+                </a:spcBef>
+                <a:spcAft>
+                  <a:spcPts val="0"/>
+                </a:spcAft>
+                <a:buClrTx/>
+                <a:buSzTx/>
+                <a:buFontTx/>
+                <a:buNone/>
+                <a:tabLst/>
+                <a:defRPr/>
+              </a:pPr>
+              <a:r>
+                <a:rPr kumimoji="0" lang="en-GB" sz="1200" i="0" u="none" strike="noStrike" kern="1200" cap="none" spc="0" normalizeH="0" baseline="0" noProof="0" dirty="0">
+                  <a:ln>
+                    <a:noFill/>
+                  </a:ln>
+                  <a:solidFill>
+                    <a:prstClr val="black"/>
+                  </a:solidFill>
+                  <a:effectLst/>
+                  <a:uLnTx/>
+                  <a:uFillTx/>
+                  <a:latin typeface="Calibri" panose="020F0502020204030204" pitchFamily="34" charset="0"/>
+                  <a:ea typeface="Cambria Math" panose="02040503050406030204" pitchFamily="18" charset="0"/>
+                  <a:cs typeface="Calibri" panose="020F0502020204030204" pitchFamily="34" charset="0"/>
+                </a:rPr>
+                <a:t>+ flag: </a:t>
+              </a:r>
+              <a:r>
+                <a:rPr kumimoji="0" lang="en-GB" sz="1200" i="0" u="none" strike="noStrike" kern="1200" cap="none" spc="0" normalizeH="0" baseline="0" noProof="0" dirty="0" err="1">
+                  <a:ln>
+                    <a:noFill/>
+                  </a:ln>
+                  <a:solidFill>
+                    <a:prstClr val="black"/>
+                  </a:solidFill>
+                  <a:effectLst/>
+                  <a:uLnTx/>
+                  <a:uFillTx/>
+                  <a:latin typeface="Courier New" panose="02070309020205020404" pitchFamily="49" charset="0"/>
+                  <a:ea typeface="Cambria Math" panose="02040503050406030204" pitchFamily="18" charset="0"/>
+                  <a:cs typeface="Courier New" panose="02070309020205020404" pitchFamily="49" charset="0"/>
+                </a:rPr>
+                <a:t>visstat</a:t>
+              </a:r>
+              <a:r>
+                <a:rPr kumimoji="0" lang="en-GB" sz="1200" i="0" u="none" strike="noStrike" kern="1200" cap="none" spc="0" normalizeH="0" baseline="0" noProof="0" dirty="0">
+                  <a:ln>
+                    <a:noFill/>
+                  </a:ln>
+                  <a:solidFill>
+                    <a:prstClr val="black"/>
+                  </a:solidFill>
+                  <a:effectLst/>
+                  <a:uLnTx/>
+                  <a:uFillTx/>
+                  <a:latin typeface="Courier New" panose="02070309020205020404" pitchFamily="49" charset="0"/>
+                  <a:ea typeface="Cambria Math" panose="02040503050406030204" pitchFamily="18" charset="0"/>
+                  <a:cs typeface="Courier New" panose="02070309020205020404" pitchFamily="49" charset="0"/>
+                </a:rPr>
+                <a:t>(…,correlation=TRUE)</a:t>
+              </a:r>
+              <a:endParaRPr kumimoji="0" lang="de-DE" sz="800" i="0" u="none" strike="noStrike" kern="1200" cap="none" spc="0" normalizeH="0" baseline="0" noProof="0" dirty="0">
+                <a:ln>
+                  <a:noFill/>
+                </a:ln>
+                <a:solidFill>
+                  <a:prstClr val="black"/>
+                </a:solidFill>
+                <a:effectLst/>
+                <a:uLnTx/>
+                <a:uFillTx/>
+                <a:latin typeface="Calibri" panose="020F0502020204030204" pitchFamily="34" charset="0"/>
+                <a:ea typeface="Cambria Math" panose="02040503050406030204" pitchFamily="18" charset="0"/>
+                <a:cs typeface="Calibri" panose="020F0502020204030204" pitchFamily="34" charset="0"/>
+              </a:endParaRPr>
+            </a:p>
+          </p:txBody>
+        </p:sp>
+        <mc:AlternateContent xmlns:mc="http://schemas.openxmlformats.org/markup-compatibility/2006">
+          <mc:Choice xmlns:a14="http://schemas.microsoft.com/office/drawing/2010/main" Requires="a14">
             <p:sp>
               <p:nvSpPr>
                 <p:cNvPr id="6" name="Textfeld 5">
@@ -9408,7 +9293,7 @@
               </p:nvSpPr>
               <p:spPr>
                 <a:xfrm>
-                  <a:off x="5554090" y="1099225"/>
+                  <a:off x="5554090" y="1006892"/>
                   <a:ext cx="5400000" cy="461665"/>
                 </a:xfrm>
                 <a:prstGeom prst="rect">
@@ -9435,23 +9320,7 @@
                   </a:defPPr>
                 </a:lstStyle>
                 <a:p>
-                  <a:pPr marL="0" marR="0" lvl="0" indent="0" algn="ctr" defTabSz="914400" rtl="0" eaLnBrk="1" fontAlgn="auto" latinLnBrk="0" hangingPunct="1">
-                    <a:lnSpc>
-                      <a:spcPct val="100000"/>
-                    </a:lnSpc>
-                    <a:spcBef>
-                      <a:spcPts val="0"/>
-                    </a:spcBef>
-                    <a:spcAft>
-                      <a:spcPts val="0"/>
-                    </a:spcAft>
-                    <a:buClrTx/>
-                    <a:buSzTx/>
-                    <a:buFontTx/>
-                    <a:buNone/>
-                    <a:tabLst/>
-                    <a:defRPr/>
-                  </a:pPr>
+                  <a:pPr lvl="0"/>
                   <a:r>
                     <a:rPr kumimoji="0" lang="en-US" sz="1200" b="0" i="0" u="none" strike="noStrike" kern="1200" cap="none" spc="0" normalizeH="0" baseline="0" noProof="0" dirty="0">
                       <a:ln>
@@ -9573,10 +9442,68 @@
                       <a:ea typeface="Cambria Math" panose="02040503050406030204" pitchFamily="18" charset="0"/>
                       <a:cs typeface="Courier New" panose="02070309020205020404" pitchFamily="49" charset="0"/>
                     </a:rPr>
-                    <a:t>(),</a:t>
-                  </a:r>
-                  <a:br>
-                    <a:rPr kumimoji="0" lang="en-GB" sz="1200" b="0" i="0" u="none" strike="noStrike" kern="1200" cap="none" spc="0" normalizeH="0" baseline="0" noProof="0" dirty="0">
+                    <a:t>(</a:t>
+                  </a:r>
+                  <a:r>
+                    <a:rPr lang="en-GB" sz="1200" dirty="0">
+                      <a:solidFill>
+                        <a:prstClr val="black"/>
+                      </a:solidFill>
+                      <a:latin typeface="Courier New" panose="02070309020205020404" pitchFamily="49" charset="0"/>
+                      <a:ea typeface="Cambria Math" panose="02040503050406030204" pitchFamily="18" charset="0"/>
+                      <a:cs typeface="Courier New" panose="02070309020205020404" pitchFamily="49" charset="0"/>
+                    </a:rPr>
+                    <a:t>…</a:t>
+                  </a:r>
+                  <a:r>
+                    <a:rPr lang="en-GB" sz="1200" dirty="0" err="1">
+                      <a:solidFill>
+                        <a:prstClr val="black"/>
+                      </a:solidFill>
+                      <a:latin typeface="Courier New" panose="02070309020205020404" pitchFamily="49" charset="0"/>
+                      <a:ea typeface="Cambria Math" panose="02040503050406030204" pitchFamily="18" charset="0"/>
+                      <a:cs typeface="Courier New" panose="02070309020205020404" pitchFamily="49" charset="0"/>
+                    </a:rPr>
+                    <a:t>var.equal</a:t>
+                  </a:r>
+                  <a:r>
+                    <a:rPr lang="en-GB" sz="1200" dirty="0">
+                      <a:solidFill>
+                        <a:prstClr val="black"/>
+                      </a:solidFill>
+                      <a:latin typeface="Courier New" panose="02070309020205020404" pitchFamily="49" charset="0"/>
+                      <a:ea typeface="Cambria Math" panose="02040503050406030204" pitchFamily="18" charset="0"/>
+                      <a:cs typeface="Courier New" panose="02070309020205020404" pitchFamily="49" charset="0"/>
+                    </a:rPr>
+                    <a:t>=TRUE), </a:t>
+                  </a:r>
+                  <a:r>
+                    <a:rPr lang="en-GB" sz="1200" dirty="0" err="1">
+                      <a:solidFill>
+                        <a:prstClr val="black"/>
+                      </a:solidFill>
+                      <a:latin typeface="Courier New" panose="02070309020205020404" pitchFamily="49" charset="0"/>
+                      <a:ea typeface="Cambria Math" panose="02040503050406030204" pitchFamily="18" charset="0"/>
+                      <a:cs typeface="Courier New" panose="02070309020205020404" pitchFamily="49" charset="0"/>
+                    </a:rPr>
+                    <a:t>t.test</a:t>
+                  </a:r>
+                  <a:r>
+                    <a:rPr lang="en-GB" sz="1200" dirty="0">
+                      <a:solidFill>
+                        <a:prstClr val="black"/>
+                      </a:solidFill>
+                      <a:latin typeface="Courier New" panose="02070309020205020404" pitchFamily="49" charset="0"/>
+                      <a:ea typeface="Cambria Math" panose="02040503050406030204" pitchFamily="18" charset="0"/>
+                      <a:cs typeface="Courier New" panose="02070309020205020404" pitchFamily="49" charset="0"/>
+                    </a:rPr>
+                    <a:t>()</a:t>
+                  </a:r>
+                </a:p>
+                <a:p>
+                  <a:pPr lvl="0"/>
+                  <a:r>
+                    <a:rPr kumimoji="0" lang="en-US" sz="1200" b="0" u="none" strike="noStrike" kern="1200" cap="none" spc="0" normalizeH="0" baseline="0" noProof="0" dirty="0">
                       <a:ln>
                         <a:noFill/>
                       </a:ln>
@@ -9586,27 +9513,10 @@
                       <a:effectLst/>
                       <a:uLnTx/>
                       <a:uFillTx/>
-                      <a:latin typeface="Courier New" panose="02070309020205020404" pitchFamily="49" charset="0"/>
                       <a:ea typeface="Cambria Math" panose="02040503050406030204" pitchFamily="18" charset="0"/>
-                      <a:cs typeface="Courier New" panose="02070309020205020404" pitchFamily="49" charset="0"/>
-                    </a:rPr>
-                  </a:br>
-                  <a:r>
-                    <a:rPr kumimoji="0" lang="en-GB" sz="1200" b="0" i="0" u="none" strike="noStrike" kern="1200" cap="none" spc="0" normalizeH="0" baseline="0" noProof="0" dirty="0">
-                      <a:ln>
-                        <a:noFill/>
-                      </a:ln>
-                      <a:solidFill>
-                        <a:prstClr val="black"/>
-                      </a:solidFill>
-                      <a:effectLst/>
-                      <a:uLnTx/>
-                      <a:uFillTx/>
-                      <a:latin typeface="Courier New" panose="02070309020205020404" pitchFamily="49" charset="0"/>
-                      <a:ea typeface="Cambria Math" panose="02040503050406030204" pitchFamily="18" charset="0"/>
-                      <a:cs typeface="Courier New" panose="02070309020205020404" pitchFamily="49" charset="0"/>
-                    </a:rPr>
-                    <a:t>                     </a:t>
+                      <a:cs typeface="+mn-cs"/>
+                    </a:rPr>
+                    <a:t>                               </a:t>
                   </a:r>
                   <a14:m>
                     <m:oMath xmlns:m="http://schemas.openxmlformats.org/officeDocument/2006/math">
@@ -9695,7 +9605,7 @@
                       <a:ea typeface="Cambria Math" panose="02040503050406030204" pitchFamily="18" charset="0"/>
                       <a:cs typeface="Courier New" panose="02070309020205020404" pitchFamily="49" charset="0"/>
                     </a:rPr>
-                    <a:t>(), </a:t>
+                    <a:t>(),                   </a:t>
                   </a:r>
                   <a:r>
                     <a:rPr kumimoji="0" lang="en-GB" sz="1200" b="0" i="0" u="none" strike="noStrike" kern="1200" cap="none" spc="0" normalizeH="0" baseline="0" noProof="0" dirty="0" err="1">
@@ -9732,7 +9642,7 @@
               </p:txBody>
             </p:sp>
           </mc:Choice>
-          <mc:Fallback xmlns="">
+          <mc:Fallback>
             <p:sp>
               <p:nvSpPr>
                 <p:cNvPr id="6" name="Textfeld 5">
@@ -9749,7 +9659,7 @@
               </p:nvSpPr>
               <p:spPr>
                 <a:xfrm>
-                  <a:off x="5554090" y="1099225"/>
+                  <a:off x="5554090" y="1006892"/>
                   <a:ext cx="5400000" cy="461665"/>
                 </a:xfrm>
                 <a:prstGeom prst="rect">
@@ -9798,8 +9708,8 @@
           </p:nvSpPr>
           <p:spPr>
             <a:xfrm>
-              <a:off x="732015" y="4040348"/>
-              <a:ext cx="4320000" cy="720000"/>
+              <a:off x="732015" y="4185311"/>
+              <a:ext cx="4320000" cy="646331"/>
             </a:xfrm>
             <a:prstGeom prst="rect">
               <a:avLst/>
@@ -9854,7 +9764,7 @@
                   <a:ea typeface="Cambria Math" panose="02040503050406030204" pitchFamily="18" charset="0"/>
                   <a:cs typeface="Calibri" panose="020F0502020204030204" pitchFamily="34" charset="0"/>
                 </a:rPr>
-                <a:t>Numeric  predictor of </a:t>
+                <a:t>numeric  predictor of </a:t>
               </a:r>
               <a:r>
                 <a:rPr kumimoji="0" lang="en-GB" sz="1200" b="0" i="0" u="none" strike="noStrike" kern="1200" cap="none" spc="0" normalizeH="0" baseline="0" noProof="0" dirty="0">
@@ -10056,41 +9966,7 @@
                   <a:ea typeface="Cambria Math" panose="02040503050406030204" pitchFamily="18" charset="0"/>
                   <a:cs typeface="Calibri" panose="020F0502020204030204" pitchFamily="34" charset="0"/>
                 </a:rPr>
-                <a:t>N</a:t>
-              </a:r>
-              <a:r>
-                <a:rPr kumimoji="0" lang="en-GB" sz="1200" b="0" i="0" u="none" strike="noStrike" kern="1200" cap="none" spc="0" normalizeH="0" baseline="0" noProof="0" dirty="0" err="1">
-                  <a:ln>
-                    <a:noFill/>
-                  </a:ln>
-                  <a:solidFill>
-                    <a:prstClr val="black"/>
-                  </a:solidFill>
-                  <a:effectLst/>
-                  <a:uLnTx/>
-                  <a:uFillTx/>
-                  <a:latin typeface="Calibri" panose="020F0502020204030204" pitchFamily="34" charset="0"/>
-                  <a:ea typeface="Cambria Math" panose="02040503050406030204" pitchFamily="18" charset="0"/>
-                  <a:cs typeface="Calibri" panose="020F0502020204030204" pitchFamily="34" charset="0"/>
-                </a:rPr>
-                <a:t>umeric</a:t>
-              </a:r>
-              <a:r>
-                <a:rPr kumimoji="0" lang="en-GB" sz="1200" b="0" i="0" u="none" strike="noStrike" kern="1200" cap="none" spc="0" normalizeH="0" baseline="0" noProof="0" dirty="0">
-                  <a:ln>
-                    <a:noFill/>
-                  </a:ln>
-                  <a:solidFill>
-                    <a:prstClr val="black"/>
-                  </a:solidFill>
-                  <a:effectLst/>
-                  <a:uLnTx/>
-                  <a:uFillTx/>
-                  <a:latin typeface="Calibri" panose="020F0502020204030204" pitchFamily="34" charset="0"/>
-                  <a:ea typeface="Cambria Math" panose="02040503050406030204" pitchFamily="18" charset="0"/>
-                  <a:cs typeface="Calibri" panose="020F0502020204030204" pitchFamily="34" charset="0"/>
-                </a:rPr>
-                <a:t> response of </a:t>
+                <a:t>numeric response of </a:t>
               </a:r>
               <a:r>
                 <a:rPr kumimoji="0" lang="en-GB" sz="1200" b="0" i="0" u="none" strike="noStrike" kern="1200" cap="none" spc="0" normalizeH="0" baseline="0" noProof="0" dirty="0">
@@ -10231,8 +10107,8 @@
             </a:p>
           </p:txBody>
         </p:sp>
-        <mc:AlternateContent xmlns:mc="http://schemas.openxmlformats.org/markup-compatibility/2006" xmlns:a14="http://schemas.microsoft.com/office/drawing/2010/main">
-          <mc:Choice Requires="a14">
+        <mc:AlternateContent xmlns:mc="http://schemas.openxmlformats.org/markup-compatibility/2006">
+          <mc:Choice xmlns:a14="http://schemas.microsoft.com/office/drawing/2010/main" Requires="a14">
             <p:sp>
               <p:nvSpPr>
                 <p:cNvPr id="9" name="Textfeld 8">
@@ -10248,7 +10124,7 @@
               <p:spPr>
                 <a:xfrm>
                   <a:off x="5554090" y="2172920"/>
-                  <a:ext cx="5400000" cy="276999"/>
+                  <a:ext cx="5400000" cy="461665"/>
                 </a:xfrm>
                 <a:prstGeom prst="rect">
                   <a:avLst/>
@@ -10275,7 +10151,7 @@
                   </a:defPPr>
                 </a:lstStyle>
                 <a:p>
-                  <a:pPr marL="0" marR="0" lvl="0" indent="0" algn="ctr" defTabSz="914400" rtl="0" eaLnBrk="1" fontAlgn="auto" latinLnBrk="0" hangingPunct="1">
+                  <a:pPr marL="0" marR="0" lvl="0" indent="0" defTabSz="914400" rtl="0" eaLnBrk="1" fontAlgn="auto" latinLnBrk="0" hangingPunct="1">
                     <a:lnSpc>
                       <a:spcPct val="100000"/>
                     </a:lnSpc>
@@ -10415,6 +10291,25 @@
                     </a:rPr>
                     <a:t>(),</a:t>
                   </a:r>
+                </a:p>
+                <a:p>
+                  <a:pPr marL="0" marR="0" lvl="0" indent="0" defTabSz="914400" rtl="0" eaLnBrk="1" fontAlgn="auto" latinLnBrk="0" hangingPunct="1">
+                    <a:lnSpc>
+                      <a:spcPct val="100000"/>
+                    </a:lnSpc>
+                    <a:spcBef>
+                      <a:spcPts val="0"/>
+                    </a:spcBef>
+                    <a:spcAft>
+                      <a:spcPts val="0"/>
+                    </a:spcAft>
+                    <a:buClrTx/>
+                    <a:buSzTx/>
+                    <a:buFontTx/>
+                    <a:buNone/>
+                    <a:tabLst/>
+                    <a:defRPr/>
+                  </a:pPr>
                   <a:r>
                     <a:rPr kumimoji="0" lang="en-GB" sz="1200" b="0" i="0" u="none" strike="noStrike" kern="1200" cap="none" spc="0" normalizeH="0" baseline="0" noProof="0" dirty="0">
                       <a:ln>
@@ -10430,7 +10325,7 @@
                       <a:ea typeface="Cambria Math" panose="02040503050406030204" pitchFamily="18" charset="0"/>
                       <a:cs typeface="+mn-cs"/>
                     </a:rPr>
-                    <a:t> </a:t>
+                    <a:t>                                         </a:t>
                   </a:r>
                   <a14:m>
                     <m:oMath xmlns:m="http://schemas.openxmlformats.org/officeDocument/2006/math">
@@ -10525,7 +10420,7 @@
               </p:txBody>
             </p:sp>
           </mc:Choice>
-          <mc:Fallback xmlns="">
+          <mc:Fallback>
             <p:sp>
               <p:nvSpPr>
                 <p:cNvPr id="9" name="Textfeld 8">
@@ -10543,7 +10438,7 @@
               <p:spPr>
                 <a:xfrm>
                   <a:off x="5554090" y="2172920"/>
-                  <a:ext cx="5400000" cy="276999"/>
+                  <a:ext cx="5400000" cy="461665"/>
                 </a:xfrm>
                 <a:prstGeom prst="rect">
                   <a:avLst/>
@@ -10551,7 +10446,7 @@
                 <a:blipFill>
                   <a:blip r:embed="rId4"/>
                   <a:stretch>
-                    <a:fillRect b="-12500"/>
+                    <a:fillRect b="-7895"/>
                   </a:stretch>
                 </a:blipFill>
                 <a:ln w="12700">
@@ -10589,7 +10484,7 @@
           </p:nvSpPr>
           <p:spPr>
             <a:xfrm>
-              <a:off x="5554090" y="4127088"/>
+              <a:off x="5554090" y="4272051"/>
               <a:ext cx="5400000" cy="276999"/>
             </a:xfrm>
             <a:prstGeom prst="rect">
@@ -10635,6 +10530,34 @@
                 <a:defRPr/>
               </a:pPr>
               <a:r>
+                <a:rPr lang="en-GB" sz="1200" dirty="0">
+                  <a:solidFill>
+                    <a:prstClr val="black"/>
+                  </a:solidFill>
+                  <a:latin typeface="Calibri" panose="020F0502020204030204" pitchFamily="34" charset="0"/>
+                  <a:ea typeface="Cambria Math" panose="02040503050406030204" pitchFamily="18" charset="0"/>
+                  <a:cs typeface="Calibri" panose="020F0502020204030204" pitchFamily="34" charset="0"/>
+                </a:rPr>
+                <a:t>s</a:t>
+              </a:r>
+              <a:r>
+                <a:rPr kumimoji="0" lang="en-GB" sz="1200" b="0" i="0" u="none" strike="noStrike" kern="1200" cap="none" spc="0" normalizeH="0" baseline="0" noProof="0" dirty="0" err="1">
+                  <a:ln>
+                    <a:noFill/>
+                  </a:ln>
+                  <a:solidFill>
+                    <a:prstClr val="black"/>
+                  </a:solidFill>
+                  <a:effectLst/>
+                  <a:uLnTx/>
+                  <a:uFillTx/>
+                  <a:latin typeface="Calibri" panose="020F0502020204030204" pitchFamily="34" charset="0"/>
+                  <a:ea typeface="Cambria Math" panose="02040503050406030204" pitchFamily="18" charset="0"/>
+                  <a:cs typeface="Calibri" panose="020F0502020204030204" pitchFamily="34" charset="0"/>
+                </a:rPr>
+                <a:t>imple</a:t>
+              </a:r>
+              <a:r>
                 <a:rPr kumimoji="0" lang="en-GB" sz="1200" b="0" i="0" u="none" strike="noStrike" kern="1200" cap="none" spc="0" normalizeH="0" baseline="0" noProof="0" dirty="0">
                   <a:ln>
                     <a:noFill/>
@@ -10649,7 +10572,7 @@
                   <a:ea typeface="Cambria Math" panose="02040503050406030204" pitchFamily="18" charset="0"/>
                   <a:cs typeface="Calibri" panose="020F0502020204030204" pitchFamily="34" charset="0"/>
                 </a:rPr>
-                <a:t>Simple linear regression:   </a:t>
+                <a:t> linear regression:   </a:t>
               </a:r>
               <a:r>
                 <a:rPr kumimoji="0" lang="en-GB" sz="1200" b="0" i="0" u="none" strike="noStrike" kern="1200" cap="none" spc="0" normalizeH="0" baseline="0" noProof="0" dirty="0" err="1">
@@ -10688,8 +10611,8 @@
             </a:p>
           </p:txBody>
         </p:sp>
-        <mc:AlternateContent xmlns:mc="http://schemas.openxmlformats.org/markup-compatibility/2006" xmlns:a14="http://schemas.microsoft.com/office/drawing/2010/main">
-          <mc:Choice Requires="a14">
+        <mc:AlternateContent xmlns:mc="http://schemas.openxmlformats.org/markup-compatibility/2006">
+          <mc:Choice xmlns:a14="http://schemas.microsoft.com/office/drawing/2010/main" Requires="a14">
             <p:sp>
               <p:nvSpPr>
                 <p:cNvPr id="7" name="Textfeld 6">
@@ -10704,8 +10627,8 @@
               </p:nvSpPr>
               <p:spPr>
                 <a:xfrm>
-                  <a:off x="743828" y="1006892"/>
-                  <a:ext cx="4320000" cy="461665"/>
+                  <a:off x="716606" y="1006892"/>
+                  <a:ext cx="4347222" cy="461665"/>
                 </a:xfrm>
                 <a:prstGeom prst="rect">
                   <a:avLst/>
@@ -10727,7 +10650,7 @@
                 </a:bodyPr>
                 <a:lstStyle/>
                 <a:p>
-                  <a:pPr marL="0" marR="0" lvl="0" indent="0" algn="l" defTabSz="914400" rtl="0" eaLnBrk="1" fontAlgn="auto" latinLnBrk="0" hangingPunct="1">
+                  <a:pPr marL="171450" marR="0" lvl="0" indent="-171450" algn="l" defTabSz="914400" rtl="0" eaLnBrk="1" fontAlgn="auto" latinLnBrk="0" hangingPunct="1">
                     <a:lnSpc>
                       <a:spcPct val="100000"/>
                     </a:lnSpc>
@@ -10739,8 +10662,8 @@
                     </a:spcAft>
                     <a:buClrTx/>
                     <a:buSzTx/>
-                    <a:buFontTx/>
-                    <a:buNone/>
+                    <a:buFont typeface="Arial" panose="020B0604020202020204" pitchFamily="34" charset="0"/>
+                    <a:buChar char="•"/>
                     <a:tabLst/>
                     <a:defRPr/>
                   </a:pPr>
@@ -10759,41 +10682,7 @@
                       <a:ea typeface="Cambria Math" panose="02040503050406030204" pitchFamily="18" charset="0"/>
                       <a:cs typeface="Calibri" panose="020F0502020204030204" pitchFamily="34" charset="0"/>
                     </a:rPr>
-                    <a:t>C</a:t>
-                  </a:r>
-                  <a:r>
-                    <a:rPr kumimoji="0" lang="en-GB" sz="1200" b="0" i="0" u="none" strike="noStrike" kern="1200" cap="none" spc="0" normalizeH="0" baseline="0" noProof="0" dirty="0" err="1">
-                      <a:ln>
-                        <a:noFill/>
-                      </a:ln>
-                      <a:solidFill>
-                        <a:prstClr val="black"/>
-                      </a:solidFill>
-                      <a:effectLst/>
-                      <a:uLnTx/>
-                      <a:uFillTx/>
-                      <a:latin typeface="Calibri" panose="020F0502020204030204" pitchFamily="34" charset="0"/>
-                      <a:ea typeface="Cambria Math" panose="02040503050406030204" pitchFamily="18" charset="0"/>
-                      <a:cs typeface="Calibri" panose="020F0502020204030204" pitchFamily="34" charset="0"/>
-                    </a:rPr>
-                    <a:t>ategorical</a:t>
-                  </a:r>
-                  <a:r>
-                    <a:rPr kumimoji="0" lang="en-GB" sz="1200" b="0" i="0" u="none" strike="noStrike" kern="1200" cap="none" spc="0" normalizeH="0" baseline="0" noProof="0" dirty="0">
-                      <a:ln>
-                        <a:noFill/>
-                      </a:ln>
-                      <a:solidFill>
-                        <a:prstClr val="black"/>
-                      </a:solidFill>
-                      <a:effectLst/>
-                      <a:uLnTx/>
-                      <a:uFillTx/>
-                      <a:latin typeface="Calibri" panose="020F0502020204030204" pitchFamily="34" charset="0"/>
-                      <a:ea typeface="Cambria Math" panose="02040503050406030204" pitchFamily="18" charset="0"/>
-                      <a:cs typeface="Calibri" panose="020F0502020204030204" pitchFamily="34" charset="0"/>
-                    </a:rPr>
-                    <a:t> predictor of </a:t>
+                    <a:t>categorical predictor of </a:t>
                   </a:r>
                   <a:r>
                     <a:rPr kumimoji="0" lang="en-GB" sz="1200" b="0" i="0" u="none" strike="noStrike" kern="1200" cap="none" spc="0" normalizeH="0" baseline="0" noProof="0" dirty="0">
@@ -10935,10 +10824,10 @@
                       <a:ea typeface="Cambria Math" panose="02040503050406030204" pitchFamily="18" charset="0"/>
                       <a:cs typeface="Calibri" panose="020F0502020204030204" pitchFamily="34" charset="0"/>
                     </a:rPr>
-                    <a:t>N</a:t>
-                  </a:r>
-                  <a:r>
-                    <a:rPr kumimoji="0" lang="en-GB" sz="1200" b="0" i="0" u="none" strike="noStrike" kern="1200" cap="none" spc="0" normalizeH="0" baseline="0" noProof="0" dirty="0" err="1">
+                    <a:t>numeric response of </a:t>
+                  </a:r>
+                  <a:r>
+                    <a:rPr kumimoji="0" lang="en-GB" sz="1200" b="0" i="0" u="none" strike="noStrike" kern="1200" cap="none" spc="0" normalizeH="0" baseline="0" noProof="0" dirty="0">
                       <a:ln>
                         <a:noFill/>
                       </a:ln>
@@ -10948,11 +10837,11 @@
                       <a:effectLst/>
                       <a:uLnTx/>
                       <a:uFillTx/>
-                      <a:latin typeface="Calibri" panose="020F0502020204030204" pitchFamily="34" charset="0"/>
+                      <a:latin typeface="Courier New" panose="02070309020205020404" pitchFamily="49" charset="0"/>
                       <a:ea typeface="Cambria Math" panose="02040503050406030204" pitchFamily="18" charset="0"/>
-                      <a:cs typeface="Calibri" panose="020F0502020204030204" pitchFamily="34" charset="0"/>
-                    </a:rPr>
-                    <a:t>umeric</a:t>
+                      <a:cs typeface="Courier New" panose="02070309020205020404" pitchFamily="49" charset="0"/>
+                    </a:rPr>
+                    <a:t>class </a:t>
                   </a:r>
                   <a:r>
                     <a:rPr kumimoji="0" lang="en-GB" sz="1200" b="0" i="0" u="none" strike="noStrike" kern="1200" cap="none" spc="0" normalizeH="0" baseline="0" noProof="0" dirty="0">
@@ -10969,7 +10858,7 @@
                       <a:ea typeface="Cambria Math" panose="02040503050406030204" pitchFamily="18" charset="0"/>
                       <a:cs typeface="Calibri" panose="020F0502020204030204" pitchFamily="34" charset="0"/>
                     </a:rPr>
-                    <a:t> response of </a:t>
+                    <a:t>“</a:t>
                   </a:r>
                   <a:r>
                     <a:rPr kumimoji="0" lang="en-GB" sz="1200" b="0" i="0" u="none" strike="noStrike" kern="1200" cap="none" spc="0" normalizeH="0" baseline="0" noProof="0" dirty="0">
@@ -10986,7 +10875,7 @@
                       <a:ea typeface="Cambria Math" panose="02040503050406030204" pitchFamily="18" charset="0"/>
                       <a:cs typeface="Courier New" panose="02070309020205020404" pitchFamily="49" charset="0"/>
                     </a:rPr>
-                    <a:t>class </a:t>
+                    <a:t>numeric</a:t>
                   </a:r>
                   <a:r>
                     <a:rPr kumimoji="0" lang="en-GB" sz="1200" b="0" i="0" u="none" strike="noStrike" kern="1200" cap="none" spc="0" normalizeH="0" baseline="0" noProof="0" dirty="0">
@@ -11003,7 +10892,7 @@
                       <a:ea typeface="Cambria Math" panose="02040503050406030204" pitchFamily="18" charset="0"/>
                       <a:cs typeface="Calibri" panose="020F0502020204030204" pitchFamily="34" charset="0"/>
                     </a:rPr>
-                    <a:t>“</a:t>
+                    <a:t>”</a:t>
                   </a:r>
                   <a:r>
                     <a:rPr kumimoji="0" lang="en-GB" sz="1200" b="0" i="0" u="none" strike="noStrike" kern="1200" cap="none" spc="0" normalizeH="0" baseline="0" noProof="0" dirty="0">
@@ -11020,7 +10909,7 @@
                       <a:ea typeface="Cambria Math" panose="02040503050406030204" pitchFamily="18" charset="0"/>
                       <a:cs typeface="Courier New" panose="02070309020205020404" pitchFamily="49" charset="0"/>
                     </a:rPr>
-                    <a:t>numeric</a:t>
+                    <a:t> </a:t>
                   </a:r>
                   <a:r>
                     <a:rPr kumimoji="0" lang="en-GB" sz="1200" b="0" i="0" u="none" strike="noStrike" kern="1200" cap="none" spc="0" normalizeH="0" baseline="0" noProof="0" dirty="0">
@@ -11037,7 +10926,7 @@
                       <a:ea typeface="Cambria Math" panose="02040503050406030204" pitchFamily="18" charset="0"/>
                       <a:cs typeface="Calibri" panose="020F0502020204030204" pitchFamily="34" charset="0"/>
                     </a:rPr>
-                    <a:t>”</a:t>
+                    <a:t>or “</a:t>
                   </a:r>
                   <a:r>
                     <a:rPr kumimoji="0" lang="en-GB" sz="1200" b="0" i="0" u="none" strike="noStrike" kern="1200" cap="none" spc="0" normalizeH="0" baseline="0" noProof="0" dirty="0">
@@ -11054,7 +10943,7 @@
                       <a:ea typeface="Cambria Math" panose="02040503050406030204" pitchFamily="18" charset="0"/>
                       <a:cs typeface="Courier New" panose="02070309020205020404" pitchFamily="49" charset="0"/>
                     </a:rPr>
-                    <a:t> </a:t>
+                    <a:t>integer</a:t>
                   </a:r>
                   <a:r>
                     <a:rPr kumimoji="0" lang="en-GB" sz="1200" b="0" i="0" u="none" strike="noStrike" kern="1200" cap="none" spc="0" normalizeH="0" baseline="0" noProof="0" dirty="0">
@@ -11071,47 +10960,13 @@
                       <a:ea typeface="Cambria Math" panose="02040503050406030204" pitchFamily="18" charset="0"/>
                       <a:cs typeface="Calibri" panose="020F0502020204030204" pitchFamily="34" charset="0"/>
                     </a:rPr>
-                    <a:t>or “</a:t>
-                  </a:r>
-                  <a:r>
-                    <a:rPr kumimoji="0" lang="en-GB" sz="1200" b="0" i="0" u="none" strike="noStrike" kern="1200" cap="none" spc="0" normalizeH="0" baseline="0" noProof="0" dirty="0">
-                      <a:ln>
-                        <a:noFill/>
-                      </a:ln>
-                      <a:solidFill>
-                        <a:prstClr val="black"/>
-                      </a:solidFill>
-                      <a:effectLst/>
-                      <a:uLnTx/>
-                      <a:uFillTx/>
-                      <a:latin typeface="Courier New" panose="02070309020205020404" pitchFamily="49" charset="0"/>
-                      <a:ea typeface="Cambria Math" panose="02040503050406030204" pitchFamily="18" charset="0"/>
-                      <a:cs typeface="Courier New" panose="02070309020205020404" pitchFamily="49" charset="0"/>
-                    </a:rPr>
-                    <a:t>integer</a:t>
-                  </a:r>
-                  <a:r>
-                    <a:rPr kumimoji="0" lang="en-GB" sz="1200" b="0" i="0" u="none" strike="noStrike" kern="1200" cap="none" spc="0" normalizeH="0" baseline="0" noProof="0" dirty="0">
-                      <a:ln>
-                        <a:noFill/>
-                      </a:ln>
-                      <a:solidFill>
-                        <a:prstClr val="black"/>
-                      </a:solidFill>
-                      <a:effectLst/>
-                      <a:uLnTx/>
-                      <a:uFillTx/>
-                      <a:latin typeface="Calibri" panose="020F0502020204030204" pitchFamily="34" charset="0"/>
-                      <a:ea typeface="Cambria Math" panose="02040503050406030204" pitchFamily="18" charset="0"/>
-                      <a:cs typeface="Calibri" panose="020F0502020204030204" pitchFamily="34" charset="0"/>
-                    </a:rPr>
                     <a:t>”</a:t>
                   </a:r>
                 </a:p>
               </p:txBody>
             </p:sp>
           </mc:Choice>
-          <mc:Fallback xmlns="">
+          <mc:Fallback>
             <p:sp>
               <p:nvSpPr>
                 <p:cNvPr id="7" name="Textfeld 6">
@@ -11128,8 +10983,8 @@
               </p:nvSpPr>
               <p:spPr>
                 <a:xfrm>
-                  <a:off x="743828" y="1006892"/>
-                  <a:ext cx="4320000" cy="461665"/>
+                  <a:off x="716606" y="1006892"/>
+                  <a:ext cx="4347222" cy="461665"/>
                 </a:xfrm>
                 <a:prstGeom prst="rect">
                   <a:avLst/>
@@ -11175,7 +11030,7 @@
           </p:nvSpPr>
           <p:spPr>
             <a:xfrm>
-              <a:off x="743828" y="5327016"/>
+              <a:off x="743828" y="5471979"/>
               <a:ext cx="4320000" cy="461665"/>
             </a:xfrm>
             <a:prstGeom prst="rect">
@@ -11217,6 +11072,34 @@
                 <a:defRPr/>
               </a:pPr>
               <a:r>
+                <a:rPr lang="en-GB" sz="1200" dirty="0">
+                  <a:solidFill>
+                    <a:prstClr val="black"/>
+                  </a:solidFill>
+                  <a:latin typeface="Calibri" panose="020F0502020204030204" pitchFamily="34" charset="0"/>
+                  <a:ea typeface="Cambria Math" panose="02040503050406030204" pitchFamily="18" charset="0"/>
+                  <a:cs typeface="Calibri" panose="020F0502020204030204" pitchFamily="34" charset="0"/>
+                </a:rPr>
+                <a:t>b</a:t>
+              </a:r>
+              <a:r>
+                <a:rPr kumimoji="0" lang="en-GB" sz="1200" b="0" i="0" u="none" strike="noStrike" kern="1200" cap="none" spc="0" normalizeH="0" baseline="0" noProof="0" dirty="0" err="1">
+                  <a:ln>
+                    <a:noFill/>
+                  </a:ln>
+                  <a:solidFill>
+                    <a:prstClr val="black"/>
+                  </a:solidFill>
+                  <a:effectLst/>
+                  <a:uLnTx/>
+                  <a:uFillTx/>
+                  <a:latin typeface="Calibri" panose="020F0502020204030204" pitchFamily="34" charset="0"/>
+                  <a:ea typeface="Cambria Math" panose="02040503050406030204" pitchFamily="18" charset="0"/>
+                  <a:cs typeface="Calibri" panose="020F0502020204030204" pitchFamily="34" charset="0"/>
+                </a:rPr>
+                <a:t>oth</a:t>
+              </a:r>
+              <a:r>
                 <a:rPr kumimoji="0" lang="en-GB" sz="1200" b="0" i="0" u="none" strike="noStrike" kern="1200" cap="none" spc="0" normalizeH="0" baseline="0" noProof="0" dirty="0">
                   <a:ln>
                     <a:noFill/>
@@ -11231,7 +11114,7 @@
                   <a:ea typeface="Cambria Math" panose="02040503050406030204" pitchFamily="18" charset="0"/>
                   <a:cs typeface="Calibri" panose="020F0502020204030204" pitchFamily="34" charset="0"/>
                 </a:rPr>
-                <a:t>Both variables  of  </a:t>
+                <a:t> variables  of  </a:t>
               </a:r>
               <a:r>
                 <a:rPr kumimoji="0" lang="en-GB" sz="1200" b="0" i="0" u="none" strike="noStrike" kern="1200" cap="none" spc="0" normalizeH="0" baseline="0" noProof="0" dirty="0">
@@ -11355,7 +11238,7 @@
           </p:nvCxnSpPr>
           <p:spPr>
             <a:xfrm>
-              <a:off x="5063828" y="5557849"/>
+              <a:off x="5063828" y="5702812"/>
               <a:ext cx="490262" cy="0"/>
             </a:xfrm>
             <a:prstGeom prst="straightConnector1">
@@ -11397,7 +11280,7 @@
           </p:nvSpPr>
           <p:spPr>
             <a:xfrm>
-              <a:off x="5554090" y="5327016"/>
+              <a:off x="5554090" y="5471979"/>
               <a:ext cx="5400000" cy="461665"/>
             </a:xfrm>
             <a:prstGeom prst="rect">
@@ -11457,7 +11340,7 @@
                   <a:ea typeface="Cambria Math" panose="02040503050406030204" pitchFamily="18" charset="0"/>
                   <a:cs typeface="Calibri" panose="020F0502020204030204" pitchFamily="34" charset="0"/>
                 </a:rPr>
-                <a:t>            Comparing proportions:</a:t>
+                <a:t>            comparing proportions:</a:t>
               </a:r>
               <a:br>
                 <a:rPr kumimoji="0" lang="en-GB" sz="1200" b="0" i="0" u="none" strike="noStrike" kern="1200" cap="none" spc="0" normalizeH="0" baseline="0" noProof="0" dirty="0">
@@ -11546,8 +11429,8 @@
             </a:p>
           </p:txBody>
         </p:sp>
-        <mc:AlternateContent xmlns:mc="http://schemas.openxmlformats.org/markup-compatibility/2006" xmlns:a14="http://schemas.microsoft.com/office/drawing/2010/main">
-          <mc:Choice Requires="a14">
+        <mc:AlternateContent xmlns:mc="http://schemas.openxmlformats.org/markup-compatibility/2006">
+          <mc:Choice xmlns:a14="http://schemas.microsoft.com/office/drawing/2010/main" Requires="a14">
             <p:sp>
               <p:nvSpPr>
                 <p:cNvPr id="5" name="Textfeld 4">
@@ -11586,7 +11469,7 @@
                 </a:bodyPr>
                 <a:lstStyle/>
                 <a:p>
-                  <a:pPr marL="0" marR="0" lvl="0" indent="0" algn="l" defTabSz="914400" rtl="0" eaLnBrk="1" fontAlgn="auto" latinLnBrk="0" hangingPunct="1">
+                  <a:pPr marL="171450" marR="0" lvl="0" indent="-171450" algn="l" defTabSz="914400" rtl="0" eaLnBrk="1" fontAlgn="auto" latinLnBrk="0" hangingPunct="1">
                     <a:lnSpc>
                       <a:spcPct val="100000"/>
                     </a:lnSpc>
@@ -11598,8 +11481,8 @@
                     </a:spcAft>
                     <a:buClrTx/>
                     <a:buSzTx/>
-                    <a:buFontTx/>
-                    <a:buNone/>
+                    <a:buFont typeface="Arial" panose="020B0604020202020204" pitchFamily="34" charset="0"/>
+                    <a:buChar char="•"/>
                     <a:tabLst/>
                     <a:defRPr/>
                   </a:pPr>
@@ -11618,7 +11501,7 @@
                       <a:ea typeface="Cambria Math" panose="02040503050406030204" pitchFamily="18" charset="0"/>
                       <a:cs typeface="Calibri" panose="020F0502020204030204" pitchFamily="34" charset="0"/>
                     </a:rPr>
-                    <a:t>Categorical predictor of </a:t>
+                    <a:t>categorical predictor of </a:t>
                   </a:r>
                   <a:r>
                     <a:rPr kumimoji="0" lang="en-GB" sz="1200" b="0" i="0" u="none" strike="noStrike" kern="1200" cap="none" spc="0" normalizeH="0" baseline="0" noProof="0" dirty="0">
@@ -11728,7 +11611,7 @@
                   </a:r>
                 </a:p>
                 <a:p>
-                  <a:pPr marL="0" marR="0" lvl="0" indent="0" algn="l" defTabSz="914400" rtl="0" eaLnBrk="1" fontAlgn="auto" latinLnBrk="0" hangingPunct="1">
+                  <a:pPr marL="171450" marR="0" lvl="0" indent="-171450" algn="l" defTabSz="914400" rtl="0" eaLnBrk="1" fontAlgn="auto" latinLnBrk="0" hangingPunct="1">
                     <a:lnSpc>
                       <a:spcPct val="100000"/>
                     </a:lnSpc>
@@ -11740,8 +11623,8 @@
                     </a:spcAft>
                     <a:buClrTx/>
                     <a:buSzTx/>
-                    <a:buFontTx/>
-                    <a:buNone/>
+                    <a:buFont typeface="Arial" panose="020B0604020202020204" pitchFamily="34" charset="0"/>
+                    <a:buChar char="•"/>
                     <a:tabLst/>
                     <a:defRPr/>
                   </a:pPr>
@@ -11760,7 +11643,7 @@
                       <a:ea typeface="Cambria Math" panose="02040503050406030204" pitchFamily="18" charset="0"/>
                       <a:cs typeface="Calibri" panose="020F0502020204030204" pitchFamily="34" charset="0"/>
                     </a:rPr>
-                    <a:t>Categorical response of </a:t>
+                    <a:t>categorical response of </a:t>
                   </a:r>
                   <a:r>
                     <a:rPr kumimoji="0" lang="en-GB" sz="1200" b="0" i="0" u="none" strike="noStrike" kern="1200" cap="none" spc="0" normalizeH="0" baseline="0" noProof="0" dirty="0">
@@ -11939,7 +11822,7 @@
               </p:txBody>
             </p:sp>
           </mc:Choice>
-          <mc:Fallback xmlns="">
+          <mc:Fallback>
             <p:sp>
               <p:nvSpPr>
                 <p:cNvPr id="5" name="Textfeld 4">
@@ -12094,7 +11977,7 @@
           </p:nvCxnSpPr>
           <p:spPr>
             <a:xfrm>
-              <a:off x="5055423" y="4284460"/>
+              <a:off x="5055423" y="4429423"/>
               <a:ext cx="512499" cy="5057"/>
             </a:xfrm>
             <a:prstGeom prst="straightConnector1">
@@ -12122,8 +12005,8 @@
             </a:fontRef>
           </p:style>
         </p:cxnSp>
-        <mc:AlternateContent xmlns:mc="http://schemas.openxmlformats.org/markup-compatibility/2006" xmlns:a14="http://schemas.microsoft.com/office/drawing/2010/main">
-          <mc:Choice Requires="a14">
+        <mc:AlternateContent xmlns:mc="http://schemas.openxmlformats.org/markup-compatibility/2006">
+          <mc:Choice xmlns:a14="http://schemas.microsoft.com/office/drawing/2010/main" Requires="a14">
             <p:sp>
               <p:nvSpPr>
                 <p:cNvPr id="11" name="Textfeld 10">
@@ -12141,7 +12024,7 @@
               <p:spPr>
                 <a:xfrm>
                   <a:off x="716606" y="2795230"/>
-                  <a:ext cx="4320000" cy="820654"/>
+                  <a:ext cx="4320000" cy="830997"/>
                 </a:xfrm>
                 <a:prstGeom prst="rect">
                   <a:avLst/>
@@ -12182,7 +12065,7 @@
                     <a:defRPr/>
                   </a:pPr>
                   <a:r>
-                    <a:rPr kumimoji="0" lang="en-GB" sz="1200" b="0" i="0" u="none" strike="noStrike" kern="1200" cap="none" spc="0" normalizeH="0" baseline="0" noProof="0" dirty="0">
+                    <a:rPr kumimoji="0" lang="en-GB" sz="1200" i="0" u="none" strike="noStrike" kern="1200" cap="none" spc="0" normalizeH="0" baseline="0" noProof="0" dirty="0">
                       <a:ln>
                         <a:noFill/>
                       </a:ln>
@@ -12196,10 +12079,10 @@
                       <a:ea typeface="Cambria Math" panose="02040503050406030204" pitchFamily="18" charset="0"/>
                       <a:cs typeface="Calibri" panose="020F0502020204030204" pitchFamily="34" charset="0"/>
                     </a:rPr>
-                    <a:t>Categorical predictor  of </a:t>
-                  </a:r>
-                  <a:r>
-                    <a:rPr kumimoji="0" lang="en-GB" sz="1200" b="0" i="0" u="none" strike="noStrike" kern="1200" cap="none" spc="0" normalizeH="0" baseline="0" noProof="0" dirty="0">
+                    <a:t>categorical predictor  of </a:t>
+                  </a:r>
+                  <a:r>
+                    <a:rPr kumimoji="0" lang="en-GB" sz="1200" i="0" u="none" strike="noStrike" kern="1200" cap="none" spc="0" normalizeH="0" baseline="0" noProof="0" dirty="0">
                       <a:ln>
                         <a:noFill/>
                       </a:ln>
@@ -12216,7 +12099,7 @@
                     <a:t>class </a:t>
                   </a:r>
                   <a:r>
-                    <a:rPr kumimoji="0" lang="en-GB" sz="1200" b="0" i="0" u="none" strike="noStrike" kern="1200" cap="none" spc="0" normalizeH="0" baseline="0" noProof="0" dirty="0">
+                    <a:rPr kumimoji="0" lang="en-GB" sz="1200" i="0" u="none" strike="noStrike" kern="1200" cap="none" spc="0" normalizeH="0" baseline="0" noProof="0" dirty="0">
                       <a:ln>
                         <a:noFill/>
                       </a:ln>
@@ -12233,7 +12116,7 @@
                     <a:t>“</a:t>
                   </a:r>
                   <a:r>
-                    <a:rPr kumimoji="0" lang="en-GB" sz="1200" b="0" i="0" u="none" strike="noStrike" kern="1200" cap="none" spc="0" normalizeH="0" baseline="0" noProof="0" dirty="0">
+                    <a:rPr kumimoji="0" lang="en-GB" sz="1200" i="0" u="none" strike="noStrike" kern="1200" cap="none" spc="0" normalizeH="0" baseline="0" noProof="0" dirty="0">
                       <a:ln>
                         <a:noFill/>
                       </a:ln>
@@ -12250,7 +12133,7 @@
                     <a:t>factor</a:t>
                   </a:r>
                   <a:r>
-                    <a:rPr kumimoji="0" lang="en-GB" sz="1200" b="0" i="0" u="none" strike="noStrike" kern="1200" cap="none" spc="0" normalizeH="0" baseline="0" noProof="0" dirty="0">
+                    <a:rPr kumimoji="0" lang="en-GB" sz="1200" i="0" u="none" strike="noStrike" kern="1200" cap="none" spc="0" normalizeH="0" baseline="0" noProof="0" dirty="0">
                       <a:ln>
                         <a:noFill/>
                       </a:ln>
@@ -12264,10 +12147,10 @@
                       <a:ea typeface="Cambria Math" panose="02040503050406030204" pitchFamily="18" charset="0"/>
                       <a:cs typeface="Calibri" panose="020F0502020204030204" pitchFamily="34" charset="0"/>
                     </a:rPr>
-                    <a:t>“  </a:t>
-                  </a:r>
-                  <a:r>
-                    <a:rPr kumimoji="0" lang="en-GB" sz="1200" b="1" i="0" u="none" strike="noStrike" kern="1200" cap="none" spc="0" normalizeH="0" baseline="0" noProof="0" dirty="0">
+                    <a:t>“  and</a:t>
+                  </a:r>
+                  <a:br>
+                    <a:rPr kumimoji="0" lang="en-GB" sz="1200" i="0" u="none" strike="noStrike" kern="1200" cap="none" spc="0" normalizeH="0" baseline="0" noProof="0" dirty="0">
                       <a:ln>
                         <a:noFill/>
                       </a:ln>
@@ -12281,10 +12164,9 @@
                       <a:ea typeface="Cambria Math" panose="02040503050406030204" pitchFamily="18" charset="0"/>
                       <a:cs typeface="Calibri" panose="020F0502020204030204" pitchFamily="34" charset="0"/>
                     </a:rPr>
-                    <a:t>and</a:t>
-                  </a:r>
-                  <a:br>
-                    <a:rPr kumimoji="0" lang="en-GB" sz="1200" b="0" i="0" u="none" strike="noStrike" kern="1200" cap="none" spc="0" normalizeH="0" baseline="0" noProof="0" dirty="0">
+                  </a:br>
+                  <a:r>
+                    <a:rPr kumimoji="0" lang="en-GB" sz="1200" i="0" u="none" strike="noStrike" kern="1200" cap="none" spc="0" normalizeH="0" baseline="0" noProof="0" dirty="0">
                       <a:ln>
                         <a:noFill/>
                       </a:ln>
@@ -12298,26 +12180,10 @@
                       <a:ea typeface="Cambria Math" panose="02040503050406030204" pitchFamily="18" charset="0"/>
                       <a:cs typeface="Calibri" panose="020F0502020204030204" pitchFamily="34" charset="0"/>
                     </a:rPr>
-                  </a:br>
-                  <a:r>
-                    <a:rPr kumimoji="0" lang="en-GB" sz="1200" b="0" i="0" u="none" strike="noStrike" kern="1200" cap="none" spc="0" normalizeH="0" baseline="0" noProof="0" dirty="0">
-                      <a:ln>
-                        <a:noFill/>
-                      </a:ln>
-                      <a:solidFill>
-                        <a:prstClr val="black"/>
-                      </a:solidFill>
-                      <a:effectLst/>
-                      <a:uLnTx/>
-                      <a:uFillTx/>
-                      <a:latin typeface="Calibri" panose="020F0502020204030204" pitchFamily="34" charset="0"/>
-                      <a:ea typeface="Cambria Math" panose="02040503050406030204" pitchFamily="18" charset="0"/>
-                      <a:cs typeface="Calibri" panose="020F0502020204030204" pitchFamily="34" charset="0"/>
-                    </a:rPr>
                     <a:t>                                                         “</a:t>
                   </a:r>
                   <a:r>
-                    <a:rPr kumimoji="0" lang="en-GB" sz="1200" b="0" i="0" u="none" strike="noStrike" kern="1200" cap="none" spc="0" normalizeH="0" baseline="0" noProof="0" dirty="0">
+                    <a:rPr kumimoji="0" lang="en-GB" sz="1200" i="0" u="none" strike="noStrike" kern="1200" cap="none" spc="0" normalizeH="0" baseline="0" noProof="0" dirty="0">
                       <a:ln>
                         <a:noFill/>
                       </a:ln>
@@ -12334,7 +12200,7 @@
                     <a:t>ordered</a:t>
                   </a:r>
                   <a:r>
-                    <a:rPr kumimoji="0" lang="en-GB" sz="1200" b="0" i="0" u="none" strike="noStrike" kern="1200" cap="none" spc="0" normalizeH="0" baseline="0" noProof="0" dirty="0">
+                    <a:rPr kumimoji="0" lang="en-GB" sz="1200" i="0" u="none" strike="noStrike" kern="1200" cap="none" spc="0" normalizeH="0" baseline="0" noProof="0" dirty="0">
                       <a:ln>
                         <a:noFill/>
                       </a:ln>
@@ -12372,7 +12238,7 @@
                     </m:oMath>
                   </a14:m>
                   <a:r>
-                    <a:rPr kumimoji="0" lang="en-GB" sz="1200" b="0" i="0" u="none" strike="noStrike" kern="1200" cap="none" spc="0" normalizeH="0" baseline="0" noProof="0" dirty="0">
+                    <a:rPr kumimoji="0" lang="en-GB" sz="1200" i="0" u="none" strike="noStrike" kern="1200" cap="none" spc="0" normalizeH="0" baseline="0" noProof="0" dirty="0">
                       <a:ln>
                         <a:noFill/>
                       </a:ln>
@@ -12408,7 +12274,7 @@
                     <a:defRPr/>
                   </a:pPr>
                   <a:r>
-                    <a:rPr kumimoji="0" lang="en-GB" sz="1200" b="0" i="0" u="none" strike="noStrike" kern="1200" cap="none" spc="0" normalizeH="0" baseline="0" noProof="0" dirty="0">
+                    <a:rPr kumimoji="0" lang="en-GB" sz="1200" i="0" u="none" strike="noStrike" kern="1200" cap="none" spc="0" normalizeH="0" baseline="0" noProof="0" dirty="0">
                       <a:ln>
                         <a:noFill/>
                       </a:ln>
@@ -12422,10 +12288,10 @@
                       <a:ea typeface="Cambria Math" panose="02040503050406030204" pitchFamily="18" charset="0"/>
                       <a:cs typeface="Calibri" panose="020F0502020204030204" pitchFamily="34" charset="0"/>
                     </a:rPr>
-                    <a:t>Categorical response of </a:t>
-                  </a:r>
-                  <a:r>
-                    <a:rPr kumimoji="0" lang="en-GB" sz="1200" b="0" i="0" u="none" strike="noStrike" kern="1200" cap="none" spc="0" normalizeH="0" baseline="0" noProof="0" dirty="0">
+                    <a:t>categorical response of </a:t>
+                  </a:r>
+                  <a:r>
+                    <a:rPr kumimoji="0" lang="en-GB" sz="1200" i="0" u="none" strike="noStrike" kern="1200" cap="none" spc="0" normalizeH="0" baseline="0" noProof="0" dirty="0">
                       <a:ln>
                         <a:noFill/>
                       </a:ln>
@@ -12442,7 +12308,7 @@
                     <a:t>class </a:t>
                   </a:r>
                   <a:r>
-                    <a:rPr kumimoji="0" lang="en-GB" sz="1200" b="0" i="0" u="none" strike="noStrike" kern="1200" cap="none" spc="0" normalizeH="0" baseline="0" noProof="0" dirty="0">
+                    <a:rPr kumimoji="0" lang="en-GB" sz="1200" i="0" u="none" strike="noStrike" kern="1200" cap="none" spc="0" normalizeH="0" baseline="0" noProof="0" dirty="0">
                       <a:ln>
                         <a:noFill/>
                       </a:ln>
@@ -12459,7 +12325,7 @@
                     <a:t>“</a:t>
                   </a:r>
                   <a:r>
-                    <a:rPr kumimoji="0" lang="en-GB" sz="1200" b="0" i="0" u="none" strike="noStrike" kern="1200" cap="none" spc="0" normalizeH="0" baseline="0" noProof="0" dirty="0">
+                    <a:rPr kumimoji="0" lang="en-GB" sz="1200" i="0" u="none" strike="noStrike" kern="1200" cap="none" spc="0" normalizeH="0" baseline="0" noProof="0" dirty="0">
                       <a:ln>
                         <a:noFill/>
                       </a:ln>
@@ -12476,7 +12342,7 @@
                     <a:t>factor</a:t>
                   </a:r>
                   <a:r>
-                    <a:rPr kumimoji="0" lang="en-GB" sz="1200" b="0" i="0" u="none" strike="noStrike" kern="1200" cap="none" spc="0" normalizeH="0" baseline="0" noProof="0" dirty="0">
+                    <a:rPr kumimoji="0" lang="en-GB" sz="1200" i="0" u="none" strike="noStrike" kern="1200" cap="none" spc="0" normalizeH="0" baseline="0" noProof="0" dirty="0">
                       <a:ln>
                         <a:noFill/>
                       </a:ln>
@@ -12490,10 +12356,10 @@
                       <a:ea typeface="Cambria Math" panose="02040503050406030204" pitchFamily="18" charset="0"/>
                       <a:cs typeface="Calibri" panose="020F0502020204030204" pitchFamily="34" charset="0"/>
                     </a:rPr>
-                    <a:t>“  </a:t>
-                  </a:r>
-                  <a:r>
-                    <a:rPr kumimoji="0" lang="en-GB" sz="1200" b="1" i="0" u="none" strike="noStrike" kern="1200" cap="none" spc="0" normalizeH="0" baseline="0" noProof="0" dirty="0">
+                    <a:t>“  and</a:t>
+                  </a:r>
+                  <a:br>
+                    <a:rPr kumimoji="0" lang="en-GB" sz="1200" i="0" u="none" strike="noStrike" kern="1200" cap="none" spc="0" normalizeH="0" baseline="0" noProof="0" dirty="0">
                       <a:ln>
                         <a:noFill/>
                       </a:ln>
@@ -12507,10 +12373,9 @@
                       <a:ea typeface="Cambria Math" panose="02040503050406030204" pitchFamily="18" charset="0"/>
                       <a:cs typeface="Calibri" panose="020F0502020204030204" pitchFamily="34" charset="0"/>
                     </a:rPr>
-                    <a:t>and</a:t>
-                  </a:r>
-                  <a:br>
-                    <a:rPr kumimoji="0" lang="en-GB" sz="1200" b="0" i="0" u="none" strike="noStrike" kern="1200" cap="none" spc="0" normalizeH="0" baseline="0" noProof="0" dirty="0">
+                  </a:br>
+                  <a:r>
+                    <a:rPr kumimoji="0" lang="en-GB" sz="1200" i="0" u="none" strike="noStrike" kern="1200" cap="none" spc="0" normalizeH="0" baseline="0" noProof="0" dirty="0">
                       <a:ln>
                         <a:noFill/>
                       </a:ln>
@@ -12524,9 +12389,27 @@
                       <a:ea typeface="Cambria Math" panose="02040503050406030204" pitchFamily="18" charset="0"/>
                       <a:cs typeface="Calibri" panose="020F0502020204030204" pitchFamily="34" charset="0"/>
                     </a:rPr>
-                  </a:br>
-                  <a:r>
-                    <a:rPr kumimoji="0" lang="en-GB" sz="1200" b="0" i="0" u="none" strike="noStrike" kern="1200" cap="none" spc="0" normalizeH="0" baseline="0" noProof="0" dirty="0">
+                    <a:t>                                                         “</a:t>
+                  </a:r>
+                  <a:r>
+                    <a:rPr kumimoji="0" lang="en-GB" sz="1200" i="0" u="none" strike="noStrike" kern="1200" cap="none" spc="0" normalizeH="0" baseline="0" noProof="0" dirty="0">
+                      <a:ln>
+                        <a:noFill/>
+                      </a:ln>
+                      <a:solidFill>
+                        <a:prstClr val="black"/>
+                      </a:solidFill>
+                      <a:effectLst/>
+                      <a:uLnTx/>
+                      <a:uFillTx/>
+                      <a:latin typeface="Courier New" panose="02070309020205020404" pitchFamily="49" charset="0"/>
+                      <a:ea typeface="Cambria Math" panose="02040503050406030204" pitchFamily="18" charset="0"/>
+                      <a:cs typeface="Courier New" panose="02070309020205020404" pitchFamily="49" charset="0"/>
+                    </a:rPr>
+                    <a:t>ordered</a:t>
+                  </a:r>
+                  <a:r>
+                    <a:rPr kumimoji="0" lang="en-GB" sz="1200" i="0" u="none" strike="noStrike" kern="1200" cap="none" spc="0" normalizeH="0" baseline="0" noProof="0" dirty="0">
                       <a:ln>
                         <a:noFill/>
                       </a:ln>
@@ -12540,47 +12423,13 @@
                       <a:ea typeface="Cambria Math" panose="02040503050406030204" pitchFamily="18" charset="0"/>
                       <a:cs typeface="Calibri" panose="020F0502020204030204" pitchFamily="34" charset="0"/>
                     </a:rPr>
-                    <a:t>                                                         “</a:t>
-                  </a:r>
-                  <a:r>
-                    <a:rPr kumimoji="0" lang="en-GB" sz="1200" b="0" i="0" u="none" strike="noStrike" kern="1200" cap="none" spc="0" normalizeH="0" baseline="0" noProof="0" dirty="0">
-                      <a:ln>
-                        <a:noFill/>
-                      </a:ln>
-                      <a:solidFill>
-                        <a:prstClr val="black"/>
-                      </a:solidFill>
-                      <a:effectLst/>
-                      <a:uLnTx/>
-                      <a:uFillTx/>
-                      <a:latin typeface="Courier New" panose="02070309020205020404" pitchFamily="49" charset="0"/>
-                      <a:ea typeface="Cambria Math" panose="02040503050406030204" pitchFamily="18" charset="0"/>
-                      <a:cs typeface="Courier New" panose="02070309020205020404" pitchFamily="49" charset="0"/>
-                    </a:rPr>
-                    <a:t>ordered</a:t>
-                  </a:r>
-                  <a:r>
-                    <a:rPr kumimoji="0" lang="en-GB" sz="1200" b="0" i="0" u="none" strike="noStrike" kern="1200" cap="none" spc="0" normalizeH="0" baseline="0" noProof="0" dirty="0">
-                      <a:ln>
-                        <a:noFill/>
-                      </a:ln>
-                      <a:solidFill>
-                        <a:prstClr val="black"/>
-                      </a:solidFill>
-                      <a:effectLst/>
-                      <a:uLnTx/>
-                      <a:uFillTx/>
-                      <a:latin typeface="Calibri" panose="020F0502020204030204" pitchFamily="34" charset="0"/>
-                      <a:ea typeface="Cambria Math" panose="02040503050406030204" pitchFamily="18" charset="0"/>
-                      <a:cs typeface="Calibri" panose="020F0502020204030204" pitchFamily="34" charset="0"/>
-                    </a:rPr>
                     <a:t>“ with j levels</a:t>
                   </a:r>
                 </a:p>
               </p:txBody>
             </p:sp>
           </mc:Choice>
-          <mc:Fallback xmlns="">
+          <mc:Fallback>
             <p:sp>
               <p:nvSpPr>
                 <p:cNvPr id="11" name="Textfeld 10">
@@ -12598,7 +12447,7 @@
               <p:spPr>
                 <a:xfrm>
                   <a:off x="716606" y="2795230"/>
-                  <a:ext cx="4320000" cy="820654"/>
+                  <a:ext cx="4320000" cy="830997"/>
                 </a:xfrm>
                 <a:prstGeom prst="rect">
                   <a:avLst/>
@@ -12606,7 +12455,7 @@
                 <a:blipFill>
                   <a:blip r:embed="rId7"/>
                   <a:stretch>
-                    <a:fillRect b="-4478"/>
+                    <a:fillRect b="-2941"/>
                   </a:stretch>
                 </a:blipFill>
                 <a:ln w="12700">
@@ -12644,7 +12493,7 @@
           </p:nvSpPr>
           <p:spPr>
             <a:xfrm>
-              <a:off x="5554090" y="4765816"/>
+              <a:off x="5554090" y="4910779"/>
               <a:ext cx="5400000" cy="276999"/>
             </a:xfrm>
             <a:prstGeom prst="rect">
@@ -12759,7 +12608,7 @@
           </p:nvCxnSpPr>
           <p:spPr>
             <a:xfrm>
-              <a:off x="5054061" y="3712358"/>
+              <a:off x="5054061" y="3812717"/>
               <a:ext cx="512499" cy="5057"/>
             </a:xfrm>
             <a:prstGeom prst="straightConnector1">
@@ -12803,7 +12652,7 @@
           </p:nvCxnSpPr>
           <p:spPr>
             <a:xfrm>
-              <a:off x="5055423" y="4930815"/>
+              <a:off x="5055423" y="5075778"/>
               <a:ext cx="512499" cy="5057"/>
             </a:xfrm>
             <a:prstGeom prst="straightConnector1">
@@ -12845,7 +12694,7 @@
           </p:nvSpPr>
           <p:spPr>
             <a:xfrm>
-              <a:off x="5554090" y="3605381"/>
+              <a:off x="5554090" y="3691915"/>
               <a:ext cx="5400000" cy="276999"/>
             </a:xfrm>
             <a:prstGeom prst="rect">
@@ -12994,9 +12843,9 @@
             <p:nvPr/>
           </p:nvCxnSpPr>
           <p:spPr>
-            <a:xfrm>
-              <a:off x="5084085" y="1240615"/>
-              <a:ext cx="470005" cy="89443"/>
+            <a:xfrm flipV="1">
+              <a:off x="5084085" y="1237725"/>
+              <a:ext cx="470005" cy="2890"/>
             </a:xfrm>
             <a:prstGeom prst="straightConnector1">
               <a:avLst/>
@@ -13037,7 +12886,7 @@
           </p:nvSpPr>
           <p:spPr>
             <a:xfrm>
-              <a:off x="720803" y="3591556"/>
+              <a:off x="720803" y="3691915"/>
               <a:ext cx="4320000" cy="276999"/>
             </a:xfrm>
             <a:prstGeom prst="rect">
@@ -13079,7 +12928,7 @@
                 <a:defRPr/>
               </a:pPr>
               <a:r>
-                <a:rPr kumimoji="0" lang="en-GB" sz="1200" b="1" i="0" u="none" strike="noStrike" kern="1200" cap="none" spc="0" normalizeH="0" baseline="0" noProof="0" dirty="0">
+                <a:rPr kumimoji="0" lang="en-GB" sz="1200" i="0" u="none" strike="noStrike" kern="1200" cap="none" spc="0" normalizeH="0" baseline="0" noProof="0" dirty="0">
                   <a:ln>
                     <a:noFill/>
                   </a:ln>
@@ -13093,27 +12942,10 @@
                   <a:ea typeface="Cambria Math" panose="02040503050406030204" pitchFamily="18" charset="0"/>
                   <a:cs typeface="Calibri" panose="020F0502020204030204" pitchFamily="34" charset="0"/>
                 </a:rPr>
-                <a:t>+ flag</a:t>
+                <a:t>+ flag: </a:t>
               </a:r>
               <a:r>
-                <a:rPr kumimoji="0" lang="en-GB" sz="1200" b="0" i="0" u="none" strike="noStrike" kern="1200" cap="none" spc="0" normalizeH="0" baseline="0" noProof="0" dirty="0">
-                  <a:ln>
-                    <a:noFill/>
-                  </a:ln>
-                  <a:solidFill>
-                    <a:prstClr val="black"/>
-                  </a:solidFill>
-                  <a:effectLst/>
-                  <a:uLnTx/>
-                  <a:uFillTx/>
-                  <a:latin typeface="Calibri" panose="020F0502020204030204" pitchFamily="34" charset="0"/>
-                  <a:ea typeface="Cambria Math" panose="02040503050406030204" pitchFamily="18" charset="0"/>
-                  <a:cs typeface="Calibri" panose="020F0502020204030204" pitchFamily="34" charset="0"/>
-                </a:rPr>
-                <a:t>: </a:t>
-              </a:r>
-              <a:r>
-                <a:rPr kumimoji="0" lang="en-GB" sz="1200" b="0" i="0" u="none" strike="noStrike" kern="1200" cap="none" spc="0" normalizeH="0" baseline="0" noProof="0" dirty="0" err="1">
+                <a:rPr kumimoji="0" lang="en-GB" sz="1200" i="0" u="none" strike="noStrike" kern="1200" cap="none" spc="0" normalizeH="0" baseline="0" noProof="0" dirty="0" err="1">
                   <a:ln>
                     <a:noFill/>
                   </a:ln>
@@ -13130,7 +12962,7 @@
                 <a:t>visstat</a:t>
               </a:r>
               <a:r>
-                <a:rPr kumimoji="0" lang="en-GB" sz="1200" b="0" i="0" u="none" strike="noStrike" kern="1200" cap="none" spc="0" normalizeH="0" baseline="0" noProof="0" dirty="0">
+                <a:rPr kumimoji="0" lang="en-GB" sz="1200" i="0" u="none" strike="noStrike" kern="1200" cap="none" spc="0" normalizeH="0" baseline="0" noProof="0" dirty="0">
                   <a:ln>
                     <a:noFill/>
                   </a:ln>
@@ -13144,43 +12976,9 @@
                   <a:ea typeface="Cambria Math" panose="02040503050406030204" pitchFamily="18" charset="0"/>
                   <a:cs typeface="Courier New" panose="02070309020205020404" pitchFamily="49" charset="0"/>
                 </a:rPr>
-                <a:t>(…,</a:t>
+                <a:t>(…,correlation=TRUE)</a:t>
               </a:r>
-              <a:r>
-                <a:rPr kumimoji="0" lang="en-GB" sz="1200" b="1" i="0" u="none" strike="noStrike" kern="1200" cap="none" spc="0" normalizeH="0" baseline="0" noProof="0" dirty="0">
-                  <a:ln>
-                    <a:noFill/>
-                  </a:ln>
-                  <a:solidFill>
-                    <a:prstClr val="black"/>
-                  </a:solidFill>
-                  <a:effectLst/>
-                  <a:uLnTx/>
-                  <a:uFillTx/>
-                  <a:latin typeface="Courier New" panose="02070309020205020404" pitchFamily="49" charset="0"/>
-                  <a:ea typeface="Cambria Math" panose="02040503050406030204" pitchFamily="18" charset="0"/>
-                  <a:cs typeface="Courier New" panose="02070309020205020404" pitchFamily="49" charset="0"/>
-                </a:rPr>
-                <a:t>correlation=TRUE</a:t>
-              </a:r>
-              <a:r>
-                <a:rPr kumimoji="0" lang="en-GB" sz="1200" b="0" i="0" u="none" strike="noStrike" kern="1200" cap="none" spc="0" normalizeH="0" baseline="0" noProof="0" dirty="0">
-                  <a:ln>
-                    <a:noFill/>
-                  </a:ln>
-                  <a:solidFill>
-                    <a:prstClr val="black"/>
-                  </a:solidFill>
-                  <a:effectLst/>
-                  <a:uLnTx/>
-                  <a:uFillTx/>
-                  <a:latin typeface="Courier New" panose="02070309020205020404" pitchFamily="49" charset="0"/>
-                  <a:ea typeface="Cambria Math" panose="02040503050406030204" pitchFamily="18" charset="0"/>
-                  <a:cs typeface="Courier New" panose="02070309020205020404" pitchFamily="49" charset="0"/>
-                </a:rPr>
-                <a:t>)</a:t>
-              </a:r>
-              <a:endParaRPr kumimoji="0" lang="de-DE" sz="800" b="0" i="0" u="none" strike="noStrike" kern="1200" cap="none" spc="0" normalizeH="0" baseline="0" noProof="0" dirty="0">
+              <a:endParaRPr kumimoji="0" lang="de-DE" sz="800" i="0" u="none" strike="noStrike" kern="1200" cap="none" spc="0" normalizeH="0" baseline="0" noProof="0" dirty="0">
                 <a:ln>
                   <a:noFill/>
                 </a:ln>
@@ -13214,8 +13012,8 @@
           </p:nvCxnSpPr>
           <p:spPr>
             <a:xfrm flipV="1">
-              <a:off x="5036606" y="2499111"/>
-              <a:ext cx="443285" cy="706446"/>
+              <a:off x="5036606" y="2496538"/>
+              <a:ext cx="449748" cy="714191"/>
             </a:xfrm>
             <a:prstGeom prst="straightConnector1">
               <a:avLst/>
@@ -13242,6 +13040,338 @@
             </a:fontRef>
           </p:style>
         </p:cxnSp>
+        <p:sp>
+          <p:nvSpPr>
+            <p:cNvPr id="4" name="Textfeld 3">
+              <a:extLst>
+                <a:ext uri="{FF2B5EF4-FFF2-40B4-BE49-F238E27FC236}">
+                  <a16:creationId xmlns:a16="http://schemas.microsoft.com/office/drawing/2014/main" id="{F417F758-CA76-D532-21B6-735C47519F0F}"/>
+                </a:ext>
+              </a:extLst>
+            </p:cNvPr>
+            <p:cNvSpPr txBox="1"/>
+            <p:nvPr/>
+          </p:nvSpPr>
+          <p:spPr>
+            <a:xfrm>
+              <a:off x="239524" y="1099225"/>
+              <a:ext cx="236184" cy="215444"/>
+            </a:xfrm>
+            <a:prstGeom prst="rect">
+              <a:avLst/>
+            </a:prstGeom>
+            <a:solidFill>
+              <a:schemeClr val="bg2">
+                <a:lumMod val="90000"/>
+                <a:alpha val="19758"/>
+              </a:schemeClr>
+            </a:solidFill>
+            <a:ln w="12700">
+              <a:noFill/>
+            </a:ln>
+          </p:spPr>
+          <p:txBody>
+            <a:bodyPr wrap="square" rtlCol="0">
+              <a:spAutoFit/>
+            </a:bodyPr>
+            <a:lstStyle/>
+            <a:p>
+              <a:pPr algn="ctr"/>
+              <a:r>
+                <a:rPr lang="de-DE" sz="800" noProof="0" dirty="0">
+                  <a:solidFill>
+                    <a:schemeClr val="tx1">
+                      <a:lumMod val="50000"/>
+                      <a:lumOff val="50000"/>
+                    </a:schemeClr>
+                  </a:solidFill>
+                  <a:latin typeface="Calibri" panose="020F0502020204030204" pitchFamily="34" charset="0"/>
+                  <a:ea typeface="Cambria Math" panose="02040503050406030204" pitchFamily="18" charset="0"/>
+                  <a:cs typeface="Calibri" panose="020F0502020204030204" pitchFamily="34" charset="0"/>
+                </a:rPr>
+                <a:t>1</a:t>
+              </a:r>
+            </a:p>
+          </p:txBody>
+        </p:sp>
+        <p:sp>
+          <p:nvSpPr>
+            <p:cNvPr id="13" name="Textfeld 12">
+              <a:extLst>
+                <a:ext uri="{FF2B5EF4-FFF2-40B4-BE49-F238E27FC236}">
+                  <a16:creationId xmlns:a16="http://schemas.microsoft.com/office/drawing/2014/main" id="{B8105820-9E2B-EE1E-03D4-B81791A38D81}"/>
+                </a:ext>
+              </a:extLst>
+            </p:cNvPr>
+            <p:cNvSpPr txBox="1"/>
+            <p:nvPr/>
+          </p:nvSpPr>
+          <p:spPr>
+            <a:xfrm>
+              <a:off x="49953" y="571433"/>
+              <a:ext cx="691375" cy="276999"/>
+            </a:xfrm>
+            <a:prstGeom prst="rect">
+              <a:avLst/>
+            </a:prstGeom>
+            <a:noFill/>
+            <a:ln w="12700">
+              <a:noFill/>
+            </a:ln>
+          </p:spPr>
+          <p:txBody>
+            <a:bodyPr wrap="square" rtlCol="0">
+              <a:spAutoFit/>
+            </a:bodyPr>
+            <a:lstStyle/>
+            <a:p>
+              <a:pPr algn="ctr"/>
+              <a:r>
+                <a:rPr lang="de-DE" sz="1200" noProof="0" dirty="0">
+                  <a:latin typeface="Calibri" panose="020F0502020204030204" pitchFamily="34" charset="0"/>
+                  <a:ea typeface="Cambria Math" panose="02040503050406030204" pitchFamily="18" charset="0"/>
+                  <a:cs typeface="Calibri" panose="020F0502020204030204" pitchFamily="34" charset="0"/>
+                </a:rPr>
+                <a:t>Route</a:t>
+              </a:r>
+            </a:p>
+          </p:txBody>
+        </p:sp>
+        <p:sp>
+          <p:nvSpPr>
+            <p:cNvPr id="18" name="Rechteck 17">
+              <a:extLst>
+                <a:ext uri="{FF2B5EF4-FFF2-40B4-BE49-F238E27FC236}">
+                  <a16:creationId xmlns:a16="http://schemas.microsoft.com/office/drawing/2014/main" id="{A0BE9EB5-D803-DFA9-50B5-0875D1465580}"/>
+                </a:ext>
+              </a:extLst>
+            </p:cNvPr>
+            <p:cNvSpPr/>
+            <p:nvPr/>
+          </p:nvSpPr>
+          <p:spPr>
+            <a:xfrm>
+              <a:off x="221016" y="1006892"/>
+              <a:ext cx="347696" cy="461665"/>
+            </a:xfrm>
+            <a:prstGeom prst="rect">
+              <a:avLst/>
+            </a:prstGeom>
+            <a:solidFill>
+              <a:schemeClr val="bg2">
+                <a:lumMod val="90000"/>
+              </a:schemeClr>
+            </a:solidFill>
+          </p:spPr>
+          <p:style>
+            <a:lnRef idx="2">
+              <a:schemeClr val="accent1">
+                <a:shade val="15000"/>
+              </a:schemeClr>
+            </a:lnRef>
+            <a:fillRef idx="1">
+              <a:schemeClr val="accent1"/>
+            </a:fillRef>
+            <a:effectRef idx="0">
+              <a:schemeClr val="accent1"/>
+            </a:effectRef>
+            <a:fontRef idx="minor">
+              <a:schemeClr val="lt1"/>
+            </a:fontRef>
+          </p:style>
+          <p:txBody>
+            <a:bodyPr rtlCol="0" anchor="ctr"/>
+            <a:lstStyle/>
+            <a:p>
+              <a:pPr algn="ctr"/>
+              <a:r>
+                <a:rPr lang="de-DE" dirty="0">
+                  <a:solidFill>
+                    <a:schemeClr val="tx1"/>
+                  </a:solidFill>
+                </a:rPr>
+                <a:t>1</a:t>
+              </a:r>
+            </a:p>
+          </p:txBody>
+        </p:sp>
+        <p:sp>
+          <p:nvSpPr>
+            <p:cNvPr id="20" name="Rechteck 19">
+              <a:extLst>
+                <a:ext uri="{FF2B5EF4-FFF2-40B4-BE49-F238E27FC236}">
+                  <a16:creationId xmlns:a16="http://schemas.microsoft.com/office/drawing/2014/main" id="{7BFDF4DF-9E89-51BE-38BA-2941AA19B2D2}"/>
+                </a:ext>
+              </a:extLst>
+            </p:cNvPr>
+            <p:cNvSpPr/>
+            <p:nvPr/>
+          </p:nvSpPr>
+          <p:spPr>
+            <a:xfrm>
+              <a:off x="215127" y="2010443"/>
+              <a:ext cx="347696" cy="1958471"/>
+            </a:xfrm>
+            <a:prstGeom prst="rect">
+              <a:avLst/>
+            </a:prstGeom>
+            <a:solidFill>
+              <a:schemeClr val="accent5">
+                <a:lumMod val="40000"/>
+                <a:lumOff val="60000"/>
+              </a:schemeClr>
+            </a:solidFill>
+          </p:spPr>
+          <p:style>
+            <a:lnRef idx="2">
+              <a:schemeClr val="accent1">
+                <a:shade val="15000"/>
+              </a:schemeClr>
+            </a:lnRef>
+            <a:fillRef idx="1">
+              <a:schemeClr val="accent1"/>
+            </a:fillRef>
+            <a:effectRef idx="0">
+              <a:schemeClr val="accent1"/>
+            </a:effectRef>
+            <a:fontRef idx="minor">
+              <a:schemeClr val="lt1"/>
+            </a:fontRef>
+          </p:style>
+          <p:txBody>
+            <a:bodyPr rtlCol="0" anchor="ctr"/>
+            <a:lstStyle/>
+            <a:p>
+              <a:pPr algn="ctr"/>
+              <a:r>
+                <a:rPr lang="de-DE" dirty="0">
+                  <a:solidFill>
+                    <a:schemeClr val="tx1"/>
+                  </a:solidFill>
+                </a:rPr>
+                <a:t>2</a:t>
+              </a:r>
+            </a:p>
+          </p:txBody>
+        </p:sp>
+        <p:sp>
+          <p:nvSpPr>
+            <p:cNvPr id="21" name="Rechteck 20">
+              <a:extLst>
+                <a:ext uri="{FF2B5EF4-FFF2-40B4-BE49-F238E27FC236}">
+                  <a16:creationId xmlns:a16="http://schemas.microsoft.com/office/drawing/2014/main" id="{D6F1D490-F1DA-72C5-A6CE-912541970EB7}"/>
+                </a:ext>
+              </a:extLst>
+            </p:cNvPr>
+            <p:cNvSpPr/>
+            <p:nvPr/>
+          </p:nvSpPr>
+          <p:spPr>
+            <a:xfrm>
+              <a:off x="215127" y="4185311"/>
+              <a:ext cx="347696" cy="1002467"/>
+            </a:xfrm>
+            <a:prstGeom prst="rect">
+              <a:avLst/>
+            </a:prstGeom>
+            <a:solidFill>
+              <a:schemeClr val="accent2">
+                <a:lumMod val="20000"/>
+                <a:lumOff val="80000"/>
+              </a:schemeClr>
+            </a:solidFill>
+          </p:spPr>
+          <p:style>
+            <a:lnRef idx="2">
+              <a:schemeClr val="accent1">
+                <a:shade val="15000"/>
+              </a:schemeClr>
+            </a:lnRef>
+            <a:fillRef idx="1">
+              <a:schemeClr val="accent1"/>
+            </a:fillRef>
+            <a:effectRef idx="0">
+              <a:schemeClr val="accent1"/>
+            </a:effectRef>
+            <a:fontRef idx="minor">
+              <a:schemeClr val="lt1"/>
+            </a:fontRef>
+          </p:style>
+          <p:txBody>
+            <a:bodyPr rtlCol="0" anchor="ctr"/>
+            <a:lstStyle/>
+            <a:p>
+              <a:pPr algn="ctr"/>
+              <a:r>
+                <a:rPr lang="de-DE" dirty="0">
+                  <a:solidFill>
+                    <a:schemeClr val="tx1"/>
+                  </a:solidFill>
+                </a:rPr>
+                <a:t>3</a:t>
+              </a:r>
+            </a:p>
+          </p:txBody>
+        </p:sp>
+        <p:sp>
+          <p:nvSpPr>
+            <p:cNvPr id="22" name="Rechteck 21">
+              <a:extLst>
+                <a:ext uri="{FF2B5EF4-FFF2-40B4-BE49-F238E27FC236}">
+                  <a16:creationId xmlns:a16="http://schemas.microsoft.com/office/drawing/2014/main" id="{FA244EA9-C7AB-8F81-B117-74B499E420BC}"/>
+                </a:ext>
+              </a:extLst>
+            </p:cNvPr>
+            <p:cNvSpPr/>
+            <p:nvPr/>
+          </p:nvSpPr>
+          <p:spPr>
+            <a:xfrm>
+              <a:off x="244786" y="5471979"/>
+              <a:ext cx="347696" cy="461665"/>
+            </a:xfrm>
+            <a:prstGeom prst="rect">
+              <a:avLst/>
+            </a:prstGeom>
+            <a:solidFill>
+              <a:schemeClr val="accent4">
+                <a:lumMod val="20000"/>
+                <a:lumOff val="80000"/>
+              </a:schemeClr>
+            </a:solidFill>
+          </p:spPr>
+          <p:style>
+            <a:lnRef idx="2">
+              <a:schemeClr val="accent1">
+                <a:shade val="15000"/>
+              </a:schemeClr>
+            </a:lnRef>
+            <a:fillRef idx="1">
+              <a:schemeClr val="accent1"/>
+            </a:fillRef>
+            <a:effectRef idx="0">
+              <a:schemeClr val="accent1"/>
+            </a:effectRef>
+            <a:fontRef idx="minor">
+              <a:schemeClr val="lt1"/>
+            </a:fontRef>
+          </p:style>
+          <p:txBody>
+            <a:bodyPr rtlCol="0" anchor="ctr"/>
+            <a:lstStyle/>
+            <a:p>
+              <a:pPr algn="ctr"/>
+              <a:r>
+                <a:rPr lang="de-DE" dirty="0">
+                  <a:solidFill>
+                    <a:schemeClr val="tx1"/>
+                  </a:solidFill>
+                </a:rPr>
+                <a:t>4</a:t>
+              </a:r>
+            </a:p>
+          </p:txBody>
+        </p:sp>
       </p:grpSp>
     </p:spTree>
     <p:extLst>

--- a/vignettes/figures/overview.pptx
+++ b/vignettes/figures/overview.pptx
@@ -131,9 +131,38 @@
 <file path=ppt/revisionInfo.xml><?xml version="1.0" encoding="utf-8"?>
 <p1510:revInfo xmlns:a="http://schemas.openxmlformats.org/drawingml/2006/main" xmlns:r="http://schemas.openxmlformats.org/officeDocument/2006/relationships" xmlns:p1510="http://schemas.microsoft.com/office/powerpoint/2015/10/main">
   <p1510:revLst>
-    <p1510:client id="{029578F4-396C-7740-87A7-C4D5F9DB13DB}" v="185" dt="2026-05-22T16:13:26.705"/>
+    <p1510:client id="{029578F4-396C-7740-87A7-C4D5F9DB13DB}" v="186" dt="2026-05-24T07:24:44.177"/>
   </p1510:revLst>
 </p1510:revInfo>
+</file>
+
+<file path=ppt/changesInfos/changesInfo1.xml><?xml version="1.0" encoding="utf-8"?>
+<pc:chgInfo xmlns:a="http://schemas.openxmlformats.org/drawingml/2006/main" xmlns:r="http://schemas.openxmlformats.org/officeDocument/2006/relationships" xmlns:ac="http://schemas.microsoft.com/office/drawing/2013/main/command" xmlns:pc="http://schemas.microsoft.com/office/powerpoint/2013/main/command">
+  <pc:docChgLst>
+    <pc:chgData name="Schilling Sabine HSLU W" userId="b0e2af5c-9187-4900-883a-c96514cd8e15" providerId="ADAL" clId="{5E51067F-94D7-505D-9735-0698788361AC}"/>
+    <pc:docChg chg="custSel modSld">
+      <pc:chgData name="Schilling Sabine HSLU W" userId="b0e2af5c-9187-4900-883a-c96514cd8e15" providerId="ADAL" clId="{5E51067F-94D7-505D-9735-0698788361AC}" dt="2026-05-24T07:24:55.295" v="3" actId="478"/>
+      <pc:docMkLst>
+        <pc:docMk/>
+      </pc:docMkLst>
+      <pc:sldChg chg="addSp delSp modSp mod">
+        <pc:chgData name="Schilling Sabine HSLU W" userId="b0e2af5c-9187-4900-883a-c96514cd8e15" providerId="ADAL" clId="{5E51067F-94D7-505D-9735-0698788361AC}" dt="2026-05-24T07:24:55.295" v="3" actId="478"/>
+        <pc:sldMkLst>
+          <pc:docMk/>
+          <pc:sldMk cId="2052569025" sldId="275"/>
+        </pc:sldMkLst>
+        <pc:spChg chg="add del mod">
+          <ac:chgData name="Schilling Sabine HSLU W" userId="b0e2af5c-9187-4900-883a-c96514cd8e15" providerId="ADAL" clId="{5E51067F-94D7-505D-9735-0698788361AC}" dt="2026-05-24T07:24:55.295" v="3" actId="478"/>
+          <ac:spMkLst>
+            <pc:docMk/>
+            <pc:sldMk cId="2052569025" sldId="275"/>
+            <ac:spMk id="2" creationId="{5221C6E7-7004-E29B-D134-11E560A04FAD}"/>
+          </ac:spMkLst>
+        </pc:spChg>
+      </pc:sldChg>
+    </pc:docChg>
+  </pc:docChgLst>
+</pc:chgInfo>
 </file>
 
 <file path=ppt/notesMasters/notesMaster1.xml><?xml version="1.0" encoding="utf-8"?>
@@ -218,7 +247,7 @@
           <a:p>
             <a:fld id="{0AECA108-3915-9043-8428-B4BE4472B821}" type="datetimeFigureOut">
               <a:rPr lang="de-DE" smtClean="0"/>
-              <a:t>18.05.26</a:t>
+              <a:t>24.05.26</a:t>
             </a:fld>
             <a:endParaRPr lang="de-DE"/>
           </a:p>
@@ -1016,7 +1045,7 @@
           <a:p>
             <a:fld id="{43497422-92ED-3D47-BF28-17000E80E497}" type="datetimeFigureOut">
               <a:rPr lang="de-DE" smtClean="0"/>
-              <a:t>18.05.26</a:t>
+              <a:t>24.05.26</a:t>
             </a:fld>
             <a:endParaRPr lang="de-DE"/>
           </a:p>
@@ -1214,7 +1243,7 @@
           <a:p>
             <a:fld id="{43497422-92ED-3D47-BF28-17000E80E497}" type="datetimeFigureOut">
               <a:rPr lang="de-DE" smtClean="0"/>
-              <a:t>18.05.26</a:t>
+              <a:t>24.05.26</a:t>
             </a:fld>
             <a:endParaRPr lang="de-DE"/>
           </a:p>
@@ -1422,7 +1451,7 @@
           <a:p>
             <a:fld id="{43497422-92ED-3D47-BF28-17000E80E497}" type="datetimeFigureOut">
               <a:rPr lang="de-DE" smtClean="0"/>
-              <a:t>18.05.26</a:t>
+              <a:t>24.05.26</a:t>
             </a:fld>
             <a:endParaRPr lang="de-DE"/>
           </a:p>
@@ -1620,7 +1649,7 @@
           <a:p>
             <a:fld id="{43497422-92ED-3D47-BF28-17000E80E497}" type="datetimeFigureOut">
               <a:rPr lang="de-DE" smtClean="0"/>
-              <a:t>18.05.26</a:t>
+              <a:t>24.05.26</a:t>
             </a:fld>
             <a:endParaRPr lang="de-DE"/>
           </a:p>
@@ -1895,7 +1924,7 @@
           <a:p>
             <a:fld id="{43497422-92ED-3D47-BF28-17000E80E497}" type="datetimeFigureOut">
               <a:rPr lang="de-DE" smtClean="0"/>
-              <a:t>18.05.26</a:t>
+              <a:t>24.05.26</a:t>
             </a:fld>
             <a:endParaRPr lang="de-DE"/>
           </a:p>
@@ -2160,7 +2189,7 @@
           <a:p>
             <a:fld id="{43497422-92ED-3D47-BF28-17000E80E497}" type="datetimeFigureOut">
               <a:rPr lang="de-DE" smtClean="0"/>
-              <a:t>18.05.26</a:t>
+              <a:t>24.05.26</a:t>
             </a:fld>
             <a:endParaRPr lang="de-DE"/>
           </a:p>
@@ -2572,7 +2601,7 @@
           <a:p>
             <a:fld id="{43497422-92ED-3D47-BF28-17000E80E497}" type="datetimeFigureOut">
               <a:rPr lang="de-DE" smtClean="0"/>
-              <a:t>18.05.26</a:t>
+              <a:t>24.05.26</a:t>
             </a:fld>
             <a:endParaRPr lang="de-DE"/>
           </a:p>
@@ -2713,7 +2742,7 @@
           <a:p>
             <a:fld id="{43497422-92ED-3D47-BF28-17000E80E497}" type="datetimeFigureOut">
               <a:rPr lang="de-DE" smtClean="0"/>
-              <a:t>18.05.26</a:t>
+              <a:t>24.05.26</a:t>
             </a:fld>
             <a:endParaRPr lang="de-DE"/>
           </a:p>
@@ -2826,7 +2855,7 @@
           <a:p>
             <a:fld id="{43497422-92ED-3D47-BF28-17000E80E497}" type="datetimeFigureOut">
               <a:rPr lang="de-DE" smtClean="0"/>
-              <a:t>18.05.26</a:t>
+              <a:t>24.05.26</a:t>
             </a:fld>
             <a:endParaRPr lang="de-DE"/>
           </a:p>
@@ -3137,7 +3166,7 @@
           <a:p>
             <a:fld id="{43497422-92ED-3D47-BF28-17000E80E497}" type="datetimeFigureOut">
               <a:rPr lang="de-DE" smtClean="0"/>
-              <a:t>18.05.26</a:t>
+              <a:t>24.05.26</a:t>
             </a:fld>
             <a:endParaRPr lang="de-DE"/>
           </a:p>
@@ -3425,7 +3454,7 @@
           <a:p>
             <a:fld id="{43497422-92ED-3D47-BF28-17000E80E497}" type="datetimeFigureOut">
               <a:rPr lang="de-DE" smtClean="0"/>
-              <a:t>18.05.26</a:t>
+              <a:t>24.05.26</a:t>
             </a:fld>
             <a:endParaRPr lang="de-DE"/>
           </a:p>
@@ -3666,7 +3695,7 @@
           <a:p>
             <a:fld id="{43497422-92ED-3D47-BF28-17000E80E497}" type="datetimeFigureOut">
               <a:rPr lang="de-DE" smtClean="0"/>
-              <a:t>18.05.26</a:t>
+              <a:t>24.05.26</a:t>
             </a:fld>
             <a:endParaRPr lang="de-DE"/>
           </a:p>
@@ -4888,8 +4917,8 @@
             </p:sp>
           </mc:Fallback>
         </mc:AlternateContent>
-        <mc:AlternateContent xmlns:mc="http://schemas.openxmlformats.org/markup-compatibility/2006">
-          <mc:Choice xmlns:a14="http://schemas.microsoft.com/office/drawing/2010/main" Requires="a14">
+        <mc:AlternateContent xmlns:mc="http://schemas.openxmlformats.org/markup-compatibility/2006" xmlns:a14="http://schemas.microsoft.com/office/drawing/2010/main">
+          <mc:Choice Requires="a14">
             <p:sp>
               <p:nvSpPr>
                 <p:cNvPr id="7" name="Textfeld 6">
@@ -5103,7 +5132,7 @@
               </p:txBody>
             </p:sp>
           </mc:Choice>
-          <mc:Fallback>
+          <mc:Fallback xmlns="">
             <p:sp>
               <p:nvSpPr>
                 <p:cNvPr id="7" name="Textfeld 6">
@@ -5642,8 +5671,8 @@
             </p:sp>
           </mc:Fallback>
         </mc:AlternateContent>
-        <mc:AlternateContent xmlns:mc="http://schemas.openxmlformats.org/markup-compatibility/2006">
-          <mc:Choice xmlns:a14="http://schemas.microsoft.com/office/drawing/2010/main" Requires="a14">
+        <mc:AlternateContent xmlns:mc="http://schemas.openxmlformats.org/markup-compatibility/2006" xmlns:a14="http://schemas.microsoft.com/office/drawing/2010/main">
+          <mc:Choice Requires="a14">
             <p:sp>
               <p:nvSpPr>
                 <p:cNvPr id="5" name="Textfeld 4">
@@ -5834,7 +5863,7 @@
               </p:txBody>
             </p:sp>
           </mc:Choice>
-          <mc:Fallback>
+          <mc:Fallback xmlns="">
             <p:sp>
               <p:nvSpPr>
                 <p:cNvPr id="5" name="Textfeld 4">
@@ -7107,8 +7136,8 @@
               </a:p>
             </p:txBody>
           </p:sp>
-          <mc:AlternateContent xmlns:mc="http://schemas.openxmlformats.org/markup-compatibility/2006">
-            <mc:Choice xmlns:a14="http://schemas.microsoft.com/office/drawing/2010/main" Requires="a14">
+          <mc:AlternateContent xmlns:mc="http://schemas.openxmlformats.org/markup-compatibility/2006" xmlns:a14="http://schemas.microsoft.com/office/drawing/2010/main">
+            <mc:Choice Requires="a14">
               <p:sp>
                 <p:nvSpPr>
                   <p:cNvPr id="7" name="Textfeld 6">
@@ -7304,7 +7333,7 @@
                 </p:txBody>
               </p:sp>
             </mc:Choice>
-            <mc:Fallback>
+            <mc:Fallback xmlns="">
               <p:sp>
                 <p:nvSpPr>
                   <p:cNvPr id="7" name="Textfeld 6">
@@ -7589,8 +7618,8 @@
               </a:p>
             </p:txBody>
           </p:sp>
-          <mc:AlternateContent xmlns:mc="http://schemas.openxmlformats.org/markup-compatibility/2006">
-            <mc:Choice xmlns:a14="http://schemas.microsoft.com/office/drawing/2010/main" Requires="a14">
+          <mc:AlternateContent xmlns:mc="http://schemas.openxmlformats.org/markup-compatibility/2006" xmlns:a14="http://schemas.microsoft.com/office/drawing/2010/main">
+            <mc:Choice Requires="a14">
               <p:sp>
                 <p:nvSpPr>
                   <p:cNvPr id="5" name="Textfeld 4">
@@ -7781,7 +7810,7 @@
                 </p:txBody>
               </p:sp>
             </mc:Choice>
-            <mc:Fallback>
+            <mc:Fallback xmlns="">
               <p:sp>
                 <p:nvSpPr>
                   <p:cNvPr id="5" name="Textfeld 4">
@@ -7964,8 +7993,8 @@
               </a:fontRef>
             </p:style>
           </p:cxnSp>
-          <mc:AlternateContent xmlns:mc="http://schemas.openxmlformats.org/markup-compatibility/2006">
-            <mc:Choice xmlns:a14="http://schemas.microsoft.com/office/drawing/2010/main" Requires="a14">
+          <mc:AlternateContent xmlns:mc="http://schemas.openxmlformats.org/markup-compatibility/2006" xmlns:a14="http://schemas.microsoft.com/office/drawing/2010/main">
+            <mc:Choice Requires="a14">
               <p:sp>
                 <p:nvSpPr>
                   <p:cNvPr id="11" name="Textfeld 10">
@@ -8198,7 +8227,7 @@
                 </p:txBody>
               </p:sp>
             </mc:Choice>
-            <mc:Fallback>
+            <mc:Fallback xmlns="">
               <p:sp>
                 <p:nvSpPr>
                   <p:cNvPr id="11" name="Textfeld 10">
@@ -9277,8 +9306,8 @@
             </a:p>
           </p:txBody>
         </p:sp>
-        <mc:AlternateContent xmlns:mc="http://schemas.openxmlformats.org/markup-compatibility/2006">
-          <mc:Choice xmlns:a14="http://schemas.microsoft.com/office/drawing/2010/main" Requires="a14">
+        <mc:AlternateContent xmlns:mc="http://schemas.openxmlformats.org/markup-compatibility/2006" xmlns:a14="http://schemas.microsoft.com/office/drawing/2010/main">
+          <mc:Choice Requires="a14">
             <p:sp>
               <p:nvSpPr>
                 <p:cNvPr id="6" name="Textfeld 5">
@@ -9642,7 +9671,7 @@
               </p:txBody>
             </p:sp>
           </mc:Choice>
-          <mc:Fallback>
+          <mc:Fallback xmlns="">
             <p:sp>
               <p:nvSpPr>
                 <p:cNvPr id="6" name="Textfeld 5">
@@ -10107,8 +10136,8 @@
             </a:p>
           </p:txBody>
         </p:sp>
-        <mc:AlternateContent xmlns:mc="http://schemas.openxmlformats.org/markup-compatibility/2006">
-          <mc:Choice xmlns:a14="http://schemas.microsoft.com/office/drawing/2010/main" Requires="a14">
+        <mc:AlternateContent xmlns:mc="http://schemas.openxmlformats.org/markup-compatibility/2006" xmlns:a14="http://schemas.microsoft.com/office/drawing/2010/main">
+          <mc:Choice Requires="a14">
             <p:sp>
               <p:nvSpPr>
                 <p:cNvPr id="9" name="Textfeld 8">
@@ -10420,7 +10449,7 @@
               </p:txBody>
             </p:sp>
           </mc:Choice>
-          <mc:Fallback>
+          <mc:Fallback xmlns="">
             <p:sp>
               <p:nvSpPr>
                 <p:cNvPr id="9" name="Textfeld 8">
@@ -10611,8 +10640,8 @@
             </a:p>
           </p:txBody>
         </p:sp>
-        <mc:AlternateContent xmlns:mc="http://schemas.openxmlformats.org/markup-compatibility/2006">
-          <mc:Choice xmlns:a14="http://schemas.microsoft.com/office/drawing/2010/main" Requires="a14">
+        <mc:AlternateContent xmlns:mc="http://schemas.openxmlformats.org/markup-compatibility/2006" xmlns:a14="http://schemas.microsoft.com/office/drawing/2010/main">
+          <mc:Choice Requires="a14">
             <p:sp>
               <p:nvSpPr>
                 <p:cNvPr id="7" name="Textfeld 6">
@@ -10966,7 +10995,7 @@
               </p:txBody>
             </p:sp>
           </mc:Choice>
-          <mc:Fallback>
+          <mc:Fallback xmlns="">
             <p:sp>
               <p:nvSpPr>
                 <p:cNvPr id="7" name="Textfeld 6">
@@ -11429,8 +11458,8 @@
             </a:p>
           </p:txBody>
         </p:sp>
-        <mc:AlternateContent xmlns:mc="http://schemas.openxmlformats.org/markup-compatibility/2006">
-          <mc:Choice xmlns:a14="http://schemas.microsoft.com/office/drawing/2010/main" Requires="a14">
+        <mc:AlternateContent xmlns:mc="http://schemas.openxmlformats.org/markup-compatibility/2006" xmlns:a14="http://schemas.microsoft.com/office/drawing/2010/main">
+          <mc:Choice Requires="a14">
             <p:sp>
               <p:nvSpPr>
                 <p:cNvPr id="5" name="Textfeld 4">
@@ -11822,7 +11851,7 @@
               </p:txBody>
             </p:sp>
           </mc:Choice>
-          <mc:Fallback>
+          <mc:Fallback xmlns="">
             <p:sp>
               <p:nvSpPr>
                 <p:cNvPr id="5" name="Textfeld 4">
@@ -12005,8 +12034,8 @@
             </a:fontRef>
           </p:style>
         </p:cxnSp>
-        <mc:AlternateContent xmlns:mc="http://schemas.openxmlformats.org/markup-compatibility/2006">
-          <mc:Choice xmlns:a14="http://schemas.microsoft.com/office/drawing/2010/main" Requires="a14">
+        <mc:AlternateContent xmlns:mc="http://schemas.openxmlformats.org/markup-compatibility/2006" xmlns:a14="http://schemas.microsoft.com/office/drawing/2010/main">
+          <mc:Choice Requires="a14">
             <p:sp>
               <p:nvSpPr>
                 <p:cNvPr id="11" name="Textfeld 10">
@@ -12429,7 +12458,7 @@
               </p:txBody>
             </p:sp>
           </mc:Choice>
-          <mc:Fallback>
+          <mc:Fallback xmlns="">
             <p:sp>
               <p:nvSpPr>
                 <p:cNvPr id="11" name="Textfeld 10">

--- a/vignettes/figures/overview.pptx
+++ b/vignettes/figures/overview.pptx
@@ -143,7 +143,7 @@
   <pc:docChgLst>
     <pc:chgData name="Schilling Sabine HSLU W" userId="b0e2af5c-9187-4900-883a-c96514cd8e15" providerId="ADAL" clId="{5E51067F-94D7-505D-9735-0698788361AC}"/>
     <pc:docChg chg="undo custSel addSld modSld">
-      <pc:chgData name="Schilling Sabine HSLU W" userId="b0e2af5c-9187-4900-883a-c96514cd8e15" providerId="ADAL" clId="{5E51067F-94D7-505D-9735-0698788361AC}" dt="2026-05-27T09:59:00.491" v="662" actId="20577"/>
+      <pc:chgData name="Schilling Sabine HSLU W" userId="b0e2af5c-9187-4900-883a-c96514cd8e15" providerId="ADAL" clId="{5E51067F-94D7-505D-9735-0698788361AC}" dt="2026-05-27T10:33:16.575" v="664" actId="1076"/>
       <pc:docMkLst>
         <pc:docMk/>
       </pc:docMkLst>
@@ -290,7 +290,7 @@
         </pc:cxnChg>
       </pc:sldChg>
       <pc:sldChg chg="addSp delSp modSp add mod">
-        <pc:chgData name="Schilling Sabine HSLU W" userId="b0e2af5c-9187-4900-883a-c96514cd8e15" providerId="ADAL" clId="{5E51067F-94D7-505D-9735-0698788361AC}" dt="2026-05-27T09:59:00.491" v="662" actId="20577"/>
+        <pc:chgData name="Schilling Sabine HSLU W" userId="b0e2af5c-9187-4900-883a-c96514cd8e15" providerId="ADAL" clId="{5E51067F-94D7-505D-9735-0698788361AC}" dt="2026-05-27T10:33:16.575" v="664" actId="1076"/>
         <pc:sldMkLst>
           <pc:docMk/>
           <pc:sldMk cId="4104955013" sldId="277"/>
@@ -320,7 +320,7 @@
           </ac:spMkLst>
         </pc:spChg>
         <pc:spChg chg="mod topLvl">
-          <ac:chgData name="Schilling Sabine HSLU W" userId="b0e2af5c-9187-4900-883a-c96514cd8e15" providerId="ADAL" clId="{5E51067F-94D7-505D-9735-0698788361AC}" dt="2026-05-27T09:57:47.234" v="628" actId="164"/>
+          <ac:chgData name="Schilling Sabine HSLU W" userId="b0e2af5c-9187-4900-883a-c96514cd8e15" providerId="ADAL" clId="{5E51067F-94D7-505D-9735-0698788361AC}" dt="2026-05-27T10:33:16.575" v="664" actId="1076"/>
           <ac:spMkLst>
             <pc:docMk/>
             <pc:sldMk cId="4104955013" sldId="277"/>
@@ -456,7 +456,7 @@
           </ac:cxnSpMkLst>
         </pc:cxnChg>
         <pc:cxnChg chg="add mod">
-          <ac:chgData name="Schilling Sabine HSLU W" userId="b0e2af5c-9187-4900-883a-c96514cd8e15" providerId="ADAL" clId="{5E51067F-94D7-505D-9735-0698788361AC}" dt="2026-05-27T09:50:31.531" v="586" actId="14100"/>
+          <ac:chgData name="Schilling Sabine HSLU W" userId="b0e2af5c-9187-4900-883a-c96514cd8e15" providerId="ADAL" clId="{5E51067F-94D7-505D-9735-0698788361AC}" dt="2026-05-27T10:33:16.575" v="664" actId="1076"/>
           <ac:cxnSpMkLst>
             <pc:docMk/>
             <pc:sldMk cId="4104955013" sldId="277"/>
@@ -536,7 +536,7 @@
           </ac:cxnSpMkLst>
         </pc:cxnChg>
         <pc:cxnChg chg="mod">
-          <ac:chgData name="Schilling Sabine HSLU W" userId="b0e2af5c-9187-4900-883a-c96514cd8e15" providerId="ADAL" clId="{5E51067F-94D7-505D-9735-0698788361AC}" dt="2026-05-27T07:48:50.895" v="138" actId="14100"/>
+          <ac:chgData name="Schilling Sabine HSLU W" userId="b0e2af5c-9187-4900-883a-c96514cd8e15" providerId="ADAL" clId="{5E51067F-94D7-505D-9735-0698788361AC}" dt="2026-05-27T10:33:16.575" v="664" actId="1076"/>
           <ac:cxnSpMkLst>
             <pc:docMk/>
             <pc:sldMk cId="4104955013" sldId="277"/>
@@ -22605,7 +22605,7 @@
               </p:nvSpPr>
               <p:spPr>
                 <a:xfrm>
-                  <a:off x="949683" y="2768464"/>
+                  <a:off x="953222" y="2795702"/>
                   <a:ext cx="4320000" cy="830997"/>
                 </a:xfrm>
                 <a:prstGeom prst="rect">
@@ -23029,7 +23029,7 @@
               </p:nvSpPr>
               <p:spPr>
                 <a:xfrm>
-                  <a:off x="949683" y="2768464"/>
+                  <a:off x="953222" y="2795702"/>
                   <a:ext cx="4320000" cy="830997"/>
                 </a:xfrm>
                 <a:prstGeom prst="rect">
@@ -23038,7 +23038,7 @@
                 <a:blipFill>
                   <a:blip r:embed="rId7"/>
                   <a:stretch>
-                    <a:fillRect b="-5970"/>
+                    <a:fillRect b="-2941"/>
                   </a:stretch>
                 </a:blipFill>
                 <a:ln w="12700">
@@ -23474,7 +23474,7 @@
           </p:nvCxnSpPr>
           <p:spPr>
             <a:xfrm flipV="1">
-              <a:off x="5269683" y="2537460"/>
+              <a:off x="5273222" y="2564698"/>
               <a:ext cx="499947" cy="646503"/>
             </a:xfrm>
             <a:prstGeom prst="straightConnector1">
@@ -23851,7 +23851,7 @@
           </p:nvCxnSpPr>
           <p:spPr>
             <a:xfrm>
-              <a:off x="3109683" y="3599461"/>
+              <a:off x="3113222" y="3626699"/>
               <a:ext cx="314" cy="282809"/>
             </a:xfrm>
             <a:prstGeom prst="straightConnector1">
@@ -23996,29 +23996,7 @@
                   <a:ea typeface="Cambria Math" panose="02040503050406030204" pitchFamily="18" charset="0"/>
                   <a:cs typeface="Calibri" panose="020F0502020204030204" pitchFamily="34" charset="0"/>
                 </a:rPr>
-                <a:t>o</a:t>
-              </a:r>
-              <a:r>
-                <a:rPr lang="en-GB" sz="1200">
-                  <a:solidFill>
-                    <a:prstClr val="black"/>
-                  </a:solidFill>
-                  <a:latin typeface="Calibri" panose="020F0502020204030204" pitchFamily="34" charset="0"/>
-                  <a:ea typeface="Cambria Math" panose="02040503050406030204" pitchFamily="18" charset="0"/>
-                  <a:cs typeface="Calibri" panose="020F0502020204030204" pitchFamily="34" charset="0"/>
-                </a:rPr>
-                <a:t>ptional </a:t>
-              </a:r>
-              <a:r>
-                <a:rPr lang="en-GB" sz="1200" dirty="0">
-                  <a:solidFill>
-                    <a:prstClr val="black"/>
-                  </a:solidFill>
-                  <a:latin typeface="Calibri" panose="020F0502020204030204" pitchFamily="34" charset="0"/>
-                  <a:ea typeface="Cambria Math" panose="02040503050406030204" pitchFamily="18" charset="0"/>
-                  <a:cs typeface="Calibri" panose="020F0502020204030204" pitchFamily="34" charset="0"/>
-                </a:rPr>
-                <a:t>rank correlation only selected, when </a:t>
+                <a:t>optional rank correlation only selected, when </a:t>
               </a:r>
               <a:r>
                 <a:rPr lang="en-GB" sz="1200" dirty="0">

--- a/vignettes/figures/overview.pptx
+++ b/vignettes/figures/overview.pptx
@@ -143,192 +143,18 @@
   <pc:docChgLst>
     <pc:chgData name="Schilling Sabine HSLU W" userId="b0e2af5c-9187-4900-883a-c96514cd8e15" providerId="ADAL" clId="{5E51067F-94D7-505D-9735-0698788361AC}"/>
     <pc:docChg chg="undo custSel addSld modSld">
-      <pc:chgData name="Schilling Sabine HSLU W" userId="b0e2af5c-9187-4900-883a-c96514cd8e15" providerId="ADAL" clId="{5E51067F-94D7-505D-9735-0698788361AC}" dt="2026-05-27T10:33:16.575" v="664" actId="1076"/>
+      <pc:chgData name="Schilling Sabine HSLU W" userId="b0e2af5c-9187-4900-883a-c96514cd8e15" providerId="ADAL" clId="{5E51067F-94D7-505D-9735-0698788361AC}" dt="2026-07-29T14:08:24.743" v="719" actId="20577"/>
       <pc:docMkLst>
         <pc:docMk/>
       </pc:docMkLst>
-      <pc:sldChg chg="addSp delSp modSp mod">
-        <pc:chgData name="Schilling Sabine HSLU W" userId="b0e2af5c-9187-4900-883a-c96514cd8e15" providerId="ADAL" clId="{5E51067F-94D7-505D-9735-0698788361AC}" dt="2026-05-26T22:08:55.372" v="4" actId="1076"/>
-        <pc:sldMkLst>
-          <pc:docMk/>
-          <pc:sldMk cId="2052569025" sldId="275"/>
-        </pc:sldMkLst>
-        <pc:grpChg chg="mod">
-          <ac:chgData name="Schilling Sabine HSLU W" userId="b0e2af5c-9187-4900-883a-c96514cd8e15" providerId="ADAL" clId="{5E51067F-94D7-505D-9735-0698788361AC}" dt="2026-05-26T22:08:55.372" v="4" actId="1076"/>
-          <ac:grpSpMkLst>
-            <pc:docMk/>
-            <pc:sldMk cId="2052569025" sldId="275"/>
-            <ac:grpSpMk id="25" creationId="{6D2399E9-90CC-6575-FAB8-005DA7317D93}"/>
-          </ac:grpSpMkLst>
-        </pc:grpChg>
-      </pc:sldChg>
-      <pc:sldChg chg="delSp modSp add mod">
-        <pc:chgData name="Schilling Sabine HSLU W" userId="b0e2af5c-9187-4900-883a-c96514cd8e15" providerId="ADAL" clId="{5E51067F-94D7-505D-9735-0698788361AC}" dt="2026-05-26T22:10:15.016" v="14" actId="14100"/>
-        <pc:sldMkLst>
-          <pc:docMk/>
-          <pc:sldMk cId="3563293283" sldId="276"/>
-        </pc:sldMkLst>
-        <pc:spChg chg="mod topLvl">
-          <ac:chgData name="Schilling Sabine HSLU W" userId="b0e2af5c-9187-4900-883a-c96514cd8e15" providerId="ADAL" clId="{5E51067F-94D7-505D-9735-0698788361AC}" dt="2026-05-26T22:09:24.629" v="9" actId="165"/>
-          <ac:spMkLst>
-            <pc:docMk/>
-            <pc:sldMk cId="3563293283" sldId="276"/>
-            <ac:spMk id="5" creationId="{D3F7C956-8F5E-CDF5-8717-BC4225E2BD16}"/>
-          </ac:spMkLst>
-        </pc:spChg>
-        <pc:spChg chg="mod topLvl">
-          <ac:chgData name="Schilling Sabine HSLU W" userId="b0e2af5c-9187-4900-883a-c96514cd8e15" providerId="ADAL" clId="{5E51067F-94D7-505D-9735-0698788361AC}" dt="2026-05-26T22:09:24.629" v="9" actId="165"/>
-          <ac:spMkLst>
-            <pc:docMk/>
-            <pc:sldMk cId="3563293283" sldId="276"/>
-            <ac:spMk id="6" creationId="{FDBCDD21-5E7C-DD03-71F6-FE950FBF3D4B}"/>
-          </ac:spMkLst>
-        </pc:spChg>
-        <pc:spChg chg="mod topLvl">
-          <ac:chgData name="Schilling Sabine HSLU W" userId="b0e2af5c-9187-4900-883a-c96514cd8e15" providerId="ADAL" clId="{5E51067F-94D7-505D-9735-0698788361AC}" dt="2026-05-26T22:09:24.629" v="9" actId="165"/>
-          <ac:spMkLst>
-            <pc:docMk/>
-            <pc:sldMk cId="3563293283" sldId="276"/>
-            <ac:spMk id="7" creationId="{DC4F1ADB-3849-F97C-D5E4-1BDD84C84D99}"/>
-          </ac:spMkLst>
-        </pc:spChg>
-        <pc:spChg chg="mod">
-          <ac:chgData name="Schilling Sabine HSLU W" userId="b0e2af5c-9187-4900-883a-c96514cd8e15" providerId="ADAL" clId="{5E51067F-94D7-505D-9735-0698788361AC}" dt="2026-05-26T22:09:55.840" v="12" actId="1076"/>
-          <ac:spMkLst>
-            <pc:docMk/>
-            <pc:sldMk cId="3563293283" sldId="276"/>
-            <ac:spMk id="11" creationId="{53E70E5B-5D7E-11CD-AEA9-677270387610}"/>
-          </ac:spMkLst>
-        </pc:spChg>
-        <pc:spChg chg="mod topLvl">
-          <ac:chgData name="Schilling Sabine HSLU W" userId="b0e2af5c-9187-4900-883a-c96514cd8e15" providerId="ADAL" clId="{5E51067F-94D7-505D-9735-0698788361AC}" dt="2026-05-26T22:09:24.629" v="9" actId="165"/>
-          <ac:spMkLst>
-            <pc:docMk/>
-            <pc:sldMk cId="3563293283" sldId="276"/>
-            <ac:spMk id="13" creationId="{710EF68B-67E5-4BFC-5A85-E08DE99B6B1D}"/>
-          </ac:spMkLst>
-        </pc:spChg>
-        <pc:spChg chg="mod topLvl">
-          <ac:chgData name="Schilling Sabine HSLU W" userId="b0e2af5c-9187-4900-883a-c96514cd8e15" providerId="ADAL" clId="{5E51067F-94D7-505D-9735-0698788361AC}" dt="2026-05-26T22:09:24.629" v="9" actId="165"/>
-          <ac:spMkLst>
-            <pc:docMk/>
-            <pc:sldMk cId="3563293283" sldId="276"/>
-            <ac:spMk id="14" creationId="{C79D8F29-37CF-8A09-3E23-59F2C947AD8C}"/>
-          </ac:spMkLst>
-        </pc:spChg>
-        <pc:spChg chg="mod topLvl">
-          <ac:chgData name="Schilling Sabine HSLU W" userId="b0e2af5c-9187-4900-883a-c96514cd8e15" providerId="ADAL" clId="{5E51067F-94D7-505D-9735-0698788361AC}" dt="2026-05-26T22:09:24.629" v="9" actId="165"/>
-          <ac:spMkLst>
-            <pc:docMk/>
-            <pc:sldMk cId="3563293283" sldId="276"/>
-            <ac:spMk id="18" creationId="{DEBFA8A2-6148-8711-FC2D-E3D98A562A7F}"/>
-          </ac:spMkLst>
-        </pc:spChg>
-        <pc:spChg chg="mod topLvl">
-          <ac:chgData name="Schilling Sabine HSLU W" userId="b0e2af5c-9187-4900-883a-c96514cd8e15" providerId="ADAL" clId="{5E51067F-94D7-505D-9735-0698788361AC}" dt="2026-05-26T22:09:24.629" v="9" actId="165"/>
-          <ac:spMkLst>
-            <pc:docMk/>
-            <pc:sldMk cId="3563293283" sldId="276"/>
-            <ac:spMk id="19" creationId="{6009A253-3506-714D-84D3-B2F4E3729A02}"/>
-          </ac:spMkLst>
-        </pc:spChg>
-        <pc:spChg chg="mod">
-          <ac:chgData name="Schilling Sabine HSLU W" userId="b0e2af5c-9187-4900-883a-c96514cd8e15" providerId="ADAL" clId="{5E51067F-94D7-505D-9735-0698788361AC}" dt="2026-05-26T22:10:02.175" v="13" actId="14100"/>
-          <ac:spMkLst>
-            <pc:docMk/>
-            <pc:sldMk cId="3563293283" sldId="276"/>
-            <ac:spMk id="20" creationId="{1B8A15B1-AA6D-2AB4-E25F-39B7ECC45099}"/>
-          </ac:spMkLst>
-        </pc:spChg>
-        <pc:spChg chg="mod">
-          <ac:chgData name="Schilling Sabine HSLU W" userId="b0e2af5c-9187-4900-883a-c96514cd8e15" providerId="ADAL" clId="{5E51067F-94D7-505D-9735-0698788361AC}" dt="2026-05-26T22:10:15.016" v="14" actId="14100"/>
-          <ac:spMkLst>
-            <pc:docMk/>
-            <pc:sldMk cId="3563293283" sldId="276"/>
-            <ac:spMk id="21" creationId="{664DBA35-A76B-7D64-A723-336435614C2D}"/>
-          </ac:spMkLst>
-        </pc:spChg>
-        <pc:spChg chg="mod topLvl">
-          <ac:chgData name="Schilling Sabine HSLU W" userId="b0e2af5c-9187-4900-883a-c96514cd8e15" providerId="ADAL" clId="{5E51067F-94D7-505D-9735-0698788361AC}" dt="2026-05-26T22:09:24.629" v="9" actId="165"/>
-          <ac:spMkLst>
-            <pc:docMk/>
-            <pc:sldMk cId="3563293283" sldId="276"/>
-            <ac:spMk id="22" creationId="{0832A3B2-F2C4-4CBB-8ED8-467E430EE142}"/>
-          </ac:spMkLst>
-        </pc:spChg>
-        <pc:spChg chg="mod topLvl">
-          <ac:chgData name="Schilling Sabine HSLU W" userId="b0e2af5c-9187-4900-883a-c96514cd8e15" providerId="ADAL" clId="{5E51067F-94D7-505D-9735-0698788361AC}" dt="2026-05-26T22:09:24.629" v="9" actId="165"/>
-          <ac:spMkLst>
-            <pc:docMk/>
-            <pc:sldMk cId="3563293283" sldId="276"/>
-            <ac:spMk id="36" creationId="{7C390E17-FD0A-6B27-751A-9D2588AE4AE9}"/>
-          </ac:spMkLst>
-        </pc:spChg>
-        <pc:spChg chg="mod topLvl">
-          <ac:chgData name="Schilling Sabine HSLU W" userId="b0e2af5c-9187-4900-883a-c96514cd8e15" providerId="ADAL" clId="{5E51067F-94D7-505D-9735-0698788361AC}" dt="2026-05-26T22:09:24.629" v="9" actId="165"/>
-          <ac:spMkLst>
-            <pc:docMk/>
-            <pc:sldMk cId="3563293283" sldId="276"/>
-            <ac:spMk id="40" creationId="{91080484-AE9B-04AE-0E84-129F6D2000F3}"/>
-          </ac:spMkLst>
-        </pc:spChg>
-        <pc:grpChg chg="mod">
-          <ac:chgData name="Schilling Sabine HSLU W" userId="b0e2af5c-9187-4900-883a-c96514cd8e15" providerId="ADAL" clId="{5E51067F-94D7-505D-9735-0698788361AC}" dt="2026-05-26T22:09:00.156" v="6" actId="1076"/>
-          <ac:grpSpMkLst>
-            <pc:docMk/>
-            <pc:sldMk cId="3563293283" sldId="276"/>
-            <ac:grpSpMk id="25" creationId="{DF37A4A9-C156-EBDB-F07B-50EE46062941}"/>
-          </ac:grpSpMkLst>
-        </pc:grpChg>
-        <pc:cxnChg chg="mod">
-          <ac:chgData name="Schilling Sabine HSLU W" userId="b0e2af5c-9187-4900-883a-c96514cd8e15" providerId="ADAL" clId="{5E51067F-94D7-505D-9735-0698788361AC}" dt="2026-05-26T22:09:55.840" v="12" actId="1076"/>
-          <ac:cxnSpMkLst>
-            <pc:docMk/>
-            <pc:sldMk cId="3563293283" sldId="276"/>
-            <ac:cxnSpMk id="86" creationId="{9EF62D55-372B-20C3-ABB9-9A7DEC43A514}"/>
-          </ac:cxnSpMkLst>
-        </pc:cxnChg>
-      </pc:sldChg>
       <pc:sldChg chg="addSp delSp modSp add mod">
-        <pc:chgData name="Schilling Sabine HSLU W" userId="b0e2af5c-9187-4900-883a-c96514cd8e15" providerId="ADAL" clId="{5E51067F-94D7-505D-9735-0698788361AC}" dt="2026-05-27T10:33:16.575" v="664" actId="1076"/>
+        <pc:chgData name="Schilling Sabine HSLU W" userId="b0e2af5c-9187-4900-883a-c96514cd8e15" providerId="ADAL" clId="{5E51067F-94D7-505D-9735-0698788361AC}" dt="2026-07-29T14:08:24.743" v="719" actId="20577"/>
         <pc:sldMkLst>
           <pc:docMk/>
           <pc:sldMk cId="4104955013" sldId="277"/>
         </pc:sldMkLst>
         <pc:spChg chg="mod topLvl">
-          <ac:chgData name="Schilling Sabine HSLU W" userId="b0e2af5c-9187-4900-883a-c96514cd8e15" providerId="ADAL" clId="{5E51067F-94D7-505D-9735-0698788361AC}" dt="2026-05-27T09:57:47.234" v="628" actId="164"/>
-          <ac:spMkLst>
-            <pc:docMk/>
-            <pc:sldMk cId="4104955013" sldId="277"/>
-            <ac:spMk id="5" creationId="{C8E8BD9F-432B-56EC-0F4D-ADF784F9E170}"/>
-          </ac:spMkLst>
-        </pc:spChg>
-        <pc:spChg chg="mod">
-          <ac:chgData name="Schilling Sabine HSLU W" userId="b0e2af5c-9187-4900-883a-c96514cd8e15" providerId="ADAL" clId="{5E51067F-94D7-505D-9735-0698788361AC}" dt="2026-05-27T07:57:19.145" v="163" actId="1036"/>
-          <ac:spMkLst>
-            <pc:docMk/>
-            <pc:sldMk cId="4104955013" sldId="277"/>
-            <ac:spMk id="8" creationId="{A41CC212-A60C-208D-35F3-B8CCC6937DA8}"/>
-          </ac:spMkLst>
-        </pc:spChg>
-        <pc:spChg chg="mod topLvl">
-          <ac:chgData name="Schilling Sabine HSLU W" userId="b0e2af5c-9187-4900-883a-c96514cd8e15" providerId="ADAL" clId="{5E51067F-94D7-505D-9735-0698788361AC}" dt="2026-05-27T09:57:47.234" v="628" actId="164"/>
-          <ac:spMkLst>
-            <pc:docMk/>
-            <pc:sldMk cId="4104955013" sldId="277"/>
-            <ac:spMk id="9" creationId="{DBF75D4E-8825-BAD0-B381-10669B6A6F6B}"/>
-          </ac:spMkLst>
-        </pc:spChg>
-        <pc:spChg chg="mod topLvl">
-          <ac:chgData name="Schilling Sabine HSLU W" userId="b0e2af5c-9187-4900-883a-c96514cd8e15" providerId="ADAL" clId="{5E51067F-94D7-505D-9735-0698788361AC}" dt="2026-05-27T10:33:16.575" v="664" actId="1076"/>
-          <ac:spMkLst>
-            <pc:docMk/>
-            <pc:sldMk cId="4104955013" sldId="277"/>
-            <ac:spMk id="11" creationId="{8B475B6F-280F-4A35-03D0-41F0DFCA83F3}"/>
-          </ac:spMkLst>
-        </pc:spChg>
-        <pc:spChg chg="mod topLvl">
-          <ac:chgData name="Schilling Sabine HSLU W" userId="b0e2af5c-9187-4900-883a-c96514cd8e15" providerId="ADAL" clId="{5E51067F-94D7-505D-9735-0698788361AC}" dt="2026-05-27T09:57:47.234" v="628" actId="164"/>
+          <ac:chgData name="Schilling Sabine HSLU W" userId="b0e2af5c-9187-4900-883a-c96514cd8e15" providerId="ADAL" clId="{5E51067F-94D7-505D-9735-0698788361AC}" dt="2026-07-29T14:08:04.854" v="694" actId="20577"/>
           <ac:spMkLst>
             <pc:docMk/>
             <pc:sldMk cId="4104955013" sldId="277"/>
@@ -336,213 +162,13 @@
           </ac:spMkLst>
         </pc:spChg>
         <pc:spChg chg="mod">
-          <ac:chgData name="Schilling Sabine HSLU W" userId="b0e2af5c-9187-4900-883a-c96514cd8e15" providerId="ADAL" clId="{5E51067F-94D7-505D-9735-0698788361AC}" dt="2026-05-27T07:57:19.145" v="163" actId="1036"/>
-          <ac:spMkLst>
-            <pc:docMk/>
-            <pc:sldMk cId="4104955013" sldId="277"/>
-            <ac:spMk id="14" creationId="{2C28BFF0-B44A-540A-EC8D-6ED47BC96645}"/>
-          </ac:spMkLst>
-        </pc:spChg>
-        <pc:spChg chg="mod">
-          <ac:chgData name="Schilling Sabine HSLU W" userId="b0e2af5c-9187-4900-883a-c96514cd8e15" providerId="ADAL" clId="{5E51067F-94D7-505D-9735-0698788361AC}" dt="2026-05-27T09:51:30.122" v="591" actId="1076"/>
-          <ac:spMkLst>
-            <pc:docMk/>
-            <pc:sldMk cId="4104955013" sldId="277"/>
-            <ac:spMk id="19" creationId="{EE5D0758-DB05-1B93-C5B7-12D45C0EFC6F}"/>
-          </ac:spMkLst>
-        </pc:spChg>
-        <pc:spChg chg="mod topLvl">
-          <ac:chgData name="Schilling Sabine HSLU W" userId="b0e2af5c-9187-4900-883a-c96514cd8e15" providerId="ADAL" clId="{5E51067F-94D7-505D-9735-0698788361AC}" dt="2026-05-27T09:57:47.234" v="628" actId="164"/>
-          <ac:spMkLst>
-            <pc:docMk/>
-            <pc:sldMk cId="4104955013" sldId="277"/>
-            <ac:spMk id="21" creationId="{DF982242-EE07-A86A-CA9A-1B6AA1385B0F}"/>
-          </ac:spMkLst>
-        </pc:spChg>
-        <pc:spChg chg="mod topLvl">
-          <ac:chgData name="Schilling Sabine HSLU W" userId="b0e2af5c-9187-4900-883a-c96514cd8e15" providerId="ADAL" clId="{5E51067F-94D7-505D-9735-0698788361AC}" dt="2026-05-27T09:57:47.234" v="628" actId="164"/>
-          <ac:spMkLst>
-            <pc:docMk/>
-            <pc:sldMk cId="4104955013" sldId="277"/>
-            <ac:spMk id="22" creationId="{741D0FB7-565E-2711-349C-C82EBF8E3119}"/>
-          </ac:spMkLst>
-        </pc:spChg>
-        <pc:spChg chg="mod topLvl">
-          <ac:chgData name="Schilling Sabine HSLU W" userId="b0e2af5c-9187-4900-883a-c96514cd8e15" providerId="ADAL" clId="{5E51067F-94D7-505D-9735-0698788361AC}" dt="2026-05-27T09:57:47.234" v="628" actId="164"/>
-          <ac:spMkLst>
-            <pc:docMk/>
-            <pc:sldMk cId="4104955013" sldId="277"/>
-            <ac:spMk id="36" creationId="{4023D75A-D702-3F81-09DC-F3A9FF42F9F6}"/>
-          </ac:spMkLst>
-        </pc:spChg>
-        <pc:spChg chg="add mod">
-          <ac:chgData name="Schilling Sabine HSLU W" userId="b0e2af5c-9187-4900-883a-c96514cd8e15" providerId="ADAL" clId="{5E51067F-94D7-505D-9735-0698788361AC}" dt="2026-05-27T09:59:00.491" v="662" actId="20577"/>
-          <ac:spMkLst>
-            <pc:docMk/>
-            <pc:sldMk cId="4104955013" sldId="277"/>
-            <ac:spMk id="38" creationId="{B898312C-6EC1-809B-E83F-E7B06D7D6F2D}"/>
-          </ac:spMkLst>
-        </pc:spChg>
-        <pc:spChg chg="mod">
-          <ac:chgData name="Schilling Sabine HSLU W" userId="b0e2af5c-9187-4900-883a-c96514cd8e15" providerId="ADAL" clId="{5E51067F-94D7-505D-9735-0698788361AC}" dt="2026-05-27T07:57:19.145" v="163" actId="1036"/>
+          <ac:chgData name="Schilling Sabine HSLU W" userId="b0e2af5c-9187-4900-883a-c96514cd8e15" providerId="ADAL" clId="{5E51067F-94D7-505D-9735-0698788361AC}" dt="2026-07-29T14:08:24.743" v="719" actId="20577"/>
           <ac:spMkLst>
             <pc:docMk/>
             <pc:sldMk cId="4104955013" sldId="277"/>
             <ac:spMk id="40" creationId="{6D7EF49C-93D7-2FE7-8F02-6FA7D39FC16F}"/>
           </ac:spMkLst>
         </pc:spChg>
-        <pc:spChg chg="add del mod">
-          <ac:chgData name="Schilling Sabine HSLU W" userId="b0e2af5c-9187-4900-883a-c96514cd8e15" providerId="ADAL" clId="{5E51067F-94D7-505D-9735-0698788361AC}" dt="2026-05-27T09:52:54.781" v="610" actId="478"/>
-          <ac:spMkLst>
-            <pc:docMk/>
-            <pc:sldMk cId="4104955013" sldId="277"/>
-            <ac:spMk id="54" creationId="{5077B2D8-C5FC-F168-4E13-5B206752E475}"/>
-          </ac:spMkLst>
-        </pc:spChg>
-        <pc:spChg chg="mod topLvl">
-          <ac:chgData name="Schilling Sabine HSLU W" userId="b0e2af5c-9187-4900-883a-c96514cd8e15" providerId="ADAL" clId="{5E51067F-94D7-505D-9735-0698788361AC}" dt="2026-05-27T09:57:47.234" v="628" actId="164"/>
-          <ac:spMkLst>
-            <pc:docMk/>
-            <pc:sldMk cId="4104955013" sldId="277"/>
-            <ac:spMk id="57" creationId="{06151A23-0BD4-4576-17CE-CAFC00C30807}"/>
-          </ac:spMkLst>
-        </pc:spChg>
-        <pc:spChg chg="mod topLvl">
-          <ac:chgData name="Schilling Sabine HSLU W" userId="b0e2af5c-9187-4900-883a-c96514cd8e15" providerId="ADAL" clId="{5E51067F-94D7-505D-9735-0698788361AC}" dt="2026-05-27T09:57:47.234" v="628" actId="164"/>
-          <ac:spMkLst>
-            <pc:docMk/>
-            <pc:sldMk cId="4104955013" sldId="277"/>
-            <ac:spMk id="68" creationId="{3855A362-3E56-A0C4-6001-BC6EFB57ECDC}"/>
-          </ac:spMkLst>
-        </pc:spChg>
-        <pc:spChg chg="mod topLvl">
-          <ac:chgData name="Schilling Sabine HSLU W" userId="b0e2af5c-9187-4900-883a-c96514cd8e15" providerId="ADAL" clId="{5E51067F-94D7-505D-9735-0698788361AC}" dt="2026-05-27T09:57:47.234" v="628" actId="164"/>
-          <ac:spMkLst>
-            <pc:docMk/>
-            <pc:sldMk cId="4104955013" sldId="277"/>
-            <ac:spMk id="85" creationId="{70B7903D-AF54-6C2B-EF89-945DC6A2CE63}"/>
-          </ac:spMkLst>
-        </pc:spChg>
-        <pc:grpChg chg="mod">
-          <ac:chgData name="Schilling Sabine HSLU W" userId="b0e2af5c-9187-4900-883a-c96514cd8e15" providerId="ADAL" clId="{5E51067F-94D7-505D-9735-0698788361AC}" dt="2026-05-26T22:38:43.763" v="96" actId="1076"/>
-          <ac:grpSpMkLst>
-            <pc:docMk/>
-            <pc:sldMk cId="4104955013" sldId="277"/>
-            <ac:grpSpMk id="2" creationId="{0FDC65F3-A80E-CAA5-E2B0-945AEED65F4A}"/>
-          </ac:grpSpMkLst>
-        </pc:grpChg>
-        <pc:cxnChg chg="add del mod">
-          <ac:chgData name="Schilling Sabine HSLU W" userId="b0e2af5c-9187-4900-883a-c96514cd8e15" providerId="ADAL" clId="{5E51067F-94D7-505D-9735-0698788361AC}" dt="2026-05-26T22:38:49.620" v="97" actId="478"/>
-          <ac:cxnSpMkLst>
-            <pc:docMk/>
-            <pc:sldMk cId="4104955013" sldId="277"/>
-            <ac:cxnSpMk id="3" creationId="{3BCA7BC5-A134-9B8E-F507-2AAA9B17D74C}"/>
-          </ac:cxnSpMkLst>
-        </pc:cxnChg>
-        <pc:cxnChg chg="del mod">
-          <ac:chgData name="Schilling Sabine HSLU W" userId="b0e2af5c-9187-4900-883a-c96514cd8e15" providerId="ADAL" clId="{5E51067F-94D7-505D-9735-0698788361AC}" dt="2026-05-27T09:49:16.697" v="579" actId="478"/>
-          <ac:cxnSpMkLst>
-            <pc:docMk/>
-            <pc:sldMk cId="4104955013" sldId="277"/>
-            <ac:cxnSpMk id="15" creationId="{CF35F69A-8AFF-AE26-A69B-A01B9BE51C76}"/>
-          </ac:cxnSpMkLst>
-        </pc:cxnChg>
-        <pc:cxnChg chg="add del mod">
-          <ac:chgData name="Schilling Sabine HSLU W" userId="b0e2af5c-9187-4900-883a-c96514cd8e15" providerId="ADAL" clId="{5E51067F-94D7-505D-9735-0698788361AC}" dt="2026-05-26T22:38:52.816" v="98" actId="478"/>
-          <ac:cxnSpMkLst>
-            <pc:docMk/>
-            <pc:sldMk cId="4104955013" sldId="277"/>
-            <ac:cxnSpMk id="23" creationId="{BBAD91D1-B146-DE2C-1705-CDFF56DCC999}"/>
-          </ac:cxnSpMkLst>
-        </pc:cxnChg>
-        <pc:cxnChg chg="add mod">
-          <ac:chgData name="Schilling Sabine HSLU W" userId="b0e2af5c-9187-4900-883a-c96514cd8e15" providerId="ADAL" clId="{5E51067F-94D7-505D-9735-0698788361AC}" dt="2026-05-27T10:33:16.575" v="664" actId="1076"/>
-          <ac:cxnSpMkLst>
-            <pc:docMk/>
-            <pc:sldMk cId="4104955013" sldId="277"/>
-            <ac:cxnSpMk id="26" creationId="{A44724E2-EA26-7801-C5CD-8E574D2F7F3B}"/>
-          </ac:cxnSpMkLst>
-        </pc:cxnChg>
-        <pc:cxnChg chg="add del mod">
-          <ac:chgData name="Schilling Sabine HSLU W" userId="b0e2af5c-9187-4900-883a-c96514cd8e15" providerId="ADAL" clId="{5E51067F-94D7-505D-9735-0698788361AC}" dt="2026-05-27T08:57:10.841" v="216" actId="478"/>
-          <ac:cxnSpMkLst>
-            <pc:docMk/>
-            <pc:sldMk cId="4104955013" sldId="277"/>
-            <ac:cxnSpMk id="33" creationId="{A394D471-4E87-9780-558D-887F2B3D5838}"/>
-          </ac:cxnSpMkLst>
-        </pc:cxnChg>
-        <pc:cxnChg chg="add mod">
-          <ac:chgData name="Schilling Sabine HSLU W" userId="b0e2af5c-9187-4900-883a-c96514cd8e15" providerId="ADAL" clId="{5E51067F-94D7-505D-9735-0698788361AC}" dt="2026-05-27T09:47:44.960" v="564" actId="1076"/>
-          <ac:cxnSpMkLst>
-            <pc:docMk/>
-            <pc:sldMk cId="4104955013" sldId="277"/>
-            <ac:cxnSpMk id="35" creationId="{0A87760E-B77D-A62A-17C8-167F3DFF3746}"/>
-          </ac:cxnSpMkLst>
-        </pc:cxnChg>
-        <pc:cxnChg chg="mod">
-          <ac:chgData name="Schilling Sabine HSLU W" userId="b0e2af5c-9187-4900-883a-c96514cd8e15" providerId="ADAL" clId="{5E51067F-94D7-505D-9735-0698788361AC}" dt="2026-05-27T07:48:05.486" v="109" actId="1036"/>
-          <ac:cxnSpMkLst>
-            <pc:docMk/>
-            <pc:sldMk cId="4104955013" sldId="277"/>
-            <ac:cxnSpMk id="37" creationId="{13505D13-EFCE-E4A4-44E9-376E0F792A22}"/>
-          </ac:cxnSpMkLst>
-        </pc:cxnChg>
-        <pc:cxnChg chg="add del mod">
-          <ac:chgData name="Schilling Sabine HSLU W" userId="b0e2af5c-9187-4900-883a-c96514cd8e15" providerId="ADAL" clId="{5E51067F-94D7-505D-9735-0698788361AC}" dt="2026-05-27T09:47:57.299" v="566" actId="478"/>
-          <ac:cxnSpMkLst>
-            <pc:docMk/>
-            <pc:sldMk cId="4104955013" sldId="277"/>
-            <ac:cxnSpMk id="39" creationId="{ABBED563-775B-36F8-CCC8-CDB6D35521BE}"/>
-          </ac:cxnSpMkLst>
-        </pc:cxnChg>
-        <pc:cxnChg chg="add mod">
-          <ac:chgData name="Schilling Sabine HSLU W" userId="b0e2af5c-9187-4900-883a-c96514cd8e15" providerId="ADAL" clId="{5E51067F-94D7-505D-9735-0698788361AC}" dt="2026-05-27T09:58:53.029" v="660" actId="1037"/>
-          <ac:cxnSpMkLst>
-            <pc:docMk/>
-            <pc:sldMk cId="4104955013" sldId="277"/>
-            <ac:cxnSpMk id="44" creationId="{33A82D98-93F7-1C4C-62DA-58C792C8F9AE}"/>
-          </ac:cxnSpMkLst>
-        </pc:cxnChg>
-        <pc:cxnChg chg="add mod">
-          <ac:chgData name="Schilling Sabine HSLU W" userId="b0e2af5c-9187-4900-883a-c96514cd8e15" providerId="ADAL" clId="{5E51067F-94D7-505D-9735-0698788361AC}" dt="2026-05-27T09:49:29.650" v="583" actId="14100"/>
-          <ac:cxnSpMkLst>
-            <pc:docMk/>
-            <pc:sldMk cId="4104955013" sldId="277"/>
-            <ac:cxnSpMk id="48" creationId="{BF87B7B0-0D2C-437C-E0E4-BB6C5B611E1E}"/>
-          </ac:cxnSpMkLst>
-        </pc:cxnChg>
-        <pc:cxnChg chg="mod">
-          <ac:chgData name="Schilling Sabine HSLU W" userId="b0e2af5c-9187-4900-883a-c96514cd8e15" providerId="ADAL" clId="{5E51067F-94D7-505D-9735-0698788361AC}" dt="2026-05-27T07:57:19.145" v="163" actId="1036"/>
-          <ac:cxnSpMkLst>
-            <pc:docMk/>
-            <pc:sldMk cId="4104955013" sldId="277"/>
-            <ac:cxnSpMk id="49" creationId="{F85EA249-6F51-DB63-34C5-DF67F004A9EA}"/>
-          </ac:cxnSpMkLst>
-        </pc:cxnChg>
-        <pc:cxnChg chg="add mod">
-          <ac:chgData name="Schilling Sabine HSLU W" userId="b0e2af5c-9187-4900-883a-c96514cd8e15" providerId="ADAL" clId="{5E51067F-94D7-505D-9735-0698788361AC}" dt="2026-05-27T09:49:36.845" v="585" actId="1076"/>
-          <ac:cxnSpMkLst>
-            <pc:docMk/>
-            <pc:sldMk cId="4104955013" sldId="277"/>
-            <ac:cxnSpMk id="51" creationId="{D87037BC-DC60-ECF1-C371-204F88E7384B}"/>
-          </ac:cxnSpMkLst>
-        </pc:cxnChg>
-        <pc:cxnChg chg="del mod">
-          <ac:chgData name="Schilling Sabine HSLU W" userId="b0e2af5c-9187-4900-883a-c96514cd8e15" providerId="ADAL" clId="{5E51067F-94D7-505D-9735-0698788361AC}" dt="2026-05-27T09:49:18.959" v="580" actId="478"/>
-          <ac:cxnSpMkLst>
-            <pc:docMk/>
-            <pc:sldMk cId="4104955013" sldId="277"/>
-            <ac:cxnSpMk id="67" creationId="{B2F3DD35-FB61-5524-42E3-9D2F9CDC6A0B}"/>
-          </ac:cxnSpMkLst>
-        </pc:cxnChg>
-        <pc:cxnChg chg="mod">
-          <ac:chgData name="Schilling Sabine HSLU W" userId="b0e2af5c-9187-4900-883a-c96514cd8e15" providerId="ADAL" clId="{5E51067F-94D7-505D-9735-0698788361AC}" dt="2026-05-27T10:33:16.575" v="664" actId="1076"/>
-          <ac:cxnSpMkLst>
-            <pc:docMk/>
-            <pc:sldMk cId="4104955013" sldId="277"/>
-            <ac:cxnSpMk id="86" creationId="{EA654AFB-152F-E1B5-7BA3-94A302442F4F}"/>
-          </ac:cxnSpMkLst>
-        </pc:cxnChg>
       </pc:sldChg>
     </pc:docChg>
   </pc:docChgLst>
@@ -631,7 +257,7 @@
           <a:p>
             <a:fld id="{0AECA108-3915-9043-8428-B4BE4472B821}" type="datetimeFigureOut">
               <a:rPr lang="de-DE" smtClean="0"/>
-              <a:t>27.05.26</a:t>
+              <a:t>29.07.26</a:t>
             </a:fld>
             <a:endParaRPr lang="de-DE"/>
           </a:p>
@@ -1765,7 +1391,7 @@
           <a:p>
             <a:fld id="{43497422-92ED-3D47-BF28-17000E80E497}" type="datetimeFigureOut">
               <a:rPr lang="de-DE" smtClean="0"/>
-              <a:t>27.05.26</a:t>
+              <a:t>29.07.26</a:t>
             </a:fld>
             <a:endParaRPr lang="de-DE"/>
           </a:p>
@@ -1963,7 +1589,7 @@
           <a:p>
             <a:fld id="{43497422-92ED-3D47-BF28-17000E80E497}" type="datetimeFigureOut">
               <a:rPr lang="de-DE" smtClean="0"/>
-              <a:t>27.05.26</a:t>
+              <a:t>29.07.26</a:t>
             </a:fld>
             <a:endParaRPr lang="de-DE"/>
           </a:p>
@@ -2171,7 +1797,7 @@
           <a:p>
             <a:fld id="{43497422-92ED-3D47-BF28-17000E80E497}" type="datetimeFigureOut">
               <a:rPr lang="de-DE" smtClean="0"/>
-              <a:t>27.05.26</a:t>
+              <a:t>29.07.26</a:t>
             </a:fld>
             <a:endParaRPr lang="de-DE"/>
           </a:p>
@@ -2369,7 +1995,7 @@
           <a:p>
             <a:fld id="{43497422-92ED-3D47-BF28-17000E80E497}" type="datetimeFigureOut">
               <a:rPr lang="de-DE" smtClean="0"/>
-              <a:t>27.05.26</a:t>
+              <a:t>29.07.26</a:t>
             </a:fld>
             <a:endParaRPr lang="de-DE"/>
           </a:p>
@@ -2644,7 +2270,7 @@
           <a:p>
             <a:fld id="{43497422-92ED-3D47-BF28-17000E80E497}" type="datetimeFigureOut">
               <a:rPr lang="de-DE" smtClean="0"/>
-              <a:t>27.05.26</a:t>
+              <a:t>29.07.26</a:t>
             </a:fld>
             <a:endParaRPr lang="de-DE"/>
           </a:p>
@@ -2909,7 +2535,7 @@
           <a:p>
             <a:fld id="{43497422-92ED-3D47-BF28-17000E80E497}" type="datetimeFigureOut">
               <a:rPr lang="de-DE" smtClean="0"/>
-              <a:t>27.05.26</a:t>
+              <a:t>29.07.26</a:t>
             </a:fld>
             <a:endParaRPr lang="de-DE"/>
           </a:p>
@@ -3321,7 +2947,7 @@
           <a:p>
             <a:fld id="{43497422-92ED-3D47-BF28-17000E80E497}" type="datetimeFigureOut">
               <a:rPr lang="de-DE" smtClean="0"/>
-              <a:t>27.05.26</a:t>
+              <a:t>29.07.26</a:t>
             </a:fld>
             <a:endParaRPr lang="de-DE"/>
           </a:p>
@@ -3462,7 +3088,7 @@
           <a:p>
             <a:fld id="{43497422-92ED-3D47-BF28-17000E80E497}" type="datetimeFigureOut">
               <a:rPr lang="de-DE" smtClean="0"/>
-              <a:t>27.05.26</a:t>
+              <a:t>29.07.26</a:t>
             </a:fld>
             <a:endParaRPr lang="de-DE"/>
           </a:p>
@@ -3575,7 +3201,7 @@
           <a:p>
             <a:fld id="{43497422-92ED-3D47-BF28-17000E80E497}" type="datetimeFigureOut">
               <a:rPr lang="de-DE" smtClean="0"/>
-              <a:t>27.05.26</a:t>
+              <a:t>29.07.26</a:t>
             </a:fld>
             <a:endParaRPr lang="de-DE"/>
           </a:p>
@@ -3886,7 +3512,7 @@
           <a:p>
             <a:fld id="{43497422-92ED-3D47-BF28-17000E80E497}" type="datetimeFigureOut">
               <a:rPr lang="de-DE" smtClean="0"/>
-              <a:t>27.05.26</a:t>
+              <a:t>29.07.26</a:t>
             </a:fld>
             <a:endParaRPr lang="de-DE"/>
           </a:p>
@@ -4174,7 +3800,7 @@
           <a:p>
             <a:fld id="{43497422-92ED-3D47-BF28-17000E80E497}" type="datetimeFigureOut">
               <a:rPr lang="de-DE" smtClean="0"/>
-              <a:t>27.05.26</a:t>
+              <a:t>29.07.26</a:t>
             </a:fld>
             <a:endParaRPr lang="de-DE"/>
           </a:p>
@@ -4415,7 +4041,7 @@
           <a:p>
             <a:fld id="{43497422-92ED-3D47-BF28-17000E80E497}" type="datetimeFigureOut">
               <a:rPr lang="de-DE" smtClean="0"/>
-              <a:t>27.05.26</a:t>
+              <a:t>29.07.26</a:t>
             </a:fld>
             <a:endParaRPr lang="de-DE"/>
           </a:p>
@@ -14841,8 +14467,8 @@
           </a:p>
         </p:txBody>
       </p:sp>
-      <mc:AlternateContent xmlns:mc="http://schemas.openxmlformats.org/markup-compatibility/2006">
-        <mc:Choice xmlns:a14="http://schemas.microsoft.com/office/drawing/2010/main" Requires="a14">
+      <mc:AlternateContent xmlns:mc="http://schemas.openxmlformats.org/markup-compatibility/2006" xmlns:a14="http://schemas.microsoft.com/office/drawing/2010/main">
+        <mc:Choice Requires="a14">
           <p:sp>
             <p:nvSpPr>
               <p:cNvPr id="6" name="Textfeld 5">
@@ -15206,7 +14832,7 @@
             </p:txBody>
           </p:sp>
         </mc:Choice>
-        <mc:Fallback>
+        <mc:Fallback xmlns="">
           <p:sp>
             <p:nvSpPr>
               <p:cNvPr id="6" name="Textfeld 5">
@@ -15671,8 +15297,8 @@
           </a:p>
         </p:txBody>
       </p:sp>
-      <mc:AlternateContent xmlns:mc="http://schemas.openxmlformats.org/markup-compatibility/2006">
-        <mc:Choice xmlns:a14="http://schemas.microsoft.com/office/drawing/2010/main" Requires="a14">
+      <mc:AlternateContent xmlns:mc="http://schemas.openxmlformats.org/markup-compatibility/2006" xmlns:a14="http://schemas.microsoft.com/office/drawing/2010/main">
+        <mc:Choice Requires="a14">
           <p:sp>
             <p:nvSpPr>
               <p:cNvPr id="9" name="Textfeld 8">
@@ -15984,7 +15610,7 @@
             </p:txBody>
           </p:sp>
         </mc:Choice>
-        <mc:Fallback>
+        <mc:Fallback xmlns="">
           <p:sp>
             <p:nvSpPr>
               <p:cNvPr id="9" name="Textfeld 8">
@@ -16175,8 +15801,8 @@
           </a:p>
         </p:txBody>
       </p:sp>
-      <mc:AlternateContent xmlns:mc="http://schemas.openxmlformats.org/markup-compatibility/2006">
-        <mc:Choice xmlns:a14="http://schemas.microsoft.com/office/drawing/2010/main" Requires="a14">
+      <mc:AlternateContent xmlns:mc="http://schemas.openxmlformats.org/markup-compatibility/2006" xmlns:a14="http://schemas.microsoft.com/office/drawing/2010/main">
+        <mc:Choice Requires="a14">
           <p:sp>
             <p:nvSpPr>
               <p:cNvPr id="7" name="Textfeld 6">
@@ -16530,7 +16156,7 @@
             </p:txBody>
           </p:sp>
         </mc:Choice>
-        <mc:Fallback>
+        <mc:Fallback xmlns="">
           <p:sp>
             <p:nvSpPr>
               <p:cNvPr id="7" name="Textfeld 6">
@@ -16993,8 +16619,8 @@
           </a:p>
         </p:txBody>
       </p:sp>
-      <mc:AlternateContent xmlns:mc="http://schemas.openxmlformats.org/markup-compatibility/2006">
-        <mc:Choice xmlns:a14="http://schemas.microsoft.com/office/drawing/2010/main" Requires="a14">
+      <mc:AlternateContent xmlns:mc="http://schemas.openxmlformats.org/markup-compatibility/2006" xmlns:a14="http://schemas.microsoft.com/office/drawing/2010/main">
+        <mc:Choice Requires="a14">
           <p:sp>
             <p:nvSpPr>
               <p:cNvPr id="5" name="Textfeld 4">
@@ -17386,7 +17012,7 @@
             </p:txBody>
           </p:sp>
         </mc:Choice>
-        <mc:Fallback>
+        <mc:Fallback xmlns="">
           <p:sp>
             <p:nvSpPr>
               <p:cNvPr id="5" name="Textfeld 4">
@@ -17569,8 +17195,8 @@
           </a:fontRef>
         </p:style>
       </p:cxnSp>
-      <mc:AlternateContent xmlns:mc="http://schemas.openxmlformats.org/markup-compatibility/2006">
-        <mc:Choice xmlns:a14="http://schemas.microsoft.com/office/drawing/2010/main" Requires="a14">
+      <mc:AlternateContent xmlns:mc="http://schemas.openxmlformats.org/markup-compatibility/2006" xmlns:a14="http://schemas.microsoft.com/office/drawing/2010/main">
+        <mc:Choice Requires="a14">
           <p:sp>
             <p:nvSpPr>
               <p:cNvPr id="11" name="Textfeld 10">
@@ -17993,7 +17619,7 @@
             </p:txBody>
           </p:sp>
         </mc:Choice>
-        <mc:Fallback>
+        <mc:Fallback xmlns="">
           <p:sp>
             <p:nvSpPr>
               <p:cNvPr id="11" name="Textfeld 10">
@@ -19065,7 +18691,52 @@
                   <a:ea typeface="Cambria Math" panose="02040503050406030204" pitchFamily="18" charset="0"/>
                   <a:cs typeface="Calibri" panose="020F0502020204030204" pitchFamily="34" charset="0"/>
                 </a:rPr>
-                <a:t>               Tests of central tendencies</a:t>
+                <a:t>               </a:t>
+              </a:r>
+              <a:r>
+                <a:rPr lang="en-GB" sz="1200" dirty="0">
+                  <a:solidFill>
+                    <a:prstClr val="black"/>
+                  </a:solidFill>
+                  <a:latin typeface="Calibri" panose="020F0502020204030204" pitchFamily="34" charset="0"/>
+                  <a:ea typeface="Cambria Math" panose="02040503050406030204" pitchFamily="18" charset="0"/>
+                  <a:cs typeface="Calibri" panose="020F0502020204030204" pitchFamily="34" charset="0"/>
+                </a:rPr>
+                <a:t>g</a:t>
+              </a:r>
+              <a:r>
+                <a:rPr kumimoji="0" lang="en-GB" sz="1200" b="0" i="0" u="none" strike="noStrike" kern="1200" cap="none" spc="0" normalizeH="0" baseline="0" noProof="0" dirty="0" err="1">
+                  <a:ln>
+                    <a:noFill/>
+                  </a:ln>
+                  <a:solidFill>
+                    <a:prstClr val="black"/>
+                  </a:solidFill>
+                  <a:effectLst/>
+                  <a:uLnTx/>
+                  <a:uFillTx/>
+                  <a:latin typeface="Calibri" panose="020F0502020204030204" pitchFamily="34" charset="0"/>
+                  <a:ea typeface="Cambria Math" panose="02040503050406030204" pitchFamily="18" charset="0"/>
+                  <a:cs typeface="Calibri" panose="020F0502020204030204" pitchFamily="34" charset="0"/>
+                </a:rPr>
+                <a:t>roup</a:t>
+              </a:r>
+              <a:r>
+                <a:rPr kumimoji="0" lang="en-GB" sz="1200" b="0" i="0" u="none" strike="noStrike" kern="1200" cap="none" spc="0" normalizeH="0" baseline="0" noProof="0" dirty="0">
+                  <a:ln>
+                    <a:noFill/>
+                  </a:ln>
+                  <a:solidFill>
+                    <a:prstClr val="black"/>
+                  </a:solidFill>
+                  <a:effectLst/>
+                  <a:uLnTx/>
+                  <a:uFillTx/>
+                  <a:latin typeface="Calibri" panose="020F0502020204030204" pitchFamily="34" charset="0"/>
+                  <a:ea typeface="Cambria Math" panose="02040503050406030204" pitchFamily="18" charset="0"/>
+                  <a:cs typeface="Calibri" panose="020F0502020204030204" pitchFamily="34" charset="0"/>
+                </a:rPr>
+                <a:t> comparisons</a:t>
               </a:r>
             </a:p>
             <a:p>
@@ -19672,8 +19343,8 @@
             </a:p>
           </p:txBody>
         </p:sp>
-        <mc:AlternateContent xmlns:mc="http://schemas.openxmlformats.org/markup-compatibility/2006">
-          <mc:Choice xmlns:a14="http://schemas.microsoft.com/office/drawing/2010/main" Requires="a14">
+        <mc:AlternateContent xmlns:mc="http://schemas.openxmlformats.org/markup-compatibility/2006" xmlns:a14="http://schemas.microsoft.com/office/drawing/2010/main">
+          <mc:Choice Requires="a14">
             <p:sp>
               <p:nvSpPr>
                 <p:cNvPr id="6" name="Textfeld 5">
@@ -20037,7 +19708,7 @@
               </p:txBody>
             </p:sp>
           </mc:Choice>
-          <mc:Fallback>
+          <mc:Fallback xmlns="">
             <p:sp>
               <p:nvSpPr>
                 <p:cNvPr id="6" name="Textfeld 5">
@@ -20502,8 +20173,8 @@
             </a:p>
           </p:txBody>
         </p:sp>
-        <mc:AlternateContent xmlns:mc="http://schemas.openxmlformats.org/markup-compatibility/2006">
-          <mc:Choice xmlns:a14="http://schemas.microsoft.com/office/drawing/2010/main" Requires="a14">
+        <mc:AlternateContent xmlns:mc="http://schemas.openxmlformats.org/markup-compatibility/2006" xmlns:a14="http://schemas.microsoft.com/office/drawing/2010/main">
+          <mc:Choice Requires="a14">
             <p:sp>
               <p:nvSpPr>
                 <p:cNvPr id="9" name="Textfeld 8">
@@ -21002,7 +20673,7 @@
               </p:txBody>
             </p:sp>
           </mc:Choice>
-          <mc:Fallback>
+          <mc:Fallback xmlns="">
             <p:sp>
               <p:nvSpPr>
                 <p:cNvPr id="9" name="Textfeld 8">
@@ -21193,8 +20864,8 @@
             </a:p>
           </p:txBody>
         </p:sp>
-        <mc:AlternateContent xmlns:mc="http://schemas.openxmlformats.org/markup-compatibility/2006">
-          <mc:Choice xmlns:a14="http://schemas.microsoft.com/office/drawing/2010/main" Requires="a14">
+        <mc:AlternateContent xmlns:mc="http://schemas.openxmlformats.org/markup-compatibility/2006" xmlns:a14="http://schemas.microsoft.com/office/drawing/2010/main">
+          <mc:Choice Requires="a14">
             <p:sp>
               <p:nvSpPr>
                 <p:cNvPr id="7" name="Textfeld 6">
@@ -21548,7 +21219,7 @@
               </p:txBody>
             </p:sp>
           </mc:Choice>
-          <mc:Fallback>
+          <mc:Fallback xmlns="">
             <p:sp>
               <p:nvSpPr>
                 <p:cNvPr id="7" name="Textfeld 6">
@@ -21922,7 +21593,41 @@
                   <a:ea typeface="Cambria Math" panose="02040503050406030204" pitchFamily="18" charset="0"/>
                   <a:cs typeface="Calibri" panose="020F0502020204030204" pitchFamily="34" charset="0"/>
                 </a:rPr>
-                <a:t>            comparing proportions:</a:t>
+                <a:t>            </a:t>
+              </a:r>
+              <a:r>
+                <a:rPr kumimoji="0" lang="en-GB" sz="1200" b="0" i="0" u="none" strike="noStrike" kern="1200" cap="none" spc="0" normalizeH="0" baseline="0" noProof="0">
+                  <a:ln>
+                    <a:noFill/>
+                  </a:ln>
+                  <a:solidFill>
+                    <a:prstClr val="black"/>
+                  </a:solidFill>
+                  <a:effectLst/>
+                  <a:uLnTx/>
+                  <a:uFillTx/>
+                  <a:latin typeface="Calibri" panose="020F0502020204030204" pitchFamily="34" charset="0"/>
+                  <a:ea typeface="Cambria Math" panose="02040503050406030204" pitchFamily="18" charset="0"/>
+                  <a:cs typeface="Calibri" panose="020F0502020204030204" pitchFamily="34" charset="0"/>
+                </a:rPr>
+                <a:t>proportions comparison</a:t>
+              </a:r>
+              <a:r>
+                <a:rPr kumimoji="0" lang="en-GB" sz="1200" b="0" i="0" u="none" strike="noStrike" kern="1200" cap="none" spc="0" normalizeH="0" baseline="0" noProof="0" dirty="0">
+                  <a:ln>
+                    <a:noFill/>
+                  </a:ln>
+                  <a:solidFill>
+                    <a:prstClr val="black"/>
+                  </a:solidFill>
+                  <a:effectLst/>
+                  <a:uLnTx/>
+                  <a:uFillTx/>
+                  <a:latin typeface="Calibri" panose="020F0502020204030204" pitchFamily="34" charset="0"/>
+                  <a:ea typeface="Cambria Math" panose="02040503050406030204" pitchFamily="18" charset="0"/>
+                  <a:cs typeface="Calibri" panose="020F0502020204030204" pitchFamily="34" charset="0"/>
+                </a:rPr>
+                <a:t>s</a:t>
               </a:r>
               <a:br>
                 <a:rPr kumimoji="0" lang="en-GB" sz="1200" b="0" i="0" u="none" strike="noStrike" kern="1200" cap="none" spc="0" normalizeH="0" baseline="0" noProof="0" dirty="0">
@@ -22011,8 +21716,8 @@
             </a:p>
           </p:txBody>
         </p:sp>
-        <mc:AlternateContent xmlns:mc="http://schemas.openxmlformats.org/markup-compatibility/2006">
-          <mc:Choice xmlns:a14="http://schemas.microsoft.com/office/drawing/2010/main" Requires="a14">
+        <mc:AlternateContent xmlns:mc="http://schemas.openxmlformats.org/markup-compatibility/2006" xmlns:a14="http://schemas.microsoft.com/office/drawing/2010/main">
+          <mc:Choice Requires="a14">
             <p:sp>
               <p:nvSpPr>
                 <p:cNvPr id="5" name="Textfeld 4">
@@ -22404,7 +22109,7 @@
               </p:txBody>
             </p:sp>
           </mc:Choice>
-          <mc:Fallback>
+          <mc:Fallback xmlns="">
             <p:sp>
               <p:nvSpPr>
                 <p:cNvPr id="5" name="Textfeld 4">
@@ -22587,8 +22292,8 @@
             </a:fontRef>
           </p:style>
         </p:cxnSp>
-        <mc:AlternateContent xmlns:mc="http://schemas.openxmlformats.org/markup-compatibility/2006">
-          <mc:Choice xmlns:a14="http://schemas.microsoft.com/office/drawing/2010/main" Requires="a14">
+        <mc:AlternateContent xmlns:mc="http://schemas.openxmlformats.org/markup-compatibility/2006" xmlns:a14="http://schemas.microsoft.com/office/drawing/2010/main">
+          <mc:Choice Requires="a14">
             <p:sp>
               <p:nvSpPr>
                 <p:cNvPr id="11" name="Textfeld 10">
@@ -23012,7 +22717,7 @@
               </p:txBody>
             </p:sp>
           </mc:Choice>
-          <mc:Fallback>
+          <mc:Fallback xmlns="">
             <p:sp>
               <p:nvSpPr>
                 <p:cNvPr id="11" name="Textfeld 10">
